--- a/Weekly Reports/Self-Driving-RC-Car.pptx
+++ b/Weekly Reports/Self-Driving-RC-Car.pptx
@@ -15,6 +15,10 @@
     <p:sldId id="263" r:id="rId13"/>
     <p:sldId id="264" r:id="rId14"/>
     <p:sldId id="265" r:id="rId15"/>
+    <p:sldId id="266" r:id="rId16"/>
+    <p:sldId id="267" r:id="rId17"/>
+    <p:sldId id="268" r:id="rId18"/>
+    <p:sldId id="269" r:id="rId19"/>
   </p:sldIdLst>
   <p:sldSz cx="12192000" cy="6858000"/>
   <p:notesSz cx="6858000" cy="9144000"/>
@@ -119,304 +123,6 @@
     </p:ext>
   </p:extLst>
 </p:presentation>
-</file>
-
-<file path=ppt/charts/chart1.xml><?xml version="1.0" encoding="utf-8"?>
-<c:chartSpace xmlns:c="http://schemas.openxmlformats.org/drawingml/2006/chart" xmlns:a="http://schemas.openxmlformats.org/drawingml/2006/main" xmlns:r="http://schemas.openxmlformats.org/officeDocument/2006/relationships" xmlns:c16r2="http://schemas.microsoft.com/office/drawing/2015/06/chart">
-  <c:date1904 val="1"/>
-  <c:lang val="en-US"/>
-  <c:roundedCorners val="1"/>
-  <c:style val="2"/>
-  <c:chart>
-    <c:autoTitleDeleted val="1"/>
-    <c:plotArea>
-      <c:layout/>
-      <c:barChart>
-        <c:barDir val="bar"/>
-        <c:grouping val="clustered"/>
-        <c:varyColors val="0"/>
-        <c:ser>
-          <c:idx val="0"/>
-          <c:order val="0"/>
-          <c:tx>
-            <c:v>Test recall</c:v>
-          </c:tx>
-          <c:spPr>
-            <a:solidFill>
-              <a:srgbClr val="4A4A4A"/>
-            </a:solidFill>
-          </c:spPr>
-          <c:invertIfNegative val="1"/>
-          <c:dLbls>
-            <c:spPr>
-              <a:noFill/>
-              <a:ln>
-                <a:noFill/>
-              </a:ln>
-              <a:effectLst/>
-            </c:spPr>
-            <c:txPr>
-              <a:bodyPr anchorCtr="1"/>
-              <a:lstStyle/>
-              <a:p>
-                <a:pPr>
-                  <a:defRPr sz="975">
-                    <a:solidFill>
-                      <a:srgbClr val="111111"/>
-                    </a:solidFill>
-                    <a:latin typeface="Aptos"/>
-                    <a:ea typeface="Aptos"/>
-                    <a:cs typeface="Aptos"/>
-                  </a:defRPr>
-                </a:pPr>
-                <a:endParaRPr lang="en-US"/>
-              </a:p>
-            </c:txPr>
-            <c:dLblPos val="outEnd"/>
-            <c:showLegendKey val="0"/>
-            <c:showVal val="1"/>
-            <c:showCatName val="0"/>
-            <c:showSerName val="0"/>
-            <c:showPercent val="0"/>
-            <c:showBubbleSize val="0"/>
-            <c:showLeaderLines val="0"/>
-            <c:extLst>
-              <c:ext xmlns:c15="http://schemas.microsoft.com/office/drawing/2012/chart" uri="{CE6537A1-D6FC-4f65-9D91-7224C49458BB}">
-                <c15:showLeaderLines val="0"/>
-              </c:ext>
-            </c:extLst>
-          </c:dLbls>
-          <c:cat>
-            <c:strRef>
-              <c:f>'Chart Data'!$A$2:$A$13</c:f>
-              <c:strCache>
-                <c:ptCount val="12"/>
-                <c:pt idx="0">
-                  <c:v>Added Lane</c:v>
-                </c:pt>
-                <c:pt idx="1">
-                  <c:v>Keep Right</c:v>
-                </c:pt>
-                <c:pt idx="2">
-                  <c:v>Merge</c:v>
-                </c:pt>
-                <c:pt idx="3">
-                  <c:v>Pedestrian</c:v>
-                </c:pt>
-                <c:pt idx="4">
-                  <c:v>School</c:v>
-                </c:pt>
-                <c:pt idx="5">
-                  <c:v>Signal Ahead</c:v>
-                </c:pt>
-                <c:pt idx="6">
-                  <c:v>Speed 25</c:v>
-                </c:pt>
-                <c:pt idx="7">
-                  <c:v>Speed 30</c:v>
-                </c:pt>
-                <c:pt idx="8">
-                  <c:v>Speed 35</c:v>
-                </c:pt>
-                <c:pt idx="9">
-                  <c:v>Speed 45</c:v>
-                </c:pt>
-                <c:pt idx="10">
-                  <c:v>Speed 65</c:v>
-                </c:pt>
-                <c:pt idx="11">
-                  <c:v>Stop</c:v>
-                </c:pt>
-              </c:strCache>
-            </c:strRef>
-          </c:cat>
-          <c:val>
-            <c:numRef>
-              <c:f>'Chart Data'!$B$2:$B$13</c:f>
-              <c:numCache>
-                <c:formatCode>General</c:formatCode>
-                <c:ptCount val="12"/>
-                <c:pt idx="0">
-                  <c:v>100</c:v>
-                </c:pt>
-                <c:pt idx="1">
-                  <c:v>100</c:v>
-                </c:pt>
-                <c:pt idx="2">
-                  <c:v>52.6</c:v>
-                </c:pt>
-                <c:pt idx="3">
-                  <c:v>78.900000000000006</c:v>
-                </c:pt>
-                <c:pt idx="4">
-                  <c:v>63.6</c:v>
-                </c:pt>
-                <c:pt idx="5">
-                  <c:v>93.4</c:v>
-                </c:pt>
-                <c:pt idx="6">
-                  <c:v>100</c:v>
-                </c:pt>
-                <c:pt idx="7">
-                  <c:v>71.400000000000006</c:v>
-                </c:pt>
-                <c:pt idx="8">
-                  <c:v>76.5</c:v>
-                </c:pt>
-                <c:pt idx="9">
-                  <c:v>84</c:v>
-                </c:pt>
-                <c:pt idx="10">
-                  <c:v>100</c:v>
-                </c:pt>
-                <c:pt idx="11">
-                  <c:v>98.6</c:v>
-                </c:pt>
-              </c:numCache>
-            </c:numRef>
-          </c:val>
-          <c:extLst>
-            <c:ext xmlns:c14="http://schemas.microsoft.com/office/drawing/2007/8/2/chart" uri="{6F2FDCE9-48DA-4B69-8628-5D25D57E5C99}">
-              <c14:invertSolidFillFmt>
-                <c14:spPr xmlns:c14="http://schemas.microsoft.com/office/drawing/2007/8/2/chart">
-                  <a:solidFill>
-                    <a:srgbClr val="FFFFFF"/>
-                  </a:solidFill>
-                </c14:spPr>
-              </c14:invertSolidFillFmt>
-            </c:ext>
-            <c:ext xmlns:c16="http://schemas.microsoft.com/office/drawing/2014/chart" uri="{C3380CC4-5D6E-409C-BE32-E72D297353CC}">
-              <c16:uniqueId val="{00000000-77E3-2A46-AB46-E43CA9D2C35D}"/>
-            </c:ext>
-          </c:extLst>
-        </c:ser>
-        <c:dLbls>
-          <c:dLblPos val="outEnd"/>
-          <c:showLegendKey val="0"/>
-          <c:showVal val="1"/>
-          <c:showCatName val="0"/>
-          <c:showSerName val="0"/>
-          <c:showPercent val="0"/>
-          <c:showBubbleSize val="0"/>
-        </c:dLbls>
-        <c:gapWidth val="48"/>
-        <c:axId val="48650112"/>
-        <c:axId val="48672768"/>
-      </c:barChart>
-      <c:catAx>
-        <c:axId val="48650112"/>
-        <c:scaling>
-          <c:orientation val="minMax"/>
-        </c:scaling>
-        <c:delete val="0"/>
-        <c:axPos val="l"/>
-        <c:majorGridlines>
-          <c:spPr>
-            <a:ln w="9525">
-              <a:solidFill>
-                <a:srgbClr val="DDDDDD"/>
-              </a:solidFill>
-              <a:prstDash val="solid"/>
-            </a:ln>
-          </c:spPr>
-        </c:majorGridlines>
-        <c:numFmt formatCode="General" sourceLinked="1"/>
-        <c:majorTickMark val="none"/>
-        <c:minorTickMark val="none"/>
-        <c:tickLblPos val="nextTo"/>
-        <c:spPr>
-          <a:ln w="9525">
-            <a:solidFill>
-              <a:srgbClr val="777777"/>
-            </a:solidFill>
-            <a:prstDash val="solid"/>
-          </a:ln>
-        </c:spPr>
-        <c:txPr>
-          <a:bodyPr anchorCtr="1"/>
-          <a:lstStyle/>
-          <a:p>
-            <a:pPr>
-              <a:defRPr sz="1050">
-                <a:solidFill>
-                  <a:srgbClr val="222222"/>
-                </a:solidFill>
-                <a:latin typeface="Aptos"/>
-                <a:ea typeface="Aptos"/>
-                <a:cs typeface="Aptos"/>
-              </a:defRPr>
-            </a:pPr>
-            <a:endParaRPr lang="en-US"/>
-          </a:p>
-        </c:txPr>
-        <c:crossAx val="48672768"/>
-        <c:crosses val="autoZero"/>
-        <c:auto val="1"/>
-        <c:lblAlgn val="ctr"/>
-        <c:lblOffset val="100"/>
-        <c:noMultiLvlLbl val="1"/>
-      </c:catAx>
-      <c:valAx>
-        <c:axId val="48672768"/>
-        <c:scaling>
-          <c:orientation val="minMax"/>
-        </c:scaling>
-        <c:delete val="0"/>
-        <c:axPos val="b"/>
-        <c:numFmt formatCode="General" sourceLinked="1"/>
-        <c:majorTickMark val="none"/>
-        <c:minorTickMark val="none"/>
-        <c:tickLblPos val="nextTo"/>
-        <c:spPr>
-          <a:ln w="9525">
-            <a:solidFill>
-              <a:srgbClr val="777777"/>
-            </a:solidFill>
-            <a:prstDash val="solid"/>
-          </a:ln>
-        </c:spPr>
-        <c:txPr>
-          <a:bodyPr anchorCtr="1"/>
-          <a:lstStyle/>
-          <a:p>
-            <a:pPr>
-              <a:defRPr sz="1050">
-                <a:solidFill>
-                  <a:srgbClr val="111111"/>
-                </a:solidFill>
-                <a:latin typeface="Aptos"/>
-                <a:ea typeface="Aptos"/>
-                <a:cs typeface="Aptos"/>
-              </a:defRPr>
-            </a:pPr>
-            <a:endParaRPr lang="en-US"/>
-          </a:p>
-        </c:txPr>
-        <c:crossAx val="48650112"/>
-        <c:crosses val="autoZero"/>
-        <c:crossBetween val="between"/>
-      </c:valAx>
-      <c:spPr>
-        <a:noFill/>
-        <a:ln w="0">
-          <a:noFill/>
-        </a:ln>
-      </c:spPr>
-    </c:plotArea>
-    <c:plotVisOnly val="1"/>
-    <c:dispBlanksAs val="zero"/>
-    <c:showDLblsOverMax val="1"/>
-  </c:chart>
-  <c:spPr>
-    <a:noFill/>
-    <a:ln w="0">
-      <a:noFill/>
-    </a:ln>
-  </c:spPr>
-  <c:externalData r:id="rId1">
-    <c:autoUpdate val="0"/>
-  </c:externalData>
-</c:chartSpace>
 </file>
 
 <file path=ppt/slideLayouts/slideLayout1.xml><?xml version="1.0" encoding="utf-8"?>
@@ -3720,6 +3426,805 @@
         <p:nvPr/>
       </p:nvGrpSpPr>
       <p:grpSpPr/>
+      <p:sp useBgFill="1">
+        <p:nvSpPr>
+          <p:cNvPr id="25" name="Rectangle 24">
+            <a:extLst>
+              <a:ext uri="{FF2B5EF4-FFF2-40B4-BE49-F238E27FC236}">
+                <a16:creationId xmlns:a16="http://schemas.microsoft.com/office/drawing/2014/main" id="{7979CB03-77A3-48F2-A1C8-52F03FCB3D00}"/>
+              </a:ext>
+              <a:ext uri="{C183D7F6-B498-43B3-948B-1728B52AA6E4}">
+                <adec:decorative xmlns:adec="http://schemas.microsoft.com/office/drawing/2017/decorative" val="1"/>
+              </a:ext>
+            </a:extLst>
+          </p:cNvPr>
+          <p:cNvSpPr>
+            <a:spLocks noGrp="1" noRot="1" noChangeAspect="1" noMove="1" noResize="1" noEditPoints="1" noAdjustHandles="1" noChangeArrowheads="1" noChangeShapeType="1" noTextEdit="1"/>
+          </p:cNvSpPr>
+          <p:nvPr>
+            <p:extLst>
+              <p:ext uri="{386F3935-93C4-4BCD-93E2-E3B085C9AB24}">
+                <p16:designElem xmlns:p16="http://schemas.microsoft.com/office/powerpoint/2015/main" val="1"/>
+              </p:ext>
+            </p:extLst>
+          </p:nvPr>
+        </p:nvSpPr>
+        <p:spPr>
+          <a:xfrm>
+            <a:off x="0" y="0"/>
+            <a:ext cx="12192000" cy="6858000"/>
+          </a:xfrm>
+          <a:prstGeom prst="rect">
+            <a:avLst/>
+          </a:prstGeom>
+          <a:ln>
+            <a:noFill/>
+          </a:ln>
+        </p:spPr>
+        <p:style>
+          <a:lnRef idx="2">
+            <a:schemeClr val="accent1">
+              <a:shade val="50000"/>
+            </a:schemeClr>
+          </a:lnRef>
+          <a:fillRef idx="1">
+            <a:schemeClr val="accent1"/>
+          </a:fillRef>
+          <a:effectRef idx="0">
+            <a:schemeClr val="accent1"/>
+          </a:effectRef>
+          <a:fontRef idx="minor">
+            <a:schemeClr val="lt1"/>
+          </a:fontRef>
+        </p:style>
+        <p:txBody>
+          <a:bodyPr rtlCol="0" anchor="ctr"/>
+          <a:lstStyle/>
+          <a:p>
+            <a:pPr algn="ctr"/>
+            <a:endParaRPr lang="en-US"/>
+          </a:p>
+        </p:txBody>
+      </p:sp>
+      <p:sp useBgFill="1">
+        <p:nvSpPr>
+          <p:cNvPr id="27" name="Rectangle 26">
+            <a:extLst>
+              <a:ext uri="{FF2B5EF4-FFF2-40B4-BE49-F238E27FC236}">
+                <a16:creationId xmlns:a16="http://schemas.microsoft.com/office/drawing/2014/main" id="{9073D962-D3D2-4A72-8593-65C213CBFFC3}"/>
+              </a:ext>
+              <a:ext uri="{C183D7F6-B498-43B3-948B-1728B52AA6E4}">
+                <adec:decorative xmlns:adec="http://schemas.microsoft.com/office/drawing/2017/decorative" val="1"/>
+              </a:ext>
+            </a:extLst>
+          </p:cNvPr>
+          <p:cNvSpPr>
+            <a:spLocks noGrp="1" noRot="1" noChangeAspect="1" noMove="1" noResize="1" noEditPoints="1" noAdjustHandles="1" noChangeArrowheads="1" noChangeShapeType="1" noTextEdit="1"/>
+          </p:cNvSpPr>
+          <p:nvPr>
+            <p:extLst>
+              <p:ext uri="{386F3935-93C4-4BCD-93E2-E3B085C9AB24}">
+                <p16:designElem xmlns:p16="http://schemas.microsoft.com/office/powerpoint/2015/main" val="1"/>
+              </p:ext>
+            </p:extLst>
+          </p:nvPr>
+        </p:nvSpPr>
+        <p:spPr>
+          <a:xfrm>
+            <a:off x="381654" y="633619"/>
+            <a:ext cx="4520912" cy="5495925"/>
+          </a:xfrm>
+          <a:prstGeom prst="rect">
+            <a:avLst/>
+          </a:prstGeom>
+          <a:ln w="9525">
+            <a:solidFill>
+              <a:srgbClr val="DEDEDE"/>
+            </a:solidFill>
+          </a:ln>
+          <a:effectLst>
+            <a:outerShdw blurRad="50800" dist="38100" dir="2700000" algn="tl" rotWithShape="0">
+              <a:schemeClr val="bg1">
+                <a:lumMod val="85000"/>
+                <a:alpha val="50000"/>
+              </a:schemeClr>
+            </a:outerShdw>
+          </a:effectLst>
+        </p:spPr>
+        <p:style>
+          <a:lnRef idx="2">
+            <a:schemeClr val="accent1">
+              <a:shade val="50000"/>
+            </a:schemeClr>
+          </a:lnRef>
+          <a:fillRef idx="1">
+            <a:schemeClr val="accent1"/>
+          </a:fillRef>
+          <a:effectRef idx="0">
+            <a:schemeClr val="accent1"/>
+          </a:effectRef>
+          <a:fontRef idx="minor">
+            <a:schemeClr val="lt1"/>
+          </a:fontRef>
+        </p:style>
+        <p:txBody>
+          <a:bodyPr rtlCol="0" anchor="ctr"/>
+          <a:lstStyle/>
+          <a:p>
+            <a:pPr marL="0" marR="0" lvl="0" indent="0" algn="ctr" defTabSz="914400" rtl="0" eaLnBrk="1" fontAlgn="auto" latinLnBrk="0" hangingPunct="1">
+              <a:lnSpc>
+                <a:spcPct val="100000"/>
+              </a:lnSpc>
+              <a:spcBef>
+                <a:spcPts val="0"/>
+              </a:spcBef>
+              <a:spcAft>
+                <a:spcPts val="0"/>
+              </a:spcAft>
+              <a:buClrTx/>
+              <a:buSzTx/>
+              <a:buFontTx/>
+              <a:buNone/>
+              <a:tabLst/>
+              <a:defRPr/>
+            </a:pPr>
+            <a:endParaRPr kumimoji="0" lang="en-US" sz="1800" b="0" i="0" u="none" strike="noStrike" kern="1200" cap="none" spc="0" normalizeH="0" baseline="0" noProof="0">
+              <a:ln>
+                <a:noFill/>
+              </a:ln>
+              <a:solidFill>
+                <a:prstClr val="white"/>
+              </a:solidFill>
+              <a:effectLst/>
+              <a:uLnTx/>
+              <a:uFillTx/>
+              <a:latin typeface="Calibri" panose="020F0502020204030204"/>
+              <a:ea typeface="+mn-ea"/>
+              <a:cs typeface="+mn-cs"/>
+            </a:endParaRPr>
+          </a:p>
+        </p:txBody>
+      </p:sp>
+      <p:sp>
+        <p:nvSpPr>
+          <p:cNvPr id="2" name="Title 1">
+            <a:extLst>
+              <a:ext uri="{FF2B5EF4-FFF2-40B4-BE49-F238E27FC236}">
+                <a16:creationId xmlns:a16="http://schemas.microsoft.com/office/drawing/2014/main" id="{6B50277F-C2E1-025E-B6AB-EA1CA120F3BA}"/>
+              </a:ext>
+            </a:extLst>
+          </p:cNvPr>
+          <p:cNvSpPr>
+            <a:spLocks noGrp="1"/>
+          </p:cNvSpPr>
+          <p:nvPr>
+            <p:ph type="title"/>
+          </p:nvPr>
+        </p:nvSpPr>
+        <p:spPr>
+          <a:xfrm>
+            <a:off x="813816" y="978408"/>
+            <a:ext cx="3721608" cy="1106424"/>
+          </a:xfrm>
+        </p:spPr>
+        <p:txBody>
+          <a:bodyPr vert="horz" lIns="91440" tIns="45720" rIns="91440" bIns="45720" rtlCol="0" anchor="ctr">
+            <a:normAutofit/>
+          </a:bodyPr>
+          <a:lstStyle/>
+          <a:p>
+            <a:r>
+              <a:rPr lang="en-US" sz="2800" kern="1200">
+                <a:solidFill>
+                  <a:schemeClr val="tx1"/>
+                </a:solidFill>
+                <a:latin typeface="+mj-lt"/>
+                <a:ea typeface="+mj-ea"/>
+                <a:cs typeface="+mj-cs"/>
+              </a:rPr>
+              <a:t>Waffle bot plates</a:t>
+            </a:r>
+          </a:p>
+        </p:txBody>
+      </p:sp>
+      <p:sp>
+        <p:nvSpPr>
+          <p:cNvPr id="29" name="Rectangle 28">
+            <a:extLst>
+              <a:ext uri="{FF2B5EF4-FFF2-40B4-BE49-F238E27FC236}">
+                <a16:creationId xmlns:a16="http://schemas.microsoft.com/office/drawing/2014/main" id="{2387511B-F6E1-4929-AC90-94FB8B6B0F41}"/>
+              </a:ext>
+              <a:ext uri="{C183D7F6-B498-43B3-948B-1728B52AA6E4}">
+                <adec:decorative xmlns:adec="http://schemas.microsoft.com/office/drawing/2017/decorative" val="1"/>
+              </a:ext>
+            </a:extLst>
+          </p:cNvPr>
+          <p:cNvSpPr>
+            <a:spLocks noGrp="1" noRot="1" noChangeAspect="1" noMove="1" noResize="1" noEditPoints="1" noAdjustHandles="1" noChangeArrowheads="1" noChangeShapeType="1" noTextEdit="1"/>
+          </p:cNvSpPr>
+          <p:nvPr>
+            <p:extLst>
+              <p:ext uri="{386F3935-93C4-4BCD-93E2-E3B085C9AB24}">
+                <p16:designElem xmlns:p16="http://schemas.microsoft.com/office/powerpoint/2015/main" val="1"/>
+              </p:ext>
+            </p:extLst>
+          </p:nvPr>
+        </p:nvSpPr>
+        <p:spPr>
+          <a:xfrm>
+            <a:off x="317645" y="1181536"/>
+            <a:ext cx="128016" cy="704088"/>
+          </a:xfrm>
+          <a:prstGeom prst="rect">
+            <a:avLst/>
+          </a:prstGeom>
+          <a:solidFill>
+            <a:schemeClr val="accent2"/>
+          </a:solidFill>
+          <a:ln>
+            <a:noFill/>
+          </a:ln>
+        </p:spPr>
+        <p:style>
+          <a:lnRef idx="2">
+            <a:schemeClr val="accent1">
+              <a:shade val="50000"/>
+            </a:schemeClr>
+          </a:lnRef>
+          <a:fillRef idx="1">
+            <a:schemeClr val="accent1"/>
+          </a:fillRef>
+          <a:effectRef idx="0">
+            <a:schemeClr val="accent1"/>
+          </a:effectRef>
+          <a:fontRef idx="minor">
+            <a:schemeClr val="lt1"/>
+          </a:fontRef>
+        </p:style>
+        <p:txBody>
+          <a:bodyPr rtlCol="0" anchor="ctr"/>
+          <a:lstStyle/>
+          <a:p>
+            <a:pPr marL="0" marR="0" lvl="0" indent="0" algn="ctr" defTabSz="914400" rtl="0" eaLnBrk="1" fontAlgn="auto" latinLnBrk="0" hangingPunct="1">
+              <a:lnSpc>
+                <a:spcPct val="100000"/>
+              </a:lnSpc>
+              <a:spcBef>
+                <a:spcPts val="0"/>
+              </a:spcBef>
+              <a:spcAft>
+                <a:spcPts val="0"/>
+              </a:spcAft>
+              <a:buClrTx/>
+              <a:buSzTx/>
+              <a:buFontTx/>
+              <a:buNone/>
+              <a:tabLst/>
+              <a:defRPr/>
+            </a:pPr>
+            <a:endParaRPr kumimoji="0" lang="en-US" sz="1800" b="0" i="0" u="none" strike="noStrike" kern="1200" cap="none" spc="0" normalizeH="0" baseline="0" noProof="0">
+              <a:ln>
+                <a:noFill/>
+              </a:ln>
+              <a:solidFill>
+                <a:prstClr val="white"/>
+              </a:solidFill>
+              <a:effectLst/>
+              <a:uLnTx/>
+              <a:uFillTx/>
+              <a:latin typeface="Calibri" panose="020F0502020204030204"/>
+              <a:ea typeface="+mn-ea"/>
+              <a:cs typeface="+mn-cs"/>
+            </a:endParaRPr>
+          </a:p>
+        </p:txBody>
+      </p:sp>
+      <p:sp>
+        <p:nvSpPr>
+          <p:cNvPr id="31" name="Rectangle 30">
+            <a:extLst>
+              <a:ext uri="{FF2B5EF4-FFF2-40B4-BE49-F238E27FC236}">
+                <a16:creationId xmlns:a16="http://schemas.microsoft.com/office/drawing/2014/main" id="{AA58F78C-27AB-465F-AA33-15E08AF267F9}"/>
+              </a:ext>
+              <a:ext uri="{C183D7F6-B498-43B3-948B-1728B52AA6E4}">
+                <adec:decorative xmlns:adec="http://schemas.microsoft.com/office/drawing/2017/decorative" val="1"/>
+              </a:ext>
+            </a:extLst>
+          </p:cNvPr>
+          <p:cNvSpPr>
+            <a:spLocks noGrp="1" noRot="1" noChangeAspect="1" noMove="1" noResize="1" noEditPoints="1" noAdjustHandles="1" noChangeArrowheads="1" noChangeShapeType="1" noTextEdit="1"/>
+          </p:cNvSpPr>
+          <p:nvPr>
+            <p:extLst>
+              <p:ext uri="{386F3935-93C4-4BCD-93E2-E3B085C9AB24}">
+                <p16:designElem xmlns:p16="http://schemas.microsoft.com/office/powerpoint/2015/main" val="1"/>
+              </p:ext>
+            </p:extLst>
+          </p:nvPr>
+        </p:nvSpPr>
+        <p:spPr>
+          <a:xfrm>
+            <a:off x="843560" y="2185416"/>
+            <a:ext cx="3683187" cy="9144"/>
+          </a:xfrm>
+          <a:prstGeom prst="rect">
+            <a:avLst/>
+          </a:prstGeom>
+          <a:solidFill>
+            <a:srgbClr val="D5D5D5"/>
+          </a:solidFill>
+          <a:ln w="3175">
+            <a:noFill/>
+          </a:ln>
+          <a:effectLst/>
+        </p:spPr>
+        <p:style>
+          <a:lnRef idx="2">
+            <a:schemeClr val="accent1">
+              <a:shade val="50000"/>
+            </a:schemeClr>
+          </a:lnRef>
+          <a:fillRef idx="1">
+            <a:schemeClr val="accent1"/>
+          </a:fillRef>
+          <a:effectRef idx="0">
+            <a:schemeClr val="accent1"/>
+          </a:effectRef>
+          <a:fontRef idx="minor">
+            <a:schemeClr val="lt1"/>
+          </a:fontRef>
+        </p:style>
+        <p:txBody>
+          <a:bodyPr rtlCol="0" anchor="ctr"/>
+          <a:lstStyle/>
+          <a:p>
+            <a:pPr marL="0" marR="0" lvl="0" indent="0" algn="ctr" defTabSz="914400" rtl="0" eaLnBrk="1" fontAlgn="auto" latinLnBrk="0" hangingPunct="1">
+              <a:lnSpc>
+                <a:spcPct val="100000"/>
+              </a:lnSpc>
+              <a:spcBef>
+                <a:spcPts val="0"/>
+              </a:spcBef>
+              <a:spcAft>
+                <a:spcPts val="0"/>
+              </a:spcAft>
+              <a:buClrTx/>
+              <a:buSzTx/>
+              <a:buFontTx/>
+              <a:buNone/>
+              <a:tabLst/>
+              <a:defRPr/>
+            </a:pPr>
+            <a:endParaRPr kumimoji="0" lang="en-US" sz="1800" b="0" i="0" u="none" strike="noStrike" kern="1200" cap="none" spc="0" normalizeH="0" baseline="0" noProof="0">
+              <a:ln>
+                <a:noFill/>
+              </a:ln>
+              <a:solidFill>
+                <a:prstClr val="white"/>
+              </a:solidFill>
+              <a:effectLst/>
+              <a:uLnTx/>
+              <a:uFillTx/>
+              <a:latin typeface="Calibri" panose="020F0502020204030204"/>
+              <a:ea typeface="+mn-ea"/>
+              <a:cs typeface="+mn-cs"/>
+            </a:endParaRPr>
+          </a:p>
+        </p:txBody>
+      </p:sp>
+      <p:sp>
+        <p:nvSpPr>
+          <p:cNvPr id="12" name="TextBox 11">
+            <a:extLst>
+              <a:ext uri="{FF2B5EF4-FFF2-40B4-BE49-F238E27FC236}">
+                <a16:creationId xmlns:a16="http://schemas.microsoft.com/office/drawing/2014/main" id="{ABAE7B79-4E78-B0C2-2F1C-78B1C7B893A1}"/>
+              </a:ext>
+            </a:extLst>
+          </p:cNvPr>
+          <p:cNvSpPr txBox="1"/>
+          <p:nvPr/>
+        </p:nvSpPr>
+        <p:spPr>
+          <a:xfrm>
+            <a:off x="813816" y="2368296"/>
+            <a:ext cx="3721608" cy="3502152"/>
+          </a:xfrm>
+          <a:prstGeom prst="rect">
+            <a:avLst/>
+          </a:prstGeom>
+        </p:spPr>
+        <p:txBody>
+          <a:bodyPr vert="horz" lIns="91440" tIns="45720" rIns="91440" bIns="45720" rtlCol="0">
+            <a:normAutofit/>
+          </a:bodyPr>
+          <a:lstStyle/>
+          <a:p>
+            <a:pPr>
+              <a:lnSpc>
+                <a:spcPct val="90000"/>
+              </a:lnSpc>
+              <a:spcAft>
+                <a:spcPts val="600"/>
+              </a:spcAft>
+            </a:pPr>
+            <a:r>
+              <a:rPr lang="en-US" sz="1700" dirty="0"/>
+              <a:t>I found some simplified Waffle plates on printables.com</a:t>
+            </a:r>
+          </a:p>
+          <a:p>
+            <a:pPr marL="285750" indent="-228600">
+              <a:lnSpc>
+                <a:spcPct val="90000"/>
+              </a:lnSpc>
+              <a:spcAft>
+                <a:spcPts val="600"/>
+              </a:spcAft>
+              <a:buFont typeface="Arial" panose="020B0604020202020204" pitchFamily="34" charset="0"/>
+              <a:buChar char="•"/>
+            </a:pPr>
+            <a:r>
+              <a:rPr lang="en-US" sz="1700" dirty="0"/>
+              <a:t>One with no holes</a:t>
+            </a:r>
+          </a:p>
+          <a:p>
+            <a:pPr marL="285750" indent="-228600">
+              <a:lnSpc>
+                <a:spcPct val="90000"/>
+              </a:lnSpc>
+              <a:spcAft>
+                <a:spcPts val="600"/>
+              </a:spcAft>
+              <a:buFont typeface="Arial" panose="020B0604020202020204" pitchFamily="34" charset="0"/>
+              <a:buChar char="•"/>
+            </a:pPr>
+            <a:r>
+              <a:rPr lang="en-US" sz="1700" dirty="0"/>
+              <a:t>One being a simple plate</a:t>
+            </a:r>
+          </a:p>
+          <a:p>
+            <a:pPr marL="285750" indent="-228600">
+              <a:lnSpc>
+                <a:spcPct val="90000"/>
+              </a:lnSpc>
+              <a:spcAft>
+                <a:spcPts val="600"/>
+              </a:spcAft>
+              <a:buFont typeface="Arial" panose="020B0604020202020204" pitchFamily="34" charset="0"/>
+              <a:buChar char="•"/>
+            </a:pPr>
+            <a:r>
+              <a:rPr lang="en-US" sz="1700" dirty="0"/>
+              <a:t>Two being different doubles</a:t>
+            </a:r>
+          </a:p>
+        </p:txBody>
+      </p:sp>
+      <p:pic>
+        <p:nvPicPr>
+          <p:cNvPr id="5" name="Content Placeholder 4">
+            <a:extLst>
+              <a:ext uri="{FF2B5EF4-FFF2-40B4-BE49-F238E27FC236}">
+                <a16:creationId xmlns:a16="http://schemas.microsoft.com/office/drawing/2014/main" id="{9A22B260-71E4-61AF-270D-7F0B9A2AC581}"/>
+              </a:ext>
+            </a:extLst>
+          </p:cNvPr>
+          <p:cNvPicPr>
+            <a:picLocks noGrp="1" noChangeAspect="1"/>
+          </p:cNvPicPr>
+          <p:nvPr>
+            <p:ph idx="1"/>
+          </p:nvPr>
+        </p:nvPicPr>
+        <p:blipFill>
+          <a:blip r:embed="rId3"/>
+          <a:srcRect l="17124" r="20167" b="-2"/>
+          <a:stretch>
+            <a:fillRect/>
+          </a:stretch>
+        </p:blipFill>
+        <p:spPr>
+          <a:xfrm>
+            <a:off x="5171031" y="10"/>
+            <a:ext cx="3144714" cy="3209534"/>
+          </a:xfrm>
+          <a:prstGeom prst="rect">
+            <a:avLst/>
+          </a:prstGeom>
+        </p:spPr>
+      </p:pic>
+      <p:pic>
+        <p:nvPicPr>
+          <p:cNvPr id="7" name="Picture 6">
+            <a:extLst>
+              <a:ext uri="{FF2B5EF4-FFF2-40B4-BE49-F238E27FC236}">
+                <a16:creationId xmlns:a16="http://schemas.microsoft.com/office/drawing/2014/main" id="{F24AECCB-24C6-4B83-4AB9-593BDB264B59}"/>
+              </a:ext>
+            </a:extLst>
+          </p:cNvPr>
+          <p:cNvPicPr>
+            <a:picLocks noChangeAspect="1"/>
+          </p:cNvPicPr>
+          <p:nvPr/>
+        </p:nvPicPr>
+        <p:blipFill>
+          <a:blip r:embed="rId2"/>
+          <a:srcRect l="15725" r="12036"/>
+          <a:stretch>
+            <a:fillRect/>
+          </a:stretch>
+        </p:blipFill>
+        <p:spPr>
+          <a:xfrm>
+            <a:off x="5171033" y="3310128"/>
+            <a:ext cx="3144712" cy="3547872"/>
+          </a:xfrm>
+          <a:prstGeom prst="rect">
+            <a:avLst/>
+          </a:prstGeom>
+        </p:spPr>
+      </p:pic>
+      <p:pic>
+        <p:nvPicPr>
+          <p:cNvPr id="11" name="Picture 10">
+            <a:extLst>
+              <a:ext uri="{FF2B5EF4-FFF2-40B4-BE49-F238E27FC236}">
+                <a16:creationId xmlns:a16="http://schemas.microsoft.com/office/drawing/2014/main" id="{E5244B0E-E9C2-D93F-4555-E1ADC15B5386}"/>
+              </a:ext>
+            </a:extLst>
+          </p:cNvPr>
+          <p:cNvPicPr>
+            <a:picLocks noChangeAspect="1"/>
+          </p:cNvPicPr>
+          <p:nvPr/>
+        </p:nvPicPr>
+        <p:blipFill>
+          <a:blip r:embed="rId5"/>
+          <a:srcRect l="17005" r="8313" b="-3"/>
+          <a:stretch>
+            <a:fillRect/>
+          </a:stretch>
+        </p:blipFill>
+        <p:spPr>
+          <a:xfrm>
+            <a:off x="8416348" y="10"/>
+            <a:ext cx="3775651" cy="4133078"/>
+          </a:xfrm>
+          <a:prstGeom prst="rect">
+            <a:avLst/>
+          </a:prstGeom>
+        </p:spPr>
+      </p:pic>
+      <p:pic>
+        <p:nvPicPr>
+          <p:cNvPr id="9" name="Picture 8">
+            <a:extLst>
+              <a:ext uri="{FF2B5EF4-FFF2-40B4-BE49-F238E27FC236}">
+                <a16:creationId xmlns:a16="http://schemas.microsoft.com/office/drawing/2014/main" id="{C28A1D29-825A-D98C-E441-F5CBF4A1803C}"/>
+              </a:ext>
+            </a:extLst>
+          </p:cNvPr>
+          <p:cNvPicPr>
+            <a:picLocks noChangeAspect="1"/>
+          </p:cNvPicPr>
+          <p:nvPr/>
+        </p:nvPicPr>
+        <p:blipFill>
+          <a:blip r:embed="rId4"/>
+          <a:srcRect l="4765" r="1003" b="5"/>
+          <a:stretch>
+            <a:fillRect/>
+          </a:stretch>
+        </p:blipFill>
+        <p:spPr>
+          <a:xfrm>
+            <a:off x="8416348" y="4233672"/>
+            <a:ext cx="3775652" cy="2624328"/>
+          </a:xfrm>
+          <a:prstGeom prst="rect">
+            <a:avLst/>
+          </a:prstGeom>
+        </p:spPr>
+      </p:pic>
+    </p:spTree>
+  </p:cSld>
+  <p:clrMapOvr>
+    <a:masterClrMapping/>
+  </p:clrMapOvr>
+</p:sld>
+</file>
+
+<file path=ppt/slides/slide11.xml><?xml version="1.0" encoding="utf-8"?>
+<p:sld xmlns:a="http://schemas.openxmlformats.org/drawingml/2006/main" xmlns:p="http://schemas.openxmlformats.org/presentationml/2006/main" xmlns:r="http://schemas.openxmlformats.org/officeDocument/2006/relationships">
+  <p:cSld>
+    <p:spTree>
+      <p:nvGrpSpPr>
+        <p:cNvPr id="1" name=""/>
+        <p:cNvGrpSpPr/>
+        <p:nvPr/>
+      </p:nvGrpSpPr>
+      <p:grpSpPr/>
+      <p:sp>
+        <p:nvSpPr>
+          <p:cNvPr id="2" name="Title 1">
+            <a:extLst>
+              <a:ext uri="{FF2B5EF4-FFF2-40B4-BE49-F238E27FC236}">
+                <a16:creationId xmlns:a16="http://schemas.microsoft.com/office/drawing/2014/main" id="{6D259182-6FD3-6E62-0AC1-D7F9A089FCBC}"/>
+              </a:ext>
+            </a:extLst>
+          </p:cNvPr>
+          <p:cNvSpPr>
+            <a:spLocks noGrp="1"/>
+          </p:cNvSpPr>
+          <p:nvPr>
+            <p:ph type="title"/>
+          </p:nvPr>
+        </p:nvSpPr>
+        <p:spPr/>
+        <p:txBody>
+          <a:bodyPr/>
+          <a:lstStyle/>
+          <a:p>
+            <a:r>
+              <a:t>Abigail Duran</a:t>
+            </a:r>
+          </a:p>
+        </p:txBody>
+      </p:sp>
+      <p:sp>
+        <p:nvSpPr>
+          <p:cNvPr id="3" name="Content Placeholder 2">
+            <a:extLst>
+              <a:ext uri="{FF2B5EF4-FFF2-40B4-BE49-F238E27FC236}">
+                <a16:creationId xmlns:a16="http://schemas.microsoft.com/office/drawing/2014/main" id="{A7A8531B-14FC-040D-A94D-6293C4D3F000}"/>
+              </a:ext>
+            </a:extLst>
+          </p:cNvPr>
+          <p:cNvSpPr>
+            <a:spLocks noGrp="1"/>
+          </p:cNvSpPr>
+          <p:nvPr>
+            <p:ph idx="1"/>
+          </p:nvPr>
+        </p:nvSpPr>
+        <p:spPr>
+          <a:xfrm>
+            <a:off x="838200" y="1580298"/>
+            <a:ext cx="10515600" cy="4351338"/>
+          </a:xfrm>
+        </p:spPr>
+        <p:txBody>
+          <a:bodyPr>
+            <a:normAutofit fontScale="70000" lnSpcReduction="20000"/>
+          </a:bodyPr>
+          <a:lstStyle/>
+          <a:p>
+            <a:r>
+              <a:rPr b="1" dirty="0"/>
+              <a:t>Goals for the week</a:t>
+            </a:r>
+            <a:endParaRPr lang="en-US" b="1" dirty="0"/>
+          </a:p>
+          <a:p>
+            <a:pPr lvl="1"/>
+            <a:r>
+              <a:rPr lang="en-US" dirty="0"/>
+              <a:t>Prepare the PCB design files with all currently selected components and required connections.</a:t>
+            </a:r>
+          </a:p>
+          <a:p>
+            <a:pPr lvl="1"/>
+            <a:r>
+              <a:rPr lang="en-US" dirty="0"/>
+              <a:t>Make sure the schematic reflects the components planned for the current </a:t>
+            </a:r>
+            <a:r>
+              <a:rPr lang="en-US" dirty="0" err="1"/>
+              <a:t>BuggyBot</a:t>
+            </a:r>
+            <a:r>
+              <a:rPr lang="en-US" dirty="0"/>
+              <a:t> hardware setup.</a:t>
+            </a:r>
+          </a:p>
+          <a:p>
+            <a:r>
+              <a:rPr lang="en-US" b="1" dirty="0"/>
+              <a:t>Progress for the week</a:t>
+            </a:r>
+          </a:p>
+          <a:p>
+            <a:pPr lvl="1"/>
+            <a:r>
+              <a:rPr lang="en-US" dirty="0"/>
+              <a:t>Created an organized component checklist/spreadsheet for the PCB design. </a:t>
+            </a:r>
+          </a:p>
+          <a:p>
+            <a:pPr lvl="1"/>
+            <a:r>
+              <a:rPr lang="en-US" dirty="0"/>
+              <a:t>Reviewed the CM5 IO Board components and connections to determine which features should be kept, removed, or modified.</a:t>
+            </a:r>
+          </a:p>
+          <a:p>
+            <a:pPr lvl="1"/>
+            <a:r>
+              <a:rPr lang="en-US" dirty="0"/>
+              <a:t>Removed unnecessary components from both the schematic and PCB layout.</a:t>
+            </a:r>
+          </a:p>
+          <a:p>
+            <a:r>
+              <a:rPr lang="en-US" b="1" dirty="0"/>
+              <a:t>Goals for next week</a:t>
+            </a:r>
+            <a:r>
+              <a:rPr lang="en-US" dirty="0"/>
+              <a:t>​​​</a:t>
+            </a:r>
+          </a:p>
+          <a:p>
+            <a:pPr lvl="1"/>
+            <a:r>
+              <a:rPr lang="en-US" dirty="0"/>
+              <a:t>Continue developing the PCB design and component placement.</a:t>
+            </a:r>
+          </a:p>
+          <a:p>
+            <a:pPr lvl="1"/>
+            <a:r>
+              <a:rPr lang="en-US" dirty="0"/>
+              <a:t>Begin planning power distribution and signal routing.​</a:t>
+            </a:r>
+          </a:p>
+          <a:p>
+            <a:pPr lvl="1"/>
+            <a:r>
+              <a:rPr lang="en-US" dirty="0"/>
+              <a:t>Work toward finalizing the PCB design for manufacturing.</a:t>
+            </a:r>
+            <a:endParaRPr dirty="0"/>
+          </a:p>
+          <a:p>
+            <a:r>
+              <a:rPr b="1" dirty="0"/>
+              <a:t>Hours spent on progress</a:t>
+            </a:r>
+          </a:p>
+          <a:p>
+            <a:pPr lvl="1"/>
+            <a:r>
+              <a:rPr lang="en-US" dirty="0"/>
+              <a:t>6 hours​</a:t>
+            </a:r>
+          </a:p>
+          <a:p>
+            <a:pPr lvl="1"/>
+            <a:endParaRPr b="1" dirty="0"/>
+          </a:p>
+        </p:txBody>
+      </p:sp>
+    </p:spTree>
+  </p:cSld>
+  <p:clrMapOvr>
+    <a:masterClrMapping/>
+  </p:clrMapOvr>
+</p:sld>
+</file>
+
+<file path=ppt/slides/slide12.xml><?xml version="1.0" encoding="utf-8"?>
+<p:sld xmlns:a="http://schemas.openxmlformats.org/drawingml/2006/main" xmlns:p="http://schemas.openxmlformats.org/presentationml/2006/main" xmlns:r="http://schemas.openxmlformats.org/officeDocument/2006/relationships">
+  <p:cSld>
+    <p:spTree>
+      <p:nvGrpSpPr>
+        <p:cNvPr id="1" name=""/>
+        <p:cNvGrpSpPr/>
+        <p:nvPr/>
+      </p:nvGrpSpPr>
+      <p:grpSpPr/>
       <p:sp>
         <p:nvSpPr>
           <p:cNvPr id="8" name="Rectangle 7">
@@ -3877,10 +4382,10 @@
       </p:sp>
       <p:pic>
         <p:nvPicPr>
-          <p:cNvPr id="7" name="Picture 6">
+          <p:cNvPr id="3" name="Picture 2">
             <a:extLst>
               <a:ext uri="{FF2B5EF4-FFF2-40B4-BE49-F238E27FC236}">
-                <a16:creationId xmlns:a16="http://schemas.microsoft.com/office/drawing/2014/main" id="{6A847D18-1A87-FA4C-7DFB-55209922AE72}"/>
+                <a16:creationId xmlns:a16="http://schemas.microsoft.com/office/drawing/2014/main" id="{10F150F6-B5DC-9B0E-7802-A8FC01B0B8C8}"/>
               </a:ext>
             </a:extLst>
           </p:cNvPr>
@@ -3897,8 +4402,104 @@
         </p:blipFill>
         <p:spPr>
           <a:xfrm>
-            <a:off x="774756" y="452384"/>
-            <a:ext cx="10642488" cy="5953232"/>
+            <a:off x="1377950" y="368556"/>
+            <a:ext cx="9436100" cy="6120887"/>
+          </a:xfrm>
+          <a:prstGeom prst="rect">
+            <a:avLst/>
+          </a:prstGeom>
+        </p:spPr>
+      </p:pic>
+    </p:spTree>
+  </p:cSld>
+  <p:clrMapOvr>
+    <a:masterClrMapping/>
+  </p:clrMapOvr>
+</p:sld>
+</file>
+
+<file path=ppt/slides/slide13.xml><?xml version="1.0" encoding="utf-8"?>
+<p:sld xmlns:a="http://schemas.openxmlformats.org/drawingml/2006/main" xmlns:p="http://schemas.openxmlformats.org/presentationml/2006/main" xmlns:r="http://schemas.openxmlformats.org/officeDocument/2006/relationships">
+  <p:cSld>
+    <p:spTree>
+      <p:nvGrpSpPr>
+        <p:cNvPr id="1" name=""/>
+        <p:cNvGrpSpPr/>
+        <p:nvPr/>
+      </p:nvGrpSpPr>
+      <p:grpSpPr/>
+      <p:pic>
+        <p:nvPicPr>
+          <p:cNvPr id="5" name="Picture 4">
+            <a:extLst>
+              <a:ext uri="{FF2B5EF4-FFF2-40B4-BE49-F238E27FC236}">
+                <a16:creationId xmlns:a16="http://schemas.microsoft.com/office/drawing/2014/main" id="{34186BFD-4D32-6F06-6690-29A945916E9F}"/>
+              </a:ext>
+            </a:extLst>
+          </p:cNvPr>
+          <p:cNvPicPr>
+            <a:picLocks noChangeAspect="1"/>
+          </p:cNvPicPr>
+          <p:nvPr/>
+        </p:nvPicPr>
+        <p:blipFill>
+          <a:blip r:embed="rId2"/>
+          <a:stretch>
+            <a:fillRect/>
+          </a:stretch>
+        </p:blipFill>
+        <p:spPr>
+          <a:xfrm>
+            <a:off x="1355725" y="700902"/>
+            <a:ext cx="9480550" cy="5456196"/>
+          </a:xfrm>
+          <a:prstGeom prst="rect">
+            <a:avLst/>
+          </a:prstGeom>
+        </p:spPr>
+      </p:pic>
+    </p:spTree>
+  </p:cSld>
+  <p:clrMapOvr>
+    <a:masterClrMapping/>
+  </p:clrMapOvr>
+</p:sld>
+</file>
+
+<file path=ppt/slides/slide14.xml><?xml version="1.0" encoding="utf-8"?>
+<p:sld xmlns:a="http://schemas.openxmlformats.org/drawingml/2006/main" xmlns:p="http://schemas.openxmlformats.org/presentationml/2006/main" xmlns:r="http://schemas.openxmlformats.org/officeDocument/2006/relationships">
+  <p:cSld>
+    <p:spTree>
+      <p:nvGrpSpPr>
+        <p:cNvPr id="1" name=""/>
+        <p:cNvGrpSpPr/>
+        <p:nvPr/>
+      </p:nvGrpSpPr>
+      <p:grpSpPr/>
+      <p:pic>
+        <p:nvPicPr>
+          <p:cNvPr id="3" name="Picture 2">
+            <a:extLst>
+              <a:ext uri="{FF2B5EF4-FFF2-40B4-BE49-F238E27FC236}">
+                <a16:creationId xmlns:a16="http://schemas.microsoft.com/office/drawing/2014/main" id="{A0E52E99-419F-5F59-B3FB-9FE958F8A333}"/>
+              </a:ext>
+            </a:extLst>
+          </p:cNvPr>
+          <p:cNvPicPr>
+            <a:picLocks noChangeAspect="1"/>
+          </p:cNvPicPr>
+          <p:nvPr/>
+        </p:nvPicPr>
+        <p:blipFill>
+          <a:blip r:embed="rId2"/>
+          <a:stretch>
+            <a:fillRect/>
+          </a:stretch>
+        </p:blipFill>
+        <p:spPr>
+          <a:xfrm>
+            <a:off x="1619250" y="831017"/>
+            <a:ext cx="8953500" cy="5195966"/>
           </a:xfrm>
           <a:prstGeom prst="rect">
             <a:avLst/>
@@ -3925,55 +4526,37 @@
       <p:grpSpPr/>
       <p:sp>
         <p:nvSpPr>
-          <p:cNvPr id="9" name="slide-title">
-            <a:extLst>
-              <a:ext uri="{FF2B5EF4-FFF2-40B4-BE49-F238E27FC236}">
-                <a16:creationId xmlns:a16="http://schemas.microsoft.com/office/drawing/2014/main" id="{B2B79A4A-5F48-4F8C-95D6-B925E3164B2D}"/>
-              </a:ext>
-            </a:extLst>
-          </p:cNvPr>
-          <p:cNvSpPr>
-            <a:spLocks noGrp="1"/>
-          </p:cNvSpPr>
-          <p:nvPr/>
-        </p:nvSpPr>
-        <p:spPr>
-          <a:xfrm>
-            <a:off x="914400" y="590550"/>
-            <a:ext cx="10668000" cy="742950"/>
+          <p:cNvPr id="2" name="Title"/>
+          <p:cNvSpPr txBox="1"/>
+          <p:nvPr/>
+        </p:nvSpPr>
+        <p:spPr>
+          <a:xfrm>
+            <a:off x="768096" y="365760"/>
+            <a:ext cx="10789920" cy="658368"/>
           </a:xfrm>
           <a:prstGeom prst="rect">
             <a:avLst/>
           </a:prstGeom>
           <a:noFill/>
-          <a:ln w="0">
-            <a:noFill/>
-          </a:ln>
-        </p:spPr>
-        <p:txBody>
-          <a:bodyPr wrap="square" lIns="0" tIns="0" rIns="0" bIns="0">
-            <a:normAutofit/>
+        </p:spPr>
+        <p:txBody>
+          <a:bodyPr wrap="square" lIns="18288" tIns="18288" rIns="18288" bIns="18288" anchor="t">
+            <a:noAutofit/>
           </a:bodyPr>
           <a:lstStyle/>
           <a:p>
-            <a:pPr>
-              <a:defRPr sz="4200">
+            <a:pPr algn="l">
+              <a:spcAft>
+                <a:spcPts val="0"/>
+              </a:spcAft>
+            </a:pPr>
+            <a:r>
+              <a:rPr sz="3500" b="0">
                 <a:solidFill>
                   <a:srgbClr val="000000"/>
                 </a:solidFill>
                 <a:latin typeface="Aptos Display"/>
-                <a:ea typeface="Aptos Display"/>
-                <a:cs typeface="Aptos Display"/>
-              </a:defRPr>
-            </a:pPr>
-            <a:r>
-              <a:rPr sz="4200">
-                <a:solidFill>
-                  <a:srgbClr val="000000"/>
-                </a:solidFill>
-                <a:latin typeface="Aptos Display"/>
-                <a:ea typeface="Aptos Display"/>
-                <a:cs typeface="Aptos Display"/>
               </a:rPr>
               <a:t>Ethan Wells</a:t>
             </a:r>
@@ -3982,536 +4565,670 @@
       </p:sp>
       <p:sp>
         <p:nvSpPr>
-          <p:cNvPr id="2" name="section-goals-for-the-week">
-            <a:extLst>
-              <a:ext uri="{FF2B5EF4-FFF2-40B4-BE49-F238E27FC236}">
-                <a16:creationId xmlns:a16="http://schemas.microsoft.com/office/drawing/2014/main" id="{D695EA51-DF94-4706-B740-AAEF12FBA793}"/>
-              </a:ext>
-            </a:extLst>
-          </p:cNvPr>
-          <p:cNvSpPr>
-            <a:spLocks noGrp="1"/>
-          </p:cNvSpPr>
-          <p:nvPr/>
-        </p:nvSpPr>
-        <p:spPr>
-          <a:xfrm>
-            <a:off x="762000" y="1524000"/>
-            <a:ext cx="10287000" cy="323850"/>
+          <p:cNvPr id="3" name="Subtitle"/>
+          <p:cNvSpPr txBox="1"/>
+          <p:nvPr/>
+        </p:nvSpPr>
+        <p:spPr>
+          <a:xfrm>
+            <a:off x="786384" y="1024128"/>
+            <a:ext cx="10607040" cy="365760"/>
           </a:xfrm>
           <a:prstGeom prst="rect">
             <a:avLst/>
           </a:prstGeom>
           <a:noFill/>
-          <a:ln w="0">
-            <a:noFill/>
-          </a:ln>
-        </p:spPr>
-        <p:txBody>
-          <a:bodyPr wrap="square" lIns="0" tIns="0" rIns="0" bIns="0">
-            <a:normAutofit/>
+        </p:spPr>
+        <p:txBody>
+          <a:bodyPr wrap="square" lIns="18288" tIns="18288" rIns="18288" bIns="18288" anchor="t">
+            <a:noAutofit/>
           </a:bodyPr>
           <a:lstStyle/>
           <a:p>
-            <a:pPr>
-              <a:defRPr sz="1800" b="1">
+            <a:pPr algn="l">
+              <a:spcAft>
+                <a:spcPts val="0"/>
+              </a:spcAft>
+            </a:pPr>
+            <a:r>
+              <a:rPr sz="1500" b="1">
                 <a:solidFill>
                   <a:srgbClr val="000000"/>
                 </a:solidFill>
                 <a:latin typeface="Aptos"/>
-                <a:ea typeface="Aptos"/>
-                <a:cs typeface="Aptos"/>
-              </a:defRPr>
+              </a:rPr>
+              <a:t>Week 8 progress</a:t>
+            </a:r>
+          </a:p>
+        </p:txBody>
+      </p:sp>
+      <p:sp>
+        <p:nvSpPr>
+          <p:cNvPr id="4" name="TextBox 3"/>
+          <p:cNvSpPr txBox="1"/>
+          <p:nvPr/>
+        </p:nvSpPr>
+        <p:spPr>
+          <a:xfrm>
+            <a:off x="768096" y="1600200"/>
+            <a:ext cx="7589520" cy="329184"/>
+          </a:xfrm>
+          <a:prstGeom prst="rect">
+            <a:avLst/>
+          </a:prstGeom>
+          <a:noFill/>
+        </p:spPr>
+        <p:txBody>
+          <a:bodyPr wrap="square" lIns="18288" tIns="18288" rIns="18288" bIns="18288" anchor="t">
+            <a:noAutofit/>
+          </a:bodyPr>
+          <a:lstStyle/>
+          <a:p>
+            <a:pPr algn="l">
+              <a:spcAft>
+                <a:spcPts val="0"/>
+              </a:spcAft>
             </a:pPr>
+            <a:r>
+              <a:rPr sz="1700" b="1">
+                <a:solidFill>
+                  <a:srgbClr val="000000"/>
+                </a:solidFill>
+                <a:latin typeface="Aptos"/>
+              </a:rPr>
+              <a:t>Goals for the week</a:t>
+            </a:r>
+          </a:p>
+        </p:txBody>
+      </p:sp>
+      <p:sp>
+        <p:nvSpPr>
+          <p:cNvPr id="5" name="TextBox 4"/>
+          <p:cNvSpPr txBox="1"/>
+          <p:nvPr/>
+        </p:nvSpPr>
+        <p:spPr>
+          <a:xfrm>
+            <a:off x="786384" y="1947672"/>
+            <a:ext cx="7589520" cy="320040"/>
+          </a:xfrm>
+          <a:prstGeom prst="rect">
+            <a:avLst/>
+          </a:prstGeom>
+          <a:noFill/>
+        </p:spPr>
+        <p:txBody>
+          <a:bodyPr wrap="square" lIns="18288" tIns="18288" rIns="18288" bIns="18288" anchor="t">
+            <a:noAutofit/>
+          </a:bodyPr>
+          <a:lstStyle/>
+          <a:p>
+            <a:pPr marL="228600" indent="-182880" algn="l">
+              <a:spcAft>
+                <a:spcPts val="400"/>
+              </a:spcAft>
+              <a:buChar char="•"/>
+            </a:pPr>
+            <a:r>
+              <a:rPr sz="1400" b="0">
+                <a:solidFill>
+                  <a:srgbClr val="000000"/>
+                </a:solidFill>
+                <a:latin typeface="Aptos"/>
+              </a:rPr>
+              <a:t>Train the Mapillary model and, if time allowed, combine it with LISA.</a:t>
+            </a:r>
+          </a:p>
+        </p:txBody>
+      </p:sp>
+      <p:sp>
+        <p:nvSpPr>
+          <p:cNvPr id="6" name="TextBox 5"/>
+          <p:cNvSpPr txBox="1"/>
+          <p:nvPr/>
+        </p:nvSpPr>
+        <p:spPr>
+          <a:xfrm>
+            <a:off x="768096" y="2423160"/>
+            <a:ext cx="7589520" cy="329184"/>
+          </a:xfrm>
+          <a:prstGeom prst="rect">
+            <a:avLst/>
+          </a:prstGeom>
+          <a:noFill/>
+        </p:spPr>
+        <p:txBody>
+          <a:bodyPr wrap="square" lIns="18288" tIns="18288" rIns="18288" bIns="18288" anchor="t">
+            <a:noAutofit/>
+          </a:bodyPr>
+          <a:lstStyle/>
+          <a:p>
+            <a:pPr algn="l">
+              <a:spcAft>
+                <a:spcPts val="0"/>
+              </a:spcAft>
+            </a:pPr>
+            <a:r>
+              <a:rPr sz="1700" b="1">
+                <a:solidFill>
+                  <a:srgbClr val="000000"/>
+                </a:solidFill>
+                <a:latin typeface="Aptos"/>
+              </a:rPr>
+              <a:t>Progress for the week</a:t>
+            </a:r>
+          </a:p>
+        </p:txBody>
+      </p:sp>
+      <p:sp>
+        <p:nvSpPr>
+          <p:cNvPr id="7" name="TextBox 6"/>
+          <p:cNvSpPr txBox="1"/>
+          <p:nvPr/>
+        </p:nvSpPr>
+        <p:spPr>
+          <a:xfrm>
+            <a:off x="786384" y="2770632"/>
+            <a:ext cx="7589520" cy="1600200"/>
+          </a:xfrm>
+          <a:prstGeom prst="rect">
+            <a:avLst/>
+          </a:prstGeom>
+          <a:noFill/>
+        </p:spPr>
+        <p:txBody>
+          <a:bodyPr wrap="square" lIns="18288" tIns="18288" rIns="18288" bIns="18288" anchor="t">
+            <a:noAutofit/>
+          </a:bodyPr>
+          <a:lstStyle/>
+          <a:p>
+            <a:pPr marL="228600" indent="-182880" algn="l">
+              <a:spcAft>
+                <a:spcPts val="400"/>
+              </a:spcAft>
+              <a:buChar char="•"/>
+            </a:pPr>
+            <a:r>
+              <a:rPr sz="1400" b="0">
+                <a:solidFill>
+                  <a:srgbClr val="000000"/>
+                </a:solidFill>
+                <a:latin typeface="Aptos"/>
+              </a:rPr>
+              <a:t>Trained the Mapillary model: 92.59% top-1 (400/432) on its own test crops.</a:t>
+            </a:r>
+          </a:p>
+          <a:p>
+            <a:pPr marL="228600" indent="-182880" algn="l">
+              <a:spcAft>
+                <a:spcPts val="400"/>
+              </a:spcAft>
+              <a:buChar char="•"/>
+            </a:pPr>
+            <a:r>
+              <a:rPr sz="1400" b="0">
+                <a:solidFill>
+                  <a:srgbClr val="000000"/>
+                </a:solidFill>
+                <a:latin typeface="Aptos"/>
+              </a:rPr>
+              <a:t>Merged LISA + Mapillary: 7,601 train, 929 validation, 1,016 test crops.</a:t>
+            </a:r>
+          </a:p>
+          <a:p>
+            <a:pPr marL="228600" indent="-182880" algn="l">
+              <a:spcAft>
+                <a:spcPts val="400"/>
+              </a:spcAft>
+              <a:buChar char="•"/>
+            </a:pPr>
+            <a:r>
+              <a:rPr sz="1400" b="0">
+                <a:solidFill>
+                  <a:srgbClr val="000000"/>
+                </a:solidFill>
+                <a:latin typeface="Aptos"/>
+              </a:rPr>
+              <a:t>Trained the combined model: 99.31% top-1 (1,009/1,016), 98.55% macro F1.</a:t>
+            </a:r>
+          </a:p>
+          <a:p>
+            <a:pPr marL="228600" indent="-182880" algn="l">
+              <a:spcAft>
+                <a:spcPts val="400"/>
+              </a:spcAft>
+              <a:buChar char="•"/>
+            </a:pPr>
+            <a:r>
+              <a:rPr sz="1400" b="0">
+                <a:solidFill>
+                  <a:srgbClr val="000000"/>
+                </a:solidFill>
+                <a:latin typeface="Aptos"/>
+              </a:rPr>
+              <a:t>Compared all three models on the same 1,016 held-out crops.</a:t>
+            </a:r>
+          </a:p>
+          <a:p>
+            <a:pPr marL="228600" indent="-182880" algn="l">
+              <a:spcAft>
+                <a:spcPts val="400"/>
+              </a:spcAft>
+              <a:buChar char="•"/>
+            </a:pPr>
+            <a:r>
+              <a:rPr sz="1400" b="0">
+                <a:solidFill>
+                  <a:srgbClr val="000000"/>
+                </a:solidFill>
+                <a:latin typeface="Aptos"/>
+              </a:rPr>
+              <a:t>Prepared 12 printable sign-card designs.</a:t>
+            </a:r>
+          </a:p>
+        </p:txBody>
+      </p:sp>
+      <p:sp>
+        <p:nvSpPr>
+          <p:cNvPr id="8" name="TextBox 7"/>
+          <p:cNvSpPr txBox="1"/>
+          <p:nvPr/>
+        </p:nvSpPr>
+        <p:spPr>
+          <a:xfrm>
+            <a:off x="768096" y="4343400"/>
+            <a:ext cx="7589520" cy="329184"/>
+          </a:xfrm>
+          <a:prstGeom prst="rect">
+            <a:avLst/>
+          </a:prstGeom>
+          <a:noFill/>
+        </p:spPr>
+        <p:txBody>
+          <a:bodyPr wrap="square" lIns="18288" tIns="18288" rIns="18288" bIns="18288" anchor="t">
+            <a:noAutofit/>
+          </a:bodyPr>
+          <a:lstStyle/>
+          <a:p>
+            <a:pPr algn="l">
+              <a:spcAft>
+                <a:spcPts val="0"/>
+              </a:spcAft>
+            </a:pPr>
+            <a:r>
+              <a:rPr sz="1700" b="1">
+                <a:solidFill>
+                  <a:srgbClr val="000000"/>
+                </a:solidFill>
+                <a:latin typeface="Aptos"/>
+              </a:rPr>
+              <a:t>Goals for next week</a:t>
+            </a:r>
+          </a:p>
+        </p:txBody>
+      </p:sp>
+      <p:sp>
+        <p:nvSpPr>
+          <p:cNvPr id="9" name="TextBox 8"/>
+          <p:cNvSpPr txBox="1"/>
+          <p:nvPr/>
+        </p:nvSpPr>
+        <p:spPr>
+          <a:xfrm>
+            <a:off x="786384" y="4690872"/>
+            <a:ext cx="7589520" cy="685800"/>
+          </a:xfrm>
+          <a:prstGeom prst="rect">
+            <a:avLst/>
+          </a:prstGeom>
+          <a:noFill/>
+        </p:spPr>
+        <p:txBody>
+          <a:bodyPr wrap="square" lIns="18288" tIns="18288" rIns="18288" bIns="18288" anchor="t">
+            <a:noAutofit/>
+          </a:bodyPr>
+          <a:lstStyle/>
+          <a:p>
+            <a:pPr marL="228600" indent="-182880" algn="l">
+              <a:spcAft>
+                <a:spcPts val="400"/>
+              </a:spcAft>
+              <a:buChar char="•"/>
+            </a:pPr>
+            <a:r>
+              <a:rPr sz="1400" b="0">
+                <a:solidFill>
+                  <a:srgbClr val="000000"/>
+                </a:solidFill>
+                <a:latin typeface="Aptos"/>
+              </a:rPr>
+              <a:t>Print the cards and capture them with the CM5 camera at set distances and angles.</a:t>
+            </a:r>
+          </a:p>
+          <a:p>
+            <a:pPr marL="228600" indent="-182880" algn="l">
+              <a:spcAft>
+                <a:spcPts val="400"/>
+              </a:spcAft>
+              <a:buChar char="•"/>
+            </a:pPr>
+            <a:r>
+              <a:rPr sz="1400" b="0">
+                <a:solidFill>
+                  <a:srgbClr val="000000"/>
+                </a:solidFill>
+                <a:latin typeface="Aptos"/>
+              </a:rPr>
+              <a:t>Score the camera crops separately from the road-scene crop benchmark.</a:t>
+            </a:r>
+          </a:p>
+        </p:txBody>
+      </p:sp>
+      <p:sp>
+        <p:nvSpPr>
+          <p:cNvPr id="10" name="Result card"/>
+          <p:cNvSpPr/>
+          <p:nvPr/>
+        </p:nvSpPr>
+        <p:spPr>
+          <a:xfrm>
+            <a:off x="8732520" y="1645920"/>
+            <a:ext cx="2697480" cy="2148840"/>
+          </a:xfrm>
+          <a:prstGeom prst="roundRect">
+            <a:avLst>
+              <a:gd name="adj" fmla="val 8000"/>
+            </a:avLst>
+          </a:prstGeom>
+          <a:solidFill>
+            <a:srgbClr val="EFF4F8"/>
+          </a:solidFill>
+          <a:ln>
+            <a:noFill/>
+          </a:ln>
+          <a:effectLst/>
+        </p:spPr>
+        <p:txBody>
+          <a:bodyPr rtlCol="0" anchor="ctr"/>
+          <a:lstStyle/>
+          <a:p>
+            <a:pPr algn="ctr"/>
+            <a:endParaRPr/>
+          </a:p>
+        </p:txBody>
+      </p:sp>
+      <p:sp>
+        <p:nvSpPr>
+          <p:cNvPr id="11" name="TextBox 10"/>
+          <p:cNvSpPr txBox="1"/>
+          <p:nvPr/>
+        </p:nvSpPr>
+        <p:spPr>
+          <a:xfrm>
+            <a:off x="8915400" y="1810512"/>
+            <a:ext cx="2331720" cy="274320"/>
+          </a:xfrm>
+          <a:prstGeom prst="rect">
+            <a:avLst/>
+          </a:prstGeom>
+          <a:noFill/>
+        </p:spPr>
+        <p:txBody>
+          <a:bodyPr wrap="square" lIns="18288" tIns="18288" rIns="18288" bIns="18288" anchor="t">
+            <a:noAutofit/>
+          </a:bodyPr>
+          <a:lstStyle/>
+          <a:p>
+            <a:pPr algn="l">
+              <a:spcAft>
+                <a:spcPts val="0"/>
+              </a:spcAft>
+            </a:pPr>
+            <a:r>
+              <a:rPr sz="1300" b="1">
+                <a:solidFill>
+                  <a:srgbClr val="22313F"/>
+                </a:solidFill>
+                <a:latin typeface="Aptos"/>
+              </a:rPr>
+              <a:t>Week goal met</a:t>
+            </a:r>
+          </a:p>
+        </p:txBody>
+      </p:sp>
+      <p:sp>
+        <p:nvSpPr>
+          <p:cNvPr id="12" name="TextBox 11"/>
+          <p:cNvSpPr txBox="1"/>
+          <p:nvPr/>
+        </p:nvSpPr>
+        <p:spPr>
+          <a:xfrm>
+            <a:off x="8915400" y="2148840"/>
+            <a:ext cx="2331720" cy="731520"/>
+          </a:xfrm>
+          <a:prstGeom prst="rect">
+            <a:avLst/>
+          </a:prstGeom>
+          <a:noFill/>
+        </p:spPr>
+        <p:txBody>
+          <a:bodyPr wrap="square" lIns="18288" tIns="18288" rIns="18288" bIns="18288" anchor="t">
+            <a:noAutofit/>
+          </a:bodyPr>
+          <a:lstStyle/>
+          <a:p>
+            <a:pPr algn="l">
+              <a:spcAft>
+                <a:spcPts val="0"/>
+              </a:spcAft>
+            </a:pPr>
+            <a:r>
+              <a:rPr sz="4000" b="1">
+                <a:solidFill>
+                  <a:srgbClr val="30669D"/>
+                </a:solidFill>
+                <a:latin typeface="Aptos"/>
+              </a:rPr>
+              <a:t>99.31%</a:t>
+            </a:r>
+          </a:p>
+        </p:txBody>
+      </p:sp>
+      <p:sp>
+        <p:nvSpPr>
+          <p:cNvPr id="13" name="TextBox 12"/>
+          <p:cNvSpPr txBox="1"/>
+          <p:nvPr/>
+        </p:nvSpPr>
+        <p:spPr>
+          <a:xfrm>
+            <a:off x="8915400" y="2926080"/>
+            <a:ext cx="2331720" cy="731520"/>
+          </a:xfrm>
+          <a:prstGeom prst="rect">
+            <a:avLst/>
+          </a:prstGeom>
+          <a:noFill/>
+        </p:spPr>
+        <p:txBody>
+          <a:bodyPr wrap="square" lIns="18288" tIns="18288" rIns="18288" bIns="18288" anchor="t">
+            <a:noAutofit/>
+          </a:bodyPr>
+          <a:lstStyle/>
+          <a:p>
+            <a:pPr algn="l">
+              <a:spcAft>
+                <a:spcPts val="0"/>
+              </a:spcAft>
+            </a:pPr>
+            <a:r>
+              <a:rPr sz="1300" b="0">
+                <a:solidFill>
+                  <a:srgbClr val="22313F"/>
+                </a:solidFill>
+                <a:latin typeface="Aptos"/>
+              </a:rPr>
+              <a:t>Combined-model top-1 on 1,016 held-out crops</a:t>
+            </a:r>
+          </a:p>
+        </p:txBody>
+      </p:sp>
+      <p:sp>
+        <p:nvSpPr>
+          <p:cNvPr id="14" name="Hours card"/>
+          <p:cNvSpPr/>
+          <p:nvPr/>
+        </p:nvSpPr>
+        <p:spPr>
+          <a:xfrm>
+            <a:off x="8732520" y="4023360"/>
+            <a:ext cx="2697480" cy="1783080"/>
+          </a:xfrm>
+          <a:prstGeom prst="roundRect">
+            <a:avLst>
+              <a:gd name="adj" fmla="val 8000"/>
+            </a:avLst>
+          </a:prstGeom>
+          <a:solidFill>
+            <a:srgbClr val="EFF4F8"/>
+          </a:solidFill>
+          <a:ln>
+            <a:noFill/>
+          </a:ln>
+          <a:effectLst/>
+        </p:spPr>
+        <p:txBody>
+          <a:bodyPr rtlCol="0" anchor="ctr"/>
+          <a:lstStyle/>
+          <a:p>
+            <a:pPr algn="ctr"/>
+            <a:endParaRPr/>
+          </a:p>
+        </p:txBody>
+      </p:sp>
+      <p:sp>
+        <p:nvSpPr>
+          <p:cNvPr id="15" name="TextBox 14"/>
+          <p:cNvSpPr txBox="1"/>
+          <p:nvPr/>
+        </p:nvSpPr>
+        <p:spPr>
+          <a:xfrm>
+            <a:off x="8915400" y="4187952"/>
+            <a:ext cx="2331720" cy="274320"/>
+          </a:xfrm>
+          <a:prstGeom prst="rect">
+            <a:avLst/>
+          </a:prstGeom>
+          <a:noFill/>
+        </p:spPr>
+        <p:txBody>
+          <a:bodyPr wrap="square" lIns="18288" tIns="18288" rIns="18288" bIns="18288" anchor="t">
+            <a:noAutofit/>
+          </a:bodyPr>
+          <a:lstStyle/>
+          <a:p>
+            <a:pPr algn="l">
+              <a:spcAft>
+                <a:spcPts val="0"/>
+              </a:spcAft>
+            </a:pPr>
+            <a:r>
+              <a:rPr sz="1300" b="1">
+                <a:solidFill>
+                  <a:srgbClr val="22313F"/>
+                </a:solidFill>
+                <a:latin typeface="Aptos"/>
+              </a:rPr>
+              <a:t>Hours spent on progress</a:t>
+            </a:r>
+          </a:p>
+        </p:txBody>
+      </p:sp>
+      <p:sp>
+        <p:nvSpPr>
+          <p:cNvPr id="16" name="TextBox 15"/>
+          <p:cNvSpPr txBox="1"/>
+          <p:nvPr/>
+        </p:nvSpPr>
+        <p:spPr>
+          <a:xfrm>
+            <a:off x="8915400" y="4526280"/>
+            <a:ext cx="2331720" cy="731520"/>
+          </a:xfrm>
+          <a:prstGeom prst="rect">
+            <a:avLst/>
+          </a:prstGeom>
+          <a:noFill/>
+        </p:spPr>
+        <p:txBody>
+          <a:bodyPr wrap="square" lIns="18288" tIns="18288" rIns="18288" bIns="18288" anchor="t">
+            <a:noAutofit/>
+          </a:bodyPr>
+          <a:lstStyle/>
+          <a:p>
+            <a:pPr algn="l">
+              <a:spcAft>
+                <a:spcPts val="0"/>
+              </a:spcAft>
+            </a:pPr>
+            <a:r>
+              <a:rPr sz="4000" b="1">
+                <a:solidFill>
+                  <a:srgbClr val="000000"/>
+                </a:solidFill>
+                <a:latin typeface="Aptos"/>
+              </a:rPr>
+              <a:t>8</a:t>
+            </a:r>
             <a:r>
               <a:rPr sz="1800" b="1">
                 <a:solidFill>
                   <a:srgbClr val="000000"/>
                 </a:solidFill>
                 <a:latin typeface="Aptos"/>
-                <a:ea typeface="Aptos"/>
-                <a:cs typeface="Aptos"/>
               </a:rPr>
-              <a:t>Goals for the week</a:t>
-            </a:r>
-          </a:p>
-        </p:txBody>
-      </p:sp>
-      <p:sp>
-        <p:nvSpPr>
-          <p:cNvPr id="3" name="week7-goals">
-            <a:extLst>
-              <a:ext uri="{FF2B5EF4-FFF2-40B4-BE49-F238E27FC236}">
-                <a16:creationId xmlns:a16="http://schemas.microsoft.com/office/drawing/2014/main" id="{F34356FF-7AEF-48B2-891A-1E3B171587D6}"/>
-              </a:ext>
-            </a:extLst>
-          </p:cNvPr>
-          <p:cNvSpPr>
-            <a:spLocks noGrp="1"/>
-          </p:cNvSpPr>
-          <p:nvPr/>
-        </p:nvSpPr>
-        <p:spPr>
-          <a:xfrm>
-            <a:off x="838200" y="1885950"/>
-            <a:ext cx="10477500" cy="457200"/>
+              <a:t> hours</a:t>
+            </a:r>
+          </a:p>
+        </p:txBody>
+      </p:sp>
+      <p:sp>
+        <p:nvSpPr>
+          <p:cNvPr id="17" name="TextBox 16"/>
+          <p:cNvSpPr txBox="1"/>
+          <p:nvPr/>
+        </p:nvSpPr>
+        <p:spPr>
+          <a:xfrm>
+            <a:off x="8915400" y="5303520"/>
+            <a:ext cx="2331720" cy="320040"/>
           </a:xfrm>
           <a:prstGeom prst="rect">
             <a:avLst/>
           </a:prstGeom>
           <a:noFill/>
-          <a:ln w="0">
-            <a:noFill/>
-          </a:ln>
-        </p:spPr>
-        <p:txBody>
-          <a:bodyPr wrap="square" lIns="0" tIns="0" rIns="0" bIns="0">
-            <a:normAutofit/>
+        </p:spPr>
+        <p:txBody>
+          <a:bodyPr wrap="square" lIns="18288" tIns="18288" rIns="18288" bIns="18288" anchor="t">
+            <a:noAutofit/>
           </a:bodyPr>
           <a:lstStyle/>
           <a:p>
-            <a:pPr marL="228600" indent="-114300">
+            <a:pPr algn="l">
               <a:spcAft>
-                <a:spcPts val="700"/>
+                <a:spcPts val="0"/>
               </a:spcAft>
-              <a:buChar char="•"/>
-              <a:defRPr sz="1500">
+            </a:pPr>
+            <a:r>
+              <a:rPr sz="1300" b="0">
                 <a:solidFill>
-                  <a:srgbClr val="000000"/>
+                  <a:srgbClr val="22313F"/>
                 </a:solidFill>
                 <a:latin typeface="Aptos"/>
-                <a:ea typeface="Aptos"/>
-                <a:cs typeface="Aptos"/>
-              </a:defRPr>
-            </a:pPr>
-            <a:r>
-              <a:rPr sz="1500">
-                <a:solidFill>
-                  <a:srgbClr val="000000"/>
-                </a:solidFill>
-                <a:latin typeface="Aptos"/>
-                <a:ea typeface="Aptos"/>
-                <a:cs typeface="Aptos"/>
               </a:rPr>
-              <a:t>Train and test a CNN on the prepared LISA sign dataset.</a:t>
-            </a:r>
-          </a:p>
-        </p:txBody>
-      </p:sp>
-      <p:sp>
-        <p:nvSpPr>
-          <p:cNvPr id="4" name="section-progress-for-the-week">
-            <a:extLst>
-              <a:ext uri="{FF2B5EF4-FFF2-40B4-BE49-F238E27FC236}">
-                <a16:creationId xmlns:a16="http://schemas.microsoft.com/office/drawing/2014/main" id="{A60F2C09-C968-42DD-92C0-6839F067AA8F}"/>
-              </a:ext>
-            </a:extLst>
-          </p:cNvPr>
-          <p:cNvSpPr>
-            <a:spLocks noGrp="1"/>
-          </p:cNvSpPr>
-          <p:nvPr/>
-        </p:nvSpPr>
-        <p:spPr>
-          <a:xfrm>
-            <a:off x="762000" y="2438400"/>
-            <a:ext cx="10287000" cy="323850"/>
-          </a:xfrm>
-          <a:prstGeom prst="rect">
-            <a:avLst/>
-          </a:prstGeom>
-          <a:noFill/>
-          <a:ln w="0">
-            <a:noFill/>
-          </a:ln>
-        </p:spPr>
-        <p:txBody>
-          <a:bodyPr wrap="square" lIns="0" tIns="0" rIns="0" bIns="0">
-            <a:normAutofit/>
-          </a:bodyPr>
-          <a:lstStyle/>
-          <a:p>
-            <a:pPr>
-              <a:defRPr sz="1800" b="1">
-                <a:solidFill>
-                  <a:srgbClr val="000000"/>
-                </a:solidFill>
-                <a:latin typeface="Aptos"/>
-                <a:ea typeface="Aptos"/>
-                <a:cs typeface="Aptos"/>
-              </a:defRPr>
-            </a:pPr>
-            <a:r>
-              <a:rPr sz="1800" b="1">
-                <a:solidFill>
-                  <a:srgbClr val="000000"/>
-                </a:solidFill>
-                <a:latin typeface="Aptos"/>
-                <a:ea typeface="Aptos"/>
-                <a:cs typeface="Aptos"/>
-              </a:rPr>
-              <a:t>Progress for the week</a:t>
-            </a:r>
-          </a:p>
-        </p:txBody>
-      </p:sp>
-      <p:sp>
-        <p:nvSpPr>
-          <p:cNvPr id="5" name="week7-progress">
-            <a:extLst>
-              <a:ext uri="{FF2B5EF4-FFF2-40B4-BE49-F238E27FC236}">
-                <a16:creationId xmlns:a16="http://schemas.microsoft.com/office/drawing/2014/main" id="{1266AE4D-44FD-4BAC-B49F-E3B95A24F6F9}"/>
-              </a:ext>
-            </a:extLst>
-          </p:cNvPr>
-          <p:cNvSpPr>
-            <a:spLocks noGrp="1"/>
-          </p:cNvSpPr>
-          <p:nvPr/>
-        </p:nvSpPr>
-        <p:spPr>
-          <a:xfrm>
-            <a:off x="838200" y="2819400"/>
-            <a:ext cx="10477500" cy="1695450"/>
-          </a:xfrm>
-          <a:prstGeom prst="rect">
-            <a:avLst/>
-          </a:prstGeom>
-          <a:noFill/>
-          <a:ln w="0">
-            <a:noFill/>
-          </a:ln>
-        </p:spPr>
-        <p:txBody>
-          <a:bodyPr wrap="square" lIns="0" tIns="0" rIns="0" bIns="0">
-            <a:normAutofit/>
-          </a:bodyPr>
-          <a:lstStyle/>
-          <a:p>
-            <a:pPr marL="228600" indent="-114300">
-              <a:spcAft>
-                <a:spcPts val="700"/>
-              </a:spcAft>
-              <a:buChar char="•"/>
-              <a:defRPr sz="1500">
-                <a:solidFill>
-                  <a:srgbClr val="000000"/>
-                </a:solidFill>
-                <a:latin typeface="Aptos"/>
-                <a:ea typeface="Aptos"/>
-                <a:cs typeface="Aptos"/>
-              </a:defRPr>
-            </a:pPr>
-            <a:r>
-              <a:rPr sz="1500">
-                <a:solidFill>
-                  <a:srgbClr val="000000"/>
-                </a:solidFill>
-                <a:latin typeface="Aptos"/>
-                <a:ea typeface="Aptos"/>
-                <a:cs typeface="Aptos"/>
-              </a:rPr>
-              <a:t>Trained and tested the LISA model: 89.90% top-1 (525 of 584 test crops) and 84.93% macro class accuracy.</a:t>
-            </a:r>
-          </a:p>
-          <a:p>
-            <a:pPr marL="228600" indent="-114300">
-              <a:spcAft>
-                <a:spcPts val="700"/>
-              </a:spcAft>
-              <a:buChar char="•"/>
-              <a:defRPr sz="1500">
-                <a:solidFill>
-                  <a:srgbClr val="000000"/>
-                </a:solidFill>
-                <a:latin typeface="Aptos"/>
-                <a:ea typeface="Aptos"/>
-                <a:cs typeface="Aptos"/>
-              </a:defRPr>
-            </a:pPr>
-            <a:r>
-              <a:rPr sz="1500">
-                <a:solidFill>
-                  <a:srgbClr val="000000"/>
-                </a:solidFill>
-                <a:latin typeface="Aptos"/>
-                <a:ea typeface="Aptos"/>
-                <a:cs typeface="Aptos"/>
-              </a:rPr>
-              <a:t>Reviewed per-class results and found limited, uneven training data, including few independent sign tracks for several classes.</a:t>
-            </a:r>
-          </a:p>
-          <a:p>
-            <a:pPr marL="228600" indent="-114300">
-              <a:spcAft>
-                <a:spcPts val="700"/>
-              </a:spcAft>
-              <a:buChar char="•"/>
-              <a:defRPr sz="1500">
-                <a:solidFill>
-                  <a:srgbClr val="000000"/>
-                </a:solidFill>
-                <a:latin typeface="Aptos"/>
-                <a:ea typeface="Aptos"/>
-                <a:cs typeface="Aptos"/>
-              </a:defRPr>
-            </a:pPr>
-            <a:r>
-              <a:rPr sz="1500">
-                <a:solidFill>
-                  <a:srgbClr val="000000"/>
-                </a:solidFill>
-                <a:latin typeface="Aptos"/>
-                <a:ea typeface="Aptos"/>
-                <a:cs typeface="Aptos"/>
-              </a:rPr>
-              <a:t>Sourced Mapillary data and prepared 3,449 crops for the same 12 classes: 2,655 train, 362 validation, and 432 test.</a:t>
-            </a:r>
-          </a:p>
-        </p:txBody>
-      </p:sp>
-      <p:sp>
-        <p:nvSpPr>
-          <p:cNvPr id="6" name="section-goals-for-next-week">
-            <a:extLst>
-              <a:ext uri="{FF2B5EF4-FFF2-40B4-BE49-F238E27FC236}">
-                <a16:creationId xmlns:a16="http://schemas.microsoft.com/office/drawing/2014/main" id="{D868C7A5-2C2A-4AB8-A115-2B857D2BCB8D}"/>
-              </a:ext>
-            </a:extLst>
-          </p:cNvPr>
-          <p:cNvSpPr>
-            <a:spLocks noGrp="1"/>
-          </p:cNvSpPr>
-          <p:nvPr/>
-        </p:nvSpPr>
-        <p:spPr>
-          <a:xfrm>
-            <a:off x="762000" y="3919537"/>
-            <a:ext cx="10287000" cy="323850"/>
-          </a:xfrm>
-          <a:prstGeom prst="rect">
-            <a:avLst/>
-          </a:prstGeom>
-          <a:noFill/>
-          <a:ln w="0">
-            <a:noFill/>
-          </a:ln>
-        </p:spPr>
-        <p:txBody>
-          <a:bodyPr wrap="square" lIns="0" tIns="0" rIns="0" bIns="0">
-            <a:normAutofit/>
-          </a:bodyPr>
-          <a:lstStyle/>
-          <a:p>
-            <a:pPr>
-              <a:defRPr sz="1800" b="1">
-                <a:solidFill>
-                  <a:srgbClr val="000000"/>
-                </a:solidFill>
-                <a:latin typeface="Aptos"/>
-                <a:ea typeface="Aptos"/>
-                <a:cs typeface="Aptos"/>
-              </a:defRPr>
-            </a:pPr>
-            <a:r>
-              <a:rPr sz="1800" b="1" dirty="0">
-                <a:solidFill>
-                  <a:srgbClr val="000000"/>
-                </a:solidFill>
-                <a:latin typeface="Aptos"/>
-                <a:ea typeface="Aptos"/>
-                <a:cs typeface="Aptos"/>
-              </a:rPr>
-              <a:t>Goals for next week</a:t>
-            </a:r>
-          </a:p>
-        </p:txBody>
-      </p:sp>
-      <p:sp>
-        <p:nvSpPr>
-          <p:cNvPr id="7" name="week7-next-goals">
-            <a:extLst>
-              <a:ext uri="{FF2B5EF4-FFF2-40B4-BE49-F238E27FC236}">
-                <a16:creationId xmlns:a16="http://schemas.microsoft.com/office/drawing/2014/main" id="{9995E687-CADA-4F6C-9CD4-273839F63FC8}"/>
-              </a:ext>
-            </a:extLst>
-          </p:cNvPr>
-          <p:cNvSpPr>
-            <a:spLocks noGrp="1"/>
-          </p:cNvSpPr>
-          <p:nvPr/>
-        </p:nvSpPr>
-        <p:spPr>
-          <a:xfrm>
-            <a:off x="838200" y="4360069"/>
-            <a:ext cx="10477500" cy="704850"/>
-          </a:xfrm>
-          <a:prstGeom prst="rect">
-            <a:avLst/>
-          </a:prstGeom>
-          <a:noFill/>
-          <a:ln w="0">
-            <a:noFill/>
-          </a:ln>
-        </p:spPr>
-        <p:txBody>
-          <a:bodyPr wrap="square" lIns="0" tIns="0" rIns="0" bIns="0">
-            <a:normAutofit/>
-          </a:bodyPr>
-          <a:lstStyle/>
-          <a:p>
-            <a:pPr marL="228600" indent="-114300">
-              <a:spcAft>
-                <a:spcPts val="700"/>
-              </a:spcAft>
-              <a:buChar char="•"/>
-              <a:defRPr sz="1425">
-                <a:solidFill>
-                  <a:srgbClr val="000000"/>
-                </a:solidFill>
-                <a:latin typeface="Aptos"/>
-                <a:ea typeface="Aptos"/>
-                <a:cs typeface="Aptos"/>
-              </a:defRPr>
-            </a:pPr>
-            <a:r>
-              <a:rPr sz="1425" dirty="0">
-                <a:solidFill>
-                  <a:srgbClr val="000000"/>
-                </a:solidFill>
-                <a:latin typeface="Aptos"/>
-                <a:ea typeface="Aptos"/>
-                <a:cs typeface="Aptos"/>
-              </a:rPr>
-              <a:t>Train and test a model on the prepared </a:t>
-            </a:r>
-            <a:r>
-              <a:rPr sz="1425" dirty="0" err="1">
-                <a:solidFill>
-                  <a:srgbClr val="000000"/>
-                </a:solidFill>
-                <a:latin typeface="Aptos"/>
-                <a:ea typeface="Aptos"/>
-                <a:cs typeface="Aptos"/>
-              </a:rPr>
-              <a:t>Mapillary</a:t>
-            </a:r>
-            <a:r>
-              <a:rPr sz="1425" dirty="0">
-                <a:solidFill>
-                  <a:srgbClr val="000000"/>
-                </a:solidFill>
-                <a:latin typeface="Aptos"/>
-                <a:ea typeface="Aptos"/>
-                <a:cs typeface="Aptos"/>
-              </a:rPr>
-              <a:t> data.</a:t>
-            </a:r>
-          </a:p>
-          <a:p>
-            <a:pPr marL="228600" indent="-114300">
-              <a:spcAft>
-                <a:spcPts val="700"/>
-              </a:spcAft>
-              <a:buChar char="•"/>
-              <a:defRPr sz="1425">
-                <a:solidFill>
-                  <a:srgbClr val="000000"/>
-                </a:solidFill>
-                <a:latin typeface="Aptos"/>
-                <a:ea typeface="Aptos"/>
-                <a:cs typeface="Aptos"/>
-              </a:defRPr>
-            </a:pPr>
-            <a:r>
-              <a:rPr sz="1425" dirty="0">
-                <a:solidFill>
-                  <a:srgbClr val="000000"/>
-                </a:solidFill>
-                <a:latin typeface="Aptos"/>
-                <a:ea typeface="Aptos"/>
-                <a:cs typeface="Aptos"/>
-              </a:rPr>
-              <a:t>If time allows, combine the LISA and </a:t>
-            </a:r>
-            <a:r>
-              <a:rPr sz="1425" dirty="0" err="1">
-                <a:solidFill>
-                  <a:srgbClr val="000000"/>
-                </a:solidFill>
-                <a:latin typeface="Aptos"/>
-                <a:ea typeface="Aptos"/>
-                <a:cs typeface="Aptos"/>
-              </a:rPr>
-              <a:t>Mapillary</a:t>
-            </a:r>
-            <a:r>
-              <a:rPr sz="1425" dirty="0">
-                <a:solidFill>
-                  <a:srgbClr val="000000"/>
-                </a:solidFill>
-                <a:latin typeface="Aptos"/>
-                <a:ea typeface="Aptos"/>
-                <a:cs typeface="Aptos"/>
-              </a:rPr>
-              <a:t> datasets, then train and test the combined model.</a:t>
-            </a:r>
-          </a:p>
-        </p:txBody>
-      </p:sp>
-      <p:sp>
-        <p:nvSpPr>
-          <p:cNvPr id="8" name="hours">
-            <a:extLst>
-              <a:ext uri="{FF2B5EF4-FFF2-40B4-BE49-F238E27FC236}">
-                <a16:creationId xmlns:a16="http://schemas.microsoft.com/office/drawing/2014/main" id="{CF43D2E0-B715-4D97-84BA-CF4F5F33C417}"/>
-              </a:ext>
-            </a:extLst>
-          </p:cNvPr>
-          <p:cNvSpPr>
-            <a:spLocks noGrp="1"/>
-          </p:cNvSpPr>
-          <p:nvPr/>
-        </p:nvSpPr>
-        <p:spPr>
-          <a:xfrm>
-            <a:off x="762000" y="5064919"/>
-            <a:ext cx="6667500" cy="342900"/>
-          </a:xfrm>
-          <a:prstGeom prst="rect">
-            <a:avLst/>
-          </a:prstGeom>
-          <a:noFill/>
-          <a:ln w="0">
-            <a:noFill/>
-          </a:ln>
-        </p:spPr>
-        <p:txBody>
-          <a:bodyPr wrap="square" lIns="0" tIns="0" rIns="0" bIns="0">
-            <a:normAutofit/>
-          </a:bodyPr>
-          <a:lstStyle/>
-          <a:p>
-            <a:pPr>
-              <a:defRPr sz="1575">
-                <a:solidFill>
-                  <a:srgbClr val="000000"/>
-                </a:solidFill>
-                <a:latin typeface="Aptos"/>
-                <a:ea typeface="Aptos"/>
-                <a:cs typeface="Aptos"/>
-              </a:defRPr>
-            </a:pPr>
-            <a:r>
-              <a:rPr sz="1575" dirty="0">
-                <a:solidFill>
-                  <a:srgbClr val="000000"/>
-                </a:solidFill>
-                <a:latin typeface="Aptos"/>
-                <a:ea typeface="Aptos"/>
-                <a:cs typeface="Aptos"/>
-              </a:rPr>
-              <a:t>Hours spent on progress: 7 hours</a:t>
+              <a:t>10/9, 10/12, 10/13</a:t>
             </a:r>
           </a:p>
         </p:txBody>
@@ -4536,103 +5253,69 @@
       <p:grpSpPr/>
       <p:sp>
         <p:nvSpPr>
-          <p:cNvPr id="13" name="slide-title">
-            <a:extLst>
-              <a:ext uri="{FF2B5EF4-FFF2-40B4-BE49-F238E27FC236}">
-                <a16:creationId xmlns:a16="http://schemas.microsoft.com/office/drawing/2014/main" id="{E20E7FBC-A104-459D-8712-E3C3F70ABA5D}"/>
-              </a:ext>
-            </a:extLst>
-          </p:cNvPr>
-          <p:cNvSpPr>
-            <a:spLocks noGrp="1"/>
-          </p:cNvSpPr>
-          <p:nvPr/>
-        </p:nvSpPr>
-        <p:spPr>
-          <a:xfrm>
-            <a:off x="914400" y="590550"/>
-            <a:ext cx="10668000" cy="742950"/>
+          <p:cNvPr id="2" name="Title"/>
+          <p:cNvSpPr txBox="1"/>
+          <p:nvPr/>
+        </p:nvSpPr>
+        <p:spPr>
+          <a:xfrm>
+            <a:off x="768096" y="365760"/>
+            <a:ext cx="10789920" cy="658368"/>
           </a:xfrm>
           <a:prstGeom prst="rect">
             <a:avLst/>
           </a:prstGeom>
           <a:noFill/>
-          <a:ln w="0">
-            <a:noFill/>
-          </a:ln>
-        </p:spPr>
-        <p:txBody>
-          <a:bodyPr wrap="square" lIns="0" tIns="0" rIns="0" bIns="0">
-            <a:normAutofit/>
+        </p:spPr>
+        <p:txBody>
+          <a:bodyPr wrap="square" lIns="18288" tIns="18288" rIns="18288" bIns="18288" anchor="t">
+            <a:noAutofit/>
           </a:bodyPr>
           <a:lstStyle/>
           <a:p>
-            <a:pPr>
-              <a:defRPr sz="4200">
+            <a:pPr algn="l">
+              <a:spcAft>
+                <a:spcPts val="0"/>
+              </a:spcAft>
+            </a:pPr>
+            <a:r>
+              <a:rPr sz="3500" b="0">
                 <a:solidFill>
                   <a:srgbClr val="000000"/>
                 </a:solidFill>
                 <a:latin typeface="Aptos Display"/>
-                <a:ea typeface="Aptos Display"/>
-                <a:cs typeface="Aptos Display"/>
-              </a:defRPr>
-            </a:pPr>
-            <a:r>
-              <a:rPr sz="4200">
-                <a:solidFill>
-                  <a:srgbClr val="000000"/>
-                </a:solidFill>
-                <a:latin typeface="Aptos Display"/>
-                <a:ea typeface="Aptos Display"/>
-                <a:cs typeface="Aptos Display"/>
               </a:rPr>
-              <a:t>LISA Model Results</a:t>
-            </a:r>
-          </a:p>
-        </p:txBody>
-      </p:sp>
-      <p:sp>
-        <p:nvSpPr>
-          <p:cNvPr id="2" name="chart-caption">
-            <a:extLst>
-              <a:ext uri="{FF2B5EF4-FFF2-40B4-BE49-F238E27FC236}">
-                <a16:creationId xmlns:a16="http://schemas.microsoft.com/office/drawing/2014/main" id="{0B0290F6-0F6B-4067-8388-43F8C6332CE7}"/>
-              </a:ext>
-            </a:extLst>
-          </p:cNvPr>
-          <p:cNvSpPr>
-            <a:spLocks noGrp="1"/>
-          </p:cNvSpPr>
-          <p:nvPr/>
-        </p:nvSpPr>
-        <p:spPr>
-          <a:xfrm>
-            <a:off x="704850" y="1438275"/>
-            <a:ext cx="6667500" cy="323850"/>
+              <a:t>The combined model led on the shared test set</a:t>
+            </a:r>
+          </a:p>
+        </p:txBody>
+      </p:sp>
+      <p:sp>
+        <p:nvSpPr>
+          <p:cNvPr id="3" name="Subtitle"/>
+          <p:cNvSpPr txBox="1"/>
+          <p:nvPr/>
+        </p:nvSpPr>
+        <p:spPr>
+          <a:xfrm>
+            <a:off x="786384" y="1024128"/>
+            <a:ext cx="10607040" cy="365760"/>
           </a:xfrm>
           <a:prstGeom prst="rect">
             <a:avLst/>
           </a:prstGeom>
           <a:noFill/>
-          <a:ln w="0">
-            <a:noFill/>
-          </a:ln>
-        </p:spPr>
-        <p:txBody>
-          <a:bodyPr wrap="square" lIns="0" tIns="0" rIns="0" bIns="0">
-            <a:normAutofit/>
+        </p:spPr>
+        <p:txBody>
+          <a:bodyPr wrap="square" lIns="18288" tIns="18288" rIns="18288" bIns="18288" anchor="t">
+            <a:noAutofit/>
           </a:bodyPr>
           <a:lstStyle/>
           <a:p>
-            <a:pPr>
-              <a:defRPr sz="1500" b="1">
-                <a:solidFill>
-                  <a:srgbClr val="000000"/>
-                </a:solidFill>
-                <a:latin typeface="Aptos"/>
-                <a:ea typeface="Aptos"/>
-                <a:cs typeface="Aptos"/>
-              </a:defRPr>
+            <a:pPr algn="l">
+              <a:spcAft>
+                <a:spcPts val="0"/>
+              </a:spcAft>
             </a:pPr>
             <a:r>
               <a:rPr sz="1500" b="1">
@@ -4640,572 +5323,584 @@
                   <a:srgbClr val="000000"/>
                 </a:solidFill>
                 <a:latin typeface="Aptos"/>
-                <a:ea typeface="Aptos"/>
-                <a:cs typeface="Aptos"/>
               </a:rPr>
-              <a:t>Test recall by class (%)</a:t>
-            </a:r>
-          </a:p>
-        </p:txBody>
-      </p:sp>
-      <p:graphicFrame>
-        <p:nvGraphicFramePr>
-          <p:cNvPr id="15" name="Chart"/>
-          <p:cNvGraphicFramePr/>
-          <p:nvPr/>
-        </p:nvGraphicFramePr>
-        <p:xfrm>
-          <a:off x="514350" y="1790700"/>
-          <a:ext cx="7696200" cy="4143375"/>
-        </p:xfrm>
-        <a:graphic>
-          <a:graphicData uri="http://schemas.openxmlformats.org/drawingml/2006/chart">
-            <c:chart xmlns:c="http://schemas.openxmlformats.org/drawingml/2006/chart" r:id="rId2"/>
-          </a:graphicData>
-        </a:graphic>
-      </p:graphicFrame>
-      <p:sp>
-        <p:nvSpPr>
-          <p:cNvPr id="4" name="misclassified-header">
-            <a:extLst>
-              <a:ext uri="{FF2B5EF4-FFF2-40B4-BE49-F238E27FC236}">
-                <a16:creationId xmlns:a16="http://schemas.microsoft.com/office/drawing/2014/main" id="{59CD83B1-128B-4EA9-A1E9-FF4379B79456}"/>
-              </a:ext>
-            </a:extLst>
-          </p:cNvPr>
-          <p:cNvSpPr>
-            <a:spLocks noGrp="1"/>
-          </p:cNvSpPr>
-          <p:nvPr/>
-        </p:nvSpPr>
-        <p:spPr>
-          <a:xfrm>
-            <a:off x="8515350" y="1485900"/>
-            <a:ext cx="3143250" cy="323850"/>
+              <a:t>Top-1 accuracy on the same 1,016 held-out crops</a:t>
+            </a:r>
+          </a:p>
+        </p:txBody>
+      </p:sp>
+      <p:sp>
+        <p:nvSpPr>
+          <p:cNvPr id="4" name="TextBox 3"/>
+          <p:cNvSpPr txBox="1"/>
+          <p:nvPr/>
+        </p:nvSpPr>
+        <p:spPr>
+          <a:xfrm>
+            <a:off x="868680" y="2048256"/>
+            <a:ext cx="1371600" cy="365760"/>
           </a:xfrm>
           <a:prstGeom prst="rect">
             <a:avLst/>
           </a:prstGeom>
           <a:noFill/>
-          <a:ln w="0">
-            <a:noFill/>
-          </a:ln>
-        </p:spPr>
-        <p:txBody>
-          <a:bodyPr wrap="square" lIns="0" tIns="0" rIns="0" bIns="0">
-            <a:normAutofit/>
+        </p:spPr>
+        <p:txBody>
+          <a:bodyPr wrap="square" lIns="18288" tIns="18288" rIns="18288" bIns="18288" anchor="t">
+            <a:noAutofit/>
           </a:bodyPr>
           <a:lstStyle/>
           <a:p>
-            <a:pPr>
-              <a:defRPr sz="1500" b="1">
+            <a:pPr algn="l">
+              <a:spcAft>
+                <a:spcPts val="0"/>
+              </a:spcAft>
+            </a:pPr>
+            <a:r>
+              <a:rPr sz="1700" b="0">
                 <a:solidFill>
                   <a:srgbClr val="000000"/>
                 </a:solidFill>
                 <a:latin typeface="Aptos"/>
-                <a:ea typeface="Aptos"/>
-                <a:cs typeface="Aptos"/>
-              </a:defRPr>
+              </a:rPr>
+              <a:t>LISA</a:t>
+            </a:r>
+          </a:p>
+        </p:txBody>
+      </p:sp>
+      <p:sp>
+        <p:nvSpPr>
+          <p:cNvPr id="5" name="Rectangle 4"/>
+          <p:cNvSpPr/>
+          <p:nvPr/>
+        </p:nvSpPr>
+        <p:spPr>
+          <a:xfrm>
+            <a:off x="2331720" y="1993392"/>
+            <a:ext cx="6812280" cy="530352"/>
+          </a:xfrm>
+          <a:prstGeom prst="rect">
+            <a:avLst/>
+          </a:prstGeom>
+          <a:solidFill>
+            <a:srgbClr val="EFF4F8"/>
+          </a:solidFill>
+          <a:ln>
+            <a:noFill/>
+          </a:ln>
+          <a:effectLst/>
+        </p:spPr>
+        <p:txBody>
+          <a:bodyPr rtlCol="0" anchor="ctr"/>
+          <a:lstStyle/>
+          <a:p>
+            <a:pPr algn="ctr"/>
+            <a:endParaRPr/>
+          </a:p>
+        </p:txBody>
+      </p:sp>
+      <p:sp>
+        <p:nvSpPr>
+          <p:cNvPr id="6" name="Rectangle 5"/>
+          <p:cNvSpPr/>
+          <p:nvPr/>
+        </p:nvSpPr>
+        <p:spPr>
+          <a:xfrm>
+            <a:off x="2331720" y="1993392"/>
+            <a:ext cx="5786350" cy="530352"/>
+          </a:xfrm>
+          <a:prstGeom prst="rect">
+            <a:avLst/>
+          </a:prstGeom>
+          <a:solidFill>
+            <a:srgbClr val="788490"/>
+          </a:solidFill>
+          <a:ln>
+            <a:noFill/>
+          </a:ln>
+          <a:effectLst/>
+        </p:spPr>
+        <p:txBody>
+          <a:bodyPr rtlCol="0" anchor="ctr"/>
+          <a:lstStyle/>
+          <a:p>
+            <a:pPr algn="ctr"/>
+            <a:endParaRPr/>
+          </a:p>
+        </p:txBody>
+      </p:sp>
+      <p:sp>
+        <p:nvSpPr>
+          <p:cNvPr id="7" name="TextBox 6"/>
+          <p:cNvSpPr txBox="1"/>
+          <p:nvPr/>
+        </p:nvSpPr>
+        <p:spPr>
+          <a:xfrm>
+            <a:off x="9345168" y="2066544"/>
+            <a:ext cx="2057400" cy="365760"/>
+          </a:xfrm>
+          <a:prstGeom prst="rect">
+            <a:avLst/>
+          </a:prstGeom>
+          <a:noFill/>
+        </p:spPr>
+        <p:txBody>
+          <a:bodyPr wrap="square" lIns="18288" tIns="18288" rIns="18288" bIns="18288" anchor="t">
+            <a:noAutofit/>
+          </a:bodyPr>
+          <a:lstStyle/>
+          <a:p>
+            <a:pPr algn="l">
+              <a:spcAft>
+                <a:spcPts val="0"/>
+              </a:spcAft>
             </a:pPr>
             <a:r>
-              <a:rPr sz="1500" b="1">
+              <a:rPr sz="1800" b="1">
                 <a:solidFill>
                   <a:srgbClr val="000000"/>
                 </a:solidFill>
                 <a:latin typeface="Aptos"/>
-                <a:ea typeface="Aptos"/>
-                <a:cs typeface="Aptos"/>
               </a:rPr>
-              <a:t>Misclassified test crops</a:t>
-            </a:r>
-          </a:p>
-        </p:txBody>
-      </p:sp>
-      <p:pic>
-        <p:nvPicPr>
-          <p:cNvPr id="17" name="Picture 16"/>
-          <p:cNvPicPr>
-            <a:picLocks noChangeAspect="1"/>
-          </p:cNvPicPr>
-          <p:nvPr/>
-        </p:nvPicPr>
-        <p:blipFill>
-          <a:blip r:embed="rId5"/>
-          <a:stretch/>
-        </p:blipFill>
-        <p:spPr>
-          <a:xfrm>
-            <a:off x="8548688" y="2000250"/>
-            <a:ext cx="1000125" cy="1000125"/>
-          </a:xfrm>
-          <a:prstGeom prst="rect">
-            <a:avLst/>
-          </a:prstGeom>
-        </p:spPr>
-      </p:pic>
-      <p:sp>
-        <p:nvSpPr>
-          <p:cNvPr id="6" name="error-caption-1">
-            <a:extLst>
-              <a:ext uri="{FF2B5EF4-FFF2-40B4-BE49-F238E27FC236}">
-                <a16:creationId xmlns:a16="http://schemas.microsoft.com/office/drawing/2014/main" id="{57B1AAED-DFE6-4AF3-9636-A3A7DA69E226}"/>
-              </a:ext>
-            </a:extLst>
-          </p:cNvPr>
-          <p:cNvSpPr>
-            <a:spLocks noGrp="1"/>
-          </p:cNvSpPr>
-          <p:nvPr/>
-        </p:nvSpPr>
-        <p:spPr>
-          <a:xfrm>
-            <a:off x="9715500" y="2076450"/>
-            <a:ext cx="1952625" cy="857250"/>
+              <a:t>84.94%</a:t>
+            </a:r>
+          </a:p>
+        </p:txBody>
+      </p:sp>
+      <p:sp>
+        <p:nvSpPr>
+          <p:cNvPr id="8" name="TextBox 7"/>
+          <p:cNvSpPr txBox="1"/>
+          <p:nvPr/>
+        </p:nvSpPr>
+        <p:spPr>
+          <a:xfrm>
+            <a:off x="2377440" y="2596896"/>
+            <a:ext cx="2011680" cy="256032"/>
           </a:xfrm>
           <a:prstGeom prst="rect">
             <a:avLst/>
           </a:prstGeom>
           <a:noFill/>
-          <a:ln w="0">
-            <a:noFill/>
-          </a:ln>
-        </p:spPr>
-        <p:txBody>
-          <a:bodyPr wrap="square" lIns="0" tIns="0" rIns="0" bIns="0">
-            <a:normAutofit/>
+        </p:spPr>
+        <p:txBody>
+          <a:bodyPr wrap="square" lIns="18288" tIns="18288" rIns="18288" bIns="18288" anchor="t">
+            <a:noAutofit/>
           </a:bodyPr>
           <a:lstStyle/>
           <a:p>
-            <a:pPr>
-              <a:defRPr sz="1350">
+            <a:pPr algn="l">
+              <a:spcAft>
+                <a:spcPts val="0"/>
+              </a:spcAft>
+            </a:pPr>
+            <a:r>
+              <a:rPr sz="1100" b="0">
+                <a:solidFill>
+                  <a:srgbClr val="22313F"/>
+                </a:solidFill>
+                <a:latin typeface="Aptos"/>
+              </a:rPr>
+              <a:t>863 / 1,016</a:t>
+            </a:r>
+          </a:p>
+        </p:txBody>
+      </p:sp>
+      <p:sp>
+        <p:nvSpPr>
+          <p:cNvPr id="9" name="TextBox 8"/>
+          <p:cNvSpPr txBox="1"/>
+          <p:nvPr/>
+        </p:nvSpPr>
+        <p:spPr>
+          <a:xfrm>
+            <a:off x="868680" y="3191256"/>
+            <a:ext cx="1371600" cy="365760"/>
+          </a:xfrm>
+          <a:prstGeom prst="rect">
+            <a:avLst/>
+          </a:prstGeom>
+          <a:noFill/>
+        </p:spPr>
+        <p:txBody>
+          <a:bodyPr wrap="square" lIns="18288" tIns="18288" rIns="18288" bIns="18288" anchor="t">
+            <a:noAutofit/>
+          </a:bodyPr>
+          <a:lstStyle/>
+          <a:p>
+            <a:pPr algn="l">
+              <a:spcAft>
+                <a:spcPts val="0"/>
+              </a:spcAft>
+            </a:pPr>
+            <a:r>
+              <a:rPr sz="1700" b="0">
                 <a:solidFill>
                   <a:srgbClr val="000000"/>
                 </a:solidFill>
                 <a:latin typeface="Aptos"/>
-                <a:ea typeface="Aptos"/>
-                <a:cs typeface="Aptos"/>
-              </a:defRPr>
+              </a:rPr>
+              <a:t>Mapillary</a:t>
+            </a:r>
+          </a:p>
+        </p:txBody>
+      </p:sp>
+      <p:sp>
+        <p:nvSpPr>
+          <p:cNvPr id="10" name="Rectangle 9"/>
+          <p:cNvSpPr/>
+          <p:nvPr/>
+        </p:nvSpPr>
+        <p:spPr>
+          <a:xfrm>
+            <a:off x="2331720" y="3136392"/>
+            <a:ext cx="6812280" cy="530352"/>
+          </a:xfrm>
+          <a:prstGeom prst="rect">
+            <a:avLst/>
+          </a:prstGeom>
+          <a:solidFill>
+            <a:srgbClr val="EFF4F8"/>
+          </a:solidFill>
+          <a:ln>
+            <a:noFill/>
+          </a:ln>
+          <a:effectLst/>
+        </p:spPr>
+        <p:txBody>
+          <a:bodyPr rtlCol="0" anchor="ctr"/>
+          <a:lstStyle/>
+          <a:p>
+            <a:pPr algn="ctr"/>
+            <a:endParaRPr/>
+          </a:p>
+        </p:txBody>
+      </p:sp>
+      <p:sp>
+        <p:nvSpPr>
+          <p:cNvPr id="11" name="Rectangle 10"/>
+          <p:cNvSpPr/>
+          <p:nvPr/>
+        </p:nvSpPr>
+        <p:spPr>
+          <a:xfrm>
+            <a:off x="2331720" y="3136392"/>
+            <a:ext cx="4908247" cy="530352"/>
+          </a:xfrm>
+          <a:prstGeom prst="rect">
+            <a:avLst/>
+          </a:prstGeom>
+          <a:solidFill>
+            <a:srgbClr val="788490"/>
+          </a:solidFill>
+          <a:ln>
+            <a:noFill/>
+          </a:ln>
+          <a:effectLst/>
+        </p:spPr>
+        <p:txBody>
+          <a:bodyPr rtlCol="0" anchor="ctr"/>
+          <a:lstStyle/>
+          <a:p>
+            <a:pPr algn="ctr"/>
+            <a:endParaRPr/>
+          </a:p>
+        </p:txBody>
+      </p:sp>
+      <p:sp>
+        <p:nvSpPr>
+          <p:cNvPr id="12" name="TextBox 11"/>
+          <p:cNvSpPr txBox="1"/>
+          <p:nvPr/>
+        </p:nvSpPr>
+        <p:spPr>
+          <a:xfrm>
+            <a:off x="9345168" y="3209544"/>
+            <a:ext cx="2057400" cy="365760"/>
+          </a:xfrm>
+          <a:prstGeom prst="rect">
+            <a:avLst/>
+          </a:prstGeom>
+          <a:noFill/>
+        </p:spPr>
+        <p:txBody>
+          <a:bodyPr wrap="square" lIns="18288" tIns="18288" rIns="18288" bIns="18288" anchor="t">
+            <a:noAutofit/>
+          </a:bodyPr>
+          <a:lstStyle/>
+          <a:p>
+            <a:pPr algn="l">
+              <a:spcAft>
+                <a:spcPts val="0"/>
+              </a:spcAft>
             </a:pPr>
             <a:r>
-              <a:rPr sz="1350">
+              <a:rPr sz="1800" b="1">
                 <a:solidFill>
                   <a:srgbClr val="000000"/>
                 </a:solidFill>
                 <a:latin typeface="Aptos"/>
-                <a:ea typeface="Aptos"/>
-                <a:cs typeface="Aptos"/>
               </a:rPr>
-              <a:t>True: Merge</a:t>
-            </a:r>
-          </a:p>
-          <a:p>
-            <a:pPr>
-              <a:defRPr sz="1350">
+              <a:t>72.05%</a:t>
+            </a:r>
+          </a:p>
+        </p:txBody>
+      </p:sp>
+      <p:sp>
+        <p:nvSpPr>
+          <p:cNvPr id="13" name="TextBox 12"/>
+          <p:cNvSpPr txBox="1"/>
+          <p:nvPr/>
+        </p:nvSpPr>
+        <p:spPr>
+          <a:xfrm>
+            <a:off x="2377440" y="3739896"/>
+            <a:ext cx="2011680" cy="256032"/>
+          </a:xfrm>
+          <a:prstGeom prst="rect">
+            <a:avLst/>
+          </a:prstGeom>
+          <a:noFill/>
+        </p:spPr>
+        <p:txBody>
+          <a:bodyPr wrap="square" lIns="18288" tIns="18288" rIns="18288" bIns="18288" anchor="t">
+            <a:noAutofit/>
+          </a:bodyPr>
+          <a:lstStyle/>
+          <a:p>
+            <a:pPr algn="l">
+              <a:spcAft>
+                <a:spcPts val="0"/>
+              </a:spcAft>
+            </a:pPr>
+            <a:r>
+              <a:rPr sz="1100" b="0">
+                <a:solidFill>
+                  <a:srgbClr val="22313F"/>
+                </a:solidFill>
+                <a:latin typeface="Aptos"/>
+              </a:rPr>
+              <a:t>732 / 1,016</a:t>
+            </a:r>
+          </a:p>
+        </p:txBody>
+      </p:sp>
+      <p:sp>
+        <p:nvSpPr>
+          <p:cNvPr id="14" name="TextBox 13"/>
+          <p:cNvSpPr txBox="1"/>
+          <p:nvPr/>
+        </p:nvSpPr>
+        <p:spPr>
+          <a:xfrm>
+            <a:off x="868680" y="4334255"/>
+            <a:ext cx="1371600" cy="365760"/>
+          </a:xfrm>
+          <a:prstGeom prst="rect">
+            <a:avLst/>
+          </a:prstGeom>
+          <a:noFill/>
+        </p:spPr>
+        <p:txBody>
+          <a:bodyPr wrap="square" lIns="18288" tIns="18288" rIns="18288" bIns="18288" anchor="t">
+            <a:noAutofit/>
+          </a:bodyPr>
+          <a:lstStyle/>
+          <a:p>
+            <a:pPr algn="l">
+              <a:spcAft>
+                <a:spcPts val="0"/>
+              </a:spcAft>
+            </a:pPr>
+            <a:r>
+              <a:rPr sz="1700" b="1">
                 <a:solidFill>
                   <a:srgbClr val="000000"/>
                 </a:solidFill>
                 <a:latin typeface="Aptos"/>
-                <a:ea typeface="Aptos"/>
-                <a:cs typeface="Aptos"/>
-              </a:defRPr>
+              </a:rPr>
+              <a:t>Combined</a:t>
+            </a:r>
+          </a:p>
+        </p:txBody>
+      </p:sp>
+      <p:sp>
+        <p:nvSpPr>
+          <p:cNvPr id="15" name="Rectangle 14"/>
+          <p:cNvSpPr/>
+          <p:nvPr/>
+        </p:nvSpPr>
+        <p:spPr>
+          <a:xfrm>
+            <a:off x="2331720" y="4279392"/>
+            <a:ext cx="6812280" cy="530352"/>
+          </a:xfrm>
+          <a:prstGeom prst="rect">
+            <a:avLst/>
+          </a:prstGeom>
+          <a:solidFill>
+            <a:srgbClr val="EFF4F8"/>
+          </a:solidFill>
+          <a:ln>
+            <a:noFill/>
+          </a:ln>
+          <a:effectLst/>
+        </p:spPr>
+        <p:txBody>
+          <a:bodyPr rtlCol="0" anchor="ctr"/>
+          <a:lstStyle/>
+          <a:p>
+            <a:pPr algn="ctr"/>
+            <a:endParaRPr/>
+          </a:p>
+        </p:txBody>
+      </p:sp>
+      <p:sp>
+        <p:nvSpPr>
+          <p:cNvPr id="16" name="Rectangle 15"/>
+          <p:cNvSpPr/>
+          <p:nvPr/>
+        </p:nvSpPr>
+        <p:spPr>
+          <a:xfrm>
+            <a:off x="2331720" y="4279392"/>
+            <a:ext cx="6765275" cy="530352"/>
+          </a:xfrm>
+          <a:prstGeom prst="rect">
+            <a:avLst/>
+          </a:prstGeom>
+          <a:solidFill>
+            <a:srgbClr val="30669D"/>
+          </a:solidFill>
+          <a:ln>
+            <a:noFill/>
+          </a:ln>
+          <a:effectLst/>
+        </p:spPr>
+        <p:txBody>
+          <a:bodyPr rtlCol="0" anchor="ctr"/>
+          <a:lstStyle/>
+          <a:p>
+            <a:pPr algn="ctr"/>
+            <a:endParaRPr/>
+          </a:p>
+        </p:txBody>
+      </p:sp>
+      <p:sp>
+        <p:nvSpPr>
+          <p:cNvPr id="17" name="TextBox 16"/>
+          <p:cNvSpPr txBox="1"/>
+          <p:nvPr/>
+        </p:nvSpPr>
+        <p:spPr>
+          <a:xfrm>
+            <a:off x="9345168" y="4352544"/>
+            <a:ext cx="2057400" cy="365760"/>
+          </a:xfrm>
+          <a:prstGeom prst="rect">
+            <a:avLst/>
+          </a:prstGeom>
+          <a:noFill/>
+        </p:spPr>
+        <p:txBody>
+          <a:bodyPr wrap="square" lIns="18288" tIns="18288" rIns="18288" bIns="18288" anchor="t">
+            <a:noAutofit/>
+          </a:bodyPr>
+          <a:lstStyle/>
+          <a:p>
+            <a:pPr algn="l">
+              <a:spcAft>
+                <a:spcPts val="0"/>
+              </a:spcAft>
             </a:pPr>
             <a:r>
-              <a:rPr sz="1350">
+              <a:rPr sz="1800" b="1">
                 <a:solidFill>
                   <a:srgbClr val="000000"/>
                 </a:solidFill>
                 <a:latin typeface="Aptos"/>
-                <a:ea typeface="Aptos"/>
-                <a:cs typeface="Aptos"/>
               </a:rPr>
-              <a:t>Predicted: Added Lane</a:t>
-            </a:r>
-          </a:p>
-          <a:p>
-            <a:pPr>
-              <a:defRPr sz="1350">
+              <a:t>99.31%</a:t>
+            </a:r>
+          </a:p>
+        </p:txBody>
+      </p:sp>
+      <p:sp>
+        <p:nvSpPr>
+          <p:cNvPr id="18" name="TextBox 17"/>
+          <p:cNvSpPr txBox="1"/>
+          <p:nvPr/>
+        </p:nvSpPr>
+        <p:spPr>
+          <a:xfrm>
+            <a:off x="2377440" y="4882896"/>
+            <a:ext cx="2011680" cy="256032"/>
+          </a:xfrm>
+          <a:prstGeom prst="rect">
+            <a:avLst/>
+          </a:prstGeom>
+          <a:noFill/>
+        </p:spPr>
+        <p:txBody>
+          <a:bodyPr wrap="square" lIns="18288" tIns="18288" rIns="18288" bIns="18288" anchor="t">
+            <a:noAutofit/>
+          </a:bodyPr>
+          <a:lstStyle/>
+          <a:p>
+            <a:pPr algn="l">
+              <a:spcAft>
+                <a:spcPts val="0"/>
+              </a:spcAft>
+            </a:pPr>
+            <a:r>
+              <a:rPr sz="1100" b="0">
                 <a:solidFill>
-                  <a:srgbClr val="000000"/>
+                  <a:srgbClr val="22313F"/>
                 </a:solidFill>
                 <a:latin typeface="Aptos"/>
-                <a:ea typeface="Aptos"/>
-                <a:cs typeface="Aptos"/>
-              </a:defRPr>
+              </a:rPr>
+              <a:t>1,009 / 1,016</a:t>
+            </a:r>
+          </a:p>
+        </p:txBody>
+      </p:sp>
+      <p:sp>
+        <p:nvSpPr>
+          <p:cNvPr id="19" name="TextBox 18"/>
+          <p:cNvSpPr txBox="1"/>
+          <p:nvPr/>
+        </p:nvSpPr>
+        <p:spPr>
+          <a:xfrm>
+            <a:off x="877824" y="5486400"/>
+            <a:ext cx="10607040" cy="365760"/>
+          </a:xfrm>
+          <a:prstGeom prst="rect">
+            <a:avLst/>
+          </a:prstGeom>
+          <a:noFill/>
+        </p:spPr>
+        <p:txBody>
+          <a:bodyPr wrap="square" lIns="18288" tIns="18288" rIns="18288" bIns="18288" anchor="t">
+            <a:noAutofit/>
+          </a:bodyPr>
+          <a:lstStyle/>
+          <a:p>
+            <a:pPr algn="l">
+              <a:spcAft>
+                <a:spcPts val="0"/>
+              </a:spcAft>
             </a:pPr>
             <a:r>
-              <a:rPr sz="1350">
+              <a:rPr sz="1700" b="1">
                 <a:solidFill>
-                  <a:srgbClr val="000000"/>
+                  <a:srgbClr val="30669D"/>
                 </a:solidFill>
                 <a:latin typeface="Aptos"/>
-                <a:ea typeface="Aptos"/>
-                <a:cs typeface="Aptos"/>
               </a:rPr>
-              <a:t>Recall: 52.6% (10/19)</a:t>
-            </a:r>
-          </a:p>
-        </p:txBody>
-      </p:sp>
-      <p:pic>
-        <p:nvPicPr>
-          <p:cNvPr id="19" name="Picture 18"/>
-          <p:cNvPicPr>
-            <a:picLocks noChangeAspect="1"/>
-          </p:cNvPicPr>
-          <p:nvPr/>
-        </p:nvPicPr>
-        <p:blipFill>
-          <a:blip r:embed="rId4"/>
-          <a:stretch/>
-        </p:blipFill>
-        <p:spPr>
-          <a:xfrm>
-            <a:off x="8548688" y="3371850"/>
-            <a:ext cx="1000125" cy="1000125"/>
-          </a:xfrm>
-          <a:prstGeom prst="rect">
-            <a:avLst/>
-          </a:prstGeom>
-        </p:spPr>
-      </p:pic>
-      <p:sp>
-        <p:nvSpPr>
-          <p:cNvPr id="8" name="error-caption-2">
-            <a:extLst>
-              <a:ext uri="{FF2B5EF4-FFF2-40B4-BE49-F238E27FC236}">
-                <a16:creationId xmlns:a16="http://schemas.microsoft.com/office/drawing/2014/main" id="{7EC912E9-52EA-4CA6-AB05-7E6E8916C6F7}"/>
-              </a:ext>
-            </a:extLst>
-          </p:cNvPr>
-          <p:cNvSpPr>
-            <a:spLocks noGrp="1"/>
-          </p:cNvSpPr>
-          <p:nvPr/>
-        </p:nvSpPr>
-        <p:spPr>
-          <a:xfrm>
-            <a:off x="9715500" y="3448050"/>
-            <a:ext cx="1952625" cy="857250"/>
-          </a:xfrm>
-          <a:prstGeom prst="rect">
-            <a:avLst/>
-          </a:prstGeom>
-          <a:noFill/>
-          <a:ln w="0">
-            <a:noFill/>
-          </a:ln>
-        </p:spPr>
-        <p:txBody>
-          <a:bodyPr wrap="square" lIns="0" tIns="0" rIns="0" bIns="0">
-            <a:normAutofit/>
-          </a:bodyPr>
-          <a:lstStyle/>
-          <a:p>
-            <a:pPr>
-              <a:defRPr sz="1350">
-                <a:solidFill>
-                  <a:srgbClr val="000000"/>
-                </a:solidFill>
-                <a:latin typeface="Aptos"/>
-                <a:ea typeface="Aptos"/>
-                <a:cs typeface="Aptos"/>
-              </a:defRPr>
-            </a:pPr>
-            <a:r>
-              <a:rPr sz="1350">
-                <a:solidFill>
-                  <a:srgbClr val="000000"/>
-                </a:solidFill>
-                <a:latin typeface="Aptos"/>
-                <a:ea typeface="Aptos"/>
-                <a:cs typeface="Aptos"/>
-              </a:rPr>
-              <a:t>True: School</a:t>
-            </a:r>
-          </a:p>
-          <a:p>
-            <a:pPr>
-              <a:defRPr sz="1350">
-                <a:solidFill>
-                  <a:srgbClr val="000000"/>
-                </a:solidFill>
-                <a:latin typeface="Aptos"/>
-                <a:ea typeface="Aptos"/>
-                <a:cs typeface="Aptos"/>
-              </a:defRPr>
-            </a:pPr>
-            <a:r>
-              <a:rPr sz="1350">
-                <a:solidFill>
-                  <a:srgbClr val="000000"/>
-                </a:solidFill>
-                <a:latin typeface="Aptos"/>
-                <a:ea typeface="Aptos"/>
-                <a:cs typeface="Aptos"/>
-              </a:rPr>
-              <a:t>Predicted: Pedestrian Crossing</a:t>
-            </a:r>
-          </a:p>
-          <a:p>
-            <a:pPr>
-              <a:defRPr sz="1350">
-                <a:solidFill>
-                  <a:srgbClr val="000000"/>
-                </a:solidFill>
-                <a:latin typeface="Aptos"/>
-                <a:ea typeface="Aptos"/>
-                <a:cs typeface="Aptos"/>
-              </a:defRPr>
-            </a:pPr>
-            <a:r>
-              <a:rPr sz="1350">
-                <a:solidFill>
-                  <a:srgbClr val="000000"/>
-                </a:solidFill>
-                <a:latin typeface="Aptos"/>
-                <a:ea typeface="Aptos"/>
-                <a:cs typeface="Aptos"/>
-              </a:rPr>
-              <a:t>Recall: 63.6% (7/11)</a:t>
-            </a:r>
-          </a:p>
-        </p:txBody>
-      </p:sp>
-      <p:pic>
-        <p:nvPicPr>
-          <p:cNvPr id="21" name="Picture 20"/>
-          <p:cNvPicPr>
-            <a:picLocks noChangeAspect="1"/>
-          </p:cNvPicPr>
-          <p:nvPr/>
-        </p:nvPicPr>
-        <p:blipFill>
-          <a:blip r:embed="rId3"/>
-          <a:stretch/>
-        </p:blipFill>
-        <p:spPr>
-          <a:xfrm>
-            <a:off x="8548688" y="4743450"/>
-            <a:ext cx="1000125" cy="1000125"/>
-          </a:xfrm>
-          <a:prstGeom prst="rect">
-            <a:avLst/>
-          </a:prstGeom>
-        </p:spPr>
-      </p:pic>
-      <p:sp>
-        <p:nvSpPr>
-          <p:cNvPr id="10" name="error-caption-3">
-            <a:extLst>
-              <a:ext uri="{FF2B5EF4-FFF2-40B4-BE49-F238E27FC236}">
-                <a16:creationId xmlns:a16="http://schemas.microsoft.com/office/drawing/2014/main" id="{126093DC-4B25-463C-8069-2FF62759B879}"/>
-              </a:ext>
-            </a:extLst>
-          </p:cNvPr>
-          <p:cNvSpPr>
-            <a:spLocks noGrp="1"/>
-          </p:cNvSpPr>
-          <p:nvPr/>
-        </p:nvSpPr>
-        <p:spPr>
-          <a:xfrm>
-            <a:off x="9715500" y="4819650"/>
-            <a:ext cx="1952625" cy="857250"/>
-          </a:xfrm>
-          <a:prstGeom prst="rect">
-            <a:avLst/>
-          </a:prstGeom>
-          <a:noFill/>
-          <a:ln w="0">
-            <a:noFill/>
-          </a:ln>
-        </p:spPr>
-        <p:txBody>
-          <a:bodyPr wrap="square" lIns="0" tIns="0" rIns="0" bIns="0">
-            <a:normAutofit/>
-          </a:bodyPr>
-          <a:lstStyle/>
-          <a:p>
-            <a:pPr>
-              <a:defRPr sz="1350">
-                <a:solidFill>
-                  <a:srgbClr val="000000"/>
-                </a:solidFill>
-                <a:latin typeface="Aptos"/>
-                <a:ea typeface="Aptos"/>
-                <a:cs typeface="Aptos"/>
-              </a:defRPr>
-            </a:pPr>
-            <a:r>
-              <a:rPr sz="1350">
-                <a:solidFill>
-                  <a:srgbClr val="000000"/>
-                </a:solidFill>
-                <a:latin typeface="Aptos"/>
-                <a:ea typeface="Aptos"/>
-                <a:cs typeface="Aptos"/>
-              </a:rPr>
-              <a:t>True: Speed Limit 30</a:t>
-            </a:r>
-          </a:p>
-          <a:p>
-            <a:pPr>
-              <a:defRPr sz="1350">
-                <a:solidFill>
-                  <a:srgbClr val="000000"/>
-                </a:solidFill>
-                <a:latin typeface="Aptos"/>
-                <a:ea typeface="Aptos"/>
-                <a:cs typeface="Aptos"/>
-              </a:defRPr>
-            </a:pPr>
-            <a:r>
-              <a:rPr sz="1350">
-                <a:solidFill>
-                  <a:srgbClr val="000000"/>
-                </a:solidFill>
-                <a:latin typeface="Aptos"/>
-                <a:ea typeface="Aptos"/>
-                <a:cs typeface="Aptos"/>
-              </a:rPr>
-              <a:t>Predicted: Speed Limit 35</a:t>
-            </a:r>
-          </a:p>
-          <a:p>
-            <a:pPr>
-              <a:defRPr sz="1350">
-                <a:solidFill>
-                  <a:srgbClr val="000000"/>
-                </a:solidFill>
-                <a:latin typeface="Aptos"/>
-                <a:ea typeface="Aptos"/>
-                <a:cs typeface="Aptos"/>
-              </a:defRPr>
-            </a:pPr>
-            <a:r>
-              <a:rPr sz="1350">
-                <a:solidFill>
-                  <a:srgbClr val="000000"/>
-                </a:solidFill>
-                <a:latin typeface="Aptos"/>
-                <a:ea typeface="Aptos"/>
-                <a:cs typeface="Aptos"/>
-              </a:rPr>
-              <a:t>Recall: 71.4% (15/21)</a:t>
-            </a:r>
-          </a:p>
-        </p:txBody>
-      </p:sp>
-      <p:sp>
-        <p:nvSpPr>
-          <p:cNvPr id="11" name="lisa-overall">
-            <a:extLst>
-              <a:ext uri="{FF2B5EF4-FFF2-40B4-BE49-F238E27FC236}">
-                <a16:creationId xmlns:a16="http://schemas.microsoft.com/office/drawing/2014/main" id="{7C702B46-6420-4866-BCE6-20C9D9CE06D4}"/>
-              </a:ext>
-            </a:extLst>
-          </p:cNvPr>
-          <p:cNvSpPr>
-            <a:spLocks noGrp="1"/>
-          </p:cNvSpPr>
-          <p:nvPr/>
-        </p:nvSpPr>
-        <p:spPr>
-          <a:xfrm>
-            <a:off x="704850" y="6048375"/>
-            <a:ext cx="7429500" cy="266700"/>
-          </a:xfrm>
-          <a:prstGeom prst="rect">
-            <a:avLst/>
-          </a:prstGeom>
-          <a:noFill/>
-          <a:ln w="0">
-            <a:noFill/>
-          </a:ln>
-        </p:spPr>
-        <p:txBody>
-          <a:bodyPr wrap="square" lIns="0" tIns="0" rIns="0" bIns="0">
-            <a:normAutofit/>
-          </a:bodyPr>
-          <a:lstStyle/>
-          <a:p>
-            <a:pPr>
-              <a:defRPr sz="1350" b="1">
-                <a:solidFill>
-                  <a:srgbClr val="000000"/>
-                </a:solidFill>
-                <a:latin typeface="Aptos"/>
-                <a:ea typeface="Aptos"/>
-                <a:cs typeface="Aptos"/>
-              </a:defRPr>
-            </a:pPr>
-            <a:r>
-              <a:rPr sz="1350" b="1">
-                <a:solidFill>
-                  <a:srgbClr val="000000"/>
-                </a:solidFill>
-                <a:latin typeface="Aptos"/>
-                <a:ea typeface="Aptos"/>
-                <a:cs typeface="Aptos"/>
-              </a:rPr>
-              <a:t>Overall: 89.90% top-1 · 84.93% macro class accuracy</a:t>
-            </a:r>
-          </a:p>
-        </p:txBody>
-      </p:sp>
-      <p:sp>
-        <p:nvSpPr>
-          <p:cNvPr id="12" name="lisa-camera-caveat">
-            <a:extLst>
-              <a:ext uri="{FF2B5EF4-FFF2-40B4-BE49-F238E27FC236}">
-                <a16:creationId xmlns:a16="http://schemas.microsoft.com/office/drawing/2014/main" id="{8176778B-AF40-4253-8403-673150E56E3C}"/>
-              </a:ext>
-            </a:extLst>
-          </p:cNvPr>
-          <p:cNvSpPr>
-            <a:spLocks noGrp="1"/>
-          </p:cNvSpPr>
-          <p:nvPr/>
-        </p:nvSpPr>
-        <p:spPr>
-          <a:xfrm>
-            <a:off x="704850" y="6343650"/>
-            <a:ext cx="7667625" cy="247650"/>
-          </a:xfrm>
-          <a:prstGeom prst="rect">
-            <a:avLst/>
-          </a:prstGeom>
-          <a:noFill/>
-          <a:ln w="0">
-            <a:noFill/>
-          </a:ln>
-        </p:spPr>
-        <p:txBody>
-          <a:bodyPr wrap="square" lIns="0" tIns="0" rIns="0" bIns="0">
-            <a:normAutofit/>
-          </a:bodyPr>
-          <a:lstStyle/>
-          <a:p>
-            <a:pPr>
-              <a:defRPr sz="1200">
-                <a:solidFill>
-                  <a:srgbClr val="000000"/>
-                </a:solidFill>
-                <a:latin typeface="Aptos"/>
-                <a:ea typeface="Aptos"/>
-                <a:cs typeface="Aptos"/>
-              </a:defRPr>
-            </a:pPr>
-            <a:r>
-              <a:rPr sz="1200">
-                <a:solidFill>
-                  <a:srgbClr val="000000"/>
-                </a:solidFill>
-                <a:latin typeface="Aptos"/>
-                <a:ea typeface="Aptos"/>
-                <a:cs typeface="Aptos"/>
-              </a:rPr>
-              <a:t>Test scores use prepared crops; they do not measure BuggyBot’s live camera pipeline.</a:t>
+              <a:t>Combined result: 98.55% macro F1</a:t>
             </a:r>
           </a:p>
         </p:txBody>
@@ -5230,1234 +5925,1631 @@
       <p:grpSpPr/>
       <p:sp>
         <p:nvSpPr>
-          <p:cNvPr id="29" name="slide-title">
-            <a:extLst>
-              <a:ext uri="{FF2B5EF4-FFF2-40B4-BE49-F238E27FC236}">
-                <a16:creationId xmlns:a16="http://schemas.microsoft.com/office/drawing/2014/main" id="{D69184A5-FC43-46B3-822B-E7045C706EDB}"/>
-              </a:ext>
-            </a:extLst>
-          </p:cNvPr>
-          <p:cNvSpPr>
-            <a:spLocks noGrp="1"/>
-          </p:cNvSpPr>
-          <p:nvPr/>
-        </p:nvSpPr>
-        <p:spPr>
-          <a:xfrm>
-            <a:off x="914400" y="590550"/>
-            <a:ext cx="10668000" cy="742950"/>
+          <p:cNvPr id="2" name="Title"/>
+          <p:cNvSpPr txBox="1"/>
+          <p:nvPr/>
+        </p:nvSpPr>
+        <p:spPr>
+          <a:xfrm>
+            <a:off x="768096" y="365760"/>
+            <a:ext cx="10789920" cy="658368"/>
           </a:xfrm>
           <a:prstGeom prst="rect">
             <a:avLst/>
           </a:prstGeom>
           <a:noFill/>
-          <a:ln w="0">
-            <a:noFill/>
-          </a:ln>
-        </p:spPr>
-        <p:txBody>
-          <a:bodyPr wrap="square" lIns="0" tIns="0" rIns="0" bIns="0">
-            <a:normAutofit/>
+        </p:spPr>
+        <p:txBody>
+          <a:bodyPr wrap="square" lIns="18288" tIns="18288" rIns="18288" bIns="18288" anchor="t">
+            <a:noAutofit/>
           </a:bodyPr>
           <a:lstStyle/>
           <a:p>
-            <a:pPr>
-              <a:defRPr sz="4200">
+            <a:pPr algn="l">
+              <a:spcAft>
+                <a:spcPts val="0"/>
+              </a:spcAft>
+            </a:pPr>
+            <a:r>
+              <a:rPr lang="en-US" sz="3500" b="0" dirty="0">
                 <a:solidFill>
                   <a:srgbClr val="000000"/>
                 </a:solidFill>
                 <a:latin typeface="Aptos Display"/>
-                <a:ea typeface="Aptos Display"/>
-                <a:cs typeface="Aptos Display"/>
-              </a:defRPr>
+              </a:rPr>
+              <a:t>Pain points and struggles</a:t>
+            </a:r>
+            <a:endParaRPr sz="3500" b="0" dirty="0">
+              <a:solidFill>
+                <a:srgbClr val="000000"/>
+              </a:solidFill>
+              <a:latin typeface="Aptos Display"/>
+            </a:endParaRPr>
+          </a:p>
+        </p:txBody>
+      </p:sp>
+      <p:sp>
+        <p:nvSpPr>
+          <p:cNvPr id="3" name="Subtitle"/>
+          <p:cNvSpPr txBox="1"/>
+          <p:nvPr/>
+        </p:nvSpPr>
+        <p:spPr>
+          <a:xfrm>
+            <a:off x="786384" y="1024128"/>
+            <a:ext cx="10607040" cy="365760"/>
+          </a:xfrm>
+          <a:prstGeom prst="rect">
+            <a:avLst/>
+          </a:prstGeom>
+          <a:noFill/>
+        </p:spPr>
+        <p:txBody>
+          <a:bodyPr wrap="square" lIns="18288" tIns="18288" rIns="18288" bIns="18288" anchor="t">
+            <a:noAutofit/>
+          </a:bodyPr>
+          <a:lstStyle/>
+          <a:p>
+            <a:pPr algn="l">
+              <a:spcAft>
+                <a:spcPts val="0"/>
+              </a:spcAft>
             </a:pPr>
             <a:r>
-              <a:rPr sz="4200">
-                <a:solidFill>
-                  <a:srgbClr val="000000"/>
-                </a:solidFill>
-                <a:latin typeface="Aptos Display"/>
-                <a:ea typeface="Aptos Display"/>
-                <a:cs typeface="Aptos Display"/>
-              </a:rPr>
-              <a:t>Mapillary Data Preparation</a:t>
-            </a:r>
-          </a:p>
-        </p:txBody>
-      </p:sp>
-      <p:sp>
-        <p:nvSpPr>
-          <p:cNvPr id="2" name="mapillary-gallery-label">
-            <a:extLst>
-              <a:ext uri="{FF2B5EF4-FFF2-40B4-BE49-F238E27FC236}">
-                <a16:creationId xmlns:a16="http://schemas.microsoft.com/office/drawing/2014/main" id="{7649E00A-9F17-4050-BC07-1A6FDB7359C2}"/>
-              </a:ext>
-            </a:extLst>
-          </p:cNvPr>
-          <p:cNvSpPr>
-            <a:spLocks noGrp="1"/>
-          </p:cNvSpPr>
-          <p:nvPr/>
-        </p:nvSpPr>
-        <p:spPr>
-          <a:xfrm>
-            <a:off x="666750" y="1447800"/>
-            <a:ext cx="4953000" cy="304800"/>
-          </a:xfrm>
-          <a:prstGeom prst="rect">
-            <a:avLst/>
-          </a:prstGeom>
-          <a:noFill/>
-          <a:ln w="0">
-            <a:noFill/>
-          </a:ln>
-        </p:spPr>
-        <p:txBody>
-          <a:bodyPr wrap="square" lIns="0" tIns="0" rIns="0" bIns="0">
-            <a:normAutofit/>
-          </a:bodyPr>
-          <a:lstStyle/>
-          <a:p>
-            <a:pPr>
-              <a:defRPr sz="1425" b="1">
+              <a:rPr sz="1500" b="1" dirty="0">
                 <a:solidFill>
                   <a:srgbClr val="000000"/>
                 </a:solidFill>
                 <a:latin typeface="Aptos"/>
-                <a:ea typeface="Aptos"/>
-                <a:cs typeface="Aptos"/>
-              </a:defRPr>
+              </a:rPr>
+              <a:t>Top-1 accuracy split by where each test crop came from (same 1,016 crops)</a:t>
+            </a:r>
+          </a:p>
+        </p:txBody>
+      </p:sp>
+      <p:sp>
+        <p:nvSpPr>
+          <p:cNvPr id="4" name="TextBox 3"/>
+          <p:cNvSpPr txBox="1"/>
+          <p:nvPr/>
+        </p:nvSpPr>
+        <p:spPr>
+          <a:xfrm>
+            <a:off x="2395728" y="1664208"/>
+            <a:ext cx="1874519" cy="530352"/>
+          </a:xfrm>
+          <a:prstGeom prst="rect">
+            <a:avLst/>
+          </a:prstGeom>
+          <a:noFill/>
+        </p:spPr>
+        <p:txBody>
+          <a:bodyPr wrap="square" lIns="18288" tIns="18288" rIns="18288" bIns="18288" anchor="t">
+            <a:noAutofit/>
+          </a:bodyPr>
+          <a:lstStyle/>
+          <a:p>
+            <a:pPr algn="ctr">
+              <a:spcAft>
+                <a:spcPts val="0"/>
+              </a:spcAft>
             </a:pPr>
             <a:r>
-              <a:rPr sz="1425" b="1">
+              <a:rPr sz="1400" b="1">
                 <a:solidFill>
                   <a:srgbClr val="000000"/>
                 </a:solidFill>
                 <a:latin typeface="Aptos"/>
-                <a:ea typeface="Aptos"/>
-                <a:cs typeface="Aptos"/>
               </a:rPr>
-              <a:t>Prepared training crops · one example per class</a:t>
-            </a:r>
-          </a:p>
-        </p:txBody>
-      </p:sp>
-      <p:pic>
-        <p:nvPicPr>
-          <p:cNvPr id="31" name="Picture 30"/>
-          <p:cNvPicPr>
-            <a:picLocks noChangeAspect="1"/>
-          </p:cNvPicPr>
-          <p:nvPr/>
-        </p:nvPicPr>
-        <p:blipFill>
-          <a:blip r:embed="rId4"/>
-          <a:stretch/>
-        </p:blipFill>
-        <p:spPr>
-          <a:xfrm>
-            <a:off x="714375" y="1933575"/>
-            <a:ext cx="914400" cy="914400"/>
-          </a:xfrm>
-          <a:prstGeom prst="rect">
-            <a:avLst/>
-          </a:prstGeom>
-        </p:spPr>
-      </p:pic>
-      <p:sp>
-        <p:nvSpPr>
-          <p:cNvPr id="4" name="mapillary-label-addedLane">
-            <a:extLst>
-              <a:ext uri="{FF2B5EF4-FFF2-40B4-BE49-F238E27FC236}">
-                <a16:creationId xmlns:a16="http://schemas.microsoft.com/office/drawing/2014/main" id="{3744D9A2-08AE-47BC-9AAE-8592BBE4527B}"/>
-              </a:ext>
-            </a:extLst>
-          </p:cNvPr>
-          <p:cNvSpPr>
-            <a:spLocks noGrp="1"/>
-          </p:cNvSpPr>
-          <p:nvPr/>
-        </p:nvSpPr>
-        <p:spPr>
-          <a:xfrm>
-            <a:off x="628650" y="2876550"/>
-            <a:ext cx="1085850" cy="238125"/>
+              <a:t>LISA crops</a:t>
+            </a:r>
+          </a:p>
+          <a:p>
+            <a:pPr algn="ctr">
+              <a:spcAft>
+                <a:spcPts val="0"/>
+              </a:spcAft>
+            </a:pPr>
+            <a:r>
+              <a:rPr sz="1100" b="0">
+                <a:solidFill>
+                  <a:srgbClr val="22313F"/>
+                </a:solidFill>
+                <a:latin typeface="Aptos"/>
+              </a:rPr>
+              <a:t>584 images</a:t>
+            </a:r>
+          </a:p>
+        </p:txBody>
+      </p:sp>
+      <p:sp>
+        <p:nvSpPr>
+          <p:cNvPr id="5" name="TextBox 4"/>
+          <p:cNvSpPr txBox="1"/>
+          <p:nvPr/>
+        </p:nvSpPr>
+        <p:spPr>
+          <a:xfrm>
+            <a:off x="4379976" y="1664208"/>
+            <a:ext cx="1874519" cy="530352"/>
           </a:xfrm>
           <a:prstGeom prst="rect">
             <a:avLst/>
           </a:prstGeom>
           <a:noFill/>
-          <a:ln w="0">
-            <a:noFill/>
-          </a:ln>
-        </p:spPr>
-        <p:txBody>
-          <a:bodyPr wrap="square" lIns="0" tIns="0" rIns="0" bIns="0">
-            <a:normAutofit/>
+        </p:spPr>
+        <p:txBody>
+          <a:bodyPr wrap="square" lIns="18288" tIns="18288" rIns="18288" bIns="18288" anchor="t">
+            <a:noAutofit/>
           </a:bodyPr>
           <a:lstStyle/>
           <a:p>
             <a:pPr algn="ctr">
-              <a:defRPr sz="1125">
+              <a:spcAft>
+                <a:spcPts val="0"/>
+              </a:spcAft>
+            </a:pPr>
+            <a:r>
+              <a:rPr sz="1400" b="1">
                 <a:solidFill>
                   <a:srgbClr val="000000"/>
                 </a:solidFill>
                 <a:latin typeface="Aptos"/>
-                <a:ea typeface="Aptos"/>
-                <a:cs typeface="Aptos"/>
-              </a:defRPr>
+              </a:rPr>
+              <a:t>Mapillary crops</a:t>
+            </a:r>
+          </a:p>
+          <a:p>
+            <a:pPr algn="ctr">
+              <a:spcAft>
+                <a:spcPts val="0"/>
+              </a:spcAft>
             </a:pPr>
             <a:r>
-              <a:rPr sz="1125">
+              <a:rPr sz="1100" b="0">
+                <a:solidFill>
+                  <a:srgbClr val="22313F"/>
+                </a:solidFill>
+                <a:latin typeface="Aptos"/>
+              </a:rPr>
+              <a:t>432 images</a:t>
+            </a:r>
+          </a:p>
+        </p:txBody>
+      </p:sp>
+      <p:sp>
+        <p:nvSpPr>
+          <p:cNvPr id="6" name="TextBox 5"/>
+          <p:cNvSpPr txBox="1"/>
+          <p:nvPr/>
+        </p:nvSpPr>
+        <p:spPr>
+          <a:xfrm>
+            <a:off x="768096" y="2240280"/>
+            <a:ext cx="1572768" cy="1024128"/>
+          </a:xfrm>
+          <a:prstGeom prst="rect">
+            <a:avLst/>
+          </a:prstGeom>
+          <a:noFill/>
+        </p:spPr>
+        <p:txBody>
+          <a:bodyPr wrap="square" lIns="18288" tIns="18288" rIns="18288" bIns="18288" anchor="ctr">
+            <a:noAutofit/>
+          </a:bodyPr>
+          <a:lstStyle/>
+          <a:p>
+            <a:pPr algn="l">
+              <a:spcAft>
+                <a:spcPts val="0"/>
+              </a:spcAft>
+            </a:pPr>
+            <a:r>
+              <a:rPr sz="1400" b="1">
                 <a:solidFill>
                   <a:srgbClr val="000000"/>
                 </a:solidFill>
                 <a:latin typeface="Aptos"/>
-                <a:ea typeface="Aptos"/>
-                <a:cs typeface="Aptos"/>
               </a:rPr>
-              <a:t>Added Lane</a:t>
-            </a:r>
-          </a:p>
-        </p:txBody>
-      </p:sp>
-      <p:pic>
-        <p:nvPicPr>
-          <p:cNvPr id="33" name="Picture 32"/>
-          <p:cNvPicPr>
-            <a:picLocks noChangeAspect="1"/>
-          </p:cNvPicPr>
-          <p:nvPr/>
-        </p:nvPicPr>
-        <p:blipFill>
-          <a:blip r:embed="rId11"/>
-          <a:stretch/>
-        </p:blipFill>
-        <p:spPr>
-          <a:xfrm>
-            <a:off x="1914525" y="1933575"/>
-            <a:ext cx="914400" cy="914400"/>
-          </a:xfrm>
-          <a:prstGeom prst="rect">
-            <a:avLst/>
-          </a:prstGeom>
-        </p:spPr>
-      </p:pic>
-      <p:sp>
-        <p:nvSpPr>
-          <p:cNvPr id="6" name="mapillary-label-keepRight">
-            <a:extLst>
-              <a:ext uri="{FF2B5EF4-FFF2-40B4-BE49-F238E27FC236}">
-                <a16:creationId xmlns:a16="http://schemas.microsoft.com/office/drawing/2014/main" id="{4733F377-7801-4ACA-95CB-FB4F842908C5}"/>
-              </a:ext>
-            </a:extLst>
-          </p:cNvPr>
-          <p:cNvSpPr>
-            <a:spLocks noGrp="1"/>
-          </p:cNvSpPr>
-          <p:nvPr/>
-        </p:nvSpPr>
-        <p:spPr>
-          <a:xfrm>
-            <a:off x="1828800" y="2876550"/>
-            <a:ext cx="1085850" cy="238125"/>
-          </a:xfrm>
-          <a:prstGeom prst="rect">
-            <a:avLst/>
-          </a:prstGeom>
-          <a:noFill/>
-          <a:ln w="0">
+              <a:t>LISA model</a:t>
+            </a:r>
+          </a:p>
+        </p:txBody>
+      </p:sp>
+      <p:sp>
+        <p:nvSpPr>
+          <p:cNvPr id="7" name="Rounded Rectangle 6"/>
+          <p:cNvSpPr/>
+          <p:nvPr/>
+        </p:nvSpPr>
+        <p:spPr>
+          <a:xfrm>
+            <a:off x="2395728" y="2240280"/>
+            <a:ext cx="1874519" cy="1024128"/>
+          </a:xfrm>
+          <a:prstGeom prst="roundRect">
+            <a:avLst>
+              <a:gd name="adj" fmla="val 8000"/>
+            </a:avLst>
+          </a:prstGeom>
+          <a:solidFill>
+            <a:srgbClr val="788490"/>
+          </a:solidFill>
+          <a:ln>
             <a:noFill/>
           </a:ln>
-        </p:spPr>
-        <p:txBody>
-          <a:bodyPr wrap="square" lIns="0" tIns="0" rIns="0" bIns="0">
-            <a:normAutofit/>
+          <a:effectLst/>
+        </p:spPr>
+        <p:txBody>
+          <a:bodyPr rtlCol="0" anchor="ctr"/>
+          <a:lstStyle/>
+          <a:p>
+            <a:pPr algn="ctr"/>
+            <a:endParaRPr/>
+          </a:p>
+        </p:txBody>
+      </p:sp>
+      <p:sp>
+        <p:nvSpPr>
+          <p:cNvPr id="8" name="TextBox 7"/>
+          <p:cNvSpPr txBox="1"/>
+          <p:nvPr/>
+        </p:nvSpPr>
+        <p:spPr>
+          <a:xfrm>
+            <a:off x="2395728" y="2368296"/>
+            <a:ext cx="1874519" cy="457200"/>
+          </a:xfrm>
+          <a:prstGeom prst="rect">
+            <a:avLst/>
+          </a:prstGeom>
+          <a:noFill/>
+        </p:spPr>
+        <p:txBody>
+          <a:bodyPr wrap="square" lIns="18288" tIns="18288" rIns="18288" bIns="18288" anchor="t">
+            <a:noAutofit/>
           </a:bodyPr>
           <a:lstStyle/>
           <a:p>
             <a:pPr algn="ctr">
-              <a:defRPr sz="1125">
+              <a:spcAft>
+                <a:spcPts val="0"/>
+              </a:spcAft>
+            </a:pPr>
+            <a:r>
+              <a:rPr sz="2400" b="1">
+                <a:solidFill>
+                  <a:srgbClr val="FFFFFF"/>
+                </a:solidFill>
+                <a:latin typeface="Aptos"/>
+              </a:rPr>
+              <a:t>89.90%</a:t>
+            </a:r>
+          </a:p>
+        </p:txBody>
+      </p:sp>
+      <p:sp>
+        <p:nvSpPr>
+          <p:cNvPr id="9" name="TextBox 8"/>
+          <p:cNvSpPr txBox="1"/>
+          <p:nvPr/>
+        </p:nvSpPr>
+        <p:spPr>
+          <a:xfrm>
+            <a:off x="2395728" y="2843784"/>
+            <a:ext cx="1874519" cy="274320"/>
+          </a:xfrm>
+          <a:prstGeom prst="rect">
+            <a:avLst/>
+          </a:prstGeom>
+          <a:noFill/>
+        </p:spPr>
+        <p:txBody>
+          <a:bodyPr wrap="square" lIns="18288" tIns="18288" rIns="18288" bIns="18288" anchor="t">
+            <a:noAutofit/>
+          </a:bodyPr>
+          <a:lstStyle/>
+          <a:p>
+            <a:pPr algn="ctr">
+              <a:spcAft>
+                <a:spcPts val="0"/>
+              </a:spcAft>
+            </a:pPr>
+            <a:r>
+              <a:rPr sz="1100" b="0">
+                <a:solidFill>
+                  <a:srgbClr val="FFFFFF"/>
+                </a:solidFill>
+                <a:latin typeface="Aptos"/>
+              </a:rPr>
+              <a:t>525 / 584</a:t>
+            </a:r>
+          </a:p>
+        </p:txBody>
+      </p:sp>
+      <p:sp>
+        <p:nvSpPr>
+          <p:cNvPr id="10" name="Rounded Rectangle 9"/>
+          <p:cNvSpPr/>
+          <p:nvPr/>
+        </p:nvSpPr>
+        <p:spPr>
+          <a:xfrm>
+            <a:off x="4379976" y="2240280"/>
+            <a:ext cx="1874519" cy="1024128"/>
+          </a:xfrm>
+          <a:prstGeom prst="roundRect">
+            <a:avLst>
+              <a:gd name="adj" fmla="val 8000"/>
+            </a:avLst>
+          </a:prstGeom>
+          <a:solidFill>
+            <a:srgbClr val="F6DED6"/>
+          </a:solidFill>
+          <a:ln>
+            <a:noFill/>
+          </a:ln>
+          <a:effectLst/>
+        </p:spPr>
+        <p:txBody>
+          <a:bodyPr rtlCol="0" anchor="ctr"/>
+          <a:lstStyle/>
+          <a:p>
+            <a:pPr algn="ctr"/>
+            <a:endParaRPr/>
+          </a:p>
+        </p:txBody>
+      </p:sp>
+      <p:sp>
+        <p:nvSpPr>
+          <p:cNvPr id="11" name="TextBox 10"/>
+          <p:cNvSpPr txBox="1"/>
+          <p:nvPr/>
+        </p:nvSpPr>
+        <p:spPr>
+          <a:xfrm>
+            <a:off x="4379976" y="2368296"/>
+            <a:ext cx="1874519" cy="457200"/>
+          </a:xfrm>
+          <a:prstGeom prst="rect">
+            <a:avLst/>
+          </a:prstGeom>
+          <a:noFill/>
+        </p:spPr>
+        <p:txBody>
+          <a:bodyPr wrap="square" lIns="18288" tIns="18288" rIns="18288" bIns="18288" anchor="t">
+            <a:noAutofit/>
+          </a:bodyPr>
+          <a:lstStyle/>
+          <a:p>
+            <a:pPr algn="ctr">
+              <a:spcAft>
+                <a:spcPts val="0"/>
+              </a:spcAft>
+            </a:pPr>
+            <a:r>
+              <a:rPr sz="2400" b="1">
+                <a:solidFill>
+                  <a:srgbClr val="9E3A26"/>
+                </a:solidFill>
+                <a:latin typeface="Aptos"/>
+              </a:rPr>
+              <a:t>78.24%</a:t>
+            </a:r>
+          </a:p>
+        </p:txBody>
+      </p:sp>
+      <p:sp>
+        <p:nvSpPr>
+          <p:cNvPr id="12" name="TextBox 11"/>
+          <p:cNvSpPr txBox="1"/>
+          <p:nvPr/>
+        </p:nvSpPr>
+        <p:spPr>
+          <a:xfrm>
+            <a:off x="4379976" y="2843784"/>
+            <a:ext cx="1874519" cy="274320"/>
+          </a:xfrm>
+          <a:prstGeom prst="rect">
+            <a:avLst/>
+          </a:prstGeom>
+          <a:noFill/>
+        </p:spPr>
+        <p:txBody>
+          <a:bodyPr wrap="square" lIns="18288" tIns="18288" rIns="18288" bIns="18288" anchor="t">
+            <a:noAutofit/>
+          </a:bodyPr>
+          <a:lstStyle/>
+          <a:p>
+            <a:pPr algn="ctr">
+              <a:spcAft>
+                <a:spcPts val="0"/>
+              </a:spcAft>
+            </a:pPr>
+            <a:r>
+              <a:rPr sz="1100" b="0">
+                <a:solidFill>
+                  <a:srgbClr val="9E3A26"/>
+                </a:solidFill>
+                <a:latin typeface="Aptos"/>
+              </a:rPr>
+              <a:t>338 / 432</a:t>
+            </a:r>
+          </a:p>
+        </p:txBody>
+      </p:sp>
+      <p:sp>
+        <p:nvSpPr>
+          <p:cNvPr id="13" name="TextBox 12"/>
+          <p:cNvSpPr txBox="1"/>
+          <p:nvPr/>
+        </p:nvSpPr>
+        <p:spPr>
+          <a:xfrm>
+            <a:off x="768096" y="3374136"/>
+            <a:ext cx="1572768" cy="1024128"/>
+          </a:xfrm>
+          <a:prstGeom prst="rect">
+            <a:avLst/>
+          </a:prstGeom>
+          <a:noFill/>
+        </p:spPr>
+        <p:txBody>
+          <a:bodyPr wrap="square" lIns="18288" tIns="18288" rIns="18288" bIns="18288" anchor="ctr">
+            <a:noAutofit/>
+          </a:bodyPr>
+          <a:lstStyle/>
+          <a:p>
+            <a:pPr algn="l">
+              <a:spcAft>
+                <a:spcPts val="0"/>
+              </a:spcAft>
+            </a:pPr>
+            <a:r>
+              <a:rPr sz="1400" b="1">
                 <a:solidFill>
                   <a:srgbClr val="000000"/>
                 </a:solidFill>
                 <a:latin typeface="Aptos"/>
-                <a:ea typeface="Aptos"/>
-                <a:cs typeface="Aptos"/>
-              </a:defRPr>
+              </a:rPr>
+              <a:t>Mapillary model</a:t>
+            </a:r>
+          </a:p>
+        </p:txBody>
+      </p:sp>
+      <p:sp>
+        <p:nvSpPr>
+          <p:cNvPr id="14" name="Rounded Rectangle 13"/>
+          <p:cNvSpPr/>
+          <p:nvPr/>
+        </p:nvSpPr>
+        <p:spPr>
+          <a:xfrm>
+            <a:off x="2395728" y="3374136"/>
+            <a:ext cx="1874519" cy="1024128"/>
+          </a:xfrm>
+          <a:prstGeom prst="roundRect">
+            <a:avLst>
+              <a:gd name="adj" fmla="val 8000"/>
+            </a:avLst>
+          </a:prstGeom>
+          <a:solidFill>
+            <a:srgbClr val="F6DED6"/>
+          </a:solidFill>
+          <a:ln>
+            <a:noFill/>
+          </a:ln>
+          <a:effectLst/>
+        </p:spPr>
+        <p:txBody>
+          <a:bodyPr rtlCol="0" anchor="ctr"/>
+          <a:lstStyle/>
+          <a:p>
+            <a:pPr algn="ctr"/>
+            <a:endParaRPr/>
+          </a:p>
+        </p:txBody>
+      </p:sp>
+      <p:sp>
+        <p:nvSpPr>
+          <p:cNvPr id="15" name="TextBox 14"/>
+          <p:cNvSpPr txBox="1"/>
+          <p:nvPr/>
+        </p:nvSpPr>
+        <p:spPr>
+          <a:xfrm>
+            <a:off x="2395728" y="3502152"/>
+            <a:ext cx="1874519" cy="457200"/>
+          </a:xfrm>
+          <a:prstGeom prst="rect">
+            <a:avLst/>
+          </a:prstGeom>
+          <a:noFill/>
+        </p:spPr>
+        <p:txBody>
+          <a:bodyPr wrap="square" lIns="18288" tIns="18288" rIns="18288" bIns="18288" anchor="t">
+            <a:noAutofit/>
+          </a:bodyPr>
+          <a:lstStyle/>
+          <a:p>
+            <a:pPr algn="ctr">
+              <a:spcAft>
+                <a:spcPts val="0"/>
+              </a:spcAft>
             </a:pPr>
             <a:r>
-              <a:rPr sz="1125">
+              <a:rPr sz="2400" b="1">
+                <a:solidFill>
+                  <a:srgbClr val="9E3A26"/>
+                </a:solidFill>
+                <a:latin typeface="Aptos"/>
+              </a:rPr>
+              <a:t>56.85%</a:t>
+            </a:r>
+          </a:p>
+        </p:txBody>
+      </p:sp>
+      <p:sp>
+        <p:nvSpPr>
+          <p:cNvPr id="16" name="TextBox 15"/>
+          <p:cNvSpPr txBox="1"/>
+          <p:nvPr/>
+        </p:nvSpPr>
+        <p:spPr>
+          <a:xfrm>
+            <a:off x="2395728" y="3977640"/>
+            <a:ext cx="1874519" cy="274320"/>
+          </a:xfrm>
+          <a:prstGeom prst="rect">
+            <a:avLst/>
+          </a:prstGeom>
+          <a:noFill/>
+        </p:spPr>
+        <p:txBody>
+          <a:bodyPr wrap="square" lIns="18288" tIns="18288" rIns="18288" bIns="18288" anchor="t">
+            <a:noAutofit/>
+          </a:bodyPr>
+          <a:lstStyle/>
+          <a:p>
+            <a:pPr algn="ctr">
+              <a:spcAft>
+                <a:spcPts val="0"/>
+              </a:spcAft>
+            </a:pPr>
+            <a:r>
+              <a:rPr sz="1100" b="0">
+                <a:solidFill>
+                  <a:srgbClr val="9E3A26"/>
+                </a:solidFill>
+                <a:latin typeface="Aptos"/>
+              </a:rPr>
+              <a:t>332 / 584</a:t>
+            </a:r>
+          </a:p>
+        </p:txBody>
+      </p:sp>
+      <p:sp>
+        <p:nvSpPr>
+          <p:cNvPr id="17" name="Rounded Rectangle 16"/>
+          <p:cNvSpPr/>
+          <p:nvPr/>
+        </p:nvSpPr>
+        <p:spPr>
+          <a:xfrm>
+            <a:off x="4379976" y="3374136"/>
+            <a:ext cx="1874519" cy="1024128"/>
+          </a:xfrm>
+          <a:prstGeom prst="roundRect">
+            <a:avLst>
+              <a:gd name="adj" fmla="val 8000"/>
+            </a:avLst>
+          </a:prstGeom>
+          <a:solidFill>
+            <a:srgbClr val="788490"/>
+          </a:solidFill>
+          <a:ln>
+            <a:noFill/>
+          </a:ln>
+          <a:effectLst/>
+        </p:spPr>
+        <p:txBody>
+          <a:bodyPr rtlCol="0" anchor="ctr"/>
+          <a:lstStyle/>
+          <a:p>
+            <a:pPr algn="ctr"/>
+            <a:endParaRPr/>
+          </a:p>
+        </p:txBody>
+      </p:sp>
+      <p:sp>
+        <p:nvSpPr>
+          <p:cNvPr id="18" name="TextBox 17"/>
+          <p:cNvSpPr txBox="1"/>
+          <p:nvPr/>
+        </p:nvSpPr>
+        <p:spPr>
+          <a:xfrm>
+            <a:off x="4379976" y="3502152"/>
+            <a:ext cx="1874519" cy="457200"/>
+          </a:xfrm>
+          <a:prstGeom prst="rect">
+            <a:avLst/>
+          </a:prstGeom>
+          <a:noFill/>
+        </p:spPr>
+        <p:txBody>
+          <a:bodyPr wrap="square" lIns="18288" tIns="18288" rIns="18288" bIns="18288" anchor="t">
+            <a:noAutofit/>
+          </a:bodyPr>
+          <a:lstStyle/>
+          <a:p>
+            <a:pPr algn="ctr">
+              <a:spcAft>
+                <a:spcPts val="0"/>
+              </a:spcAft>
+            </a:pPr>
+            <a:r>
+              <a:rPr sz="2400" b="1">
+                <a:solidFill>
+                  <a:srgbClr val="FFFFFF"/>
+                </a:solidFill>
+                <a:latin typeface="Aptos"/>
+              </a:rPr>
+              <a:t>92.59%</a:t>
+            </a:r>
+          </a:p>
+        </p:txBody>
+      </p:sp>
+      <p:sp>
+        <p:nvSpPr>
+          <p:cNvPr id="19" name="TextBox 18"/>
+          <p:cNvSpPr txBox="1"/>
+          <p:nvPr/>
+        </p:nvSpPr>
+        <p:spPr>
+          <a:xfrm>
+            <a:off x="4379976" y="3977640"/>
+            <a:ext cx="1874519" cy="274320"/>
+          </a:xfrm>
+          <a:prstGeom prst="rect">
+            <a:avLst/>
+          </a:prstGeom>
+          <a:noFill/>
+        </p:spPr>
+        <p:txBody>
+          <a:bodyPr wrap="square" lIns="18288" tIns="18288" rIns="18288" bIns="18288" anchor="t">
+            <a:noAutofit/>
+          </a:bodyPr>
+          <a:lstStyle/>
+          <a:p>
+            <a:pPr algn="ctr">
+              <a:spcAft>
+                <a:spcPts val="0"/>
+              </a:spcAft>
+            </a:pPr>
+            <a:r>
+              <a:rPr sz="1100" b="0">
+                <a:solidFill>
+                  <a:srgbClr val="FFFFFF"/>
+                </a:solidFill>
+                <a:latin typeface="Aptos"/>
+              </a:rPr>
+              <a:t>400 / 432</a:t>
+            </a:r>
+          </a:p>
+        </p:txBody>
+      </p:sp>
+      <p:sp>
+        <p:nvSpPr>
+          <p:cNvPr id="20" name="TextBox 19"/>
+          <p:cNvSpPr txBox="1"/>
+          <p:nvPr/>
+        </p:nvSpPr>
+        <p:spPr>
+          <a:xfrm>
+            <a:off x="768096" y="4507992"/>
+            <a:ext cx="1572768" cy="1024128"/>
+          </a:xfrm>
+          <a:prstGeom prst="rect">
+            <a:avLst/>
+          </a:prstGeom>
+          <a:noFill/>
+        </p:spPr>
+        <p:txBody>
+          <a:bodyPr wrap="square" lIns="18288" tIns="18288" rIns="18288" bIns="18288" anchor="ctr">
+            <a:noAutofit/>
+          </a:bodyPr>
+          <a:lstStyle/>
+          <a:p>
+            <a:pPr algn="l">
+              <a:spcAft>
+                <a:spcPts val="0"/>
+              </a:spcAft>
+            </a:pPr>
+            <a:r>
+              <a:rPr sz="1400" b="1">
                 <a:solidFill>
                   <a:srgbClr val="000000"/>
                 </a:solidFill>
                 <a:latin typeface="Aptos"/>
-                <a:ea typeface="Aptos"/>
-                <a:cs typeface="Aptos"/>
               </a:rPr>
-              <a:t>Keep Right</a:t>
-            </a:r>
-          </a:p>
-        </p:txBody>
-      </p:sp>
-      <p:pic>
-        <p:nvPicPr>
-          <p:cNvPr id="35" name="Picture 34"/>
-          <p:cNvPicPr>
-            <a:picLocks noChangeAspect="1"/>
-          </p:cNvPicPr>
-          <p:nvPr/>
-        </p:nvPicPr>
-        <p:blipFill>
-          <a:blip r:embed="rId9"/>
-          <a:stretch/>
-        </p:blipFill>
-        <p:spPr>
-          <a:xfrm>
-            <a:off x="3114675" y="1933575"/>
-            <a:ext cx="914400" cy="914400"/>
-          </a:xfrm>
-          <a:prstGeom prst="rect">
-            <a:avLst/>
-          </a:prstGeom>
-        </p:spPr>
-      </p:pic>
-      <p:sp>
-        <p:nvSpPr>
-          <p:cNvPr id="8" name="mapillary-label-merge">
-            <a:extLst>
-              <a:ext uri="{FF2B5EF4-FFF2-40B4-BE49-F238E27FC236}">
-                <a16:creationId xmlns:a16="http://schemas.microsoft.com/office/drawing/2014/main" id="{69F98927-4EBA-493E-9E97-A7CEBD266CA0}"/>
-              </a:ext>
-            </a:extLst>
-          </p:cNvPr>
-          <p:cNvSpPr>
-            <a:spLocks noGrp="1"/>
-          </p:cNvSpPr>
-          <p:nvPr/>
-        </p:nvSpPr>
-        <p:spPr>
-          <a:xfrm>
-            <a:off x="3028950" y="2876550"/>
-            <a:ext cx="1085850" cy="238125"/>
-          </a:xfrm>
-          <a:prstGeom prst="rect">
-            <a:avLst/>
-          </a:prstGeom>
-          <a:noFill/>
-          <a:ln w="0">
+              <a:t>Combined model</a:t>
+            </a:r>
+          </a:p>
+        </p:txBody>
+      </p:sp>
+      <p:sp>
+        <p:nvSpPr>
+          <p:cNvPr id="21" name="Rounded Rectangle 20"/>
+          <p:cNvSpPr/>
+          <p:nvPr/>
+        </p:nvSpPr>
+        <p:spPr>
+          <a:xfrm>
+            <a:off x="2395728" y="4507992"/>
+            <a:ext cx="1874519" cy="1024128"/>
+          </a:xfrm>
+          <a:prstGeom prst="roundRect">
+            <a:avLst>
+              <a:gd name="adj" fmla="val 8000"/>
+            </a:avLst>
+          </a:prstGeom>
+          <a:solidFill>
+            <a:srgbClr val="30669D"/>
+          </a:solidFill>
+          <a:ln>
             <a:noFill/>
           </a:ln>
-        </p:spPr>
-        <p:txBody>
-          <a:bodyPr wrap="square" lIns="0" tIns="0" rIns="0" bIns="0">
-            <a:normAutofit/>
+          <a:effectLst/>
+        </p:spPr>
+        <p:txBody>
+          <a:bodyPr rtlCol="0" anchor="ctr"/>
+          <a:lstStyle/>
+          <a:p>
+            <a:pPr algn="ctr"/>
+            <a:endParaRPr/>
+          </a:p>
+        </p:txBody>
+      </p:sp>
+      <p:sp>
+        <p:nvSpPr>
+          <p:cNvPr id="22" name="TextBox 21"/>
+          <p:cNvSpPr txBox="1"/>
+          <p:nvPr/>
+        </p:nvSpPr>
+        <p:spPr>
+          <a:xfrm>
+            <a:off x="2395728" y="4636008"/>
+            <a:ext cx="1874519" cy="457200"/>
+          </a:xfrm>
+          <a:prstGeom prst="rect">
+            <a:avLst/>
+          </a:prstGeom>
+          <a:noFill/>
+        </p:spPr>
+        <p:txBody>
+          <a:bodyPr wrap="square" lIns="18288" tIns="18288" rIns="18288" bIns="18288" anchor="t">
+            <a:noAutofit/>
           </a:bodyPr>
           <a:lstStyle/>
           <a:p>
             <a:pPr algn="ctr">
-              <a:defRPr sz="1125">
+              <a:spcAft>
+                <a:spcPts val="0"/>
+              </a:spcAft>
+            </a:pPr>
+            <a:r>
+              <a:rPr sz="2400" b="1">
+                <a:solidFill>
+                  <a:srgbClr val="FFFFFF"/>
+                </a:solidFill>
+                <a:latin typeface="Aptos"/>
+              </a:rPr>
+              <a:t>99.66%</a:t>
+            </a:r>
+          </a:p>
+        </p:txBody>
+      </p:sp>
+      <p:sp>
+        <p:nvSpPr>
+          <p:cNvPr id="23" name="TextBox 22"/>
+          <p:cNvSpPr txBox="1"/>
+          <p:nvPr/>
+        </p:nvSpPr>
+        <p:spPr>
+          <a:xfrm>
+            <a:off x="2395728" y="5111496"/>
+            <a:ext cx="1874519" cy="274320"/>
+          </a:xfrm>
+          <a:prstGeom prst="rect">
+            <a:avLst/>
+          </a:prstGeom>
+          <a:noFill/>
+        </p:spPr>
+        <p:txBody>
+          <a:bodyPr wrap="square" lIns="18288" tIns="18288" rIns="18288" bIns="18288" anchor="t">
+            <a:noAutofit/>
+          </a:bodyPr>
+          <a:lstStyle/>
+          <a:p>
+            <a:pPr algn="ctr">
+              <a:spcAft>
+                <a:spcPts val="0"/>
+              </a:spcAft>
+            </a:pPr>
+            <a:r>
+              <a:rPr sz="1100" b="0">
+                <a:solidFill>
+                  <a:srgbClr val="FFFFFF"/>
+                </a:solidFill>
+                <a:latin typeface="Aptos"/>
+              </a:rPr>
+              <a:t>582 / 584</a:t>
+            </a:r>
+          </a:p>
+        </p:txBody>
+      </p:sp>
+      <p:sp>
+        <p:nvSpPr>
+          <p:cNvPr id="24" name="Rounded Rectangle 23"/>
+          <p:cNvSpPr/>
+          <p:nvPr/>
+        </p:nvSpPr>
+        <p:spPr>
+          <a:xfrm>
+            <a:off x="4379976" y="4507992"/>
+            <a:ext cx="1874519" cy="1024128"/>
+          </a:xfrm>
+          <a:prstGeom prst="roundRect">
+            <a:avLst>
+              <a:gd name="adj" fmla="val 8000"/>
+            </a:avLst>
+          </a:prstGeom>
+          <a:solidFill>
+            <a:srgbClr val="30669D"/>
+          </a:solidFill>
+          <a:ln>
+            <a:noFill/>
+          </a:ln>
+          <a:effectLst/>
+        </p:spPr>
+        <p:txBody>
+          <a:bodyPr rtlCol="0" anchor="ctr"/>
+          <a:lstStyle/>
+          <a:p>
+            <a:pPr algn="ctr"/>
+            <a:endParaRPr/>
+          </a:p>
+        </p:txBody>
+      </p:sp>
+      <p:sp>
+        <p:nvSpPr>
+          <p:cNvPr id="25" name="TextBox 24"/>
+          <p:cNvSpPr txBox="1"/>
+          <p:nvPr/>
+        </p:nvSpPr>
+        <p:spPr>
+          <a:xfrm>
+            <a:off x="4379976" y="4636008"/>
+            <a:ext cx="1874519" cy="457200"/>
+          </a:xfrm>
+          <a:prstGeom prst="rect">
+            <a:avLst/>
+          </a:prstGeom>
+          <a:noFill/>
+        </p:spPr>
+        <p:txBody>
+          <a:bodyPr wrap="square" lIns="18288" tIns="18288" rIns="18288" bIns="18288" anchor="t">
+            <a:noAutofit/>
+          </a:bodyPr>
+          <a:lstStyle/>
+          <a:p>
+            <a:pPr algn="ctr">
+              <a:spcAft>
+                <a:spcPts val="0"/>
+              </a:spcAft>
+            </a:pPr>
+            <a:r>
+              <a:rPr sz="2400" b="1">
+                <a:solidFill>
+                  <a:srgbClr val="FFFFFF"/>
+                </a:solidFill>
+                <a:latin typeface="Aptos"/>
+              </a:rPr>
+              <a:t>98.84%</a:t>
+            </a:r>
+          </a:p>
+        </p:txBody>
+      </p:sp>
+      <p:sp>
+        <p:nvSpPr>
+          <p:cNvPr id="26" name="TextBox 25"/>
+          <p:cNvSpPr txBox="1"/>
+          <p:nvPr/>
+        </p:nvSpPr>
+        <p:spPr>
+          <a:xfrm>
+            <a:off x="4379976" y="5111496"/>
+            <a:ext cx="1874519" cy="274320"/>
+          </a:xfrm>
+          <a:prstGeom prst="rect">
+            <a:avLst/>
+          </a:prstGeom>
+          <a:noFill/>
+        </p:spPr>
+        <p:txBody>
+          <a:bodyPr wrap="square" lIns="18288" tIns="18288" rIns="18288" bIns="18288" anchor="t">
+            <a:noAutofit/>
+          </a:bodyPr>
+          <a:lstStyle/>
+          <a:p>
+            <a:pPr algn="ctr">
+              <a:spcAft>
+                <a:spcPts val="0"/>
+              </a:spcAft>
+            </a:pPr>
+            <a:r>
+              <a:rPr sz="1100" b="0">
+                <a:solidFill>
+                  <a:srgbClr val="FFFFFF"/>
+                </a:solidFill>
+                <a:latin typeface="Aptos"/>
+              </a:rPr>
+              <a:t>427 / 432</a:t>
+            </a:r>
+          </a:p>
+        </p:txBody>
+      </p:sp>
+      <p:sp>
+        <p:nvSpPr>
+          <p:cNvPr id="27" name="Rectangle 26"/>
+          <p:cNvSpPr/>
+          <p:nvPr/>
+        </p:nvSpPr>
+        <p:spPr>
+          <a:xfrm>
+            <a:off x="2395728" y="5751576"/>
+            <a:ext cx="164592" cy="164592"/>
+          </a:xfrm>
+          <a:prstGeom prst="rect">
+            <a:avLst/>
+          </a:prstGeom>
+          <a:solidFill>
+            <a:srgbClr val="788490"/>
+          </a:solidFill>
+          <a:ln>
+            <a:noFill/>
+          </a:ln>
+          <a:effectLst/>
+        </p:spPr>
+        <p:txBody>
+          <a:bodyPr rtlCol="0" anchor="ctr"/>
+          <a:lstStyle/>
+          <a:p>
+            <a:pPr algn="ctr"/>
+            <a:endParaRPr/>
+          </a:p>
+        </p:txBody>
+      </p:sp>
+      <p:sp>
+        <p:nvSpPr>
+          <p:cNvPr id="28" name="TextBox 27"/>
+          <p:cNvSpPr txBox="1"/>
+          <p:nvPr/>
+        </p:nvSpPr>
+        <p:spPr>
+          <a:xfrm>
+            <a:off x="2615184" y="5687568"/>
+            <a:ext cx="1097280" cy="292608"/>
+          </a:xfrm>
+          <a:prstGeom prst="rect">
+            <a:avLst/>
+          </a:prstGeom>
+          <a:noFill/>
+        </p:spPr>
+        <p:txBody>
+          <a:bodyPr wrap="square" lIns="18288" tIns="18288" rIns="18288" bIns="18288" anchor="t">
+            <a:noAutofit/>
+          </a:bodyPr>
+          <a:lstStyle/>
+          <a:p>
+            <a:pPr algn="l">
+              <a:spcAft>
+                <a:spcPts val="0"/>
+              </a:spcAft>
+            </a:pPr>
+            <a:r>
+              <a:rPr sz="1100" b="0">
+                <a:solidFill>
+                  <a:srgbClr val="22313F"/>
+                </a:solidFill>
+                <a:latin typeface="Aptos"/>
+              </a:rPr>
+              <a:t>Own dataset</a:t>
+            </a:r>
+          </a:p>
+        </p:txBody>
+      </p:sp>
+      <p:sp>
+        <p:nvSpPr>
+          <p:cNvPr id="29" name="Rectangle 28"/>
+          <p:cNvSpPr/>
+          <p:nvPr/>
+        </p:nvSpPr>
+        <p:spPr>
+          <a:xfrm>
+            <a:off x="3721608" y="5751576"/>
+            <a:ext cx="164592" cy="164592"/>
+          </a:xfrm>
+          <a:prstGeom prst="rect">
+            <a:avLst/>
+          </a:prstGeom>
+          <a:solidFill>
+            <a:srgbClr val="F6DED6"/>
+          </a:solidFill>
+          <a:ln>
+            <a:noFill/>
+          </a:ln>
+          <a:effectLst/>
+        </p:spPr>
+        <p:txBody>
+          <a:bodyPr rtlCol="0" anchor="ctr"/>
+          <a:lstStyle/>
+          <a:p>
+            <a:pPr algn="ctr"/>
+            <a:endParaRPr/>
+          </a:p>
+        </p:txBody>
+      </p:sp>
+      <p:sp>
+        <p:nvSpPr>
+          <p:cNvPr id="30" name="TextBox 29"/>
+          <p:cNvSpPr txBox="1"/>
+          <p:nvPr/>
+        </p:nvSpPr>
+        <p:spPr>
+          <a:xfrm>
+            <a:off x="3941064" y="5687568"/>
+            <a:ext cx="1097280" cy="292608"/>
+          </a:xfrm>
+          <a:prstGeom prst="rect">
+            <a:avLst/>
+          </a:prstGeom>
+          <a:noFill/>
+        </p:spPr>
+        <p:txBody>
+          <a:bodyPr wrap="square" lIns="18288" tIns="18288" rIns="18288" bIns="18288" anchor="t">
+            <a:noAutofit/>
+          </a:bodyPr>
+          <a:lstStyle/>
+          <a:p>
+            <a:pPr algn="l">
+              <a:spcAft>
+                <a:spcPts val="0"/>
+              </a:spcAft>
+            </a:pPr>
+            <a:r>
+              <a:rPr sz="1100" b="0">
+                <a:solidFill>
+                  <a:srgbClr val="22313F"/>
+                </a:solidFill>
+                <a:latin typeface="Aptos"/>
+              </a:rPr>
+              <a:t>Other dataset</a:t>
+            </a:r>
+          </a:p>
+        </p:txBody>
+      </p:sp>
+      <p:sp>
+        <p:nvSpPr>
+          <p:cNvPr id="31" name="Rectangle 30"/>
+          <p:cNvSpPr/>
+          <p:nvPr/>
+        </p:nvSpPr>
+        <p:spPr>
+          <a:xfrm>
+            <a:off x="5047488" y="5751576"/>
+            <a:ext cx="164592" cy="164592"/>
+          </a:xfrm>
+          <a:prstGeom prst="rect">
+            <a:avLst/>
+          </a:prstGeom>
+          <a:solidFill>
+            <a:srgbClr val="30669D"/>
+          </a:solidFill>
+          <a:ln>
+            <a:noFill/>
+          </a:ln>
+          <a:effectLst/>
+        </p:spPr>
+        <p:txBody>
+          <a:bodyPr rtlCol="0" anchor="ctr"/>
+          <a:lstStyle/>
+          <a:p>
+            <a:pPr algn="ctr"/>
+            <a:endParaRPr/>
+          </a:p>
+        </p:txBody>
+      </p:sp>
+      <p:sp>
+        <p:nvSpPr>
+          <p:cNvPr id="32" name="TextBox 31"/>
+          <p:cNvSpPr txBox="1"/>
+          <p:nvPr/>
+        </p:nvSpPr>
+        <p:spPr>
+          <a:xfrm>
+            <a:off x="5266944" y="5687568"/>
+            <a:ext cx="1097280" cy="292608"/>
+          </a:xfrm>
+          <a:prstGeom prst="rect">
+            <a:avLst/>
+          </a:prstGeom>
+          <a:noFill/>
+        </p:spPr>
+        <p:txBody>
+          <a:bodyPr wrap="square" lIns="18288" tIns="18288" rIns="18288" bIns="18288" anchor="t">
+            <a:noAutofit/>
+          </a:bodyPr>
+          <a:lstStyle/>
+          <a:p>
+            <a:pPr algn="l">
+              <a:spcAft>
+                <a:spcPts val="0"/>
+              </a:spcAft>
+            </a:pPr>
+            <a:r>
+              <a:rPr sz="1100" b="0">
+                <a:solidFill>
+                  <a:srgbClr val="22313F"/>
+                </a:solidFill>
+                <a:latin typeface="Aptos"/>
+              </a:rPr>
+              <a:t>Both</a:t>
+            </a:r>
+          </a:p>
+        </p:txBody>
+      </p:sp>
+      <p:sp>
+        <p:nvSpPr>
+          <p:cNvPr id="33" name="Oval 32"/>
+          <p:cNvSpPr/>
+          <p:nvPr/>
+        </p:nvSpPr>
+        <p:spPr>
+          <a:xfrm>
+            <a:off x="6720840" y="1709928"/>
+            <a:ext cx="384048" cy="384048"/>
+          </a:xfrm>
+          <a:prstGeom prst="ellipse">
+            <a:avLst/>
+          </a:prstGeom>
+          <a:solidFill>
+            <a:srgbClr val="30669D"/>
+          </a:solidFill>
+          <a:ln>
+            <a:noFill/>
+          </a:ln>
+          <a:effectLst/>
+        </p:spPr>
+        <p:txBody>
+          <a:bodyPr rtlCol="0" anchor="ctr"/>
+          <a:lstStyle/>
+          <a:p>
+            <a:pPr algn="ctr"/>
+            <a:endParaRPr/>
+          </a:p>
+        </p:txBody>
+      </p:sp>
+      <p:sp>
+        <p:nvSpPr>
+          <p:cNvPr id="34" name="TextBox 33"/>
+          <p:cNvSpPr txBox="1"/>
+          <p:nvPr/>
+        </p:nvSpPr>
+        <p:spPr>
+          <a:xfrm>
+            <a:off x="6720840" y="1709928"/>
+            <a:ext cx="384048" cy="384048"/>
+          </a:xfrm>
+          <a:prstGeom prst="rect">
+            <a:avLst/>
+          </a:prstGeom>
+          <a:noFill/>
+        </p:spPr>
+        <p:txBody>
+          <a:bodyPr wrap="square" lIns="18288" tIns="18288" rIns="18288" bIns="18288" anchor="ctr">
+            <a:noAutofit/>
+          </a:bodyPr>
+          <a:lstStyle/>
+          <a:p>
+            <a:pPr algn="ctr">
+              <a:spcAft>
+                <a:spcPts val="0"/>
+              </a:spcAft>
+            </a:pPr>
+            <a:r>
+              <a:rPr sz="1500" b="1">
+                <a:solidFill>
+                  <a:srgbClr val="FFFFFF"/>
+                </a:solidFill>
+                <a:latin typeface="Aptos"/>
+              </a:rPr>
+              <a:t>1</a:t>
+            </a:r>
+          </a:p>
+        </p:txBody>
+      </p:sp>
+      <p:sp>
+        <p:nvSpPr>
+          <p:cNvPr id="35" name="TextBox 34"/>
+          <p:cNvSpPr txBox="1"/>
+          <p:nvPr/>
+        </p:nvSpPr>
+        <p:spPr>
+          <a:xfrm>
+            <a:off x="7269479" y="1691640"/>
+            <a:ext cx="4160520" cy="329184"/>
+          </a:xfrm>
+          <a:prstGeom prst="rect">
+            <a:avLst/>
+          </a:prstGeom>
+          <a:noFill/>
+        </p:spPr>
+        <p:txBody>
+          <a:bodyPr wrap="square" lIns="18288" tIns="18288" rIns="18288" bIns="18288" anchor="t">
+            <a:noAutofit/>
+          </a:bodyPr>
+          <a:lstStyle/>
+          <a:p>
+            <a:pPr algn="l">
+              <a:spcAft>
+                <a:spcPts val="0"/>
+              </a:spcAft>
+            </a:pPr>
+            <a:r>
+              <a:rPr sz="1600" b="1">
                 <a:solidFill>
                   <a:srgbClr val="000000"/>
                 </a:solidFill>
                 <a:latin typeface="Aptos"/>
-                <a:ea typeface="Aptos"/>
-                <a:cs typeface="Aptos"/>
-              </a:defRPr>
+              </a:rPr>
+              <a:t>Different image styles</a:t>
+            </a:r>
+          </a:p>
+        </p:txBody>
+      </p:sp>
+      <p:sp>
+        <p:nvSpPr>
+          <p:cNvPr id="36" name="TextBox 35"/>
+          <p:cNvSpPr txBox="1"/>
+          <p:nvPr/>
+        </p:nvSpPr>
+        <p:spPr>
+          <a:xfrm>
+            <a:off x="7269479" y="2039112"/>
+            <a:ext cx="4160520" cy="868680"/>
+          </a:xfrm>
+          <a:prstGeom prst="rect">
+            <a:avLst/>
+          </a:prstGeom>
+          <a:noFill/>
+        </p:spPr>
+        <p:txBody>
+          <a:bodyPr wrap="square" lIns="18288" tIns="18288" rIns="18288" bIns="18288" anchor="t">
+            <a:noAutofit/>
+          </a:bodyPr>
+          <a:lstStyle/>
+          <a:p>
+            <a:pPr algn="l">
+              <a:spcAft>
+                <a:spcPts val="0"/>
+              </a:spcAft>
             </a:pPr>
             <a:r>
-              <a:rPr sz="1125">
+              <a:rPr sz="1300" b="0">
+                <a:solidFill>
+                  <a:srgbClr val="22313F"/>
+                </a:solidFill>
+                <a:latin typeface="Aptos"/>
+              </a:rPr>
+              <a:t>40% of LISA training crops are grayscale; 0.4% of Mapillary's are. The Mapillary model scored 43% on grayscale LISA crops and 67% on color ones.</a:t>
+            </a:r>
+          </a:p>
+        </p:txBody>
+      </p:sp>
+      <p:sp>
+        <p:nvSpPr>
+          <p:cNvPr id="37" name="Oval 36"/>
+          <p:cNvSpPr/>
+          <p:nvPr/>
+        </p:nvSpPr>
+        <p:spPr>
+          <a:xfrm>
+            <a:off x="6720840" y="3035808"/>
+            <a:ext cx="384048" cy="384048"/>
+          </a:xfrm>
+          <a:prstGeom prst="ellipse">
+            <a:avLst/>
+          </a:prstGeom>
+          <a:solidFill>
+            <a:srgbClr val="30669D"/>
+          </a:solidFill>
+          <a:ln>
+            <a:noFill/>
+          </a:ln>
+          <a:effectLst/>
+        </p:spPr>
+        <p:txBody>
+          <a:bodyPr rtlCol="0" anchor="ctr"/>
+          <a:lstStyle/>
+          <a:p>
+            <a:pPr algn="ctr"/>
+            <a:endParaRPr/>
+          </a:p>
+        </p:txBody>
+      </p:sp>
+      <p:sp>
+        <p:nvSpPr>
+          <p:cNvPr id="38" name="TextBox 37"/>
+          <p:cNvSpPr txBox="1"/>
+          <p:nvPr/>
+        </p:nvSpPr>
+        <p:spPr>
+          <a:xfrm>
+            <a:off x="6720840" y="3035808"/>
+            <a:ext cx="384048" cy="384048"/>
+          </a:xfrm>
+          <a:prstGeom prst="rect">
+            <a:avLst/>
+          </a:prstGeom>
+          <a:noFill/>
+        </p:spPr>
+        <p:txBody>
+          <a:bodyPr wrap="square" lIns="18288" tIns="18288" rIns="18288" bIns="18288" anchor="ctr">
+            <a:noAutofit/>
+          </a:bodyPr>
+          <a:lstStyle/>
+          <a:p>
+            <a:pPr algn="ctr">
+              <a:spcAft>
+                <a:spcPts val="0"/>
+              </a:spcAft>
+            </a:pPr>
+            <a:r>
+              <a:rPr sz="1500" b="1">
+                <a:solidFill>
+                  <a:srgbClr val="FFFFFF"/>
+                </a:solidFill>
+                <a:latin typeface="Aptos"/>
+              </a:rPr>
+              <a:t>2</a:t>
+            </a:r>
+          </a:p>
+        </p:txBody>
+      </p:sp>
+      <p:sp>
+        <p:nvSpPr>
+          <p:cNvPr id="39" name="TextBox 38"/>
+          <p:cNvSpPr txBox="1"/>
+          <p:nvPr/>
+        </p:nvSpPr>
+        <p:spPr>
+          <a:xfrm>
+            <a:off x="7269479" y="3017520"/>
+            <a:ext cx="4160520" cy="329184"/>
+          </a:xfrm>
+          <a:prstGeom prst="rect">
+            <a:avLst/>
+          </a:prstGeom>
+          <a:noFill/>
+        </p:spPr>
+        <p:txBody>
+          <a:bodyPr wrap="square" lIns="18288" tIns="18288" rIns="18288" bIns="18288" anchor="t">
+            <a:noAutofit/>
+          </a:bodyPr>
+          <a:lstStyle/>
+          <a:p>
+            <a:pPr algn="l">
+              <a:spcAft>
+                <a:spcPts val="0"/>
+              </a:spcAft>
+            </a:pPr>
+            <a:r>
+              <a:rPr sz="1600" b="1">
                 <a:solidFill>
                   <a:srgbClr val="000000"/>
                 </a:solidFill>
                 <a:latin typeface="Aptos"/>
-                <a:ea typeface="Aptos"/>
-                <a:cs typeface="Aptos"/>
               </a:rPr>
-              <a:t>Merge</a:t>
-            </a:r>
-          </a:p>
-        </p:txBody>
-      </p:sp>
-      <p:pic>
-        <p:nvPicPr>
-          <p:cNvPr id="37" name="Picture 36"/>
-          <p:cNvPicPr>
-            <a:picLocks noChangeAspect="1"/>
-          </p:cNvPicPr>
-          <p:nvPr/>
-        </p:nvPicPr>
-        <p:blipFill>
-          <a:blip r:embed="rId7"/>
-          <a:stretch/>
-        </p:blipFill>
-        <p:spPr>
-          <a:xfrm>
-            <a:off x="4314825" y="1933575"/>
-            <a:ext cx="914400" cy="914400"/>
-          </a:xfrm>
-          <a:prstGeom prst="rect">
-            <a:avLst/>
-          </a:prstGeom>
-        </p:spPr>
-      </p:pic>
-      <p:sp>
-        <p:nvSpPr>
-          <p:cNvPr id="10" name="mapillary-label-pedestrianCrossing">
-            <a:extLst>
-              <a:ext uri="{FF2B5EF4-FFF2-40B4-BE49-F238E27FC236}">
-                <a16:creationId xmlns:a16="http://schemas.microsoft.com/office/drawing/2014/main" id="{19EA3CE1-EB3E-4AF6-8E58-5A1B79BA8E7B}"/>
-              </a:ext>
-            </a:extLst>
-          </p:cNvPr>
-          <p:cNvSpPr>
-            <a:spLocks noGrp="1"/>
-          </p:cNvSpPr>
-          <p:nvPr/>
-        </p:nvSpPr>
-        <p:spPr>
-          <a:xfrm>
-            <a:off x="4229100" y="2876550"/>
-            <a:ext cx="1085850" cy="238125"/>
+              <a:t>Thin classes</a:t>
+            </a:r>
+          </a:p>
+        </p:txBody>
+      </p:sp>
+      <p:sp>
+        <p:nvSpPr>
+          <p:cNvPr id="40" name="TextBox 39"/>
+          <p:cNvSpPr txBox="1"/>
+          <p:nvPr/>
+        </p:nvSpPr>
+        <p:spPr>
+          <a:xfrm>
+            <a:off x="7269479" y="3364991"/>
+            <a:ext cx="4160520" cy="868680"/>
           </a:xfrm>
           <a:prstGeom prst="rect">
             <a:avLst/>
           </a:prstGeom>
           <a:noFill/>
-          <a:ln w="0">
+        </p:spPr>
+        <p:txBody>
+          <a:bodyPr wrap="square" lIns="18288" tIns="18288" rIns="18288" bIns="18288" anchor="t">
+            <a:noAutofit/>
+          </a:bodyPr>
+          <a:lstStyle/>
+          <a:p>
+            <a:pPr algn="l">
+              <a:spcAft>
+                <a:spcPts val="0"/>
+              </a:spcAft>
+            </a:pPr>
+            <a:r>
+              <a:rPr sz="1300" b="0">
+                <a:solidFill>
+                  <a:srgbClr val="22313F"/>
+                </a:solidFill>
+                <a:latin typeface="Aptos"/>
+              </a:rPr>
+              <a:t>Mapillary had only 19 Speed 65, 32 Added Lane, and 45 Speed 45 training crops. On LISA's crops it got 0/14, 0/26, and 1/25.</a:t>
+            </a:r>
+          </a:p>
+        </p:txBody>
+      </p:sp>
+      <p:sp>
+        <p:nvSpPr>
+          <p:cNvPr id="41" name="Oval 40"/>
+          <p:cNvSpPr/>
+          <p:nvPr/>
+        </p:nvSpPr>
+        <p:spPr>
+          <a:xfrm>
+            <a:off x="6720840" y="4361688"/>
+            <a:ext cx="384048" cy="384048"/>
+          </a:xfrm>
+          <a:prstGeom prst="ellipse">
+            <a:avLst/>
+          </a:prstGeom>
+          <a:solidFill>
+            <a:srgbClr val="30669D"/>
+          </a:solidFill>
+          <a:ln>
             <a:noFill/>
           </a:ln>
-        </p:spPr>
-        <p:txBody>
-          <a:bodyPr wrap="square" lIns="0" tIns="0" rIns="0" bIns="0">
-            <a:normAutofit/>
+          <a:effectLst/>
+        </p:spPr>
+        <p:txBody>
+          <a:bodyPr rtlCol="0" anchor="ctr"/>
+          <a:lstStyle/>
+          <a:p>
+            <a:pPr algn="ctr"/>
+            <a:endParaRPr/>
+          </a:p>
+        </p:txBody>
+      </p:sp>
+      <p:sp>
+        <p:nvSpPr>
+          <p:cNvPr id="42" name="TextBox 41"/>
+          <p:cNvSpPr txBox="1"/>
+          <p:nvPr/>
+        </p:nvSpPr>
+        <p:spPr>
+          <a:xfrm>
+            <a:off x="6720840" y="4361688"/>
+            <a:ext cx="384048" cy="384048"/>
+          </a:xfrm>
+          <a:prstGeom prst="rect">
+            <a:avLst/>
+          </a:prstGeom>
+          <a:noFill/>
+        </p:spPr>
+        <p:txBody>
+          <a:bodyPr wrap="square" lIns="18288" tIns="18288" rIns="18288" bIns="18288" anchor="ctr">
+            <a:noAutofit/>
           </a:bodyPr>
           <a:lstStyle/>
           <a:p>
             <a:pPr algn="ctr">
-              <a:defRPr sz="1125">
+              <a:spcAft>
+                <a:spcPts val="0"/>
+              </a:spcAft>
+            </a:pPr>
+            <a:r>
+              <a:rPr sz="1500" b="1">
+                <a:solidFill>
+                  <a:srgbClr val="FFFFFF"/>
+                </a:solidFill>
+                <a:latin typeface="Aptos"/>
+              </a:rPr>
+              <a:t>3</a:t>
+            </a:r>
+          </a:p>
+        </p:txBody>
+      </p:sp>
+      <p:sp>
+        <p:nvSpPr>
+          <p:cNvPr id="43" name="TextBox 42"/>
+          <p:cNvSpPr txBox="1"/>
+          <p:nvPr/>
+        </p:nvSpPr>
+        <p:spPr>
+          <a:xfrm>
+            <a:off x="7269479" y="4343400"/>
+            <a:ext cx="4160520" cy="329184"/>
+          </a:xfrm>
+          <a:prstGeom prst="rect">
+            <a:avLst/>
+          </a:prstGeom>
+          <a:noFill/>
+        </p:spPr>
+        <p:txBody>
+          <a:bodyPr wrap="square" lIns="18288" tIns="18288" rIns="18288" bIns="18288" anchor="t">
+            <a:noAutofit/>
+          </a:bodyPr>
+          <a:lstStyle/>
+          <a:p>
+            <a:pPr algn="l">
+              <a:spcAft>
+                <a:spcPts val="0"/>
+              </a:spcAft>
+            </a:pPr>
+            <a:r>
+              <a:rPr sz="1600" b="1">
                 <a:solidFill>
                   <a:srgbClr val="000000"/>
                 </a:solidFill>
                 <a:latin typeface="Aptos"/>
-                <a:ea typeface="Aptos"/>
-                <a:cs typeface="Aptos"/>
-              </a:defRPr>
+              </a:rPr>
+              <a:t>Combined model saw both</a:t>
+            </a:r>
+          </a:p>
+        </p:txBody>
+      </p:sp>
+      <p:sp>
+        <p:nvSpPr>
+          <p:cNvPr id="44" name="TextBox 43"/>
+          <p:cNvSpPr txBox="1"/>
+          <p:nvPr/>
+        </p:nvSpPr>
+        <p:spPr>
+          <a:xfrm>
+            <a:off x="7269479" y="4690872"/>
+            <a:ext cx="4160520" cy="868680"/>
+          </a:xfrm>
+          <a:prstGeom prst="rect">
+            <a:avLst/>
+          </a:prstGeom>
+          <a:noFill/>
+        </p:spPr>
+        <p:txBody>
+          <a:bodyPr wrap="square" lIns="18288" tIns="18288" rIns="18288" bIns="18288" anchor="t">
+            <a:noAutofit/>
+          </a:bodyPr>
+          <a:lstStyle/>
+          <a:p>
+            <a:pPr algn="l">
+              <a:spcAft>
+                <a:spcPts val="0"/>
+              </a:spcAft>
             </a:pPr>
             <a:r>
-              <a:rPr sz="1125">
+              <a:rPr sz="1300" b="0">
                 <a:solidFill>
-                  <a:srgbClr val="000000"/>
+                  <a:srgbClr val="22313F"/>
                 </a:solidFill>
                 <a:latin typeface="Aptos"/>
-                <a:ea typeface="Aptos"/>
-                <a:cs typeface="Aptos"/>
               </a:rPr>
-              <a:t>Pedestrian</a:t>
-            </a:r>
-          </a:p>
-        </p:txBody>
-      </p:sp>
-      <p:pic>
-        <p:nvPicPr>
-          <p:cNvPr id="39" name="Picture 38"/>
-          <p:cNvPicPr>
-            <a:picLocks noChangeAspect="1"/>
-          </p:cNvPicPr>
-          <p:nvPr/>
-        </p:nvPicPr>
-        <p:blipFill>
-          <a:blip r:embed="rId5"/>
-          <a:stretch/>
-        </p:blipFill>
-        <p:spPr>
-          <a:xfrm>
-            <a:off x="714375" y="3190875"/>
-            <a:ext cx="914400" cy="914400"/>
-          </a:xfrm>
-          <a:prstGeom prst="rect">
-            <a:avLst/>
-          </a:prstGeom>
-        </p:spPr>
-      </p:pic>
-      <p:sp>
-        <p:nvSpPr>
-          <p:cNvPr id="12" name="mapillary-label-school">
-            <a:extLst>
-              <a:ext uri="{FF2B5EF4-FFF2-40B4-BE49-F238E27FC236}">
-                <a16:creationId xmlns:a16="http://schemas.microsoft.com/office/drawing/2014/main" id="{33B383A7-8C2B-4EEC-83E3-6D32ACFB8C14}"/>
-              </a:ext>
-            </a:extLst>
-          </p:cNvPr>
-          <p:cNvSpPr>
-            <a:spLocks noGrp="1"/>
-          </p:cNvSpPr>
-          <p:nvPr/>
-        </p:nvSpPr>
-        <p:spPr>
-          <a:xfrm>
-            <a:off x="628650" y="4133850"/>
-            <a:ext cx="1085850" cy="238125"/>
-          </a:xfrm>
-          <a:prstGeom prst="rect">
-            <a:avLst/>
-          </a:prstGeom>
-          <a:noFill/>
-          <a:ln w="0">
-            <a:noFill/>
-          </a:ln>
-        </p:spPr>
-        <p:txBody>
-          <a:bodyPr wrap="square" lIns="0" tIns="0" rIns="0" bIns="0">
-            <a:normAutofit/>
-          </a:bodyPr>
-          <a:lstStyle/>
-          <a:p>
-            <a:pPr algn="ctr">
-              <a:defRPr sz="1125">
-                <a:solidFill>
-                  <a:srgbClr val="000000"/>
-                </a:solidFill>
-                <a:latin typeface="Aptos"/>
-                <a:ea typeface="Aptos"/>
-                <a:cs typeface="Aptos"/>
-              </a:defRPr>
-            </a:pPr>
-            <a:r>
-              <a:rPr sz="1125">
-                <a:solidFill>
-                  <a:srgbClr val="000000"/>
-                </a:solidFill>
-                <a:latin typeface="Aptos"/>
-                <a:ea typeface="Aptos"/>
-                <a:cs typeface="Aptos"/>
-              </a:rPr>
-              <a:t>School</a:t>
-            </a:r>
-          </a:p>
-        </p:txBody>
-      </p:sp>
-      <p:pic>
-        <p:nvPicPr>
-          <p:cNvPr id="41" name="Picture 40"/>
-          <p:cNvPicPr>
-            <a:picLocks noChangeAspect="1"/>
-          </p:cNvPicPr>
-          <p:nvPr/>
-        </p:nvPicPr>
-        <p:blipFill>
-          <a:blip r:embed="rId2"/>
-          <a:stretch/>
-        </p:blipFill>
-        <p:spPr>
-          <a:xfrm>
-            <a:off x="1914525" y="3190875"/>
-            <a:ext cx="914400" cy="914400"/>
-          </a:xfrm>
-          <a:prstGeom prst="rect">
-            <a:avLst/>
-          </a:prstGeom>
-        </p:spPr>
-      </p:pic>
-      <p:sp>
-        <p:nvSpPr>
-          <p:cNvPr id="14" name="mapillary-label-signalAhead">
-            <a:extLst>
-              <a:ext uri="{FF2B5EF4-FFF2-40B4-BE49-F238E27FC236}">
-                <a16:creationId xmlns:a16="http://schemas.microsoft.com/office/drawing/2014/main" id="{ECF62389-CE52-4C5F-9DE3-ABAD75BA0164}"/>
-              </a:ext>
-            </a:extLst>
-          </p:cNvPr>
-          <p:cNvSpPr>
-            <a:spLocks noGrp="1"/>
-          </p:cNvSpPr>
-          <p:nvPr/>
-        </p:nvSpPr>
-        <p:spPr>
-          <a:xfrm>
-            <a:off x="1828800" y="4133850"/>
-            <a:ext cx="1085850" cy="238125"/>
-          </a:xfrm>
-          <a:prstGeom prst="rect">
-            <a:avLst/>
-          </a:prstGeom>
-          <a:noFill/>
-          <a:ln w="0">
-            <a:noFill/>
-          </a:ln>
-        </p:spPr>
-        <p:txBody>
-          <a:bodyPr wrap="square" lIns="0" tIns="0" rIns="0" bIns="0">
-            <a:normAutofit/>
-          </a:bodyPr>
-          <a:lstStyle/>
-          <a:p>
-            <a:pPr algn="ctr">
-              <a:defRPr sz="1125">
-                <a:solidFill>
-                  <a:srgbClr val="000000"/>
-                </a:solidFill>
-                <a:latin typeface="Aptos"/>
-                <a:ea typeface="Aptos"/>
-                <a:cs typeface="Aptos"/>
-              </a:defRPr>
-            </a:pPr>
-            <a:r>
-              <a:rPr sz="1125">
-                <a:solidFill>
-                  <a:srgbClr val="000000"/>
-                </a:solidFill>
-                <a:latin typeface="Aptos"/>
-                <a:ea typeface="Aptos"/>
-                <a:cs typeface="Aptos"/>
-              </a:rPr>
-              <a:t>Signal Ahead</a:t>
-            </a:r>
-          </a:p>
-        </p:txBody>
-      </p:sp>
-      <p:pic>
-        <p:nvPicPr>
-          <p:cNvPr id="43" name="Picture 42"/>
-          <p:cNvPicPr>
-            <a:picLocks noChangeAspect="1"/>
-          </p:cNvPicPr>
-          <p:nvPr/>
-        </p:nvPicPr>
-        <p:blipFill>
-          <a:blip r:embed="rId12"/>
-          <a:stretch/>
-        </p:blipFill>
-        <p:spPr>
-          <a:xfrm>
-            <a:off x="3114675" y="3190875"/>
-            <a:ext cx="914400" cy="914400"/>
-          </a:xfrm>
-          <a:prstGeom prst="rect">
-            <a:avLst/>
-          </a:prstGeom>
-        </p:spPr>
-      </p:pic>
-      <p:sp>
-        <p:nvSpPr>
-          <p:cNvPr id="16" name="mapillary-label-speedLimit25">
-            <a:extLst>
-              <a:ext uri="{FF2B5EF4-FFF2-40B4-BE49-F238E27FC236}">
-                <a16:creationId xmlns:a16="http://schemas.microsoft.com/office/drawing/2014/main" id="{1120D8E3-41E7-40E0-838D-9DB4E581937C}"/>
-              </a:ext>
-            </a:extLst>
-          </p:cNvPr>
-          <p:cNvSpPr>
-            <a:spLocks noGrp="1"/>
-          </p:cNvSpPr>
-          <p:nvPr/>
-        </p:nvSpPr>
-        <p:spPr>
-          <a:xfrm>
-            <a:off x="3028950" y="4133850"/>
-            <a:ext cx="1085850" cy="238125"/>
-          </a:xfrm>
-          <a:prstGeom prst="rect">
-            <a:avLst/>
-          </a:prstGeom>
-          <a:noFill/>
-          <a:ln w="0">
-            <a:noFill/>
-          </a:ln>
-        </p:spPr>
-        <p:txBody>
-          <a:bodyPr wrap="square" lIns="0" tIns="0" rIns="0" bIns="0">
-            <a:normAutofit/>
-          </a:bodyPr>
-          <a:lstStyle/>
-          <a:p>
-            <a:pPr algn="ctr">
-              <a:defRPr sz="1125">
-                <a:solidFill>
-                  <a:srgbClr val="000000"/>
-                </a:solidFill>
-                <a:latin typeface="Aptos"/>
-                <a:ea typeface="Aptos"/>
-                <a:cs typeface="Aptos"/>
-              </a:defRPr>
-            </a:pPr>
-            <a:r>
-              <a:rPr sz="1125">
-                <a:solidFill>
-                  <a:srgbClr val="000000"/>
-                </a:solidFill>
-                <a:latin typeface="Aptos"/>
-                <a:ea typeface="Aptos"/>
-                <a:cs typeface="Aptos"/>
-              </a:rPr>
-              <a:t>Speed 25</a:t>
-            </a:r>
-          </a:p>
-        </p:txBody>
-      </p:sp>
-      <p:pic>
-        <p:nvPicPr>
-          <p:cNvPr id="45" name="Picture 44"/>
-          <p:cNvPicPr>
-            <a:picLocks noChangeAspect="1"/>
-          </p:cNvPicPr>
-          <p:nvPr/>
-        </p:nvPicPr>
-        <p:blipFill>
-          <a:blip r:embed="rId10"/>
-          <a:stretch/>
-        </p:blipFill>
-        <p:spPr>
-          <a:xfrm>
-            <a:off x="4314825" y="3190875"/>
-            <a:ext cx="914400" cy="914400"/>
-          </a:xfrm>
-          <a:prstGeom prst="rect">
-            <a:avLst/>
-          </a:prstGeom>
-        </p:spPr>
-      </p:pic>
-      <p:sp>
-        <p:nvSpPr>
-          <p:cNvPr id="18" name="mapillary-label-speedLimit30">
-            <a:extLst>
-              <a:ext uri="{FF2B5EF4-FFF2-40B4-BE49-F238E27FC236}">
-                <a16:creationId xmlns:a16="http://schemas.microsoft.com/office/drawing/2014/main" id="{6E936109-9D79-42C6-BF3C-50B9EA2629D6}"/>
-              </a:ext>
-            </a:extLst>
-          </p:cNvPr>
-          <p:cNvSpPr>
-            <a:spLocks noGrp="1"/>
-          </p:cNvSpPr>
-          <p:nvPr/>
-        </p:nvSpPr>
-        <p:spPr>
-          <a:xfrm>
-            <a:off x="4229100" y="4133850"/>
-            <a:ext cx="1085850" cy="238125"/>
-          </a:xfrm>
-          <a:prstGeom prst="rect">
-            <a:avLst/>
-          </a:prstGeom>
-          <a:noFill/>
-          <a:ln w="0">
-            <a:noFill/>
-          </a:ln>
-        </p:spPr>
-        <p:txBody>
-          <a:bodyPr wrap="square" lIns="0" tIns="0" rIns="0" bIns="0">
-            <a:normAutofit/>
-          </a:bodyPr>
-          <a:lstStyle/>
-          <a:p>
-            <a:pPr algn="ctr">
-              <a:defRPr sz="1125">
-                <a:solidFill>
-                  <a:srgbClr val="000000"/>
-                </a:solidFill>
-                <a:latin typeface="Aptos"/>
-                <a:ea typeface="Aptos"/>
-                <a:cs typeface="Aptos"/>
-              </a:defRPr>
-            </a:pPr>
-            <a:r>
-              <a:rPr sz="1125">
-                <a:solidFill>
-                  <a:srgbClr val="000000"/>
-                </a:solidFill>
-                <a:latin typeface="Aptos"/>
-                <a:ea typeface="Aptos"/>
-                <a:cs typeface="Aptos"/>
-              </a:rPr>
-              <a:t>Speed 30</a:t>
-            </a:r>
-          </a:p>
-        </p:txBody>
-      </p:sp>
-      <p:pic>
-        <p:nvPicPr>
-          <p:cNvPr id="47" name="Picture 46"/>
-          <p:cNvPicPr>
-            <a:picLocks noChangeAspect="1"/>
-          </p:cNvPicPr>
-          <p:nvPr/>
-        </p:nvPicPr>
-        <p:blipFill>
-          <a:blip r:embed="rId8"/>
-          <a:stretch/>
-        </p:blipFill>
-        <p:spPr>
-          <a:xfrm>
-            <a:off x="714375" y="4448175"/>
-            <a:ext cx="914400" cy="914400"/>
-          </a:xfrm>
-          <a:prstGeom prst="rect">
-            <a:avLst/>
-          </a:prstGeom>
-        </p:spPr>
-      </p:pic>
-      <p:sp>
-        <p:nvSpPr>
-          <p:cNvPr id="20" name="mapillary-label-speedLimit35">
-            <a:extLst>
-              <a:ext uri="{FF2B5EF4-FFF2-40B4-BE49-F238E27FC236}">
-                <a16:creationId xmlns:a16="http://schemas.microsoft.com/office/drawing/2014/main" id="{4EDFB993-2D80-46F6-A687-8F9FAF7865D1}"/>
-              </a:ext>
-            </a:extLst>
-          </p:cNvPr>
-          <p:cNvSpPr>
-            <a:spLocks noGrp="1"/>
-          </p:cNvSpPr>
-          <p:nvPr/>
-        </p:nvSpPr>
-        <p:spPr>
-          <a:xfrm>
-            <a:off x="628650" y="5391150"/>
-            <a:ext cx="1085850" cy="238125"/>
-          </a:xfrm>
-          <a:prstGeom prst="rect">
-            <a:avLst/>
-          </a:prstGeom>
-          <a:noFill/>
-          <a:ln w="0">
-            <a:noFill/>
-          </a:ln>
-        </p:spPr>
-        <p:txBody>
-          <a:bodyPr wrap="square" lIns="0" tIns="0" rIns="0" bIns="0">
-            <a:normAutofit/>
-          </a:bodyPr>
-          <a:lstStyle/>
-          <a:p>
-            <a:pPr algn="ctr">
-              <a:defRPr sz="1125">
-                <a:solidFill>
-                  <a:srgbClr val="000000"/>
-                </a:solidFill>
-                <a:latin typeface="Aptos"/>
-                <a:ea typeface="Aptos"/>
-                <a:cs typeface="Aptos"/>
-              </a:defRPr>
-            </a:pPr>
-            <a:r>
-              <a:rPr sz="1125">
-                <a:solidFill>
-                  <a:srgbClr val="000000"/>
-                </a:solidFill>
-                <a:latin typeface="Aptos"/>
-                <a:ea typeface="Aptos"/>
-                <a:cs typeface="Aptos"/>
-              </a:rPr>
-              <a:t>Speed 35</a:t>
-            </a:r>
-          </a:p>
-        </p:txBody>
-      </p:sp>
-      <p:pic>
-        <p:nvPicPr>
-          <p:cNvPr id="49" name="Picture 48"/>
-          <p:cNvPicPr>
-            <a:picLocks noChangeAspect="1"/>
-          </p:cNvPicPr>
-          <p:nvPr/>
-        </p:nvPicPr>
-        <p:blipFill>
-          <a:blip r:embed="rId6"/>
-          <a:stretch/>
-        </p:blipFill>
-        <p:spPr>
-          <a:xfrm>
-            <a:off x="1914525" y="4448175"/>
-            <a:ext cx="914400" cy="914400"/>
-          </a:xfrm>
-          <a:prstGeom prst="rect">
-            <a:avLst/>
-          </a:prstGeom>
-        </p:spPr>
-      </p:pic>
-      <p:sp>
-        <p:nvSpPr>
-          <p:cNvPr id="22" name="mapillary-label-speedLimit45">
-            <a:extLst>
-              <a:ext uri="{FF2B5EF4-FFF2-40B4-BE49-F238E27FC236}">
-                <a16:creationId xmlns:a16="http://schemas.microsoft.com/office/drawing/2014/main" id="{5E058768-7BA2-4BAD-A7C1-91BAB5B352AB}"/>
-              </a:ext>
-            </a:extLst>
-          </p:cNvPr>
-          <p:cNvSpPr>
-            <a:spLocks noGrp="1"/>
-          </p:cNvSpPr>
-          <p:nvPr/>
-        </p:nvSpPr>
-        <p:spPr>
-          <a:xfrm>
-            <a:off x="1828800" y="5391150"/>
-            <a:ext cx="1085850" cy="238125"/>
-          </a:xfrm>
-          <a:prstGeom prst="rect">
-            <a:avLst/>
-          </a:prstGeom>
-          <a:noFill/>
-          <a:ln w="0">
-            <a:noFill/>
-          </a:ln>
-        </p:spPr>
-        <p:txBody>
-          <a:bodyPr wrap="square" lIns="0" tIns="0" rIns="0" bIns="0">
-            <a:normAutofit/>
-          </a:bodyPr>
-          <a:lstStyle/>
-          <a:p>
-            <a:pPr algn="ctr">
-              <a:defRPr sz="1125">
-                <a:solidFill>
-                  <a:srgbClr val="000000"/>
-                </a:solidFill>
-                <a:latin typeface="Aptos"/>
-                <a:ea typeface="Aptos"/>
-                <a:cs typeface="Aptos"/>
-              </a:defRPr>
-            </a:pPr>
-            <a:r>
-              <a:rPr sz="1125">
-                <a:solidFill>
-                  <a:srgbClr val="000000"/>
-                </a:solidFill>
-                <a:latin typeface="Aptos"/>
-                <a:ea typeface="Aptos"/>
-                <a:cs typeface="Aptos"/>
-              </a:rPr>
-              <a:t>Speed 45</a:t>
-            </a:r>
-          </a:p>
-        </p:txBody>
-      </p:sp>
-      <p:pic>
-        <p:nvPicPr>
-          <p:cNvPr id="51" name="Picture 50"/>
-          <p:cNvPicPr>
-            <a:picLocks noChangeAspect="1"/>
-          </p:cNvPicPr>
-          <p:nvPr/>
-        </p:nvPicPr>
-        <p:blipFill>
-          <a:blip r:embed="rId3"/>
-          <a:stretch/>
-        </p:blipFill>
-        <p:spPr>
-          <a:xfrm>
-            <a:off x="3114675" y="4448175"/>
-            <a:ext cx="914400" cy="914400"/>
-          </a:xfrm>
-          <a:prstGeom prst="rect">
-            <a:avLst/>
-          </a:prstGeom>
-        </p:spPr>
-      </p:pic>
-      <p:sp>
-        <p:nvSpPr>
-          <p:cNvPr id="24" name="mapillary-label-speedLimit65">
-            <a:extLst>
-              <a:ext uri="{FF2B5EF4-FFF2-40B4-BE49-F238E27FC236}">
-                <a16:creationId xmlns:a16="http://schemas.microsoft.com/office/drawing/2014/main" id="{1E08C660-E9CB-4BEE-A4EA-3FA8509D4DEC}"/>
-              </a:ext>
-            </a:extLst>
-          </p:cNvPr>
-          <p:cNvSpPr>
-            <a:spLocks noGrp="1"/>
-          </p:cNvSpPr>
-          <p:nvPr/>
-        </p:nvSpPr>
-        <p:spPr>
-          <a:xfrm>
-            <a:off x="3028950" y="5391150"/>
-            <a:ext cx="1085850" cy="238125"/>
-          </a:xfrm>
-          <a:prstGeom prst="rect">
-            <a:avLst/>
-          </a:prstGeom>
-          <a:noFill/>
-          <a:ln w="0">
-            <a:noFill/>
-          </a:ln>
-        </p:spPr>
-        <p:txBody>
-          <a:bodyPr wrap="square" lIns="0" tIns="0" rIns="0" bIns="0">
-            <a:normAutofit/>
-          </a:bodyPr>
-          <a:lstStyle/>
-          <a:p>
-            <a:pPr algn="ctr">
-              <a:defRPr sz="1125">
-                <a:solidFill>
-                  <a:srgbClr val="000000"/>
-                </a:solidFill>
-                <a:latin typeface="Aptos"/>
-                <a:ea typeface="Aptos"/>
-                <a:cs typeface="Aptos"/>
-              </a:defRPr>
-            </a:pPr>
-            <a:r>
-              <a:rPr sz="1125">
-                <a:solidFill>
-                  <a:srgbClr val="000000"/>
-                </a:solidFill>
-                <a:latin typeface="Aptos"/>
-                <a:ea typeface="Aptos"/>
-                <a:cs typeface="Aptos"/>
-              </a:rPr>
-              <a:t>Speed 65</a:t>
-            </a:r>
-          </a:p>
-        </p:txBody>
-      </p:sp>
-      <p:pic>
-        <p:nvPicPr>
-          <p:cNvPr id="53" name="Picture 52"/>
-          <p:cNvPicPr>
-            <a:picLocks noChangeAspect="1"/>
-          </p:cNvPicPr>
-          <p:nvPr/>
-        </p:nvPicPr>
-        <p:blipFill>
-          <a:blip r:embed="rId13"/>
-          <a:stretch/>
-        </p:blipFill>
-        <p:spPr>
-          <a:xfrm>
-            <a:off x="4314825" y="4448175"/>
-            <a:ext cx="914400" cy="914400"/>
-          </a:xfrm>
-          <a:prstGeom prst="rect">
-            <a:avLst/>
-          </a:prstGeom>
-        </p:spPr>
-      </p:pic>
-      <p:sp>
-        <p:nvSpPr>
-          <p:cNvPr id="26" name="mapillary-label-stop">
-            <a:extLst>
-              <a:ext uri="{FF2B5EF4-FFF2-40B4-BE49-F238E27FC236}">
-                <a16:creationId xmlns:a16="http://schemas.microsoft.com/office/drawing/2014/main" id="{2C164AF5-BC37-444D-887F-D63FD68C43A4}"/>
-              </a:ext>
-            </a:extLst>
-          </p:cNvPr>
-          <p:cNvSpPr>
-            <a:spLocks noGrp="1"/>
-          </p:cNvSpPr>
-          <p:nvPr/>
-        </p:nvSpPr>
-        <p:spPr>
-          <a:xfrm>
-            <a:off x="4229100" y="5391150"/>
-            <a:ext cx="1085850" cy="238125"/>
-          </a:xfrm>
-          <a:prstGeom prst="rect">
-            <a:avLst/>
-          </a:prstGeom>
-          <a:noFill/>
-          <a:ln w="0">
-            <a:noFill/>
-          </a:ln>
-        </p:spPr>
-        <p:txBody>
-          <a:bodyPr wrap="square" lIns="0" tIns="0" rIns="0" bIns="0">
-            <a:normAutofit/>
-          </a:bodyPr>
-          <a:lstStyle/>
-          <a:p>
-            <a:pPr algn="ctr">
-              <a:defRPr sz="1125">
-                <a:solidFill>
-                  <a:srgbClr val="000000"/>
-                </a:solidFill>
-                <a:latin typeface="Aptos"/>
-                <a:ea typeface="Aptos"/>
-                <a:cs typeface="Aptos"/>
-              </a:defRPr>
-            </a:pPr>
-            <a:r>
-              <a:rPr sz="1125">
-                <a:solidFill>
-                  <a:srgbClr val="000000"/>
-                </a:solidFill>
-                <a:latin typeface="Aptos"/>
-                <a:ea typeface="Aptos"/>
-                <a:cs typeface="Aptos"/>
-              </a:rPr>
-              <a:t>Stop</a:t>
-            </a:r>
-          </a:p>
-        </p:txBody>
-      </p:sp>
-      <p:sp>
-        <p:nvSpPr>
-          <p:cNvPr id="27" name="section-preparation">
-            <a:extLst>
-              <a:ext uri="{FF2B5EF4-FFF2-40B4-BE49-F238E27FC236}">
-                <a16:creationId xmlns:a16="http://schemas.microsoft.com/office/drawing/2014/main" id="{1CD39409-C4BE-47B8-8096-E91D03728C96}"/>
-              </a:ext>
-            </a:extLst>
-          </p:cNvPr>
-          <p:cNvSpPr>
-            <a:spLocks noGrp="1"/>
-          </p:cNvSpPr>
-          <p:nvPr/>
-        </p:nvSpPr>
-        <p:spPr>
-          <a:xfrm>
-            <a:off x="5953125" y="1809750"/>
-            <a:ext cx="5143500" cy="323850"/>
-          </a:xfrm>
-          <a:prstGeom prst="rect">
-            <a:avLst/>
-          </a:prstGeom>
-          <a:noFill/>
-          <a:ln w="0">
-            <a:noFill/>
-          </a:ln>
-        </p:spPr>
-        <p:txBody>
-          <a:bodyPr wrap="square" lIns="0" tIns="0" rIns="0" bIns="0">
-            <a:normAutofit/>
-          </a:bodyPr>
-          <a:lstStyle/>
-          <a:p>
-            <a:pPr>
-              <a:defRPr sz="1800" b="1">
-                <a:solidFill>
-                  <a:srgbClr val="000000"/>
-                </a:solidFill>
-                <a:latin typeface="Aptos"/>
-                <a:ea typeface="Aptos"/>
-                <a:cs typeface="Aptos"/>
-              </a:defRPr>
-            </a:pPr>
-            <a:r>
-              <a:rPr sz="1800" b="1">
-                <a:solidFill>
-                  <a:srgbClr val="000000"/>
-                </a:solidFill>
-                <a:latin typeface="Aptos"/>
-                <a:ea typeface="Aptos"/>
-                <a:cs typeface="Aptos"/>
-              </a:rPr>
-              <a:t>Preparation</a:t>
-            </a:r>
-          </a:p>
-        </p:txBody>
-      </p:sp>
-      <p:sp>
-        <p:nvSpPr>
-          <p:cNvPr id="28" name="mapillary-summary">
-            <a:extLst>
-              <a:ext uri="{FF2B5EF4-FFF2-40B4-BE49-F238E27FC236}">
-                <a16:creationId xmlns:a16="http://schemas.microsoft.com/office/drawing/2014/main" id="{4C892EF0-634D-4887-977B-2DA260F891B1}"/>
-              </a:ext>
-            </a:extLst>
-          </p:cNvPr>
-          <p:cNvSpPr>
-            <a:spLocks noGrp="1"/>
-          </p:cNvSpPr>
-          <p:nvPr/>
-        </p:nvSpPr>
-        <p:spPr>
-          <a:xfrm>
-            <a:off x="6029325" y="2266950"/>
-            <a:ext cx="5334000" cy="2476500"/>
-          </a:xfrm>
-          <a:prstGeom prst="rect">
-            <a:avLst/>
-          </a:prstGeom>
-          <a:noFill/>
-          <a:ln w="0">
-            <a:noFill/>
-          </a:ln>
-        </p:spPr>
-        <p:txBody>
-          <a:bodyPr wrap="square" lIns="0" tIns="0" rIns="0" bIns="0">
-            <a:normAutofit/>
-          </a:bodyPr>
-          <a:lstStyle/>
-          <a:p>
-            <a:pPr marL="228600" indent="-114300">
-              <a:spcAft>
-                <a:spcPts val="700"/>
-              </a:spcAft>
-              <a:buChar char="•"/>
-              <a:defRPr sz="1575">
-                <a:solidFill>
-                  <a:srgbClr val="000000"/>
-                </a:solidFill>
-                <a:latin typeface="Aptos"/>
-                <a:ea typeface="Aptos"/>
-                <a:cs typeface="Aptos"/>
-              </a:defRPr>
-            </a:pPr>
-            <a:r>
-              <a:rPr sz="1575">
-                <a:solidFill>
-                  <a:srgbClr val="000000"/>
-                </a:solidFill>
-                <a:latin typeface="Aptos"/>
-                <a:ea typeface="Aptos"/>
-                <a:cs typeface="Aptos"/>
-              </a:rPr>
-              <a:t>Sourced Mapillary road-scene images for the same 12 U.S. sign classes.</a:t>
-            </a:r>
-          </a:p>
-          <a:p>
-            <a:pPr marL="228600" indent="-114300">
-              <a:spcAft>
-                <a:spcPts val="700"/>
-              </a:spcAft>
-              <a:buChar char="•"/>
-              <a:defRPr sz="1575">
-                <a:solidFill>
-                  <a:srgbClr val="000000"/>
-                </a:solidFill>
-                <a:latin typeface="Aptos"/>
-                <a:ea typeface="Aptos"/>
-                <a:cs typeface="Aptos"/>
-              </a:defRPr>
-            </a:pPr>
-            <a:r>
-              <a:rPr sz="1575">
-                <a:solidFill>
-                  <a:srgbClr val="000000"/>
-                </a:solidFill>
-                <a:latin typeface="Aptos"/>
-                <a:ea typeface="Aptos"/>
-                <a:cs typeface="Aptos"/>
-              </a:rPr>
-              <a:t>Prepared 3,449 cropped signs: 2,655 train, 362 validation, and 432 test.</a:t>
-            </a:r>
-          </a:p>
-          <a:p>
-            <a:pPr marL="228600" indent="-114300">
-              <a:spcAft>
-                <a:spcPts val="700"/>
-              </a:spcAft>
-              <a:buChar char="•"/>
-              <a:defRPr sz="1575">
-                <a:solidFill>
-                  <a:srgbClr val="000000"/>
-                </a:solidFill>
-                <a:latin typeface="Aptos"/>
-                <a:ea typeface="Aptos"/>
-                <a:cs typeface="Aptos"/>
-              </a:defRPr>
-            </a:pPr>
-            <a:r>
-              <a:rPr sz="1575">
-                <a:solidFill>
-                  <a:srgbClr val="000000"/>
-                </a:solidFill>
-                <a:latin typeface="Aptos"/>
-                <a:ea typeface="Aptos"/>
-                <a:cs typeface="Aptos"/>
-              </a:rPr>
-              <a:t>Next: train and evaluate the model, then consider combining Mapillary with LISA.</a:t>
+              <a:t>It trained on all 7,601 crops, with both styles in every class: 99.66% on LISA crops and 98.84% on Mapillary crops.</a:t>
             </a:r>
           </a:p>
         </p:txBody>
@@ -6482,138 +7574,834 @@
       <p:grpSpPr/>
       <p:sp>
         <p:nvSpPr>
-          <p:cNvPr id="2" name="Title 1">
-            <a:extLst>
-              <a:ext uri="{FF2B5EF4-FFF2-40B4-BE49-F238E27FC236}">
-                <a16:creationId xmlns:a16="http://schemas.microsoft.com/office/drawing/2014/main" id="{30AEBF44-7FD5-A705-80AC-D5F6B809A46E}"/>
-              </a:ext>
-            </a:extLst>
-          </p:cNvPr>
-          <p:cNvSpPr>
-            <a:spLocks noGrp="1"/>
-          </p:cNvSpPr>
-          <p:nvPr>
-            <p:ph type="title"/>
-          </p:nvPr>
-        </p:nvSpPr>
-        <p:spPr/>
-        <p:txBody>
-          <a:bodyPr/>
-          <a:lstStyle/>
-          <a:p>
-            <a:r>
-              <a:rPr lang="en-US" dirty="0"/>
-              <a:t>Alexis Perez</a:t>
-            </a:r>
-          </a:p>
-        </p:txBody>
-      </p:sp>
-      <p:sp>
-        <p:nvSpPr>
-          <p:cNvPr id="3" name="Content Placeholder 2">
-            <a:extLst>
-              <a:ext uri="{FF2B5EF4-FFF2-40B4-BE49-F238E27FC236}">
-                <a16:creationId xmlns:a16="http://schemas.microsoft.com/office/drawing/2014/main" id="{3F6BF837-7A7D-A6A3-574B-020760331940}"/>
-              </a:ext>
-            </a:extLst>
-          </p:cNvPr>
-          <p:cNvSpPr>
-            <a:spLocks noGrp="1"/>
-          </p:cNvSpPr>
-          <p:nvPr>
-            <p:ph idx="1"/>
-          </p:nvPr>
-        </p:nvSpPr>
-        <p:spPr/>
-        <p:txBody>
-          <a:bodyPr>
-            <a:normAutofit lnSpcReduction="10000"/>
+          <p:cNvPr id="2" name="Title"/>
+          <p:cNvSpPr txBox="1"/>
+          <p:nvPr/>
+        </p:nvSpPr>
+        <p:spPr>
+          <a:xfrm>
+            <a:off x="768096" y="365760"/>
+            <a:ext cx="10789920" cy="658368"/>
+          </a:xfrm>
+          <a:prstGeom prst="rect">
+            <a:avLst/>
+          </a:prstGeom>
+          <a:noFill/>
+        </p:spPr>
+        <p:txBody>
+          <a:bodyPr wrap="square" lIns="18288" tIns="18288" rIns="18288" bIns="18288" anchor="t">
+            <a:noAutofit/>
           </a:bodyPr>
           <a:lstStyle/>
           <a:p>
-            <a:r>
-              <a:rPr lang="en-US" b="1" dirty="0"/>
-              <a:t>Goals for the week</a:t>
-            </a:r>
-          </a:p>
-          <a:p>
-            <a:pPr lvl="1"/>
-            <a:r>
-              <a:rPr lang="en-US" dirty="0"/>
-              <a:t>Continue OpenCV Learning</a:t>
-            </a:r>
-          </a:p>
-          <a:p>
-            <a:pPr lvl="1"/>
-            <a:r>
-              <a:rPr lang="en-US" dirty="0"/>
-              <a:t>Research Line Sensor Options</a:t>
-            </a:r>
-          </a:p>
-          <a:p>
-            <a:r>
-              <a:rPr lang="en-US" b="1" dirty="0"/>
-              <a:t>Progress for the week</a:t>
-            </a:r>
-          </a:p>
-          <a:p>
-            <a:pPr lvl="1"/>
-            <a:r>
-              <a:rPr lang="en-US" dirty="0"/>
-              <a:t>Selected and ordered  Line Sensors</a:t>
-            </a:r>
-          </a:p>
-          <a:p>
-            <a:pPr lvl="1"/>
-            <a:r>
-              <a:rPr lang="en-US" dirty="0"/>
-              <a:t>Completed OpenCV Beginner course</a:t>
-            </a:r>
-          </a:p>
-          <a:p>
-            <a:r>
-              <a:rPr lang="en-US" b="1" dirty="0"/>
-              <a:t>Goals for next week</a:t>
-            </a:r>
-          </a:p>
-          <a:p>
-            <a:pPr lvl="1"/>
-            <a:r>
-              <a:rPr lang="en-US" dirty="0"/>
-              <a:t>Integrate line sensors with </a:t>
-            </a:r>
-            <a:r>
-              <a:rPr lang="en-US" dirty="0" err="1"/>
-              <a:t>RaspberryPi</a:t>
-            </a:r>
-            <a:endParaRPr lang="en-US" dirty="0"/>
-          </a:p>
-          <a:p>
-            <a:pPr lvl="1"/>
-            <a:r>
-              <a:rPr lang="en-US" dirty="0"/>
-              <a:t>Implement OpenCV with </a:t>
-            </a:r>
-            <a:r>
-              <a:rPr lang="en-US" dirty="0" err="1"/>
-              <a:t>RaspberryPi</a:t>
-            </a:r>
-            <a:r>
-              <a:rPr lang="en-US" dirty="0"/>
-              <a:t> Camera</a:t>
-            </a:r>
-          </a:p>
-          <a:p>
-            <a:r>
-              <a:rPr lang="en-US" b="1" dirty="0"/>
-              <a:t>Hours spent on progress</a:t>
-            </a:r>
-          </a:p>
-          <a:p>
-            <a:pPr lvl="1"/>
-            <a:r>
-              <a:rPr lang="en-US" dirty="0"/>
-              <a:t>6 hours.</a:t>
+            <a:pPr algn="l">
+              <a:spcAft>
+                <a:spcPts val="0"/>
+              </a:spcAft>
+            </a:pPr>
+            <a:r>
+              <a:rPr sz="3500" b="0">
+                <a:solidFill>
+                  <a:srgbClr val="000000"/>
+                </a:solidFill>
+                <a:latin typeface="Aptos Display"/>
+              </a:rPr>
+              <a:t>Twelve sign-card designs</a:t>
+            </a:r>
+          </a:p>
+        </p:txBody>
+      </p:sp>
+      <p:sp>
+        <p:nvSpPr>
+          <p:cNvPr id="3" name="Subtitle"/>
+          <p:cNvSpPr txBox="1"/>
+          <p:nvPr/>
+        </p:nvSpPr>
+        <p:spPr>
+          <a:xfrm>
+            <a:off x="786384" y="1024128"/>
+            <a:ext cx="10607040" cy="365760"/>
+          </a:xfrm>
+          <a:prstGeom prst="rect">
+            <a:avLst/>
+          </a:prstGeom>
+          <a:noFill/>
+        </p:spPr>
+        <p:txBody>
+          <a:bodyPr wrap="square" lIns="18288" tIns="18288" rIns="18288" bIns="18288" anchor="t">
+            <a:noAutofit/>
+          </a:bodyPr>
+          <a:lstStyle/>
+          <a:p>
+            <a:pPr algn="l">
+              <a:spcAft>
+                <a:spcPts val="0"/>
+              </a:spcAft>
+            </a:pPr>
+            <a:r>
+              <a:rPr sz="1500" b="1" dirty="0">
+                <a:solidFill>
+                  <a:srgbClr val="000000"/>
+                </a:solidFill>
+                <a:latin typeface="Aptos"/>
+              </a:rPr>
+              <a:t>Printable 3 × 5 in cards for the 12 classes</a:t>
+            </a:r>
+          </a:p>
+        </p:txBody>
+      </p:sp>
+      <p:pic>
+        <p:nvPicPr>
+          <p:cNvPr id="4" name="Picture 3" descr="addedLane.png"/>
+          <p:cNvPicPr>
+            <a:picLocks noChangeAspect="1"/>
+          </p:cNvPicPr>
+          <p:nvPr/>
+        </p:nvPicPr>
+        <p:blipFill>
+          <a:blip r:embed="rId7"/>
+          <a:stretch>
+            <a:fillRect/>
+          </a:stretch>
+        </p:blipFill>
+        <p:spPr>
+          <a:xfrm>
+            <a:off x="1529334" y="1691640"/>
+            <a:ext cx="1143000" cy="1143000"/>
+          </a:xfrm>
+          <a:prstGeom prst="rect">
+            <a:avLst/>
+          </a:prstGeom>
+        </p:spPr>
+      </p:pic>
+      <p:sp>
+        <p:nvSpPr>
+          <p:cNvPr id="5" name="TextBox 4"/>
+          <p:cNvSpPr txBox="1"/>
+          <p:nvPr/>
+        </p:nvSpPr>
+        <p:spPr>
+          <a:xfrm>
+            <a:off x="768095" y="2889504"/>
+            <a:ext cx="2665476" cy="292608"/>
+          </a:xfrm>
+          <a:prstGeom prst="rect">
+            <a:avLst/>
+          </a:prstGeom>
+          <a:noFill/>
+        </p:spPr>
+        <p:txBody>
+          <a:bodyPr wrap="square" lIns="18288" tIns="18288" rIns="18288" bIns="18288" anchor="t">
+            <a:noAutofit/>
+          </a:bodyPr>
+          <a:lstStyle/>
+          <a:p>
+            <a:pPr algn="ctr">
+              <a:spcAft>
+                <a:spcPts val="0"/>
+              </a:spcAft>
+            </a:pPr>
+            <a:r>
+              <a:rPr sz="1300" b="0">
+                <a:solidFill>
+                  <a:srgbClr val="000000"/>
+                </a:solidFill>
+                <a:latin typeface="Aptos"/>
+              </a:rPr>
+              <a:t>Added Lane</a:t>
+            </a:r>
+          </a:p>
+        </p:txBody>
+      </p:sp>
+      <p:pic>
+        <p:nvPicPr>
+          <p:cNvPr id="6" name="Picture 5" descr="keepRight.png"/>
+          <p:cNvPicPr>
+            <a:picLocks noChangeAspect="1"/>
+          </p:cNvPicPr>
+          <p:nvPr/>
+        </p:nvPicPr>
+        <p:blipFill>
+          <a:blip r:embed="rId4"/>
+          <a:stretch>
+            <a:fillRect/>
+          </a:stretch>
+        </p:blipFill>
+        <p:spPr>
+          <a:xfrm>
+            <a:off x="4309110" y="1691640"/>
+            <a:ext cx="914400" cy="1143000"/>
+          </a:xfrm>
+          <a:prstGeom prst="rect">
+            <a:avLst/>
+          </a:prstGeom>
+        </p:spPr>
+      </p:pic>
+      <p:sp>
+        <p:nvSpPr>
+          <p:cNvPr id="7" name="TextBox 6"/>
+          <p:cNvSpPr txBox="1"/>
+          <p:nvPr/>
+        </p:nvSpPr>
+        <p:spPr>
+          <a:xfrm>
+            <a:off x="3433572" y="2889504"/>
+            <a:ext cx="2665476" cy="292608"/>
+          </a:xfrm>
+          <a:prstGeom prst="rect">
+            <a:avLst/>
+          </a:prstGeom>
+          <a:noFill/>
+        </p:spPr>
+        <p:txBody>
+          <a:bodyPr wrap="square" lIns="18288" tIns="18288" rIns="18288" bIns="18288" anchor="t">
+            <a:noAutofit/>
+          </a:bodyPr>
+          <a:lstStyle/>
+          <a:p>
+            <a:pPr algn="ctr">
+              <a:spcAft>
+                <a:spcPts val="0"/>
+              </a:spcAft>
+            </a:pPr>
+            <a:r>
+              <a:rPr sz="1300" b="0">
+                <a:solidFill>
+                  <a:srgbClr val="000000"/>
+                </a:solidFill>
+                <a:latin typeface="Aptos"/>
+              </a:rPr>
+              <a:t>Keep Right</a:t>
+            </a:r>
+          </a:p>
+        </p:txBody>
+      </p:sp>
+      <p:pic>
+        <p:nvPicPr>
+          <p:cNvPr id="8" name="Picture 7" descr="merge.png"/>
+          <p:cNvPicPr>
+            <a:picLocks noChangeAspect="1"/>
+          </p:cNvPicPr>
+          <p:nvPr/>
+        </p:nvPicPr>
+        <p:blipFill>
+          <a:blip r:embed="rId12"/>
+          <a:stretch>
+            <a:fillRect/>
+          </a:stretch>
+        </p:blipFill>
+        <p:spPr>
+          <a:xfrm>
+            <a:off x="6860286" y="1691640"/>
+            <a:ext cx="1143000" cy="1143000"/>
+          </a:xfrm>
+          <a:prstGeom prst="rect">
+            <a:avLst/>
+          </a:prstGeom>
+        </p:spPr>
+      </p:pic>
+      <p:sp>
+        <p:nvSpPr>
+          <p:cNvPr id="9" name="TextBox 8"/>
+          <p:cNvSpPr txBox="1"/>
+          <p:nvPr/>
+        </p:nvSpPr>
+        <p:spPr>
+          <a:xfrm>
+            <a:off x="6099048" y="2889504"/>
+            <a:ext cx="2665476" cy="292608"/>
+          </a:xfrm>
+          <a:prstGeom prst="rect">
+            <a:avLst/>
+          </a:prstGeom>
+          <a:noFill/>
+        </p:spPr>
+        <p:txBody>
+          <a:bodyPr wrap="square" lIns="18288" tIns="18288" rIns="18288" bIns="18288" anchor="t">
+            <a:noAutofit/>
+          </a:bodyPr>
+          <a:lstStyle/>
+          <a:p>
+            <a:pPr algn="ctr">
+              <a:spcAft>
+                <a:spcPts val="0"/>
+              </a:spcAft>
+            </a:pPr>
+            <a:r>
+              <a:rPr sz="1300" b="0">
+                <a:solidFill>
+                  <a:srgbClr val="000000"/>
+                </a:solidFill>
+                <a:latin typeface="Aptos"/>
+              </a:rPr>
+              <a:t>Merge</a:t>
+            </a:r>
+          </a:p>
+        </p:txBody>
+      </p:sp>
+      <p:pic>
+        <p:nvPicPr>
+          <p:cNvPr id="10" name="Picture 9" descr="pedestrianCrossing.png"/>
+          <p:cNvPicPr>
+            <a:picLocks noChangeAspect="1"/>
+          </p:cNvPicPr>
+          <p:nvPr/>
+        </p:nvPicPr>
+        <p:blipFill>
+          <a:blip r:embed="rId10"/>
+          <a:stretch>
+            <a:fillRect/>
+          </a:stretch>
+        </p:blipFill>
+        <p:spPr>
+          <a:xfrm>
+            <a:off x="9526356" y="1691640"/>
+            <a:ext cx="1141810" cy="1143000"/>
+          </a:xfrm>
+          <a:prstGeom prst="rect">
+            <a:avLst/>
+          </a:prstGeom>
+        </p:spPr>
+      </p:pic>
+      <p:sp>
+        <p:nvSpPr>
+          <p:cNvPr id="11" name="TextBox 10"/>
+          <p:cNvSpPr txBox="1"/>
+          <p:nvPr/>
+        </p:nvSpPr>
+        <p:spPr>
+          <a:xfrm>
+            <a:off x="8764524" y="2889504"/>
+            <a:ext cx="2665476" cy="292608"/>
+          </a:xfrm>
+          <a:prstGeom prst="rect">
+            <a:avLst/>
+          </a:prstGeom>
+          <a:noFill/>
+        </p:spPr>
+        <p:txBody>
+          <a:bodyPr wrap="square" lIns="18288" tIns="18288" rIns="18288" bIns="18288" anchor="t">
+            <a:noAutofit/>
+          </a:bodyPr>
+          <a:lstStyle/>
+          <a:p>
+            <a:pPr algn="ctr">
+              <a:spcAft>
+                <a:spcPts val="0"/>
+              </a:spcAft>
+            </a:pPr>
+            <a:r>
+              <a:rPr sz="1300" b="0">
+                <a:solidFill>
+                  <a:srgbClr val="000000"/>
+                </a:solidFill>
+                <a:latin typeface="Aptos"/>
+              </a:rPr>
+              <a:t>Pedestrian Crossing</a:t>
+            </a:r>
+          </a:p>
+        </p:txBody>
+      </p:sp>
+      <p:pic>
+        <p:nvPicPr>
+          <p:cNvPr id="12" name="Picture 11" descr="school.png"/>
+          <p:cNvPicPr>
+            <a:picLocks noChangeAspect="1"/>
+          </p:cNvPicPr>
+          <p:nvPr/>
+        </p:nvPicPr>
+        <p:blipFill>
+          <a:blip r:embed="rId8"/>
+          <a:stretch>
+            <a:fillRect/>
+          </a:stretch>
+        </p:blipFill>
+        <p:spPr>
+          <a:xfrm>
+            <a:off x="1529334" y="3264408"/>
+            <a:ext cx="1143000" cy="1143000"/>
+          </a:xfrm>
+          <a:prstGeom prst="rect">
+            <a:avLst/>
+          </a:prstGeom>
+        </p:spPr>
+      </p:pic>
+      <p:sp>
+        <p:nvSpPr>
+          <p:cNvPr id="13" name="TextBox 12"/>
+          <p:cNvSpPr txBox="1"/>
+          <p:nvPr/>
+        </p:nvSpPr>
+        <p:spPr>
+          <a:xfrm>
+            <a:off x="768095" y="4462272"/>
+            <a:ext cx="2665476" cy="292608"/>
+          </a:xfrm>
+          <a:prstGeom prst="rect">
+            <a:avLst/>
+          </a:prstGeom>
+          <a:noFill/>
+        </p:spPr>
+        <p:txBody>
+          <a:bodyPr wrap="square" lIns="18288" tIns="18288" rIns="18288" bIns="18288" anchor="t">
+            <a:noAutofit/>
+          </a:bodyPr>
+          <a:lstStyle/>
+          <a:p>
+            <a:pPr algn="ctr">
+              <a:spcAft>
+                <a:spcPts val="0"/>
+              </a:spcAft>
+            </a:pPr>
+            <a:r>
+              <a:rPr sz="1300" b="0">
+                <a:solidFill>
+                  <a:srgbClr val="000000"/>
+                </a:solidFill>
+                <a:latin typeface="Aptos"/>
+              </a:rPr>
+              <a:t>School</a:t>
+            </a:r>
+          </a:p>
+        </p:txBody>
+      </p:sp>
+      <p:pic>
+        <p:nvPicPr>
+          <p:cNvPr id="14" name="Picture 13" descr="signalAhead.png"/>
+          <p:cNvPicPr>
+            <a:picLocks noChangeAspect="1"/>
+          </p:cNvPicPr>
+          <p:nvPr/>
+        </p:nvPicPr>
+        <p:blipFill>
+          <a:blip r:embed="rId5"/>
+          <a:stretch>
+            <a:fillRect/>
+          </a:stretch>
+        </p:blipFill>
+        <p:spPr>
+          <a:xfrm>
+            <a:off x="4194810" y="3264408"/>
+            <a:ext cx="1143000" cy="1143000"/>
+          </a:xfrm>
+          <a:prstGeom prst="rect">
+            <a:avLst/>
+          </a:prstGeom>
+        </p:spPr>
+      </p:pic>
+      <p:sp>
+        <p:nvSpPr>
+          <p:cNvPr id="15" name="TextBox 14"/>
+          <p:cNvSpPr txBox="1"/>
+          <p:nvPr/>
+        </p:nvSpPr>
+        <p:spPr>
+          <a:xfrm>
+            <a:off x="3433572" y="4462272"/>
+            <a:ext cx="2665476" cy="292608"/>
+          </a:xfrm>
+          <a:prstGeom prst="rect">
+            <a:avLst/>
+          </a:prstGeom>
+          <a:noFill/>
+        </p:spPr>
+        <p:txBody>
+          <a:bodyPr wrap="square" lIns="18288" tIns="18288" rIns="18288" bIns="18288" anchor="t">
+            <a:noAutofit/>
+          </a:bodyPr>
+          <a:lstStyle/>
+          <a:p>
+            <a:pPr algn="ctr">
+              <a:spcAft>
+                <a:spcPts val="0"/>
+              </a:spcAft>
+            </a:pPr>
+            <a:r>
+              <a:rPr sz="1300" b="0">
+                <a:solidFill>
+                  <a:srgbClr val="000000"/>
+                </a:solidFill>
+                <a:latin typeface="Aptos"/>
+              </a:rPr>
+              <a:t>Signal Ahead</a:t>
+            </a:r>
+          </a:p>
+        </p:txBody>
+      </p:sp>
+      <p:pic>
+        <p:nvPicPr>
+          <p:cNvPr id="16" name="Picture 15" descr="speedLimit25.png"/>
+          <p:cNvPicPr>
+            <a:picLocks noChangeAspect="1"/>
+          </p:cNvPicPr>
+          <p:nvPr/>
+        </p:nvPicPr>
+        <p:blipFill>
+          <a:blip r:embed="rId2"/>
+          <a:stretch>
+            <a:fillRect/>
+          </a:stretch>
+        </p:blipFill>
+        <p:spPr>
+          <a:xfrm>
+            <a:off x="6974586" y="3264408"/>
+            <a:ext cx="914400" cy="1143000"/>
+          </a:xfrm>
+          <a:prstGeom prst="rect">
+            <a:avLst/>
+          </a:prstGeom>
+        </p:spPr>
+      </p:pic>
+      <p:sp>
+        <p:nvSpPr>
+          <p:cNvPr id="17" name="TextBox 16"/>
+          <p:cNvSpPr txBox="1"/>
+          <p:nvPr/>
+        </p:nvSpPr>
+        <p:spPr>
+          <a:xfrm>
+            <a:off x="6099048" y="4462272"/>
+            <a:ext cx="2665476" cy="292608"/>
+          </a:xfrm>
+          <a:prstGeom prst="rect">
+            <a:avLst/>
+          </a:prstGeom>
+          <a:noFill/>
+        </p:spPr>
+        <p:txBody>
+          <a:bodyPr wrap="square" lIns="18288" tIns="18288" rIns="18288" bIns="18288" anchor="t">
+            <a:noAutofit/>
+          </a:bodyPr>
+          <a:lstStyle/>
+          <a:p>
+            <a:pPr algn="ctr">
+              <a:spcAft>
+                <a:spcPts val="0"/>
+              </a:spcAft>
+            </a:pPr>
+            <a:r>
+              <a:rPr sz="1300" b="0">
+                <a:solidFill>
+                  <a:srgbClr val="000000"/>
+                </a:solidFill>
+                <a:latin typeface="Aptos"/>
+              </a:rPr>
+              <a:t>Speed Limit 25</a:t>
+            </a:r>
+          </a:p>
+        </p:txBody>
+      </p:sp>
+      <p:pic>
+        <p:nvPicPr>
+          <p:cNvPr id="18" name="Picture 17" descr="speedLimit30.png"/>
+          <p:cNvPicPr>
+            <a:picLocks noChangeAspect="1"/>
+          </p:cNvPicPr>
+          <p:nvPr/>
+        </p:nvPicPr>
+        <p:blipFill>
+          <a:blip r:embed="rId13"/>
+          <a:stretch>
+            <a:fillRect/>
+          </a:stretch>
+        </p:blipFill>
+        <p:spPr>
+          <a:xfrm>
+            <a:off x="9640062" y="3264408"/>
+            <a:ext cx="914400" cy="1143000"/>
+          </a:xfrm>
+          <a:prstGeom prst="rect">
+            <a:avLst/>
+          </a:prstGeom>
+        </p:spPr>
+      </p:pic>
+      <p:sp>
+        <p:nvSpPr>
+          <p:cNvPr id="19" name="TextBox 18"/>
+          <p:cNvSpPr txBox="1"/>
+          <p:nvPr/>
+        </p:nvSpPr>
+        <p:spPr>
+          <a:xfrm>
+            <a:off x="8764524" y="4462272"/>
+            <a:ext cx="2665476" cy="292608"/>
+          </a:xfrm>
+          <a:prstGeom prst="rect">
+            <a:avLst/>
+          </a:prstGeom>
+          <a:noFill/>
+        </p:spPr>
+        <p:txBody>
+          <a:bodyPr wrap="square" lIns="18288" tIns="18288" rIns="18288" bIns="18288" anchor="t">
+            <a:noAutofit/>
+          </a:bodyPr>
+          <a:lstStyle/>
+          <a:p>
+            <a:pPr algn="ctr">
+              <a:spcAft>
+                <a:spcPts val="0"/>
+              </a:spcAft>
+            </a:pPr>
+            <a:r>
+              <a:rPr sz="1300" b="0">
+                <a:solidFill>
+                  <a:srgbClr val="000000"/>
+                </a:solidFill>
+                <a:latin typeface="Aptos"/>
+              </a:rPr>
+              <a:t>Speed Limit 30</a:t>
+            </a:r>
+          </a:p>
+        </p:txBody>
+      </p:sp>
+      <p:pic>
+        <p:nvPicPr>
+          <p:cNvPr id="20" name="Picture 19" descr="speedLimit35.png"/>
+          <p:cNvPicPr>
+            <a:picLocks noChangeAspect="1"/>
+          </p:cNvPicPr>
+          <p:nvPr/>
+        </p:nvPicPr>
+        <p:blipFill>
+          <a:blip r:embed="rId11"/>
+          <a:stretch>
+            <a:fillRect/>
+          </a:stretch>
+        </p:blipFill>
+        <p:spPr>
+          <a:xfrm>
+            <a:off x="1643634" y="4837176"/>
+            <a:ext cx="914400" cy="1143000"/>
+          </a:xfrm>
+          <a:prstGeom prst="rect">
+            <a:avLst/>
+          </a:prstGeom>
+        </p:spPr>
+      </p:pic>
+      <p:sp>
+        <p:nvSpPr>
+          <p:cNvPr id="21" name="TextBox 20"/>
+          <p:cNvSpPr txBox="1"/>
+          <p:nvPr/>
+        </p:nvSpPr>
+        <p:spPr>
+          <a:xfrm>
+            <a:off x="768095" y="6035040"/>
+            <a:ext cx="2665476" cy="292608"/>
+          </a:xfrm>
+          <a:prstGeom prst="rect">
+            <a:avLst/>
+          </a:prstGeom>
+          <a:noFill/>
+        </p:spPr>
+        <p:txBody>
+          <a:bodyPr wrap="square" lIns="18288" tIns="18288" rIns="18288" bIns="18288" anchor="t">
+            <a:noAutofit/>
+          </a:bodyPr>
+          <a:lstStyle/>
+          <a:p>
+            <a:pPr algn="ctr">
+              <a:spcAft>
+                <a:spcPts val="0"/>
+              </a:spcAft>
+            </a:pPr>
+            <a:r>
+              <a:rPr sz="1300" b="0">
+                <a:solidFill>
+                  <a:srgbClr val="000000"/>
+                </a:solidFill>
+                <a:latin typeface="Aptos"/>
+              </a:rPr>
+              <a:t>Speed Limit 35</a:t>
+            </a:r>
+          </a:p>
+        </p:txBody>
+      </p:sp>
+      <p:pic>
+        <p:nvPicPr>
+          <p:cNvPr id="22" name="Picture 21" descr="speedLimit45.png"/>
+          <p:cNvPicPr>
+            <a:picLocks noChangeAspect="1"/>
+          </p:cNvPicPr>
+          <p:nvPr/>
+        </p:nvPicPr>
+        <p:blipFill>
+          <a:blip r:embed="rId9"/>
+          <a:stretch>
+            <a:fillRect/>
+          </a:stretch>
+        </p:blipFill>
+        <p:spPr>
+          <a:xfrm>
+            <a:off x="4309110" y="4837176"/>
+            <a:ext cx="914400" cy="1143000"/>
+          </a:xfrm>
+          <a:prstGeom prst="rect">
+            <a:avLst/>
+          </a:prstGeom>
+        </p:spPr>
+      </p:pic>
+      <p:sp>
+        <p:nvSpPr>
+          <p:cNvPr id="23" name="TextBox 22"/>
+          <p:cNvSpPr txBox="1"/>
+          <p:nvPr/>
+        </p:nvSpPr>
+        <p:spPr>
+          <a:xfrm>
+            <a:off x="3433572" y="6035040"/>
+            <a:ext cx="2665476" cy="292608"/>
+          </a:xfrm>
+          <a:prstGeom prst="rect">
+            <a:avLst/>
+          </a:prstGeom>
+          <a:noFill/>
+        </p:spPr>
+        <p:txBody>
+          <a:bodyPr wrap="square" lIns="18288" tIns="18288" rIns="18288" bIns="18288" anchor="t">
+            <a:noAutofit/>
+          </a:bodyPr>
+          <a:lstStyle/>
+          <a:p>
+            <a:pPr algn="ctr">
+              <a:spcAft>
+                <a:spcPts val="0"/>
+              </a:spcAft>
+            </a:pPr>
+            <a:r>
+              <a:rPr sz="1300" b="0">
+                <a:solidFill>
+                  <a:srgbClr val="000000"/>
+                </a:solidFill>
+                <a:latin typeface="Aptos"/>
+              </a:rPr>
+              <a:t>Speed Limit 45</a:t>
+            </a:r>
+          </a:p>
+        </p:txBody>
+      </p:sp>
+      <p:pic>
+        <p:nvPicPr>
+          <p:cNvPr id="24" name="Picture 23" descr="speedLimit65.png"/>
+          <p:cNvPicPr>
+            <a:picLocks noChangeAspect="1"/>
+          </p:cNvPicPr>
+          <p:nvPr/>
+        </p:nvPicPr>
+        <p:blipFill>
+          <a:blip r:embed="rId6"/>
+          <a:stretch>
+            <a:fillRect/>
+          </a:stretch>
+        </p:blipFill>
+        <p:spPr>
+          <a:xfrm>
+            <a:off x="6974586" y="4837176"/>
+            <a:ext cx="914400" cy="1143000"/>
+          </a:xfrm>
+          <a:prstGeom prst="rect">
+            <a:avLst/>
+          </a:prstGeom>
+        </p:spPr>
+      </p:pic>
+      <p:sp>
+        <p:nvSpPr>
+          <p:cNvPr id="25" name="TextBox 24"/>
+          <p:cNvSpPr txBox="1"/>
+          <p:nvPr/>
+        </p:nvSpPr>
+        <p:spPr>
+          <a:xfrm>
+            <a:off x="6099048" y="6035040"/>
+            <a:ext cx="2665476" cy="292608"/>
+          </a:xfrm>
+          <a:prstGeom prst="rect">
+            <a:avLst/>
+          </a:prstGeom>
+          <a:noFill/>
+        </p:spPr>
+        <p:txBody>
+          <a:bodyPr wrap="square" lIns="18288" tIns="18288" rIns="18288" bIns="18288" anchor="t">
+            <a:noAutofit/>
+          </a:bodyPr>
+          <a:lstStyle/>
+          <a:p>
+            <a:pPr algn="ctr">
+              <a:spcAft>
+                <a:spcPts val="0"/>
+              </a:spcAft>
+            </a:pPr>
+            <a:r>
+              <a:rPr sz="1300" b="0">
+                <a:solidFill>
+                  <a:srgbClr val="000000"/>
+                </a:solidFill>
+                <a:latin typeface="Aptos"/>
+              </a:rPr>
+              <a:t>Speed Limit 65</a:t>
+            </a:r>
+          </a:p>
+        </p:txBody>
+      </p:sp>
+      <p:pic>
+        <p:nvPicPr>
+          <p:cNvPr id="26" name="Picture 25" descr="stop.png"/>
+          <p:cNvPicPr>
+            <a:picLocks noChangeAspect="1"/>
+          </p:cNvPicPr>
+          <p:nvPr/>
+        </p:nvPicPr>
+        <p:blipFill>
+          <a:blip r:embed="rId3"/>
+          <a:stretch>
+            <a:fillRect/>
+          </a:stretch>
+        </p:blipFill>
+        <p:spPr>
+          <a:xfrm>
+            <a:off x="9525762" y="4837176"/>
+            <a:ext cx="1143000" cy="1143000"/>
+          </a:xfrm>
+          <a:prstGeom prst="rect">
+            <a:avLst/>
+          </a:prstGeom>
+        </p:spPr>
+      </p:pic>
+      <p:sp>
+        <p:nvSpPr>
+          <p:cNvPr id="27" name="TextBox 26"/>
+          <p:cNvSpPr txBox="1"/>
+          <p:nvPr/>
+        </p:nvSpPr>
+        <p:spPr>
+          <a:xfrm>
+            <a:off x="8764524" y="6035040"/>
+            <a:ext cx="2665476" cy="292608"/>
+          </a:xfrm>
+          <a:prstGeom prst="rect">
+            <a:avLst/>
+          </a:prstGeom>
+          <a:noFill/>
+        </p:spPr>
+        <p:txBody>
+          <a:bodyPr wrap="square" lIns="18288" tIns="18288" rIns="18288" bIns="18288" anchor="t">
+            <a:noAutofit/>
+          </a:bodyPr>
+          <a:lstStyle/>
+          <a:p>
+            <a:pPr algn="ctr">
+              <a:spcAft>
+                <a:spcPts val="0"/>
+              </a:spcAft>
+            </a:pPr>
+            <a:r>
+              <a:rPr sz="1300" b="0">
+                <a:solidFill>
+                  <a:srgbClr val="000000"/>
+                </a:solidFill>
+                <a:latin typeface="Aptos"/>
+              </a:rPr>
+              <a:t>Stop</a:t>
             </a:r>
           </a:p>
         </p:txBody>
@@ -6641,7 +8429,7 @@
           <p:cNvPr id="2" name="Title 1">
             <a:extLst>
               <a:ext uri="{FF2B5EF4-FFF2-40B4-BE49-F238E27FC236}">
-                <a16:creationId xmlns:a16="http://schemas.microsoft.com/office/drawing/2014/main" id="{CA76FC7E-8FDD-2F27-67FA-E2218F392105}"/>
+                <a16:creationId xmlns:a16="http://schemas.microsoft.com/office/drawing/2014/main" id="{30AEBF44-7FD5-A705-80AC-D5F6B809A46E}"/>
               </a:ext>
             </a:extLst>
           </p:cNvPr>
@@ -6659,7 +8447,7 @@
           <a:p>
             <a:r>
               <a:rPr lang="en-US" dirty="0"/>
-              <a:t>Ethan Bishop</a:t>
+              <a:t>Alexis Perez</a:t>
             </a:r>
           </a:p>
         </p:txBody>
@@ -6669,7 +8457,7 @@
           <p:cNvPr id="3" name="Content Placeholder 2">
             <a:extLst>
               <a:ext uri="{FF2B5EF4-FFF2-40B4-BE49-F238E27FC236}">
-                <a16:creationId xmlns:a16="http://schemas.microsoft.com/office/drawing/2014/main" id="{D86F5DE5-5483-2694-9071-A7F6146E03D8}"/>
+                <a16:creationId xmlns:a16="http://schemas.microsoft.com/office/drawing/2014/main" id="{3F6BF837-7A7D-A6A3-574B-020760331940}"/>
               </a:ext>
             </a:extLst>
           </p:cNvPr>
@@ -6680,12 +8468,7 @@
             <p:ph idx="1"/>
           </p:nvPr>
         </p:nvSpPr>
-        <p:spPr>
-          <a:xfrm>
-            <a:off x="838200" y="1580298"/>
-            <a:ext cx="10515600" cy="4299294"/>
-          </a:xfrm>
-        </p:spPr>
+        <p:spPr/>
         <p:txBody>
           <a:bodyPr>
             <a:normAutofit lnSpcReduction="10000"/>
@@ -6693,72 +8476,69 @@
           <a:lstStyle/>
           <a:p>
             <a:r>
-              <a:rPr b="1" dirty="0"/>
+              <a:rPr lang="en-US" b="1" dirty="0"/>
               <a:t>Goals for the week</a:t>
             </a:r>
+          </a:p>
+          <a:p>
+            <a:pPr lvl="1"/>
+            <a:r>
+              <a:rPr lang="en-US" dirty="0"/>
+              <a:t>Continue OpenCV Course</a:t>
+            </a:r>
+          </a:p>
+          <a:p>
+            <a:pPr lvl="1"/>
+            <a:r>
+              <a:rPr lang="en-US" dirty="0"/>
+              <a:t>Test Line Sensors before integration</a:t>
+            </a:r>
+          </a:p>
+          <a:p>
+            <a:r>
+              <a:rPr lang="en-US" b="1" dirty="0"/>
+              <a:t>Progress for the week</a:t>
+            </a:r>
+          </a:p>
+          <a:p>
+            <a:pPr lvl="1"/>
+            <a:r>
+              <a:rPr lang="en-US" dirty="0"/>
+              <a:t>Completed OpenCV Course</a:t>
+            </a:r>
+            <a:endParaRPr lang="en-US" b="1" dirty="0"/>
+          </a:p>
+          <a:p>
+            <a:pPr lvl="1"/>
+            <a:r>
+              <a:rPr lang="en-US" dirty="0"/>
+              <a:t>Integrate Line Sensors with </a:t>
+            </a:r>
+            <a:r>
+              <a:rPr lang="en-US" dirty="0" err="1"/>
+              <a:t>RaspberryPi</a:t>
+            </a:r>
             <a:endParaRPr lang="en-US" dirty="0"/>
           </a:p>
           <a:p>
+            <a:r>
+              <a:rPr lang="en-US" b="1" dirty="0"/>
+              <a:t>Goals for next week</a:t>
+            </a:r>
+          </a:p>
+          <a:p>
             <a:pPr lvl="1"/>
             <a:r>
               <a:rPr lang="en-US" dirty="0"/>
-              <a:t>Research 3D printing </a:t>
+              <a:t>Implement OpenCV with </a:t>
             </a:r>
             <a:r>
               <a:rPr lang="en-US" dirty="0" err="1"/>
-              <a:t>stl</a:t>
+              <a:t>RaspberryPi</a:t>
             </a:r>
             <a:r>
               <a:rPr lang="en-US" dirty="0"/>
-              <a:t> files for the chassis</a:t>
-            </a:r>
-          </a:p>
-          <a:p>
-            <a:pPr lvl="1"/>
-            <a:r>
-              <a:rPr lang="en-US" dirty="0"/>
-              <a:t>Research possible ROS implementation</a:t>
-            </a:r>
-          </a:p>
-          <a:p>
-            <a:r>
-              <a:rPr b="1" dirty="0"/>
-              <a:t>Progress for the week</a:t>
-            </a:r>
-          </a:p>
-          <a:p>
-            <a:pPr lvl="1"/>
-            <a:r>
-              <a:rPr lang="en-US" dirty="0"/>
-              <a:t>Researched 3D printing </a:t>
-            </a:r>
-            <a:r>
-              <a:rPr lang="en-US" dirty="0" err="1"/>
-              <a:t>stl</a:t>
-            </a:r>
-            <a:r>
-              <a:rPr lang="en-US" dirty="0"/>
-              <a:t> files for the chassis</a:t>
-            </a:r>
-          </a:p>
-          <a:p>
-            <a:pPr lvl="1"/>
-            <a:r>
-              <a:rPr lang="en-US" dirty="0"/>
-              <a:t>Continue research on a possible ROS 2 implementation</a:t>
-            </a:r>
-          </a:p>
-          <a:p>
-            <a:r>
-              <a:rPr b="1" dirty="0"/>
-              <a:t>Goals for next week</a:t>
-            </a:r>
-          </a:p>
-          <a:p>
-            <a:pPr lvl="1"/>
-            <a:r>
-              <a:rPr lang="en-US" dirty="0"/>
-              <a:t>Continue research on a possible ROS 2 implementation</a:t>
+              <a:t> Camera</a:t>
             </a:r>
           </a:p>
           <a:p>
@@ -6771,11 +8551,7 @@
             <a:pPr lvl="1"/>
             <a:r>
               <a:rPr lang="en-US" dirty="0"/>
-              <a:t>6</a:t>
-            </a:r>
-            <a:r>
-              <a:rPr dirty="0"/>
-              <a:t> hours.</a:t>
+              <a:t>6 hours.</a:t>
             </a:r>
           </a:p>
         </p:txBody>
@@ -6789,6 +8565,1017 @@
 </file>
 
 <file path=ppt/slides/slide7.xml><?xml version="1.0" encoding="utf-8"?>
+<p:sld xmlns:a="http://schemas.openxmlformats.org/drawingml/2006/main" xmlns:p="http://schemas.openxmlformats.org/presentationml/2006/main" xmlns:r="http://schemas.openxmlformats.org/officeDocument/2006/relationships">
+  <p:cSld>
+    <p:spTree>
+      <p:nvGrpSpPr>
+        <p:cNvPr id="1" name=""/>
+        <p:cNvGrpSpPr/>
+        <p:nvPr/>
+      </p:nvGrpSpPr>
+      <p:grpSpPr/>
+      <p:sp useBgFill="1">
+        <p:nvSpPr>
+          <p:cNvPr id="42" name="Rectangle 41">
+            <a:extLst>
+              <a:ext uri="{FF2B5EF4-FFF2-40B4-BE49-F238E27FC236}">
+                <a16:creationId xmlns:a16="http://schemas.microsoft.com/office/drawing/2014/main" id="{394842B0-684D-44CC-B4BC-D13331CFD290}"/>
+              </a:ext>
+              <a:ext uri="{C183D7F6-B498-43B3-948B-1728B52AA6E4}">
+                <adec:decorative xmlns:adec="http://schemas.microsoft.com/office/drawing/2017/decorative" val="1"/>
+              </a:ext>
+            </a:extLst>
+          </p:cNvPr>
+          <p:cNvSpPr>
+            <a:spLocks noGrp="1" noRot="1" noChangeAspect="1" noMove="1" noResize="1" noEditPoints="1" noAdjustHandles="1" noChangeArrowheads="1" noChangeShapeType="1" noTextEdit="1"/>
+          </p:cNvSpPr>
+          <p:nvPr>
+            <p:extLst>
+              <p:ext uri="{386F3935-93C4-4BCD-93E2-E3B085C9AB24}">
+                <p16:designElem xmlns:p16="http://schemas.microsoft.com/office/powerpoint/2015/main" val="1"/>
+              </p:ext>
+            </p:extLst>
+          </p:nvPr>
+        </p:nvSpPr>
+        <p:spPr>
+          <a:xfrm>
+            <a:off x="0" y="0"/>
+            <a:ext cx="12188952" cy="6858000"/>
+          </a:xfrm>
+          <a:prstGeom prst="rect">
+            <a:avLst/>
+          </a:prstGeom>
+          <a:ln>
+            <a:noFill/>
+          </a:ln>
+        </p:spPr>
+        <p:style>
+          <a:lnRef idx="2">
+            <a:schemeClr val="accent1">
+              <a:shade val="50000"/>
+            </a:schemeClr>
+          </a:lnRef>
+          <a:fillRef idx="1">
+            <a:schemeClr val="accent1"/>
+          </a:fillRef>
+          <a:effectRef idx="0">
+            <a:schemeClr val="accent1"/>
+          </a:effectRef>
+          <a:fontRef idx="minor">
+            <a:schemeClr val="lt1"/>
+          </a:fontRef>
+        </p:style>
+        <p:txBody>
+          <a:bodyPr rtlCol="0" anchor="ctr"/>
+          <a:lstStyle/>
+          <a:p>
+            <a:pPr algn="ctr"/>
+            <a:endParaRPr lang="en-US"/>
+          </a:p>
+        </p:txBody>
+      </p:sp>
+      <p:sp>
+        <p:nvSpPr>
+          <p:cNvPr id="2" name="Title 1">
+            <a:extLst>
+              <a:ext uri="{FF2B5EF4-FFF2-40B4-BE49-F238E27FC236}">
+                <a16:creationId xmlns:a16="http://schemas.microsoft.com/office/drawing/2014/main" id="{4F231F43-1EFC-70EC-1329-C1A17E794D4D}"/>
+              </a:ext>
+            </a:extLst>
+          </p:cNvPr>
+          <p:cNvSpPr>
+            <a:spLocks noGrp="1"/>
+          </p:cNvSpPr>
+          <p:nvPr>
+            <p:ph type="title"/>
+          </p:nvPr>
+        </p:nvSpPr>
+        <p:spPr>
+          <a:xfrm>
+            <a:off x="640080" y="329184"/>
+            <a:ext cx="6894576" cy="1783080"/>
+          </a:xfrm>
+        </p:spPr>
+        <p:txBody>
+          <a:bodyPr anchor="b">
+            <a:normAutofit/>
+          </a:bodyPr>
+          <a:lstStyle/>
+          <a:p>
+            <a:r>
+              <a:rPr lang="en-US" sz="5000" dirty="0"/>
+              <a:t>Line Sensors </a:t>
+            </a:r>
+          </a:p>
+        </p:txBody>
+      </p:sp>
+      <p:sp>
+        <p:nvSpPr>
+          <p:cNvPr id="43" name="sketch line">
+            <a:extLst>
+              <a:ext uri="{FF2B5EF4-FFF2-40B4-BE49-F238E27FC236}">
+                <a16:creationId xmlns:a16="http://schemas.microsoft.com/office/drawing/2014/main" id="{4C2A3DC3-F495-4B99-9FF3-3FB30D63235E}"/>
+              </a:ext>
+              <a:ext uri="{C183D7F6-B498-43B3-948B-1728B52AA6E4}">
+                <adec:decorative xmlns:adec="http://schemas.microsoft.com/office/drawing/2017/decorative" val="1"/>
+              </a:ext>
+            </a:extLst>
+          </p:cNvPr>
+          <p:cNvSpPr>
+            <a:spLocks noGrp="1" noRot="1" noChangeAspect="1" noMove="1" noResize="1" noEditPoints="1" noAdjustHandles="1" noChangeArrowheads="1" noChangeShapeType="1" noTextEdit="1"/>
+          </p:cNvSpPr>
+          <p:nvPr>
+            <p:extLst>
+              <p:ext uri="{386F3935-93C4-4BCD-93E2-E3B085C9AB24}">
+                <p16:designElem xmlns:p16="http://schemas.microsoft.com/office/powerpoint/2015/main" val="1"/>
+              </p:ext>
+            </p:extLst>
+          </p:nvPr>
+        </p:nvSpPr>
+        <p:spPr>
+          <a:xfrm>
+            <a:off x="758952" y="2395728"/>
+            <a:ext cx="4243589" cy="18288"/>
+          </a:xfrm>
+          <a:custGeom>
+            <a:avLst/>
+            <a:gdLst>
+              <a:gd name="csX0" fmla="*/ 0 w 4243589"/>
+              <a:gd name="csY0" fmla="*/ 0 h 18288"/>
+              <a:gd name="csX1" fmla="*/ 478919 w 4243589"/>
+              <a:gd name="csY1" fmla="*/ 0 h 18288"/>
+              <a:gd name="csX2" fmla="*/ 957839 w 4243589"/>
+              <a:gd name="csY2" fmla="*/ 0 h 18288"/>
+              <a:gd name="csX3" fmla="*/ 1521630 w 4243589"/>
+              <a:gd name="csY3" fmla="*/ 0 h 18288"/>
+              <a:gd name="csX4" fmla="*/ 2212729 w 4243589"/>
+              <a:gd name="csY4" fmla="*/ 0 h 18288"/>
+              <a:gd name="csX5" fmla="*/ 2734084 w 4243589"/>
+              <a:gd name="csY5" fmla="*/ 0 h 18288"/>
+              <a:gd name="csX6" fmla="*/ 3255439 w 4243589"/>
+              <a:gd name="csY6" fmla="*/ 0 h 18288"/>
+              <a:gd name="csX7" fmla="*/ 4243589 w 4243589"/>
+              <a:gd name="csY7" fmla="*/ 0 h 18288"/>
+              <a:gd name="csX8" fmla="*/ 4243589 w 4243589"/>
+              <a:gd name="csY8" fmla="*/ 18288 h 18288"/>
+              <a:gd name="csX9" fmla="*/ 3594926 w 4243589"/>
+              <a:gd name="csY9" fmla="*/ 18288 h 18288"/>
+              <a:gd name="csX10" fmla="*/ 3073571 w 4243589"/>
+              <a:gd name="csY10" fmla="*/ 18288 h 18288"/>
+              <a:gd name="csX11" fmla="*/ 2552216 w 4243589"/>
+              <a:gd name="csY11" fmla="*/ 18288 h 18288"/>
+              <a:gd name="csX12" fmla="*/ 1903553 w 4243589"/>
+              <a:gd name="csY12" fmla="*/ 18288 h 18288"/>
+              <a:gd name="csX13" fmla="*/ 1212454 w 4243589"/>
+              <a:gd name="csY13" fmla="*/ 18288 h 18288"/>
+              <a:gd name="csX14" fmla="*/ 733535 w 4243589"/>
+              <a:gd name="csY14" fmla="*/ 18288 h 18288"/>
+              <a:gd name="csX15" fmla="*/ 0 w 4243589"/>
+              <a:gd name="csY15" fmla="*/ 18288 h 18288"/>
+              <a:gd name="csX16" fmla="*/ 0 w 4243589"/>
+              <a:gd name="csY16" fmla="*/ 0 h 18288"/>
+            </a:gdLst>
+            <a:ahLst/>
+            <a:cxnLst>
+              <a:cxn ang="0">
+                <a:pos x="csX0" y="csY0"/>
+              </a:cxn>
+              <a:cxn ang="0">
+                <a:pos x="csX1" y="csY1"/>
+              </a:cxn>
+              <a:cxn ang="0">
+                <a:pos x="csX2" y="csY2"/>
+              </a:cxn>
+              <a:cxn ang="0">
+                <a:pos x="csX3" y="csY3"/>
+              </a:cxn>
+              <a:cxn ang="0">
+                <a:pos x="csX4" y="csY4"/>
+              </a:cxn>
+              <a:cxn ang="0">
+                <a:pos x="csX5" y="csY5"/>
+              </a:cxn>
+              <a:cxn ang="0">
+                <a:pos x="csX6" y="csY6"/>
+              </a:cxn>
+              <a:cxn ang="0">
+                <a:pos x="csX7" y="csY7"/>
+              </a:cxn>
+              <a:cxn ang="0">
+                <a:pos x="csX8" y="csY8"/>
+              </a:cxn>
+              <a:cxn ang="0">
+                <a:pos x="csX9" y="csY9"/>
+              </a:cxn>
+              <a:cxn ang="0">
+                <a:pos x="csX10" y="csY10"/>
+              </a:cxn>
+              <a:cxn ang="0">
+                <a:pos x="csX11" y="csY11"/>
+              </a:cxn>
+              <a:cxn ang="0">
+                <a:pos x="csX12" y="csY12"/>
+              </a:cxn>
+              <a:cxn ang="0">
+                <a:pos x="csX13" y="csY13"/>
+              </a:cxn>
+              <a:cxn ang="0">
+                <a:pos x="csX14" y="csY14"/>
+              </a:cxn>
+              <a:cxn ang="0">
+                <a:pos x="csX15" y="csY15"/>
+              </a:cxn>
+              <a:cxn ang="0">
+                <a:pos x="csX16" y="csY16"/>
+              </a:cxn>
+            </a:cxnLst>
+            <a:rect l="l" t="t" r="r" b="b"/>
+            <a:pathLst>
+              <a:path w="4243589" h="18288" fill="none" extrusionOk="0">
+                <a:moveTo>
+                  <a:pt x="0" y="0"/>
+                </a:moveTo>
+                <a:cubicBezTo>
+                  <a:pt x="213395" y="-21006"/>
+                  <a:pt x="307421" y="-18116"/>
+                  <a:pt x="478919" y="0"/>
+                </a:cubicBezTo>
+                <a:cubicBezTo>
+                  <a:pt x="650417" y="18116"/>
+                  <a:pt x="831092" y="-21237"/>
+                  <a:pt x="957839" y="0"/>
+                </a:cubicBezTo>
+                <a:cubicBezTo>
+                  <a:pt x="1084586" y="21237"/>
+                  <a:pt x="1301682" y="25124"/>
+                  <a:pt x="1521630" y="0"/>
+                </a:cubicBezTo>
+                <a:cubicBezTo>
+                  <a:pt x="1741578" y="-25124"/>
+                  <a:pt x="1970269" y="-29139"/>
+                  <a:pt x="2212729" y="0"/>
+                </a:cubicBezTo>
+                <a:cubicBezTo>
+                  <a:pt x="2455189" y="29139"/>
+                  <a:pt x="2558847" y="-4796"/>
+                  <a:pt x="2734084" y="0"/>
+                </a:cubicBezTo>
+                <a:cubicBezTo>
+                  <a:pt x="2909321" y="4796"/>
+                  <a:pt x="3097217" y="-13409"/>
+                  <a:pt x="3255439" y="0"/>
+                </a:cubicBezTo>
+                <a:cubicBezTo>
+                  <a:pt x="3413662" y="13409"/>
+                  <a:pt x="3979999" y="-10121"/>
+                  <a:pt x="4243589" y="0"/>
+                </a:cubicBezTo>
+                <a:cubicBezTo>
+                  <a:pt x="4244484" y="8974"/>
+                  <a:pt x="4243043" y="9359"/>
+                  <a:pt x="4243589" y="18288"/>
+                </a:cubicBezTo>
+                <a:cubicBezTo>
+                  <a:pt x="4058777" y="31246"/>
+                  <a:pt x="3910348" y="3158"/>
+                  <a:pt x="3594926" y="18288"/>
+                </a:cubicBezTo>
+                <a:cubicBezTo>
+                  <a:pt x="3279504" y="33418"/>
+                  <a:pt x="3319955" y="-3977"/>
+                  <a:pt x="3073571" y="18288"/>
+                </a:cubicBezTo>
+                <a:cubicBezTo>
+                  <a:pt x="2827187" y="40553"/>
+                  <a:pt x="2767387" y="1863"/>
+                  <a:pt x="2552216" y="18288"/>
+                </a:cubicBezTo>
+                <a:cubicBezTo>
+                  <a:pt x="2337046" y="34713"/>
+                  <a:pt x="2181871" y="19527"/>
+                  <a:pt x="1903553" y="18288"/>
+                </a:cubicBezTo>
+                <a:cubicBezTo>
+                  <a:pt x="1625235" y="17049"/>
+                  <a:pt x="1557672" y="24174"/>
+                  <a:pt x="1212454" y="18288"/>
+                </a:cubicBezTo>
+                <a:cubicBezTo>
+                  <a:pt x="867236" y="12402"/>
+                  <a:pt x="874382" y="15627"/>
+                  <a:pt x="733535" y="18288"/>
+                </a:cubicBezTo>
+                <a:cubicBezTo>
+                  <a:pt x="592688" y="20949"/>
+                  <a:pt x="183477" y="14753"/>
+                  <a:pt x="0" y="18288"/>
+                </a:cubicBezTo>
+                <a:cubicBezTo>
+                  <a:pt x="-229" y="14222"/>
+                  <a:pt x="509" y="5816"/>
+                  <a:pt x="0" y="0"/>
+                </a:cubicBezTo>
+                <a:close/>
+              </a:path>
+              <a:path w="4243589" h="18288" stroke="0" extrusionOk="0">
+                <a:moveTo>
+                  <a:pt x="0" y="0"/>
+                </a:moveTo>
+                <a:cubicBezTo>
+                  <a:pt x="143690" y="16630"/>
+                  <a:pt x="266667" y="14847"/>
+                  <a:pt x="521355" y="0"/>
+                </a:cubicBezTo>
+                <a:cubicBezTo>
+                  <a:pt x="776043" y="-14847"/>
+                  <a:pt x="814491" y="-17363"/>
+                  <a:pt x="1000275" y="0"/>
+                </a:cubicBezTo>
+                <a:cubicBezTo>
+                  <a:pt x="1186059" y="17363"/>
+                  <a:pt x="1352504" y="-23507"/>
+                  <a:pt x="1521630" y="0"/>
+                </a:cubicBezTo>
+                <a:cubicBezTo>
+                  <a:pt x="1690756" y="23507"/>
+                  <a:pt x="1889525" y="5871"/>
+                  <a:pt x="2127857" y="0"/>
+                </a:cubicBezTo>
+                <a:cubicBezTo>
+                  <a:pt x="2366189" y="-5871"/>
+                  <a:pt x="2620628" y="-27997"/>
+                  <a:pt x="2776520" y="0"/>
+                </a:cubicBezTo>
+                <a:cubicBezTo>
+                  <a:pt x="2932412" y="27997"/>
+                  <a:pt x="3131683" y="-25073"/>
+                  <a:pt x="3467618" y="0"/>
+                </a:cubicBezTo>
+                <a:cubicBezTo>
+                  <a:pt x="3803553" y="25073"/>
+                  <a:pt x="4017371" y="3071"/>
+                  <a:pt x="4243589" y="0"/>
+                </a:cubicBezTo>
+                <a:cubicBezTo>
+                  <a:pt x="4243134" y="6162"/>
+                  <a:pt x="4243492" y="11775"/>
+                  <a:pt x="4243589" y="18288"/>
+                </a:cubicBezTo>
+                <a:cubicBezTo>
+                  <a:pt x="4017834" y="-5779"/>
+                  <a:pt x="3834586" y="13376"/>
+                  <a:pt x="3594926" y="18288"/>
+                </a:cubicBezTo>
+                <a:cubicBezTo>
+                  <a:pt x="3355266" y="23200"/>
+                  <a:pt x="3204179" y="2869"/>
+                  <a:pt x="2903827" y="18288"/>
+                </a:cubicBezTo>
+                <a:cubicBezTo>
+                  <a:pt x="2603475" y="33707"/>
+                  <a:pt x="2526187" y="46187"/>
+                  <a:pt x="2212729" y="18288"/>
+                </a:cubicBezTo>
+                <a:cubicBezTo>
+                  <a:pt x="1899271" y="-9611"/>
+                  <a:pt x="1966289" y="29692"/>
+                  <a:pt x="1733809" y="18288"/>
+                </a:cubicBezTo>
+                <a:cubicBezTo>
+                  <a:pt x="1501329" y="6884"/>
+                  <a:pt x="1343612" y="12492"/>
+                  <a:pt x="1085146" y="18288"/>
+                </a:cubicBezTo>
+                <a:cubicBezTo>
+                  <a:pt x="826680" y="24084"/>
+                  <a:pt x="778184" y="35607"/>
+                  <a:pt x="521355" y="18288"/>
+                </a:cubicBezTo>
+                <a:cubicBezTo>
+                  <a:pt x="264526" y="969"/>
+                  <a:pt x="120277" y="4268"/>
+                  <a:pt x="0" y="18288"/>
+                </a:cubicBezTo>
+                <a:cubicBezTo>
+                  <a:pt x="766" y="10800"/>
+                  <a:pt x="-457" y="8180"/>
+                  <a:pt x="0" y="0"/>
+                </a:cubicBezTo>
+                <a:close/>
+              </a:path>
+            </a:pathLst>
+          </a:custGeom>
+          <a:solidFill>
+            <a:schemeClr val="accent2"/>
+          </a:solidFill>
+          <a:ln w="41275" cap="rnd">
+            <a:solidFill>
+              <a:schemeClr val="accent2"/>
+            </a:solidFill>
+            <a:round/>
+            <a:extLst>
+              <a:ext uri="{C807C97D-BFC1-408E-A445-0C87EB9F89A2}">
+                <ask:lineSketchStyleProps xmlns:ask="http://schemas.microsoft.com/office/drawing/2018/sketchyshapes" sd="2727557108">
+                  <a:prstGeom prst="rect">
+                    <a:avLst/>
+                  </a:prstGeom>
+                  <ask:type>
+                    <ask:lineSketchFreehand/>
+                  </ask:type>
+                </ask:lineSketchStyleProps>
+              </a:ext>
+            </a:extLst>
+          </a:ln>
+        </p:spPr>
+        <p:style>
+          <a:lnRef idx="2">
+            <a:schemeClr val="accent1">
+              <a:shade val="50000"/>
+            </a:schemeClr>
+          </a:lnRef>
+          <a:fillRef idx="1">
+            <a:schemeClr val="accent1"/>
+          </a:fillRef>
+          <a:effectRef idx="0">
+            <a:schemeClr val="accent1"/>
+          </a:effectRef>
+          <a:fontRef idx="minor">
+            <a:schemeClr val="lt1"/>
+          </a:fontRef>
+        </p:style>
+        <p:txBody>
+          <a:bodyPr rtlCol="0" anchor="ctr"/>
+          <a:lstStyle/>
+          <a:p>
+            <a:pPr algn="ctr"/>
+            <a:endParaRPr lang="en-US"/>
+          </a:p>
+        </p:txBody>
+      </p:sp>
+      <p:sp>
+        <p:nvSpPr>
+          <p:cNvPr id="33" name="Content Placeholder 17">
+            <a:extLst>
+              <a:ext uri="{FF2B5EF4-FFF2-40B4-BE49-F238E27FC236}">
+                <a16:creationId xmlns:a16="http://schemas.microsoft.com/office/drawing/2014/main" id="{AC179724-C167-9754-FC67-A55A460FC63E}"/>
+              </a:ext>
+            </a:extLst>
+          </p:cNvPr>
+          <p:cNvSpPr>
+            <a:spLocks noGrp="1"/>
+          </p:cNvSpPr>
+          <p:nvPr>
+            <p:ph idx="1"/>
+          </p:nvPr>
+        </p:nvSpPr>
+        <p:spPr>
+          <a:xfrm>
+            <a:off x="640080" y="2706624"/>
+            <a:ext cx="6894576" cy="3483864"/>
+          </a:xfrm>
+        </p:spPr>
+        <p:txBody>
+          <a:bodyPr>
+            <a:normAutofit/>
+          </a:bodyPr>
+          <a:lstStyle/>
+          <a:p>
+            <a:r>
+              <a:rPr lang="en-US" sz="2400" dirty="0"/>
+              <a:t>TCS34725 RGB Color Sensor (Top)</a:t>
+            </a:r>
+            <a:endParaRPr lang="en-US" sz="1800" dirty="0"/>
+          </a:p>
+          <a:p>
+            <a:r>
+              <a:rPr lang="en-US" sz="2400" dirty="0"/>
+              <a:t>TCRT5000 IR Line Sensor (Bottom)</a:t>
+            </a:r>
+          </a:p>
+          <a:p>
+            <a:endParaRPr lang="en-US" sz="2400" dirty="0"/>
+          </a:p>
+        </p:txBody>
+      </p:sp>
+      <p:pic>
+        <p:nvPicPr>
+          <p:cNvPr id="12" name="Picture 11">
+            <a:extLst>
+              <a:ext uri="{FF2B5EF4-FFF2-40B4-BE49-F238E27FC236}">
+                <a16:creationId xmlns:a16="http://schemas.microsoft.com/office/drawing/2014/main" id="{70BE8611-6E4D-8CA7-DE11-9707FDEC2A5E}"/>
+              </a:ext>
+            </a:extLst>
+          </p:cNvPr>
+          <p:cNvPicPr>
+            <a:picLocks noChangeAspect="1"/>
+          </p:cNvPicPr>
+          <p:nvPr/>
+        </p:nvPicPr>
+        <p:blipFill>
+          <a:blip r:embed="rId3"/>
+          <a:srcRect t="3958" r="-4" b="-4"/>
+          <a:stretch>
+            <a:fillRect/>
+          </a:stretch>
+        </p:blipFill>
+        <p:spPr>
+          <a:xfrm>
+            <a:off x="8156454" y="-7"/>
+            <a:ext cx="4035547" cy="4178808"/>
+          </a:xfrm>
+          <a:custGeom>
+            <a:avLst/>
+            <a:gdLst/>
+            <a:ahLst/>
+            <a:cxnLst/>
+            <a:rect l="l" t="t" r="r" b="b"/>
+            <a:pathLst>
+              <a:path w="4035547" h="4178808">
+                <a:moveTo>
+                  <a:pt x="14988" y="0"/>
+                </a:moveTo>
+                <a:lnTo>
+                  <a:pt x="4035547" y="0"/>
+                </a:lnTo>
+                <a:lnTo>
+                  <a:pt x="4035547" y="4161794"/>
+                </a:lnTo>
+                <a:lnTo>
+                  <a:pt x="3918602" y="4164199"/>
+                </a:lnTo>
+                <a:cubicBezTo>
+                  <a:pt x="3673497" y="4178956"/>
+                  <a:pt x="3428120" y="4172295"/>
+                  <a:pt x="3183014" y="4175560"/>
+                </a:cubicBezTo>
+                <a:cubicBezTo>
+                  <a:pt x="2855121" y="4180001"/>
+                  <a:pt x="2527499" y="4168639"/>
+                  <a:pt x="2199742" y="4167595"/>
+                </a:cubicBezTo>
+                <a:cubicBezTo>
+                  <a:pt x="2132562" y="4167334"/>
+                  <a:pt x="2065110" y="4170729"/>
+                  <a:pt x="1998202" y="4175952"/>
+                </a:cubicBezTo>
+                <a:cubicBezTo>
+                  <a:pt x="1905507" y="4183005"/>
+                  <a:pt x="1814033" y="4174124"/>
+                  <a:pt x="1722153" y="4165766"/>
+                </a:cubicBezTo>
+                <a:cubicBezTo>
+                  <a:pt x="1611407" y="4155711"/>
+                  <a:pt x="1500933" y="4164591"/>
+                  <a:pt x="1390867" y="4176214"/>
+                </a:cubicBezTo>
+                <a:lnTo>
+                  <a:pt x="1348076" y="4178808"/>
+                </a:lnTo>
+                <a:lnTo>
+                  <a:pt x="597587" y="4178808"/>
+                </a:lnTo>
+                <a:lnTo>
+                  <a:pt x="507890" y="4175773"/>
+                </a:lnTo>
+                <a:cubicBezTo>
+                  <a:pt x="403218" y="4174810"/>
+                  <a:pt x="298546" y="4175691"/>
+                  <a:pt x="193840" y="4176214"/>
+                </a:cubicBezTo>
+                <a:lnTo>
+                  <a:pt x="2757" y="4175742"/>
+                </a:lnTo>
+                <a:lnTo>
+                  <a:pt x="2810" y="4034870"/>
+                </a:lnTo>
+                <a:cubicBezTo>
+                  <a:pt x="5629" y="3979851"/>
+                  <a:pt x="10539" y="3924896"/>
+                  <a:pt x="15416" y="3870068"/>
+                </a:cubicBezTo>
+                <a:cubicBezTo>
+                  <a:pt x="23018" y="3799731"/>
+                  <a:pt x="25045" y="3728899"/>
+                  <a:pt x="21498" y="3658244"/>
+                </a:cubicBezTo>
+                <a:cubicBezTo>
+                  <a:pt x="17063" y="3602147"/>
+                  <a:pt x="10095" y="3546050"/>
+                  <a:pt x="8828" y="3489953"/>
+                </a:cubicBezTo>
+                <a:cubicBezTo>
+                  <a:pt x="6548" y="3389688"/>
+                  <a:pt x="7434" y="3289424"/>
+                  <a:pt x="13262" y="3189160"/>
+                </a:cubicBezTo>
+                <a:cubicBezTo>
+                  <a:pt x="16176" y="3138901"/>
+                  <a:pt x="20864" y="3089150"/>
+                  <a:pt x="22891" y="3038510"/>
+                </a:cubicBezTo>
+                <a:cubicBezTo>
+                  <a:pt x="24918" y="2987870"/>
+                  <a:pt x="28973" y="2936723"/>
+                  <a:pt x="17444" y="2887098"/>
+                </a:cubicBezTo>
+                <a:cubicBezTo>
+                  <a:pt x="-2068" y="2802699"/>
+                  <a:pt x="12249" y="2718680"/>
+                  <a:pt x="16430" y="2634534"/>
+                </a:cubicBezTo>
+                <a:cubicBezTo>
+                  <a:pt x="18964" y="2582244"/>
+                  <a:pt x="34168" y="2528685"/>
+                  <a:pt x="20738" y="2477919"/>
+                </a:cubicBezTo>
+                <a:cubicBezTo>
+                  <a:pt x="-421" y="2398342"/>
+                  <a:pt x="13389" y="2320415"/>
+                  <a:pt x="20738" y="2242107"/>
+                </a:cubicBezTo>
+                <a:cubicBezTo>
+                  <a:pt x="29213" y="2168001"/>
+                  <a:pt x="27718" y="2093082"/>
+                  <a:pt x="16303" y="2019369"/>
+                </a:cubicBezTo>
+                <a:cubicBezTo>
+                  <a:pt x="1986" y="1946239"/>
+                  <a:pt x="1986" y="1871028"/>
+                  <a:pt x="16303" y="1797899"/>
+                </a:cubicBezTo>
+                <a:cubicBezTo>
+                  <a:pt x="28162" y="1737537"/>
+                  <a:pt x="29530" y="1675589"/>
+                  <a:pt x="20357" y="1614758"/>
+                </a:cubicBezTo>
+                <a:cubicBezTo>
+                  <a:pt x="14149" y="1571226"/>
+                  <a:pt x="3000" y="1527947"/>
+                  <a:pt x="1480" y="1484415"/>
+                </a:cubicBezTo>
+                <a:cubicBezTo>
+                  <a:pt x="-1662" y="1393377"/>
+                  <a:pt x="200" y="1302238"/>
+                  <a:pt x="7055" y="1211417"/>
+                </a:cubicBezTo>
+                <a:cubicBezTo>
+                  <a:pt x="15036" y="1107980"/>
+                  <a:pt x="30366" y="1004923"/>
+                  <a:pt x="19724" y="900725"/>
+                </a:cubicBezTo>
+                <a:cubicBezTo>
+                  <a:pt x="16050" y="864934"/>
+                  <a:pt x="8575" y="829270"/>
+                  <a:pt x="7815" y="793353"/>
+                </a:cubicBezTo>
+                <a:cubicBezTo>
+                  <a:pt x="6168" y="726087"/>
+                  <a:pt x="5407" y="659710"/>
+                  <a:pt x="9208" y="590286"/>
+                </a:cubicBezTo>
+                <a:cubicBezTo>
+                  <a:pt x="13009" y="520863"/>
+                  <a:pt x="27452" y="450424"/>
+                  <a:pt x="17697" y="382270"/>
+                </a:cubicBezTo>
+                <a:cubicBezTo>
+                  <a:pt x="7941" y="314115"/>
+                  <a:pt x="14276" y="247103"/>
+                  <a:pt x="20611" y="180218"/>
+                </a:cubicBezTo>
+                <a:cubicBezTo>
+                  <a:pt x="23652" y="148426"/>
+                  <a:pt x="25711" y="116982"/>
+                  <a:pt x="25156" y="85665"/>
+                </a:cubicBezTo>
+                <a:close/>
+              </a:path>
+            </a:pathLst>
+          </a:custGeom>
+        </p:spPr>
+      </p:pic>
+      <p:pic>
+        <p:nvPicPr>
+          <p:cNvPr id="9" name="Content Placeholder 8">
+            <a:extLst>
+              <a:ext uri="{FF2B5EF4-FFF2-40B4-BE49-F238E27FC236}">
+                <a16:creationId xmlns:a16="http://schemas.microsoft.com/office/drawing/2014/main" id="{0B340DF5-82FB-796D-5F0C-CA58BC0ACBDC}"/>
+              </a:ext>
+            </a:extLst>
+          </p:cNvPr>
+          <p:cNvPicPr>
+            <a:picLocks noChangeAspect="1"/>
+          </p:cNvPicPr>
+          <p:nvPr/>
+        </p:nvPicPr>
+        <p:blipFill>
+          <a:blip r:embed="rId2"/>
+          <a:srcRect t="16050" r="-1" b="9305"/>
+          <a:stretch>
+            <a:fillRect/>
+          </a:stretch>
+        </p:blipFill>
+        <p:spPr>
+          <a:xfrm>
+            <a:off x="8174736" y="4036195"/>
+            <a:ext cx="4047645" cy="2590808"/>
+          </a:xfrm>
+          <a:custGeom>
+            <a:avLst/>
+            <a:gdLst/>
+            <a:ahLst/>
+            <a:cxnLst/>
+            <a:rect l="l" t="t" r="r" b="b"/>
+            <a:pathLst>
+              <a:path w="4047645" h="2495811">
+                <a:moveTo>
+                  <a:pt x="2441891" y="4"/>
+                </a:moveTo>
+                <a:cubicBezTo>
+                  <a:pt x="2489381" y="-78"/>
+                  <a:pt x="2536882" y="1163"/>
+                  <a:pt x="2584383" y="4428"/>
+                </a:cubicBezTo>
+                <a:cubicBezTo>
+                  <a:pt x="2744314" y="17813"/>
+                  <a:pt x="2904989" y="21079"/>
+                  <a:pt x="3065367" y="14222"/>
+                </a:cubicBezTo>
+                <a:cubicBezTo>
+                  <a:pt x="3194244" y="5694"/>
+                  <a:pt x="3323514" y="4206"/>
+                  <a:pt x="3452568" y="9782"/>
+                </a:cubicBezTo>
+                <a:cubicBezTo>
+                  <a:pt x="3572813" y="16442"/>
+                  <a:pt x="3693059" y="23233"/>
+                  <a:pt x="3813712" y="19315"/>
+                </a:cubicBezTo>
+                <a:cubicBezTo>
+                  <a:pt x="3861755" y="17748"/>
+                  <a:pt x="3909121" y="15789"/>
+                  <a:pt x="3956758" y="13177"/>
+                </a:cubicBezTo>
+                <a:lnTo>
+                  <a:pt x="4047645" y="9696"/>
+                </a:lnTo>
+                <a:lnTo>
+                  <a:pt x="4047645" y="2495811"/>
+                </a:lnTo>
+                <a:lnTo>
+                  <a:pt x="28177" y="2495811"/>
+                </a:lnTo>
+                <a:lnTo>
+                  <a:pt x="28782" y="2485852"/>
+                </a:lnTo>
+                <a:cubicBezTo>
+                  <a:pt x="31911" y="2365446"/>
+                  <a:pt x="35027" y="2245002"/>
+                  <a:pt x="38157" y="2124521"/>
+                </a:cubicBezTo>
+                <a:cubicBezTo>
+                  <a:pt x="38284" y="2119444"/>
+                  <a:pt x="39171" y="2114494"/>
+                  <a:pt x="39171" y="2109417"/>
+                </a:cubicBezTo>
+                <a:cubicBezTo>
+                  <a:pt x="48166" y="1995573"/>
+                  <a:pt x="53107" y="1881729"/>
+                  <a:pt x="18899" y="1770550"/>
+                </a:cubicBezTo>
+                <a:cubicBezTo>
+                  <a:pt x="15871" y="1760104"/>
+                  <a:pt x="14262" y="1749304"/>
+                  <a:pt x="14084" y="1738440"/>
+                </a:cubicBezTo>
+                <a:cubicBezTo>
+                  <a:pt x="12413" y="1641514"/>
+                  <a:pt x="16644" y="1544587"/>
+                  <a:pt x="26754" y="1448181"/>
+                </a:cubicBezTo>
+                <a:cubicBezTo>
+                  <a:pt x="31949" y="1389038"/>
+                  <a:pt x="26754" y="1329006"/>
+                  <a:pt x="43478" y="1270498"/>
+                </a:cubicBezTo>
+                <a:cubicBezTo>
+                  <a:pt x="50864" y="1241421"/>
+                  <a:pt x="55109" y="1211634"/>
+                  <a:pt x="56147" y="1181656"/>
+                </a:cubicBezTo>
+                <a:cubicBezTo>
+                  <a:pt x="59948" y="1109060"/>
+                  <a:pt x="38537" y="1040779"/>
+                  <a:pt x="18139" y="972244"/>
+                </a:cubicBezTo>
+                <a:cubicBezTo>
+                  <a:pt x="7370" y="935945"/>
+                  <a:pt x="-5426" y="898886"/>
+                  <a:pt x="2429" y="860811"/>
+                </a:cubicBezTo>
+                <a:cubicBezTo>
+                  <a:pt x="16707" y="802251"/>
+                  <a:pt x="24854" y="742359"/>
+                  <a:pt x="26754" y="682112"/>
+                </a:cubicBezTo>
+                <a:cubicBezTo>
+                  <a:pt x="26754" y="639468"/>
+                  <a:pt x="16365" y="597712"/>
+                  <a:pt x="20039" y="555195"/>
+                </a:cubicBezTo>
+                <a:cubicBezTo>
+                  <a:pt x="28211" y="472712"/>
+                  <a:pt x="30238" y="389734"/>
+                  <a:pt x="26121" y="306946"/>
+                </a:cubicBezTo>
+                <a:cubicBezTo>
+                  <a:pt x="26095" y="273846"/>
+                  <a:pt x="29846" y="240848"/>
+                  <a:pt x="37270" y="208585"/>
+                </a:cubicBezTo>
+                <a:cubicBezTo>
+                  <a:pt x="46506" y="151651"/>
+                  <a:pt x="48419" y="93777"/>
+                  <a:pt x="42971" y="36360"/>
+                </a:cubicBezTo>
+                <a:lnTo>
+                  <a:pt x="38853" y="8429"/>
+                </a:lnTo>
+                <a:lnTo>
+                  <a:pt x="56649" y="7824"/>
+                </a:lnTo>
+                <a:cubicBezTo>
+                  <a:pt x="210497" y="-156"/>
+                  <a:pt x="364754" y="3162"/>
+                  <a:pt x="518087" y="17748"/>
+                </a:cubicBezTo>
+                <a:cubicBezTo>
+                  <a:pt x="626567" y="25440"/>
+                  <a:pt x="735534" y="24213"/>
+                  <a:pt x="843809" y="14092"/>
+                </a:cubicBezTo>
+                <a:cubicBezTo>
+                  <a:pt x="1042499" y="-1711"/>
+                  <a:pt x="1240782" y="10958"/>
+                  <a:pt x="1439065" y="21666"/>
+                </a:cubicBezTo>
+                <a:cubicBezTo>
+                  <a:pt x="1631105" y="32113"/>
+                  <a:pt x="1823010" y="24408"/>
+                  <a:pt x="2015050" y="17487"/>
+                </a:cubicBezTo>
+                <a:cubicBezTo>
+                  <a:pt x="2157045" y="12394"/>
+                  <a:pt x="2299420" y="249"/>
+                  <a:pt x="2441891" y="4"/>
+                </a:cubicBezTo>
+                <a:close/>
+              </a:path>
+            </a:pathLst>
+          </a:custGeom>
+        </p:spPr>
+      </p:pic>
+    </p:spTree>
+  </p:cSld>
+  <p:clrMapOvr>
+    <a:masterClrMapping/>
+  </p:clrMapOvr>
+</p:sld>
+</file>
+
+<file path=ppt/slides/slide8.xml><?xml version="1.0" encoding="utf-8"?>
+<p:sld xmlns:a="http://schemas.openxmlformats.org/drawingml/2006/main" xmlns:p="http://schemas.openxmlformats.org/presentationml/2006/main" xmlns:r="http://schemas.openxmlformats.org/officeDocument/2006/relationships">
+  <p:cSld>
+    <p:spTree>
+      <p:nvGrpSpPr>
+        <p:cNvPr id="1" name=""/>
+        <p:cNvGrpSpPr/>
+        <p:nvPr/>
+      </p:nvGrpSpPr>
+      <p:grpSpPr/>
+      <p:sp>
+        <p:nvSpPr>
+          <p:cNvPr id="2" name="Title 1">
+            <a:extLst>
+              <a:ext uri="{FF2B5EF4-FFF2-40B4-BE49-F238E27FC236}">
+                <a16:creationId xmlns:a16="http://schemas.microsoft.com/office/drawing/2014/main" id="{CA76FC7E-8FDD-2F27-67FA-E2218F392105}"/>
+              </a:ext>
+            </a:extLst>
+          </p:cNvPr>
+          <p:cNvSpPr>
+            <a:spLocks noGrp="1"/>
+          </p:cNvSpPr>
+          <p:nvPr>
+            <p:ph type="title"/>
+          </p:nvPr>
+        </p:nvSpPr>
+        <p:spPr/>
+        <p:txBody>
+          <a:bodyPr/>
+          <a:lstStyle/>
+          <a:p>
+            <a:r>
+              <a:rPr lang="en-US" dirty="0"/>
+              <a:t>Ethan Bishop</a:t>
+            </a:r>
+          </a:p>
+        </p:txBody>
+      </p:sp>
+      <p:sp>
+        <p:nvSpPr>
+          <p:cNvPr id="3" name="Content Placeholder 2">
+            <a:extLst>
+              <a:ext uri="{FF2B5EF4-FFF2-40B4-BE49-F238E27FC236}">
+                <a16:creationId xmlns:a16="http://schemas.microsoft.com/office/drawing/2014/main" id="{D86F5DE5-5483-2694-9071-A7F6146E03D8}"/>
+              </a:ext>
+            </a:extLst>
+          </p:cNvPr>
+          <p:cNvSpPr>
+            <a:spLocks noGrp="1"/>
+          </p:cNvSpPr>
+          <p:nvPr>
+            <p:ph idx="1"/>
+          </p:nvPr>
+        </p:nvSpPr>
+        <p:spPr>
+          <a:xfrm>
+            <a:off x="838200" y="1580298"/>
+            <a:ext cx="10515600" cy="4299294"/>
+          </a:xfrm>
+        </p:spPr>
+        <p:txBody>
+          <a:bodyPr>
+            <a:normAutofit/>
+          </a:bodyPr>
+          <a:lstStyle/>
+          <a:p>
+            <a:r>
+              <a:rPr b="1" dirty="0"/>
+              <a:t>Goals for the week</a:t>
+            </a:r>
+            <a:endParaRPr lang="en-US" dirty="0"/>
+          </a:p>
+          <a:p>
+            <a:pPr lvl="1"/>
+            <a:r>
+              <a:rPr lang="en-US" dirty="0"/>
+              <a:t>Research possible ROS implementation</a:t>
+            </a:r>
+          </a:p>
+          <a:p>
+            <a:r>
+              <a:rPr b="1" dirty="0"/>
+              <a:t>Progress for the week</a:t>
+            </a:r>
+          </a:p>
+          <a:p>
+            <a:pPr lvl="1"/>
+            <a:r>
+              <a:rPr lang="en-US" dirty="0"/>
+              <a:t>Continue research on a possible ROS 2 implementation</a:t>
+            </a:r>
+          </a:p>
+          <a:p>
+            <a:r>
+              <a:rPr b="1" dirty="0"/>
+              <a:t>Goals for next week</a:t>
+            </a:r>
+          </a:p>
+          <a:p>
+            <a:pPr lvl="1"/>
+            <a:r>
+              <a:rPr lang="en-US" dirty="0"/>
+              <a:t>Continue research on a possible ROS 2 implementation</a:t>
+            </a:r>
+          </a:p>
+          <a:p>
+            <a:r>
+              <a:rPr lang="en-US" b="1" dirty="0"/>
+              <a:t>Hours spent on progress</a:t>
+            </a:r>
+          </a:p>
+          <a:p>
+            <a:pPr lvl="1"/>
+            <a:r>
+              <a:rPr lang="en-US" dirty="0"/>
+              <a:t>6</a:t>
+            </a:r>
+            <a:r>
+              <a:rPr dirty="0"/>
+              <a:t> hours.</a:t>
+            </a:r>
+          </a:p>
+        </p:txBody>
+      </p:sp>
+    </p:spTree>
+  </p:cSld>
+  <p:clrMapOvr>
+    <a:masterClrMapping/>
+  </p:clrMapOvr>
+</p:sld>
+</file>
+
+<file path=ppt/slides/slide9.xml><?xml version="1.0" encoding="utf-8"?>
 <p:sld xmlns:a="http://schemas.openxmlformats.org/drawingml/2006/main" xmlns:p="http://schemas.openxmlformats.org/presentationml/2006/main" xmlns:r="http://schemas.openxmlformats.org/officeDocument/2006/relationships">
   <p:cSld>
     <p:spTree>
@@ -7174,7 +9961,7 @@
         </p:spPr>
         <p:txBody>
           <a:bodyPr>
-            <a:normAutofit fontScale="85000" lnSpcReduction="20000"/>
+            <a:normAutofit fontScale="70000" lnSpcReduction="20000"/>
           </a:bodyPr>
           <a:lstStyle/>
           <a:p>
@@ -7198,25 +9985,55 @@
           <a:p>
             <a:r>
               <a:rPr lang="en-US" sz="2200" dirty="0"/>
-              <a:t>Camera node: Streams live 640×480 video to the rest of the system</a:t>
+              <a:t>Camera node: Streams live video from the Pi Camera Module 3, with autofocus</a:t>
             </a:r>
           </a:p>
           <a:p>
             <a:r>
               <a:rPr lang="en-US" sz="2200" dirty="0"/>
-              <a:t>Sign detector node: Runs our recognition model and reports each sign's type, confidence and position</a:t>
+              <a:t>Sign detector node: Runs the vision model on each frame and reports every sign’s type, confidence and position</a:t>
             </a:r>
           </a:p>
           <a:p>
             <a:r>
               <a:rPr lang="en-US" sz="2200" dirty="0"/>
-              <a:t>Behavior node: A state machine that turns signs into driving decisions (stop, speed limit, turn)</a:t>
+              <a:t>IMU node: Reports the car’s turning and motion, and detects when it’s stuck</a:t>
             </a:r>
           </a:p>
           <a:p>
             <a:r>
               <a:rPr lang="en-US" sz="2200" dirty="0"/>
-              <a:t>Motor driver node: Converts speed and steering commands into motor signals on the HAT over I2C</a:t>
+              <a:t>Behavior node: A state machine that combines sign detections and IMU data into driving decisions (stop, slow down, turn)</a:t>
+            </a:r>
+          </a:p>
+          <a:p>
+            <a:r>
+              <a:rPr lang="en-US" sz="2200" dirty="0"/>
+              <a:t>Motor driver node: Turns speed and steering commands into wheel power through the </a:t>
+            </a:r>
+            <a:r>
+              <a:rPr lang="en-US" sz="2200" dirty="0" err="1"/>
+              <a:t>Waveshare</a:t>
+            </a:r>
+            <a:r>
+              <a:rPr lang="en-US" sz="2200" dirty="0"/>
+              <a:t> Motor Driver HAT, and stops the motors automatically if commands stop arriving</a:t>
+            </a:r>
+          </a:p>
+          <a:p>
+            <a:r>
+              <a:rPr lang="en-US" sz="2200" dirty="0"/>
+              <a:t>LCD node: Shows the car’s current state and the last sign it detected</a:t>
+            </a:r>
+          </a:p>
+          <a:p>
+            <a:r>
+              <a:rPr lang="en-US" sz="2200" dirty="0" err="1"/>
+              <a:t>Teleop</a:t>
+            </a:r>
+            <a:r>
+              <a:rPr lang="en-US" sz="2200" dirty="0"/>
+              <a:t> node: Lets a person take over and drive the car manually</a:t>
             </a:r>
           </a:p>
           <a:p>
@@ -7236,797 +10053,6 @@
               <a:rPr lang="en-US" sz="2200" dirty="0"/>
               <a:t>Why ROS 2: Modular nodes split the work across the team, and recorded drives can be replayed to test without the car</a:t>
             </a:r>
-          </a:p>
-        </p:txBody>
-      </p:sp>
-    </p:spTree>
-  </p:cSld>
-  <p:clrMapOvr>
-    <a:masterClrMapping/>
-  </p:clrMapOvr>
-</p:sld>
-</file>
-
-<file path=ppt/slides/slide8.xml><?xml version="1.0" encoding="utf-8"?>
-<p:sld xmlns:a="http://schemas.openxmlformats.org/drawingml/2006/main" xmlns:p="http://schemas.openxmlformats.org/presentationml/2006/main" xmlns:r="http://schemas.openxmlformats.org/officeDocument/2006/relationships">
-  <p:cSld>
-    <p:spTree>
-      <p:nvGrpSpPr>
-        <p:cNvPr id="1" name=""/>
-        <p:cNvGrpSpPr/>
-        <p:nvPr/>
-      </p:nvGrpSpPr>
-      <p:grpSpPr/>
-      <p:sp useBgFill="1">
-        <p:nvSpPr>
-          <p:cNvPr id="25" name="Rectangle 24">
-            <a:extLst>
-              <a:ext uri="{FF2B5EF4-FFF2-40B4-BE49-F238E27FC236}">
-                <a16:creationId xmlns:a16="http://schemas.microsoft.com/office/drawing/2014/main" id="{7979CB03-77A3-48F2-A1C8-52F03FCB3D00}"/>
-              </a:ext>
-              <a:ext uri="{C183D7F6-B498-43B3-948B-1728B52AA6E4}">
-                <adec:decorative xmlns:adec="http://schemas.microsoft.com/office/drawing/2017/decorative" val="1"/>
-              </a:ext>
-            </a:extLst>
-          </p:cNvPr>
-          <p:cNvSpPr>
-            <a:spLocks noGrp="1" noRot="1" noChangeAspect="1" noMove="1" noResize="1" noEditPoints="1" noAdjustHandles="1" noChangeArrowheads="1" noChangeShapeType="1" noTextEdit="1"/>
-          </p:cNvSpPr>
-          <p:nvPr>
-            <p:extLst>
-              <p:ext uri="{386F3935-93C4-4BCD-93E2-E3B085C9AB24}">
-                <p16:designElem xmlns:p16="http://schemas.microsoft.com/office/powerpoint/2015/main" val="1"/>
-              </p:ext>
-            </p:extLst>
-          </p:nvPr>
-        </p:nvSpPr>
-        <p:spPr>
-          <a:xfrm>
-            <a:off x="0" y="0"/>
-            <a:ext cx="12192000" cy="6858000"/>
-          </a:xfrm>
-          <a:prstGeom prst="rect">
-            <a:avLst/>
-          </a:prstGeom>
-          <a:ln>
-            <a:noFill/>
-          </a:ln>
-        </p:spPr>
-        <p:style>
-          <a:lnRef idx="2">
-            <a:schemeClr val="accent1">
-              <a:shade val="50000"/>
-            </a:schemeClr>
-          </a:lnRef>
-          <a:fillRef idx="1">
-            <a:schemeClr val="accent1"/>
-          </a:fillRef>
-          <a:effectRef idx="0">
-            <a:schemeClr val="accent1"/>
-          </a:effectRef>
-          <a:fontRef idx="minor">
-            <a:schemeClr val="lt1"/>
-          </a:fontRef>
-        </p:style>
-        <p:txBody>
-          <a:bodyPr rtlCol="0" anchor="ctr"/>
-          <a:lstStyle/>
-          <a:p>
-            <a:pPr algn="ctr"/>
-            <a:endParaRPr lang="en-US"/>
-          </a:p>
-        </p:txBody>
-      </p:sp>
-      <p:sp useBgFill="1">
-        <p:nvSpPr>
-          <p:cNvPr id="27" name="Rectangle 26">
-            <a:extLst>
-              <a:ext uri="{FF2B5EF4-FFF2-40B4-BE49-F238E27FC236}">
-                <a16:creationId xmlns:a16="http://schemas.microsoft.com/office/drawing/2014/main" id="{9073D962-D3D2-4A72-8593-65C213CBFFC3}"/>
-              </a:ext>
-              <a:ext uri="{C183D7F6-B498-43B3-948B-1728B52AA6E4}">
-                <adec:decorative xmlns:adec="http://schemas.microsoft.com/office/drawing/2017/decorative" val="1"/>
-              </a:ext>
-            </a:extLst>
-          </p:cNvPr>
-          <p:cNvSpPr>
-            <a:spLocks noGrp="1" noRot="1" noChangeAspect="1" noMove="1" noResize="1" noEditPoints="1" noAdjustHandles="1" noChangeArrowheads="1" noChangeShapeType="1" noTextEdit="1"/>
-          </p:cNvSpPr>
-          <p:nvPr>
-            <p:extLst>
-              <p:ext uri="{386F3935-93C4-4BCD-93E2-E3B085C9AB24}">
-                <p16:designElem xmlns:p16="http://schemas.microsoft.com/office/powerpoint/2015/main" val="1"/>
-              </p:ext>
-            </p:extLst>
-          </p:nvPr>
-        </p:nvSpPr>
-        <p:spPr>
-          <a:xfrm>
-            <a:off x="381654" y="633619"/>
-            <a:ext cx="4520912" cy="5495925"/>
-          </a:xfrm>
-          <a:prstGeom prst="rect">
-            <a:avLst/>
-          </a:prstGeom>
-          <a:ln w="9525">
-            <a:solidFill>
-              <a:srgbClr val="DEDEDE"/>
-            </a:solidFill>
-          </a:ln>
-          <a:effectLst>
-            <a:outerShdw blurRad="50800" dist="38100" dir="2700000" algn="tl" rotWithShape="0">
-              <a:schemeClr val="bg1">
-                <a:lumMod val="85000"/>
-                <a:alpha val="50000"/>
-              </a:schemeClr>
-            </a:outerShdw>
-          </a:effectLst>
-        </p:spPr>
-        <p:style>
-          <a:lnRef idx="2">
-            <a:schemeClr val="accent1">
-              <a:shade val="50000"/>
-            </a:schemeClr>
-          </a:lnRef>
-          <a:fillRef idx="1">
-            <a:schemeClr val="accent1"/>
-          </a:fillRef>
-          <a:effectRef idx="0">
-            <a:schemeClr val="accent1"/>
-          </a:effectRef>
-          <a:fontRef idx="minor">
-            <a:schemeClr val="lt1"/>
-          </a:fontRef>
-        </p:style>
-        <p:txBody>
-          <a:bodyPr rtlCol="0" anchor="ctr"/>
-          <a:lstStyle/>
-          <a:p>
-            <a:pPr marL="0" marR="0" lvl="0" indent="0" algn="ctr" defTabSz="914400" rtl="0" eaLnBrk="1" fontAlgn="auto" latinLnBrk="0" hangingPunct="1">
-              <a:lnSpc>
-                <a:spcPct val="100000"/>
-              </a:lnSpc>
-              <a:spcBef>
-                <a:spcPts val="0"/>
-              </a:spcBef>
-              <a:spcAft>
-                <a:spcPts val="0"/>
-              </a:spcAft>
-              <a:buClrTx/>
-              <a:buSzTx/>
-              <a:buFontTx/>
-              <a:buNone/>
-              <a:tabLst/>
-              <a:defRPr/>
-            </a:pPr>
-            <a:endParaRPr kumimoji="0" lang="en-US" sz="1800" b="0" i="0" u="none" strike="noStrike" kern="1200" cap="none" spc="0" normalizeH="0" baseline="0" noProof="0">
-              <a:ln>
-                <a:noFill/>
-              </a:ln>
-              <a:solidFill>
-                <a:prstClr val="white"/>
-              </a:solidFill>
-              <a:effectLst/>
-              <a:uLnTx/>
-              <a:uFillTx/>
-              <a:latin typeface="Calibri" panose="020F0502020204030204"/>
-              <a:ea typeface="+mn-ea"/>
-              <a:cs typeface="+mn-cs"/>
-            </a:endParaRPr>
-          </a:p>
-        </p:txBody>
-      </p:sp>
-      <p:sp>
-        <p:nvSpPr>
-          <p:cNvPr id="2" name="Title 1">
-            <a:extLst>
-              <a:ext uri="{FF2B5EF4-FFF2-40B4-BE49-F238E27FC236}">
-                <a16:creationId xmlns:a16="http://schemas.microsoft.com/office/drawing/2014/main" id="{6B50277F-C2E1-025E-B6AB-EA1CA120F3BA}"/>
-              </a:ext>
-            </a:extLst>
-          </p:cNvPr>
-          <p:cNvSpPr>
-            <a:spLocks noGrp="1"/>
-          </p:cNvSpPr>
-          <p:nvPr>
-            <p:ph type="title"/>
-          </p:nvPr>
-        </p:nvSpPr>
-        <p:spPr>
-          <a:xfrm>
-            <a:off x="813816" y="978408"/>
-            <a:ext cx="3721608" cy="1106424"/>
-          </a:xfrm>
-        </p:spPr>
-        <p:txBody>
-          <a:bodyPr vert="horz" lIns="91440" tIns="45720" rIns="91440" bIns="45720" rtlCol="0" anchor="ctr">
-            <a:normAutofit/>
-          </a:bodyPr>
-          <a:lstStyle/>
-          <a:p>
-            <a:r>
-              <a:rPr lang="en-US" sz="2800" kern="1200">
-                <a:solidFill>
-                  <a:schemeClr val="tx1"/>
-                </a:solidFill>
-                <a:latin typeface="+mj-lt"/>
-                <a:ea typeface="+mj-ea"/>
-                <a:cs typeface="+mj-cs"/>
-              </a:rPr>
-              <a:t>Waffle bot plates</a:t>
-            </a:r>
-          </a:p>
-        </p:txBody>
-      </p:sp>
-      <p:sp>
-        <p:nvSpPr>
-          <p:cNvPr id="29" name="Rectangle 28">
-            <a:extLst>
-              <a:ext uri="{FF2B5EF4-FFF2-40B4-BE49-F238E27FC236}">
-                <a16:creationId xmlns:a16="http://schemas.microsoft.com/office/drawing/2014/main" id="{2387511B-F6E1-4929-AC90-94FB8B6B0F41}"/>
-              </a:ext>
-              <a:ext uri="{C183D7F6-B498-43B3-948B-1728B52AA6E4}">
-                <adec:decorative xmlns:adec="http://schemas.microsoft.com/office/drawing/2017/decorative" val="1"/>
-              </a:ext>
-            </a:extLst>
-          </p:cNvPr>
-          <p:cNvSpPr>
-            <a:spLocks noGrp="1" noRot="1" noChangeAspect="1" noMove="1" noResize="1" noEditPoints="1" noAdjustHandles="1" noChangeArrowheads="1" noChangeShapeType="1" noTextEdit="1"/>
-          </p:cNvSpPr>
-          <p:nvPr>
-            <p:extLst>
-              <p:ext uri="{386F3935-93C4-4BCD-93E2-E3B085C9AB24}">
-                <p16:designElem xmlns:p16="http://schemas.microsoft.com/office/powerpoint/2015/main" val="1"/>
-              </p:ext>
-            </p:extLst>
-          </p:nvPr>
-        </p:nvSpPr>
-        <p:spPr>
-          <a:xfrm>
-            <a:off x="317645" y="1181536"/>
-            <a:ext cx="128016" cy="704088"/>
-          </a:xfrm>
-          <a:prstGeom prst="rect">
-            <a:avLst/>
-          </a:prstGeom>
-          <a:solidFill>
-            <a:schemeClr val="accent2"/>
-          </a:solidFill>
-          <a:ln>
-            <a:noFill/>
-          </a:ln>
-        </p:spPr>
-        <p:style>
-          <a:lnRef idx="2">
-            <a:schemeClr val="accent1">
-              <a:shade val="50000"/>
-            </a:schemeClr>
-          </a:lnRef>
-          <a:fillRef idx="1">
-            <a:schemeClr val="accent1"/>
-          </a:fillRef>
-          <a:effectRef idx="0">
-            <a:schemeClr val="accent1"/>
-          </a:effectRef>
-          <a:fontRef idx="minor">
-            <a:schemeClr val="lt1"/>
-          </a:fontRef>
-        </p:style>
-        <p:txBody>
-          <a:bodyPr rtlCol="0" anchor="ctr"/>
-          <a:lstStyle/>
-          <a:p>
-            <a:pPr marL="0" marR="0" lvl="0" indent="0" algn="ctr" defTabSz="914400" rtl="0" eaLnBrk="1" fontAlgn="auto" latinLnBrk="0" hangingPunct="1">
-              <a:lnSpc>
-                <a:spcPct val="100000"/>
-              </a:lnSpc>
-              <a:spcBef>
-                <a:spcPts val="0"/>
-              </a:spcBef>
-              <a:spcAft>
-                <a:spcPts val="0"/>
-              </a:spcAft>
-              <a:buClrTx/>
-              <a:buSzTx/>
-              <a:buFontTx/>
-              <a:buNone/>
-              <a:tabLst/>
-              <a:defRPr/>
-            </a:pPr>
-            <a:endParaRPr kumimoji="0" lang="en-US" sz="1800" b="0" i="0" u="none" strike="noStrike" kern="1200" cap="none" spc="0" normalizeH="0" baseline="0" noProof="0">
-              <a:ln>
-                <a:noFill/>
-              </a:ln>
-              <a:solidFill>
-                <a:prstClr val="white"/>
-              </a:solidFill>
-              <a:effectLst/>
-              <a:uLnTx/>
-              <a:uFillTx/>
-              <a:latin typeface="Calibri" panose="020F0502020204030204"/>
-              <a:ea typeface="+mn-ea"/>
-              <a:cs typeface="+mn-cs"/>
-            </a:endParaRPr>
-          </a:p>
-        </p:txBody>
-      </p:sp>
-      <p:sp>
-        <p:nvSpPr>
-          <p:cNvPr id="31" name="Rectangle 30">
-            <a:extLst>
-              <a:ext uri="{FF2B5EF4-FFF2-40B4-BE49-F238E27FC236}">
-                <a16:creationId xmlns:a16="http://schemas.microsoft.com/office/drawing/2014/main" id="{AA58F78C-27AB-465F-AA33-15E08AF267F9}"/>
-              </a:ext>
-              <a:ext uri="{C183D7F6-B498-43B3-948B-1728B52AA6E4}">
-                <adec:decorative xmlns:adec="http://schemas.microsoft.com/office/drawing/2017/decorative" val="1"/>
-              </a:ext>
-            </a:extLst>
-          </p:cNvPr>
-          <p:cNvSpPr>
-            <a:spLocks noGrp="1" noRot="1" noChangeAspect="1" noMove="1" noResize="1" noEditPoints="1" noAdjustHandles="1" noChangeArrowheads="1" noChangeShapeType="1" noTextEdit="1"/>
-          </p:cNvSpPr>
-          <p:nvPr>
-            <p:extLst>
-              <p:ext uri="{386F3935-93C4-4BCD-93E2-E3B085C9AB24}">
-                <p16:designElem xmlns:p16="http://schemas.microsoft.com/office/powerpoint/2015/main" val="1"/>
-              </p:ext>
-            </p:extLst>
-          </p:nvPr>
-        </p:nvSpPr>
-        <p:spPr>
-          <a:xfrm>
-            <a:off x="843560" y="2185416"/>
-            <a:ext cx="3683187" cy="9144"/>
-          </a:xfrm>
-          <a:prstGeom prst="rect">
-            <a:avLst/>
-          </a:prstGeom>
-          <a:solidFill>
-            <a:srgbClr val="D5D5D5"/>
-          </a:solidFill>
-          <a:ln w="3175">
-            <a:noFill/>
-          </a:ln>
-          <a:effectLst/>
-        </p:spPr>
-        <p:style>
-          <a:lnRef idx="2">
-            <a:schemeClr val="accent1">
-              <a:shade val="50000"/>
-            </a:schemeClr>
-          </a:lnRef>
-          <a:fillRef idx="1">
-            <a:schemeClr val="accent1"/>
-          </a:fillRef>
-          <a:effectRef idx="0">
-            <a:schemeClr val="accent1"/>
-          </a:effectRef>
-          <a:fontRef idx="minor">
-            <a:schemeClr val="lt1"/>
-          </a:fontRef>
-        </p:style>
-        <p:txBody>
-          <a:bodyPr rtlCol="0" anchor="ctr"/>
-          <a:lstStyle/>
-          <a:p>
-            <a:pPr marL="0" marR="0" lvl="0" indent="0" algn="ctr" defTabSz="914400" rtl="0" eaLnBrk="1" fontAlgn="auto" latinLnBrk="0" hangingPunct="1">
-              <a:lnSpc>
-                <a:spcPct val="100000"/>
-              </a:lnSpc>
-              <a:spcBef>
-                <a:spcPts val="0"/>
-              </a:spcBef>
-              <a:spcAft>
-                <a:spcPts val="0"/>
-              </a:spcAft>
-              <a:buClrTx/>
-              <a:buSzTx/>
-              <a:buFontTx/>
-              <a:buNone/>
-              <a:tabLst/>
-              <a:defRPr/>
-            </a:pPr>
-            <a:endParaRPr kumimoji="0" lang="en-US" sz="1800" b="0" i="0" u="none" strike="noStrike" kern="1200" cap="none" spc="0" normalizeH="0" baseline="0" noProof="0">
-              <a:ln>
-                <a:noFill/>
-              </a:ln>
-              <a:solidFill>
-                <a:prstClr val="white"/>
-              </a:solidFill>
-              <a:effectLst/>
-              <a:uLnTx/>
-              <a:uFillTx/>
-              <a:latin typeface="Calibri" panose="020F0502020204030204"/>
-              <a:ea typeface="+mn-ea"/>
-              <a:cs typeface="+mn-cs"/>
-            </a:endParaRPr>
-          </a:p>
-        </p:txBody>
-      </p:sp>
-      <p:sp>
-        <p:nvSpPr>
-          <p:cNvPr id="12" name="TextBox 11">
-            <a:extLst>
-              <a:ext uri="{FF2B5EF4-FFF2-40B4-BE49-F238E27FC236}">
-                <a16:creationId xmlns:a16="http://schemas.microsoft.com/office/drawing/2014/main" id="{ABAE7B79-4E78-B0C2-2F1C-78B1C7B893A1}"/>
-              </a:ext>
-            </a:extLst>
-          </p:cNvPr>
-          <p:cNvSpPr txBox="1"/>
-          <p:nvPr/>
-        </p:nvSpPr>
-        <p:spPr>
-          <a:xfrm>
-            <a:off x="813816" y="2368296"/>
-            <a:ext cx="3721608" cy="3502152"/>
-          </a:xfrm>
-          <a:prstGeom prst="rect">
-            <a:avLst/>
-          </a:prstGeom>
-        </p:spPr>
-        <p:txBody>
-          <a:bodyPr vert="horz" lIns="91440" tIns="45720" rIns="91440" bIns="45720" rtlCol="0">
-            <a:normAutofit/>
-          </a:bodyPr>
-          <a:lstStyle/>
-          <a:p>
-            <a:pPr>
-              <a:lnSpc>
-                <a:spcPct val="90000"/>
-              </a:lnSpc>
-              <a:spcAft>
-                <a:spcPts val="600"/>
-              </a:spcAft>
-            </a:pPr>
-            <a:r>
-              <a:rPr lang="en-US" sz="1700" dirty="0"/>
-              <a:t>I found some simplified Waffle plates on printables.com</a:t>
-            </a:r>
-          </a:p>
-          <a:p>
-            <a:pPr marL="285750" indent="-228600">
-              <a:lnSpc>
-                <a:spcPct val="90000"/>
-              </a:lnSpc>
-              <a:spcAft>
-                <a:spcPts val="600"/>
-              </a:spcAft>
-              <a:buFont typeface="Arial" panose="020B0604020202020204" pitchFamily="34" charset="0"/>
-              <a:buChar char="•"/>
-            </a:pPr>
-            <a:r>
-              <a:rPr lang="en-US" sz="1700" dirty="0"/>
-              <a:t>One with no holes</a:t>
-            </a:r>
-          </a:p>
-          <a:p>
-            <a:pPr marL="285750" indent="-228600">
-              <a:lnSpc>
-                <a:spcPct val="90000"/>
-              </a:lnSpc>
-              <a:spcAft>
-                <a:spcPts val="600"/>
-              </a:spcAft>
-              <a:buFont typeface="Arial" panose="020B0604020202020204" pitchFamily="34" charset="0"/>
-              <a:buChar char="•"/>
-            </a:pPr>
-            <a:r>
-              <a:rPr lang="en-US" sz="1700" dirty="0"/>
-              <a:t>One being a simple plate</a:t>
-            </a:r>
-          </a:p>
-          <a:p>
-            <a:pPr marL="285750" indent="-228600">
-              <a:lnSpc>
-                <a:spcPct val="90000"/>
-              </a:lnSpc>
-              <a:spcAft>
-                <a:spcPts val="600"/>
-              </a:spcAft>
-              <a:buFont typeface="Arial" panose="020B0604020202020204" pitchFamily="34" charset="0"/>
-              <a:buChar char="•"/>
-            </a:pPr>
-            <a:r>
-              <a:rPr lang="en-US" sz="1700" dirty="0"/>
-              <a:t>Two being different doubles</a:t>
-            </a:r>
-          </a:p>
-        </p:txBody>
-      </p:sp>
-      <p:pic>
-        <p:nvPicPr>
-          <p:cNvPr id="5" name="Content Placeholder 4">
-            <a:extLst>
-              <a:ext uri="{FF2B5EF4-FFF2-40B4-BE49-F238E27FC236}">
-                <a16:creationId xmlns:a16="http://schemas.microsoft.com/office/drawing/2014/main" id="{9A22B260-71E4-61AF-270D-7F0B9A2AC581}"/>
-              </a:ext>
-            </a:extLst>
-          </p:cNvPr>
-          <p:cNvPicPr>
-            <a:picLocks noGrp="1" noChangeAspect="1"/>
-          </p:cNvPicPr>
-          <p:nvPr>
-            <p:ph idx="1"/>
-          </p:nvPr>
-        </p:nvPicPr>
-        <p:blipFill>
-          <a:blip r:embed="rId3"/>
-          <a:srcRect l="17124" r="20167" b="-2"/>
-          <a:stretch>
-            <a:fillRect/>
-          </a:stretch>
-        </p:blipFill>
-        <p:spPr>
-          <a:xfrm>
-            <a:off x="5171031" y="10"/>
-            <a:ext cx="3144714" cy="3209534"/>
-          </a:xfrm>
-          <a:prstGeom prst="rect">
-            <a:avLst/>
-          </a:prstGeom>
-        </p:spPr>
-      </p:pic>
-      <p:pic>
-        <p:nvPicPr>
-          <p:cNvPr id="7" name="Picture 6">
-            <a:extLst>
-              <a:ext uri="{FF2B5EF4-FFF2-40B4-BE49-F238E27FC236}">
-                <a16:creationId xmlns:a16="http://schemas.microsoft.com/office/drawing/2014/main" id="{F24AECCB-24C6-4B83-4AB9-593BDB264B59}"/>
-              </a:ext>
-            </a:extLst>
-          </p:cNvPr>
-          <p:cNvPicPr>
-            <a:picLocks noChangeAspect="1"/>
-          </p:cNvPicPr>
-          <p:nvPr/>
-        </p:nvPicPr>
-        <p:blipFill>
-          <a:blip r:embed="rId2"/>
-          <a:srcRect l="15725" r="12036"/>
-          <a:stretch>
-            <a:fillRect/>
-          </a:stretch>
-        </p:blipFill>
-        <p:spPr>
-          <a:xfrm>
-            <a:off x="5171033" y="3310128"/>
-            <a:ext cx="3144712" cy="3547872"/>
-          </a:xfrm>
-          <a:prstGeom prst="rect">
-            <a:avLst/>
-          </a:prstGeom>
-        </p:spPr>
-      </p:pic>
-      <p:pic>
-        <p:nvPicPr>
-          <p:cNvPr id="11" name="Picture 10">
-            <a:extLst>
-              <a:ext uri="{FF2B5EF4-FFF2-40B4-BE49-F238E27FC236}">
-                <a16:creationId xmlns:a16="http://schemas.microsoft.com/office/drawing/2014/main" id="{E5244B0E-E9C2-D93F-4555-E1ADC15B5386}"/>
-              </a:ext>
-            </a:extLst>
-          </p:cNvPr>
-          <p:cNvPicPr>
-            <a:picLocks noChangeAspect="1"/>
-          </p:cNvPicPr>
-          <p:nvPr/>
-        </p:nvPicPr>
-        <p:blipFill>
-          <a:blip r:embed="rId5"/>
-          <a:srcRect l="17005" r="8313" b="-3"/>
-          <a:stretch>
-            <a:fillRect/>
-          </a:stretch>
-        </p:blipFill>
-        <p:spPr>
-          <a:xfrm>
-            <a:off x="8416348" y="10"/>
-            <a:ext cx="3775651" cy="4133078"/>
-          </a:xfrm>
-          <a:prstGeom prst="rect">
-            <a:avLst/>
-          </a:prstGeom>
-        </p:spPr>
-      </p:pic>
-      <p:pic>
-        <p:nvPicPr>
-          <p:cNvPr id="9" name="Picture 8">
-            <a:extLst>
-              <a:ext uri="{FF2B5EF4-FFF2-40B4-BE49-F238E27FC236}">
-                <a16:creationId xmlns:a16="http://schemas.microsoft.com/office/drawing/2014/main" id="{C28A1D29-825A-D98C-E441-F5CBF4A1803C}"/>
-              </a:ext>
-            </a:extLst>
-          </p:cNvPr>
-          <p:cNvPicPr>
-            <a:picLocks noChangeAspect="1"/>
-          </p:cNvPicPr>
-          <p:nvPr/>
-        </p:nvPicPr>
-        <p:blipFill>
-          <a:blip r:embed="rId4"/>
-          <a:srcRect l="4765" r="1003" b="5"/>
-          <a:stretch>
-            <a:fillRect/>
-          </a:stretch>
-        </p:blipFill>
-        <p:spPr>
-          <a:xfrm>
-            <a:off x="8416348" y="4233672"/>
-            <a:ext cx="3775652" cy="2624328"/>
-          </a:xfrm>
-          <a:prstGeom prst="rect">
-            <a:avLst/>
-          </a:prstGeom>
-        </p:spPr>
-      </p:pic>
-    </p:spTree>
-  </p:cSld>
-  <p:clrMapOvr>
-    <a:masterClrMapping/>
-  </p:clrMapOvr>
-</p:sld>
-</file>
-
-<file path=ppt/slides/slide9.xml><?xml version="1.0" encoding="utf-8"?>
-<p:sld xmlns:a="http://schemas.openxmlformats.org/drawingml/2006/main" xmlns:p="http://schemas.openxmlformats.org/presentationml/2006/main" xmlns:r="http://schemas.openxmlformats.org/officeDocument/2006/relationships">
-  <p:cSld>
-    <p:spTree>
-      <p:nvGrpSpPr>
-        <p:cNvPr id="1" name=""/>
-        <p:cNvGrpSpPr/>
-        <p:nvPr/>
-      </p:nvGrpSpPr>
-      <p:grpSpPr/>
-      <p:sp>
-        <p:nvSpPr>
-          <p:cNvPr id="2" name="Title 1">
-            <a:extLst>
-              <a:ext uri="{FF2B5EF4-FFF2-40B4-BE49-F238E27FC236}">
-                <a16:creationId xmlns:a16="http://schemas.microsoft.com/office/drawing/2014/main" id="{6D259182-6FD3-6E62-0AC1-D7F9A089FCBC}"/>
-              </a:ext>
-            </a:extLst>
-          </p:cNvPr>
-          <p:cNvSpPr>
-            <a:spLocks noGrp="1"/>
-          </p:cNvSpPr>
-          <p:nvPr>
-            <p:ph type="title"/>
-          </p:nvPr>
-        </p:nvSpPr>
-        <p:spPr/>
-        <p:txBody>
-          <a:bodyPr/>
-          <a:lstStyle/>
-          <a:p>
-            <a:r>
-              <a:t>Abigail Duran</a:t>
-            </a:r>
-          </a:p>
-        </p:txBody>
-      </p:sp>
-      <p:sp>
-        <p:nvSpPr>
-          <p:cNvPr id="3" name="Content Placeholder 2">
-            <a:extLst>
-              <a:ext uri="{FF2B5EF4-FFF2-40B4-BE49-F238E27FC236}">
-                <a16:creationId xmlns:a16="http://schemas.microsoft.com/office/drawing/2014/main" id="{A7A8531B-14FC-040D-A94D-6293C4D3F000}"/>
-              </a:ext>
-            </a:extLst>
-          </p:cNvPr>
-          <p:cNvSpPr>
-            <a:spLocks noGrp="1"/>
-          </p:cNvSpPr>
-          <p:nvPr>
-            <p:ph idx="1"/>
-          </p:nvPr>
-        </p:nvSpPr>
-        <p:spPr>
-          <a:xfrm>
-            <a:off x="838200" y="1580298"/>
-            <a:ext cx="10515600" cy="4351338"/>
-          </a:xfrm>
-        </p:spPr>
-        <p:txBody>
-          <a:bodyPr>
-            <a:normAutofit fontScale="85000" lnSpcReduction="20000"/>
-          </a:bodyPr>
-          <a:lstStyle/>
-          <a:p>
-            <a:r>
-              <a:rPr b="1" dirty="0"/>
-              <a:t>Goals for the week</a:t>
-            </a:r>
-            <a:endParaRPr lang="en-US" b="1" dirty="0"/>
-          </a:p>
-          <a:p>
-            <a:pPr lvl="1"/>
-            <a:r>
-              <a:rPr lang="en-US" dirty="0"/>
-              <a:t>Finalize the list of components and connections that will be included on the final PCB.</a:t>
-            </a:r>
-          </a:p>
-          <a:p>
-            <a:pPr lvl="1"/>
-            <a:r>
-              <a:rPr lang="en-US" dirty="0"/>
-              <a:t>Identify what parts of the CM5 IO board are necessary for the project.</a:t>
-            </a:r>
-          </a:p>
-          <a:p>
-            <a:r>
-              <a:rPr lang="en-US" b="1" dirty="0"/>
-              <a:t>Progress for the week</a:t>
-            </a:r>
-          </a:p>
-          <a:p>
-            <a:pPr lvl="1"/>
-            <a:r>
-              <a:rPr lang="en-US" dirty="0"/>
-              <a:t>Created an organized component checklist/spreadsheet for the PCB design. </a:t>
-            </a:r>
-          </a:p>
-          <a:p>
-            <a:pPr lvl="1"/>
-            <a:r>
-              <a:rPr lang="en-US" dirty="0"/>
-              <a:t>Reviewed the CM5 IO Board components and connections to determine which features should be kept, removed, or modified.</a:t>
-            </a:r>
-          </a:p>
-          <a:p>
-            <a:pPr lvl="1"/>
-            <a:r>
-              <a:rPr lang="en-US" dirty="0"/>
-              <a:t>Narrowed down the components needed for the final custom PCB.</a:t>
-            </a:r>
-          </a:p>
-          <a:p>
-            <a:r>
-              <a:rPr lang="en-US" b="1" dirty="0"/>
-              <a:t>Goals for next week</a:t>
-            </a:r>
-            <a:r>
-              <a:rPr lang="en-US" dirty="0"/>
-              <a:t>​​​</a:t>
-            </a:r>
-          </a:p>
-          <a:p>
-            <a:pPr lvl="1"/>
-            <a:r>
-              <a:rPr lang="en-US" dirty="0"/>
-              <a:t>Begin planning the PCB layout, including component placement and board dimensions.​</a:t>
-            </a:r>
-          </a:p>
-          <a:p>
-            <a:pPr lvl="1"/>
-            <a:r>
-              <a:rPr lang="en-US" dirty="0"/>
-              <a:t>Begin planning power distribution and signal routing.​</a:t>
-            </a:r>
-          </a:p>
-          <a:p>
-            <a:pPr lvl="1"/>
-            <a:r>
-              <a:rPr lang="en-US" dirty="0"/>
-              <a:t>Start transferring the finalized component requirements into the PCB design.</a:t>
-            </a:r>
-            <a:endParaRPr dirty="0"/>
-          </a:p>
-          <a:p>
-            <a:r>
-              <a:rPr b="1" dirty="0"/>
-              <a:t>Hours spent on progress</a:t>
-            </a:r>
-          </a:p>
-          <a:p>
-            <a:pPr lvl="1"/>
-            <a:r>
-              <a:rPr lang="en-US" dirty="0"/>
-              <a:t>6 hours​</a:t>
-            </a:r>
-          </a:p>
-          <a:p>
-            <a:pPr lvl="1"/>
-            <a:endParaRPr b="1" dirty="0"/>
           </a:p>
         </p:txBody>
       </p:sp>

--- a/Weekly Reports/Self-Driving-RC-Car.pptx
+++ b/Weekly Reports/Self-Driving-RC-Car.pptx
@@ -18,6 +18,7 @@
     <p:sldId id="266" r:id="rId16"/>
     <p:sldId id="267" r:id="rId17"/>
     <p:sldId id="268" r:id="rId18"/>
+    <p:sldId id="269" r:id="rId19"/>
   </p:sldIdLst>
   <p:sldSz cx="12192000" cy="6858000"/>
   <p:notesSz cx="6858000" cy="9144000"/>
@@ -3457,6 +3458,658 @@
                 <a:ea typeface="Aptos Display"/>
                 <a:cs typeface="Aptos Display"/>
               </a:rPr>
+              <a:t>ROS 2 could split our pipeline into eight nodes</a:t>
+            </a:r>
+          </a:p>
+        </p:txBody>
+      </p:sp>
+      <p:sp>
+        <p:nvSpPr>
+          <p:cNvPr id="3" name="Subtitle"/>
+          <p:cNvSpPr txBox="1"/>
+          <p:nvPr/>
+        </p:nvSpPr>
+        <p:spPr>
+          <a:xfrm>
+            <a:off x="786384" y="1024128"/>
+            <a:ext cx="10607040" cy="365760"/>
+          </a:xfrm>
+          <a:prstGeom prst="rect">
+            <a:avLst/>
+          </a:prstGeom>
+          <a:noFill/>
+        </p:spPr>
+        <p:txBody>
+          <a:bodyPr wrap="square" lIns="0" tIns="0" rIns="0" bIns="0" anchor="t">
+            <a:noAutofit/>
+          </a:bodyPr>
+          <a:lstStyle/>
+          <a:p>
+            <a:pPr marL="0" indent="0" algn="l">
+              <a:spcBef>
+                <a:spcPts val="0"/>
+              </a:spcBef>
+              <a:buNone/>
+            </a:pPr>
+            <a:r>
+              <a:rPr lang="en-US" sz="1500" b="1" dirty="0">
+                <a:solidFill>
+                  <a:srgbClr val="000000"/>
+                </a:solidFill>
+                <a:latin typeface="Aptos"/>
+                <a:ea typeface="Aptos"/>
+                <a:cs typeface="Aptos"/>
+              </a:rPr>
+              <a:t>Preliminary node structure for the car; each node does one job</a:t>
+            </a:r>
+          </a:p>
+        </p:txBody>
+      </p:sp>
+      <p:sp>
+        <p:nvSpPr>
+          <p:cNvPr id="4" name="Nodes"/>
+          <p:cNvSpPr txBox="1"/>
+          <p:nvPr/>
+        </p:nvSpPr>
+        <p:spPr>
+          <a:xfrm>
+            <a:off x="786384" y="1719072"/>
+            <a:ext cx="6309360" cy="384048"/>
+          </a:xfrm>
+          <a:prstGeom prst="rect">
+            <a:avLst/>
+          </a:prstGeom>
+          <a:noFill/>
+        </p:spPr>
+        <p:txBody>
+          <a:bodyPr wrap="square" lIns="0" tIns="0" rIns="0" bIns="0" anchor="t">
+            <a:noAutofit/>
+          </a:bodyPr>
+          <a:lstStyle/>
+          <a:p>
+            <a:pPr marL="0" indent="0" algn="l">
+              <a:spcBef>
+                <a:spcPts val="0"/>
+              </a:spcBef>
+              <a:buNone/>
+            </a:pPr>
+            <a:r>
+              <a:rPr lang="en-US" sz="1950" b="1" dirty="0">
+                <a:solidFill>
+                  <a:srgbClr val="30669D"/>
+                </a:solidFill>
+                <a:latin typeface="Aptos"/>
+                <a:ea typeface="Aptos"/>
+                <a:cs typeface="Aptos"/>
+              </a:rPr>
+              <a:t>Nodes</a:t>
+            </a:r>
+          </a:p>
+        </p:txBody>
+      </p:sp>
+      <p:sp>
+        <p:nvSpPr>
+          <p:cNvPr id="5" name="Node list"/>
+          <p:cNvSpPr txBox="1"/>
+          <p:nvPr/>
+        </p:nvSpPr>
+        <p:spPr>
+          <a:xfrm>
+            <a:off x="786384" y="2240280"/>
+            <a:ext cx="6309360" cy="4023360"/>
+          </a:xfrm>
+          <a:prstGeom prst="rect">
+            <a:avLst/>
+          </a:prstGeom>
+          <a:noFill/>
+        </p:spPr>
+        <p:txBody>
+          <a:bodyPr wrap="square" lIns="0" tIns="0" rIns="0" bIns="0" anchor="t">
+            <a:noAutofit/>
+          </a:bodyPr>
+          <a:lstStyle/>
+          <a:p>
+            <a:pPr marL="228600" indent="-228600" algn="l">
+              <a:spcBef>
+                <a:spcPts val="0"/>
+              </a:spcBef>
+              <a:buClr>
+                <a:srgbClr val="30669D"/>
+              </a:buClr>
+              <a:buFont typeface="Arial"/>
+              <a:buChar char="•"/>
+            </a:pPr>
+            <a:r>
+              <a:rPr lang="en-US" sz="1600" b="1" dirty="0">
+                <a:solidFill>
+                  <a:srgbClr val="000000"/>
+                </a:solidFill>
+                <a:latin typeface="Aptos"/>
+                <a:ea typeface="Aptos"/>
+                <a:cs typeface="Aptos"/>
+              </a:rPr>
+              <a:t>Camera: </a:t>
+            </a:r>
+            <a:r>
+              <a:rPr lang="en-US" sz="1600" b="0" dirty="0">
+                <a:solidFill>
+                  <a:srgbClr val="000000"/>
+                </a:solidFill>
+                <a:latin typeface="Aptos"/>
+                <a:ea typeface="Aptos"/>
+                <a:cs typeface="Aptos"/>
+              </a:rPr>
+              <a:t>streams video from the Pi Camera Module 3</a:t>
+            </a:r>
+          </a:p>
+          <a:p>
+            <a:pPr marL="228600" indent="-228600" algn="l">
+              <a:spcBef>
+                <a:spcPts val="700"/>
+              </a:spcBef>
+              <a:buClr>
+                <a:srgbClr val="30669D"/>
+              </a:buClr>
+              <a:buFont typeface="Arial"/>
+              <a:buChar char="•"/>
+            </a:pPr>
+            <a:r>
+              <a:rPr lang="en-US" sz="1600" b="1" dirty="0">
+                <a:solidFill>
+                  <a:srgbClr val="000000"/>
+                </a:solidFill>
+                <a:latin typeface="Aptos"/>
+                <a:ea typeface="Aptos"/>
+                <a:cs typeface="Aptos"/>
+              </a:rPr>
+              <a:t>Sign detector: </a:t>
+            </a:r>
+            <a:r>
+              <a:rPr lang="en-US" sz="1600" b="0" dirty="0">
+                <a:solidFill>
+                  <a:srgbClr val="000000"/>
+                </a:solidFill>
+                <a:latin typeface="Aptos"/>
+                <a:ea typeface="Aptos"/>
+                <a:cs typeface="Aptos"/>
+              </a:rPr>
+              <a:t>runs the vision model and reports each sign’s type, confidence and position</a:t>
+            </a:r>
+          </a:p>
+          <a:p>
+            <a:pPr marL="228600" indent="-228600" algn="l">
+              <a:spcBef>
+                <a:spcPts val="700"/>
+              </a:spcBef>
+              <a:buClr>
+                <a:srgbClr val="30669D"/>
+              </a:buClr>
+              <a:buFont typeface="Arial"/>
+              <a:buChar char="•"/>
+            </a:pPr>
+            <a:r>
+              <a:rPr lang="en-US" sz="1600" b="1" dirty="0">
+                <a:solidFill>
+                  <a:srgbClr val="000000"/>
+                </a:solidFill>
+                <a:latin typeface="Aptos"/>
+                <a:ea typeface="Aptos"/>
+                <a:cs typeface="Aptos"/>
+              </a:rPr>
+              <a:t>Line sensor: </a:t>
+            </a:r>
+            <a:r>
+              <a:rPr lang="en-US" sz="1600" b="0" dirty="0">
+                <a:solidFill>
+                  <a:srgbClr val="000000"/>
+                </a:solidFill>
+                <a:latin typeface="Aptos"/>
+                <a:ea typeface="Aptos"/>
+                <a:cs typeface="Aptos"/>
+              </a:rPr>
+              <a:t>tracks the lane lines with TCRT5000 IR sensors</a:t>
+            </a:r>
+          </a:p>
+          <a:p>
+            <a:pPr marL="228600" indent="-228600" algn="l">
+              <a:spcBef>
+                <a:spcPts val="700"/>
+              </a:spcBef>
+              <a:buClr>
+                <a:srgbClr val="30669D"/>
+              </a:buClr>
+              <a:buFont typeface="Arial"/>
+              <a:buChar char="•"/>
+            </a:pPr>
+            <a:r>
+              <a:rPr lang="en-US" sz="1600" b="1" dirty="0">
+                <a:solidFill>
+                  <a:srgbClr val="000000"/>
+                </a:solidFill>
+                <a:latin typeface="Aptos"/>
+                <a:ea typeface="Aptos"/>
+                <a:cs typeface="Aptos"/>
+              </a:rPr>
+              <a:t>IMU: </a:t>
+            </a:r>
+            <a:r>
+              <a:rPr lang="en-US" sz="1600" b="0" dirty="0">
+                <a:solidFill>
+                  <a:srgbClr val="000000"/>
+                </a:solidFill>
+                <a:latin typeface="Aptos"/>
+                <a:ea typeface="Aptos"/>
+                <a:cs typeface="Aptos"/>
+              </a:rPr>
+              <a:t>reports turning and motion; detects if the car is stuck</a:t>
+            </a:r>
+          </a:p>
+          <a:p>
+            <a:pPr marL="228600" indent="-228600" algn="l">
+              <a:spcBef>
+                <a:spcPts val="700"/>
+              </a:spcBef>
+              <a:buClr>
+                <a:srgbClr val="30669D"/>
+              </a:buClr>
+              <a:buFont typeface="Arial"/>
+              <a:buChar char="•"/>
+            </a:pPr>
+            <a:r>
+              <a:rPr lang="en-US" sz="1600" b="1" dirty="0">
+                <a:solidFill>
+                  <a:srgbClr val="000000"/>
+                </a:solidFill>
+                <a:latin typeface="Aptos"/>
+                <a:ea typeface="Aptos"/>
+                <a:cs typeface="Aptos"/>
+              </a:rPr>
+              <a:t>Behavior: </a:t>
+            </a:r>
+            <a:r>
+              <a:rPr lang="en-US" sz="1600" b="0" dirty="0">
+                <a:solidFill>
+                  <a:srgbClr val="000000"/>
+                </a:solidFill>
+                <a:latin typeface="Aptos"/>
+                <a:ea typeface="Aptos"/>
+                <a:cs typeface="Aptos"/>
+              </a:rPr>
+              <a:t>a state machine that turns signs, lane position and IMU data into driving decisions</a:t>
+            </a:r>
+          </a:p>
+          <a:p>
+            <a:pPr marL="228600" indent="-228600" algn="l">
+              <a:spcBef>
+                <a:spcPts val="700"/>
+              </a:spcBef>
+              <a:buClr>
+                <a:srgbClr val="30669D"/>
+              </a:buClr>
+              <a:buFont typeface="Arial"/>
+              <a:buChar char="•"/>
+            </a:pPr>
+            <a:r>
+              <a:rPr lang="en-US" sz="1600" b="1" dirty="0">
+                <a:solidFill>
+                  <a:srgbClr val="000000"/>
+                </a:solidFill>
+                <a:latin typeface="Aptos"/>
+                <a:ea typeface="Aptos"/>
+                <a:cs typeface="Aptos"/>
+              </a:rPr>
+              <a:t>Motor driver: </a:t>
+            </a:r>
+            <a:r>
+              <a:rPr lang="en-US" sz="1600" b="0" dirty="0">
+                <a:solidFill>
+                  <a:srgbClr val="000000"/>
+                </a:solidFill>
+                <a:latin typeface="Aptos"/>
+                <a:ea typeface="Aptos"/>
+                <a:cs typeface="Aptos"/>
+              </a:rPr>
+              <a:t>drives the wheels through the Waveshare HAT and stops if commands stop arriving</a:t>
+            </a:r>
+          </a:p>
+          <a:p>
+            <a:pPr marL="228600" indent="-228600" algn="l">
+              <a:spcBef>
+                <a:spcPts val="700"/>
+              </a:spcBef>
+              <a:buClr>
+                <a:srgbClr val="30669D"/>
+              </a:buClr>
+              <a:buFont typeface="Arial"/>
+              <a:buChar char="•"/>
+            </a:pPr>
+            <a:r>
+              <a:rPr lang="en-US" sz="1600" b="1" dirty="0">
+                <a:solidFill>
+                  <a:srgbClr val="000000"/>
+                </a:solidFill>
+                <a:latin typeface="Aptos"/>
+                <a:ea typeface="Aptos"/>
+                <a:cs typeface="Aptos"/>
+              </a:rPr>
+              <a:t>LCD: </a:t>
+            </a:r>
+            <a:r>
+              <a:rPr lang="en-US" sz="1600" b="0" dirty="0">
+                <a:solidFill>
+                  <a:srgbClr val="000000"/>
+                </a:solidFill>
+                <a:latin typeface="Aptos"/>
+                <a:ea typeface="Aptos"/>
+                <a:cs typeface="Aptos"/>
+              </a:rPr>
+              <a:t>shows the car’s state and the last sign detected</a:t>
+            </a:r>
+          </a:p>
+          <a:p>
+            <a:pPr marL="228600" indent="-228600" algn="l">
+              <a:spcBef>
+                <a:spcPts val="700"/>
+              </a:spcBef>
+              <a:buClr>
+                <a:srgbClr val="30669D"/>
+              </a:buClr>
+              <a:buFont typeface="Arial"/>
+              <a:buChar char="•"/>
+            </a:pPr>
+            <a:r>
+              <a:rPr lang="en-US" sz="1600" b="1" dirty="0">
+                <a:solidFill>
+                  <a:srgbClr val="000000"/>
+                </a:solidFill>
+                <a:latin typeface="Aptos"/>
+                <a:ea typeface="Aptos"/>
+                <a:cs typeface="Aptos"/>
+              </a:rPr>
+              <a:t>Teleop: </a:t>
+            </a:r>
+            <a:r>
+              <a:rPr lang="en-US" sz="1600" b="0" dirty="0">
+                <a:solidFill>
+                  <a:srgbClr val="000000"/>
+                </a:solidFill>
+                <a:latin typeface="Aptos"/>
+                <a:ea typeface="Aptos"/>
+                <a:cs typeface="Aptos"/>
+              </a:rPr>
+              <a:t>lets a person take over and drive manually</a:t>
+            </a:r>
+          </a:p>
+        </p:txBody>
+      </p:sp>
+      <p:sp>
+        <p:nvSpPr>
+          <p:cNvPr id="6" name="Why ROS 2"/>
+          <p:cNvSpPr txBox="1"/>
+          <p:nvPr/>
+        </p:nvSpPr>
+        <p:spPr>
+          <a:xfrm>
+            <a:off x="7635240" y="1719072"/>
+            <a:ext cx="3794760" cy="384048"/>
+          </a:xfrm>
+          <a:prstGeom prst="rect">
+            <a:avLst/>
+          </a:prstGeom>
+          <a:noFill/>
+        </p:spPr>
+        <p:txBody>
+          <a:bodyPr wrap="square" lIns="0" tIns="0" rIns="0" bIns="0" anchor="t">
+            <a:noAutofit/>
+          </a:bodyPr>
+          <a:lstStyle/>
+          <a:p>
+            <a:pPr marL="0" indent="0" algn="l">
+              <a:spcBef>
+                <a:spcPts val="0"/>
+              </a:spcBef>
+              <a:buNone/>
+            </a:pPr>
+            <a:r>
+              <a:rPr lang="en-US" sz="1950" b="1" dirty="0">
+                <a:solidFill>
+                  <a:srgbClr val="30669D"/>
+                </a:solidFill>
+                <a:latin typeface="Aptos"/>
+                <a:ea typeface="Aptos"/>
+                <a:cs typeface="Aptos"/>
+              </a:rPr>
+              <a:t>Why ROS 2</a:t>
+            </a:r>
+          </a:p>
+        </p:txBody>
+      </p:sp>
+      <p:sp>
+        <p:nvSpPr>
+          <p:cNvPr id="7" name="Why ROS 2 list"/>
+          <p:cNvSpPr txBox="1"/>
+          <p:nvPr/>
+        </p:nvSpPr>
+        <p:spPr>
+          <a:xfrm>
+            <a:off x="7635240" y="2240280"/>
+            <a:ext cx="3794760" cy="2103120"/>
+          </a:xfrm>
+          <a:prstGeom prst="rect">
+            <a:avLst/>
+          </a:prstGeom>
+          <a:noFill/>
+        </p:spPr>
+        <p:txBody>
+          <a:bodyPr wrap="square" lIns="0" tIns="0" rIns="0" bIns="0" anchor="t">
+            <a:noAutofit/>
+          </a:bodyPr>
+          <a:lstStyle/>
+          <a:p>
+            <a:pPr marL="228600" indent="-228600" algn="l">
+              <a:spcBef>
+                <a:spcPts val="0"/>
+              </a:spcBef>
+              <a:buClr>
+                <a:srgbClr val="30669D"/>
+              </a:buClr>
+              <a:buFont typeface="Arial"/>
+              <a:buChar char="•"/>
+            </a:pPr>
+            <a:r>
+              <a:rPr lang="en-US" sz="1600" b="0" dirty="0">
+                <a:solidFill>
+                  <a:srgbClr val="000000"/>
+                </a:solidFill>
+                <a:latin typeface="Aptos"/>
+                <a:ea typeface="Aptos"/>
+                <a:cs typeface="Aptos"/>
+              </a:rPr>
+              <a:t>Each teammate can own a node without touching the others</a:t>
+            </a:r>
+          </a:p>
+          <a:p>
+            <a:pPr marL="228600" indent="-228600" algn="l">
+              <a:spcBef>
+                <a:spcPts val="900"/>
+              </a:spcBef>
+              <a:buClr>
+                <a:srgbClr val="30669D"/>
+              </a:buClr>
+              <a:buFont typeface="Arial"/>
+              <a:buChar char="•"/>
+            </a:pPr>
+            <a:r>
+              <a:rPr lang="en-US" sz="1600" b="0" dirty="0">
+                <a:solidFill>
+                  <a:srgbClr val="000000"/>
+                </a:solidFill>
+                <a:latin typeface="Aptos"/>
+                <a:ea typeface="Aptos"/>
+                <a:cs typeface="Aptos"/>
+              </a:rPr>
+              <a:t>Recorded drives can be replayed to test without the car</a:t>
+            </a:r>
+          </a:p>
+          <a:p>
+            <a:pPr marL="228600" indent="-228600" algn="l">
+              <a:spcBef>
+                <a:spcPts val="900"/>
+              </a:spcBef>
+              <a:buClr>
+                <a:srgbClr val="30669D"/>
+              </a:buClr>
+              <a:buFont typeface="Arial"/>
+              <a:buChar char="•"/>
+            </a:pPr>
+            <a:r>
+              <a:rPr lang="en-US" sz="1600" b="0" dirty="0">
+                <a:solidFill>
+                  <a:srgbClr val="000000"/>
+                </a:solidFill>
+                <a:latin typeface="Aptos"/>
+                <a:ea typeface="Aptos"/>
+                <a:cs typeface="Aptos"/>
+              </a:rPr>
+              <a:t>Laptops can watch the camera feed and topics live</a:t>
+            </a:r>
+          </a:p>
+        </p:txBody>
+      </p:sp>
+      <p:sp>
+        <p:nvSpPr>
+          <p:cNvPr id="8" name="Trade-off"/>
+          <p:cNvSpPr txBox="1"/>
+          <p:nvPr/>
+        </p:nvSpPr>
+        <p:spPr>
+          <a:xfrm>
+            <a:off x="7635240" y="4434840"/>
+            <a:ext cx="3794760" cy="384048"/>
+          </a:xfrm>
+          <a:prstGeom prst="rect">
+            <a:avLst/>
+          </a:prstGeom>
+          <a:noFill/>
+        </p:spPr>
+        <p:txBody>
+          <a:bodyPr wrap="square" lIns="0" tIns="0" rIns="0" bIns="0" anchor="t">
+            <a:noAutofit/>
+          </a:bodyPr>
+          <a:lstStyle/>
+          <a:p>
+            <a:pPr marL="0" indent="0" algn="l">
+              <a:spcBef>
+                <a:spcPts val="0"/>
+              </a:spcBef>
+              <a:buNone/>
+            </a:pPr>
+            <a:r>
+              <a:rPr lang="en-US" sz="1950" b="1" dirty="0">
+                <a:solidFill>
+                  <a:srgbClr val="30669D"/>
+                </a:solidFill>
+                <a:latin typeface="Aptos"/>
+                <a:ea typeface="Aptos"/>
+                <a:cs typeface="Aptos"/>
+              </a:rPr>
+              <a:t>Trade-off</a:t>
+            </a:r>
+          </a:p>
+        </p:txBody>
+      </p:sp>
+      <p:sp>
+        <p:nvSpPr>
+          <p:cNvPr id="9" name="Trade-off text"/>
+          <p:cNvSpPr txBox="1"/>
+          <p:nvPr/>
+        </p:nvSpPr>
+        <p:spPr>
+          <a:xfrm>
+            <a:off x="7635240" y="4956048"/>
+            <a:ext cx="3794760" cy="1280160"/>
+          </a:xfrm>
+          <a:prstGeom prst="rect">
+            <a:avLst/>
+          </a:prstGeom>
+          <a:noFill/>
+        </p:spPr>
+        <p:txBody>
+          <a:bodyPr wrap="square" lIns="0" tIns="0" rIns="0" bIns="0" anchor="t">
+            <a:noAutofit/>
+          </a:bodyPr>
+          <a:lstStyle/>
+          <a:p>
+            <a:pPr marL="0" indent="0" algn="l">
+              <a:spcBef>
+                <a:spcPts val="0"/>
+              </a:spcBef>
+              <a:buNone/>
+            </a:pPr>
+            <a:r>
+              <a:rPr lang="en-US" sz="1600" b="0" dirty="0">
+                <a:solidFill>
+                  <a:srgbClr val="000000"/>
+                </a:solidFill>
+                <a:latin typeface="Aptos"/>
+                <a:ea typeface="Aptos"/>
+                <a:cs typeface="Aptos"/>
+              </a:rPr>
+              <a:t>More upfront setup than a single script, including a custom Docker build for the CM5 camera</a:t>
+            </a:r>
+          </a:p>
+        </p:txBody>
+      </p:sp>
+    </p:spTree>
+  </p:cSld>
+  <p:clrMapOvr>
+    <a:masterClrMapping/>
+  </p:clrMapOvr>
+</p:sld>
+</file>
+
+<file path=ppt/slides/slide11.xml><?xml version="1.0" encoding="utf-8"?>
+<p:sld xmlns:a="http://schemas.openxmlformats.org/drawingml/2006/main" xmlns:p="http://schemas.openxmlformats.org/presentationml/2006/main" xmlns:r="http://schemas.openxmlformats.org/officeDocument/2006/relationships">
+  <p:cSld>
+    <p:spTree>
+      <p:nvGrpSpPr>
+        <p:cNvPr id="1" name=""/>
+        <p:cNvGrpSpPr/>
+        <p:nvPr/>
+      </p:nvGrpSpPr>
+      <p:grpSpPr/>
+      <p:sp>
+        <p:nvSpPr>
+          <p:cNvPr id="2" name="Title"/>
+          <p:cNvSpPr>
+            <a:spLocks noGrp="1"/>
+          </p:cNvSpPr>
+          <p:nvPr>
+            <p:ph type="title"/>
+          </p:nvPr>
+        </p:nvSpPr>
+        <p:spPr>
+          <a:xfrm>
+            <a:off x="768096" y="365760"/>
+            <a:ext cx="10789920" cy="658368"/>
+          </a:xfrm>
+        </p:spPr>
+        <p:txBody>
+          <a:bodyPr lIns="0" tIns="0" rIns="0" bIns="0" anchor="b">
+            <a:normAutofit/>
+          </a:bodyPr>
+          <a:lstStyle/>
+          <a:p>
+            <a:pPr algn="l"/>
+            <a:r>
+              <a:rPr lang="en-US" sz="3500" b="0" dirty="0">
+                <a:solidFill>
+                  <a:srgbClr val="000000"/>
+                </a:solidFill>
+                <a:latin typeface="Aptos Display"/>
+                <a:ea typeface="Aptos Display"/>
+                <a:cs typeface="Aptos Display"/>
+              </a:rPr>
               <a:t>The behavior node makes every driving decision</a:t>
             </a:r>
           </a:p>
@@ -4474,7 +5127,7 @@
 </p:sld>
 </file>
 
-<file path=ppt/slides/slide11.xml><?xml version="1.0" encoding="utf-8"?>
+<file path=ppt/slides/slide12.xml><?xml version="1.0" encoding="utf-8"?>
 <p:sld xmlns:a="http://schemas.openxmlformats.org/drawingml/2006/main" xmlns:p="http://schemas.openxmlformats.org/presentationml/2006/main" xmlns:r="http://schemas.openxmlformats.org/officeDocument/2006/relationships">
   <p:cSld>
     <p:spTree>
@@ -4646,7 +5299,7 @@
 </p:sld>
 </file>
 
-<file path=ppt/slides/slide12.xml><?xml version="1.0" encoding="utf-8"?>
+<file path=ppt/slides/slide13.xml><?xml version="1.0" encoding="utf-8"?>
 <p:sld xmlns:a="http://schemas.openxmlformats.org/drawingml/2006/main" xmlns:p="http://schemas.openxmlformats.org/presentationml/2006/main" xmlns:r="http://schemas.openxmlformats.org/officeDocument/2006/relationships">
   <p:cSld>
     <p:spTree>
@@ -4694,7 +5347,7 @@
 </p:sld>
 </file>
 
-<file path=ppt/slides/slide13.xml><?xml version="1.0" encoding="utf-8"?>
+<file path=ppt/slides/slide14.xml><?xml version="1.0" encoding="utf-8"?>
 <p:sld xmlns:a="http://schemas.openxmlformats.org/drawingml/2006/main" xmlns:p="http://schemas.openxmlformats.org/presentationml/2006/main" xmlns:r="http://schemas.openxmlformats.org/officeDocument/2006/relationships">
   <p:cSld>
     <p:spTree>
@@ -13300,6 +13953,48 @@
         <p:nvPr/>
       </p:nvGrpSpPr>
       <p:grpSpPr/>
+      <p:pic>
+        <p:nvPicPr>
+          <p:cNvPr id="2" name="Picture 1" descr="1.jpg"/>
+          <p:cNvPicPr>
+            <a:picLocks noChangeAspect="1"/>
+          </p:cNvPicPr>
+          <p:nvPr/>
+        </p:nvPicPr>
+        <p:blipFill>
+          <a:blip r:embed="rId2"/>
+          <a:stretch>
+            <a:fillRect/>
+          </a:stretch>
+        </p:blipFill>
+        <p:spPr>
+          <a:xfrm>
+            <a:off x="943483" y="0"/>
+            <a:ext cx="10305033" cy="6858000"/>
+          </a:xfrm>
+          <a:prstGeom prst="rect">
+            <a:avLst/>
+          </a:prstGeom>
+        </p:spPr>
+      </p:pic>
+    </p:spTree>
+  </p:cSld>
+  <p:clrMapOvr>
+    <a:masterClrMapping/>
+  </p:clrMapOvr>
+</p:sld>
+</file>
+
+<file path=ppt/slides/slide8.xml><?xml version="1.0" encoding="utf-8"?>
+<p:sld xmlns:a="http://schemas.openxmlformats.org/drawingml/2006/main" xmlns:p="http://schemas.openxmlformats.org/presentationml/2006/main" xmlns:r="http://schemas.openxmlformats.org/officeDocument/2006/relationships">
+  <p:cSld>
+    <p:spTree>
+      <p:nvGrpSpPr>
+        <p:cNvPr id="1" name=""/>
+        <p:cNvGrpSpPr/>
+        <p:nvPr/>
+      </p:nvGrpSpPr>
+      <p:grpSpPr/>
       <p:sp useBgFill="1">
         <p:nvSpPr>
           <p:cNvPr id="12" name="Rectangle 11">
@@ -13861,7 +14556,7 @@
 </p:sld>
 </file>
 
-<file path=ppt/slides/slide8.xml><?xml version="1.0" encoding="utf-8"?>
+<file path=ppt/slides/slide9.xml><?xml version="1.0" encoding="utf-8"?>
 <p:sld xmlns:a="http://schemas.openxmlformats.org/drawingml/2006/main" xmlns:p="http://schemas.openxmlformats.org/presentationml/2006/main" xmlns:r="http://schemas.openxmlformats.org/officeDocument/2006/relationships">
   <p:cSld>
     <p:spTree>
@@ -13996,658 +14691,6 @@
             <a:r>
               <a:rPr dirty="0"/>
               <a:t> hours.</a:t>
-            </a:r>
-          </a:p>
-        </p:txBody>
-      </p:sp>
-    </p:spTree>
-  </p:cSld>
-  <p:clrMapOvr>
-    <a:masterClrMapping/>
-  </p:clrMapOvr>
-</p:sld>
-</file>
-
-<file path=ppt/slides/slide9.xml><?xml version="1.0" encoding="utf-8"?>
-<p:sld xmlns:a="http://schemas.openxmlformats.org/drawingml/2006/main" xmlns:p="http://schemas.openxmlformats.org/presentationml/2006/main" xmlns:r="http://schemas.openxmlformats.org/officeDocument/2006/relationships">
-  <p:cSld>
-    <p:spTree>
-      <p:nvGrpSpPr>
-        <p:cNvPr id="1" name=""/>
-        <p:cNvGrpSpPr/>
-        <p:nvPr/>
-      </p:nvGrpSpPr>
-      <p:grpSpPr/>
-      <p:sp>
-        <p:nvSpPr>
-          <p:cNvPr id="2" name="Title"/>
-          <p:cNvSpPr>
-            <a:spLocks noGrp="1"/>
-          </p:cNvSpPr>
-          <p:nvPr>
-            <p:ph type="title"/>
-          </p:nvPr>
-        </p:nvSpPr>
-        <p:spPr>
-          <a:xfrm>
-            <a:off x="768096" y="365760"/>
-            <a:ext cx="10789920" cy="658368"/>
-          </a:xfrm>
-        </p:spPr>
-        <p:txBody>
-          <a:bodyPr lIns="0" tIns="0" rIns="0" bIns="0" anchor="b">
-            <a:normAutofit/>
-          </a:bodyPr>
-          <a:lstStyle/>
-          <a:p>
-            <a:pPr algn="l"/>
-            <a:r>
-              <a:rPr lang="en-US" sz="3500" b="0" dirty="0">
-                <a:solidFill>
-                  <a:srgbClr val="000000"/>
-                </a:solidFill>
-                <a:latin typeface="Aptos Display"/>
-                <a:ea typeface="Aptos Display"/>
-                <a:cs typeface="Aptos Display"/>
-              </a:rPr>
-              <a:t>ROS 2 could split our pipeline into eight nodes</a:t>
-            </a:r>
-          </a:p>
-        </p:txBody>
-      </p:sp>
-      <p:sp>
-        <p:nvSpPr>
-          <p:cNvPr id="3" name="Subtitle"/>
-          <p:cNvSpPr txBox="1"/>
-          <p:nvPr/>
-        </p:nvSpPr>
-        <p:spPr>
-          <a:xfrm>
-            <a:off x="786384" y="1024128"/>
-            <a:ext cx="10607040" cy="365760"/>
-          </a:xfrm>
-          <a:prstGeom prst="rect">
-            <a:avLst/>
-          </a:prstGeom>
-          <a:noFill/>
-        </p:spPr>
-        <p:txBody>
-          <a:bodyPr wrap="square" lIns="0" tIns="0" rIns="0" bIns="0" anchor="t">
-            <a:noAutofit/>
-          </a:bodyPr>
-          <a:lstStyle/>
-          <a:p>
-            <a:pPr marL="0" indent="0" algn="l">
-              <a:spcBef>
-                <a:spcPts val="0"/>
-              </a:spcBef>
-              <a:buNone/>
-            </a:pPr>
-            <a:r>
-              <a:rPr lang="en-US" sz="1500" b="1" dirty="0">
-                <a:solidFill>
-                  <a:srgbClr val="000000"/>
-                </a:solidFill>
-                <a:latin typeface="Aptos"/>
-                <a:ea typeface="Aptos"/>
-                <a:cs typeface="Aptos"/>
-              </a:rPr>
-              <a:t>Preliminary node structure for the car; each node does one job</a:t>
-            </a:r>
-          </a:p>
-        </p:txBody>
-      </p:sp>
-      <p:sp>
-        <p:nvSpPr>
-          <p:cNvPr id="4" name="Nodes"/>
-          <p:cNvSpPr txBox="1"/>
-          <p:nvPr/>
-        </p:nvSpPr>
-        <p:spPr>
-          <a:xfrm>
-            <a:off x="786384" y="1719072"/>
-            <a:ext cx="6309360" cy="384048"/>
-          </a:xfrm>
-          <a:prstGeom prst="rect">
-            <a:avLst/>
-          </a:prstGeom>
-          <a:noFill/>
-        </p:spPr>
-        <p:txBody>
-          <a:bodyPr wrap="square" lIns="0" tIns="0" rIns="0" bIns="0" anchor="t">
-            <a:noAutofit/>
-          </a:bodyPr>
-          <a:lstStyle/>
-          <a:p>
-            <a:pPr marL="0" indent="0" algn="l">
-              <a:spcBef>
-                <a:spcPts val="0"/>
-              </a:spcBef>
-              <a:buNone/>
-            </a:pPr>
-            <a:r>
-              <a:rPr lang="en-US" sz="1950" b="1" dirty="0">
-                <a:solidFill>
-                  <a:srgbClr val="30669D"/>
-                </a:solidFill>
-                <a:latin typeface="Aptos"/>
-                <a:ea typeface="Aptos"/>
-                <a:cs typeface="Aptos"/>
-              </a:rPr>
-              <a:t>Nodes</a:t>
-            </a:r>
-          </a:p>
-        </p:txBody>
-      </p:sp>
-      <p:sp>
-        <p:nvSpPr>
-          <p:cNvPr id="5" name="Node list"/>
-          <p:cNvSpPr txBox="1"/>
-          <p:nvPr/>
-        </p:nvSpPr>
-        <p:spPr>
-          <a:xfrm>
-            <a:off x="786384" y="2240280"/>
-            <a:ext cx="6309360" cy="4023360"/>
-          </a:xfrm>
-          <a:prstGeom prst="rect">
-            <a:avLst/>
-          </a:prstGeom>
-          <a:noFill/>
-        </p:spPr>
-        <p:txBody>
-          <a:bodyPr wrap="square" lIns="0" tIns="0" rIns="0" bIns="0" anchor="t">
-            <a:noAutofit/>
-          </a:bodyPr>
-          <a:lstStyle/>
-          <a:p>
-            <a:pPr marL="228600" indent="-228600" algn="l">
-              <a:spcBef>
-                <a:spcPts val="0"/>
-              </a:spcBef>
-              <a:buClr>
-                <a:srgbClr val="30669D"/>
-              </a:buClr>
-              <a:buFont typeface="Arial"/>
-              <a:buChar char="•"/>
-            </a:pPr>
-            <a:r>
-              <a:rPr lang="en-US" sz="1600" b="1" dirty="0">
-                <a:solidFill>
-                  <a:srgbClr val="000000"/>
-                </a:solidFill>
-                <a:latin typeface="Aptos"/>
-                <a:ea typeface="Aptos"/>
-                <a:cs typeface="Aptos"/>
-              </a:rPr>
-              <a:t>Camera: </a:t>
-            </a:r>
-            <a:r>
-              <a:rPr lang="en-US" sz="1600" b="0" dirty="0">
-                <a:solidFill>
-                  <a:srgbClr val="000000"/>
-                </a:solidFill>
-                <a:latin typeface="Aptos"/>
-                <a:ea typeface="Aptos"/>
-                <a:cs typeface="Aptos"/>
-              </a:rPr>
-              <a:t>streams video from the Pi Camera Module 3</a:t>
-            </a:r>
-          </a:p>
-          <a:p>
-            <a:pPr marL="228600" indent="-228600" algn="l">
-              <a:spcBef>
-                <a:spcPts val="700"/>
-              </a:spcBef>
-              <a:buClr>
-                <a:srgbClr val="30669D"/>
-              </a:buClr>
-              <a:buFont typeface="Arial"/>
-              <a:buChar char="•"/>
-            </a:pPr>
-            <a:r>
-              <a:rPr lang="en-US" sz="1600" b="1" dirty="0">
-                <a:solidFill>
-                  <a:srgbClr val="000000"/>
-                </a:solidFill>
-                <a:latin typeface="Aptos"/>
-                <a:ea typeface="Aptos"/>
-                <a:cs typeface="Aptos"/>
-              </a:rPr>
-              <a:t>Sign detector: </a:t>
-            </a:r>
-            <a:r>
-              <a:rPr lang="en-US" sz="1600" b="0" dirty="0">
-                <a:solidFill>
-                  <a:srgbClr val="000000"/>
-                </a:solidFill>
-                <a:latin typeface="Aptos"/>
-                <a:ea typeface="Aptos"/>
-                <a:cs typeface="Aptos"/>
-              </a:rPr>
-              <a:t>runs the vision model and reports each sign’s type, confidence and position</a:t>
-            </a:r>
-          </a:p>
-          <a:p>
-            <a:pPr marL="228600" indent="-228600" algn="l">
-              <a:spcBef>
-                <a:spcPts val="700"/>
-              </a:spcBef>
-              <a:buClr>
-                <a:srgbClr val="30669D"/>
-              </a:buClr>
-              <a:buFont typeface="Arial"/>
-              <a:buChar char="•"/>
-            </a:pPr>
-            <a:r>
-              <a:rPr lang="en-US" sz="1600" b="1" dirty="0">
-                <a:solidFill>
-                  <a:srgbClr val="000000"/>
-                </a:solidFill>
-                <a:latin typeface="Aptos"/>
-                <a:ea typeface="Aptos"/>
-                <a:cs typeface="Aptos"/>
-              </a:rPr>
-              <a:t>Line sensor: </a:t>
-            </a:r>
-            <a:r>
-              <a:rPr lang="en-US" sz="1600" b="0" dirty="0">
-                <a:solidFill>
-                  <a:srgbClr val="000000"/>
-                </a:solidFill>
-                <a:latin typeface="Aptos"/>
-                <a:ea typeface="Aptos"/>
-                <a:cs typeface="Aptos"/>
-              </a:rPr>
-              <a:t>tracks the lane lines with TCRT5000 IR sensors</a:t>
-            </a:r>
-          </a:p>
-          <a:p>
-            <a:pPr marL="228600" indent="-228600" algn="l">
-              <a:spcBef>
-                <a:spcPts val="700"/>
-              </a:spcBef>
-              <a:buClr>
-                <a:srgbClr val="30669D"/>
-              </a:buClr>
-              <a:buFont typeface="Arial"/>
-              <a:buChar char="•"/>
-            </a:pPr>
-            <a:r>
-              <a:rPr lang="en-US" sz="1600" b="1" dirty="0">
-                <a:solidFill>
-                  <a:srgbClr val="000000"/>
-                </a:solidFill>
-                <a:latin typeface="Aptos"/>
-                <a:ea typeface="Aptos"/>
-                <a:cs typeface="Aptos"/>
-              </a:rPr>
-              <a:t>IMU: </a:t>
-            </a:r>
-            <a:r>
-              <a:rPr lang="en-US" sz="1600" b="0" dirty="0">
-                <a:solidFill>
-                  <a:srgbClr val="000000"/>
-                </a:solidFill>
-                <a:latin typeface="Aptos"/>
-                <a:ea typeface="Aptos"/>
-                <a:cs typeface="Aptos"/>
-              </a:rPr>
-              <a:t>reports turning and motion; detects if the car is stuck</a:t>
-            </a:r>
-          </a:p>
-          <a:p>
-            <a:pPr marL="228600" indent="-228600" algn="l">
-              <a:spcBef>
-                <a:spcPts val="700"/>
-              </a:spcBef>
-              <a:buClr>
-                <a:srgbClr val="30669D"/>
-              </a:buClr>
-              <a:buFont typeface="Arial"/>
-              <a:buChar char="•"/>
-            </a:pPr>
-            <a:r>
-              <a:rPr lang="en-US" sz="1600" b="1" dirty="0">
-                <a:solidFill>
-                  <a:srgbClr val="000000"/>
-                </a:solidFill>
-                <a:latin typeface="Aptos"/>
-                <a:ea typeface="Aptos"/>
-                <a:cs typeface="Aptos"/>
-              </a:rPr>
-              <a:t>Behavior: </a:t>
-            </a:r>
-            <a:r>
-              <a:rPr lang="en-US" sz="1600" b="0" dirty="0">
-                <a:solidFill>
-                  <a:srgbClr val="000000"/>
-                </a:solidFill>
-                <a:latin typeface="Aptos"/>
-                <a:ea typeface="Aptos"/>
-                <a:cs typeface="Aptos"/>
-              </a:rPr>
-              <a:t>a state machine that turns signs, lane position and IMU data into driving decisions</a:t>
-            </a:r>
-          </a:p>
-          <a:p>
-            <a:pPr marL="228600" indent="-228600" algn="l">
-              <a:spcBef>
-                <a:spcPts val="700"/>
-              </a:spcBef>
-              <a:buClr>
-                <a:srgbClr val="30669D"/>
-              </a:buClr>
-              <a:buFont typeface="Arial"/>
-              <a:buChar char="•"/>
-            </a:pPr>
-            <a:r>
-              <a:rPr lang="en-US" sz="1600" b="1" dirty="0">
-                <a:solidFill>
-                  <a:srgbClr val="000000"/>
-                </a:solidFill>
-                <a:latin typeface="Aptos"/>
-                <a:ea typeface="Aptos"/>
-                <a:cs typeface="Aptos"/>
-              </a:rPr>
-              <a:t>Motor driver: </a:t>
-            </a:r>
-            <a:r>
-              <a:rPr lang="en-US" sz="1600" b="0" dirty="0">
-                <a:solidFill>
-                  <a:srgbClr val="000000"/>
-                </a:solidFill>
-                <a:latin typeface="Aptos"/>
-                <a:ea typeface="Aptos"/>
-                <a:cs typeface="Aptos"/>
-              </a:rPr>
-              <a:t>drives the wheels through the Waveshare HAT and stops if commands stop arriving</a:t>
-            </a:r>
-          </a:p>
-          <a:p>
-            <a:pPr marL="228600" indent="-228600" algn="l">
-              <a:spcBef>
-                <a:spcPts val="700"/>
-              </a:spcBef>
-              <a:buClr>
-                <a:srgbClr val="30669D"/>
-              </a:buClr>
-              <a:buFont typeface="Arial"/>
-              <a:buChar char="•"/>
-            </a:pPr>
-            <a:r>
-              <a:rPr lang="en-US" sz="1600" b="1" dirty="0">
-                <a:solidFill>
-                  <a:srgbClr val="000000"/>
-                </a:solidFill>
-                <a:latin typeface="Aptos"/>
-                <a:ea typeface="Aptos"/>
-                <a:cs typeface="Aptos"/>
-              </a:rPr>
-              <a:t>LCD: </a:t>
-            </a:r>
-            <a:r>
-              <a:rPr lang="en-US" sz="1600" b="0" dirty="0">
-                <a:solidFill>
-                  <a:srgbClr val="000000"/>
-                </a:solidFill>
-                <a:latin typeface="Aptos"/>
-                <a:ea typeface="Aptos"/>
-                <a:cs typeface="Aptos"/>
-              </a:rPr>
-              <a:t>shows the car’s state and the last sign detected</a:t>
-            </a:r>
-          </a:p>
-          <a:p>
-            <a:pPr marL="228600" indent="-228600" algn="l">
-              <a:spcBef>
-                <a:spcPts val="700"/>
-              </a:spcBef>
-              <a:buClr>
-                <a:srgbClr val="30669D"/>
-              </a:buClr>
-              <a:buFont typeface="Arial"/>
-              <a:buChar char="•"/>
-            </a:pPr>
-            <a:r>
-              <a:rPr lang="en-US" sz="1600" b="1" dirty="0">
-                <a:solidFill>
-                  <a:srgbClr val="000000"/>
-                </a:solidFill>
-                <a:latin typeface="Aptos"/>
-                <a:ea typeface="Aptos"/>
-                <a:cs typeface="Aptos"/>
-              </a:rPr>
-              <a:t>Teleop: </a:t>
-            </a:r>
-            <a:r>
-              <a:rPr lang="en-US" sz="1600" b="0" dirty="0">
-                <a:solidFill>
-                  <a:srgbClr val="000000"/>
-                </a:solidFill>
-                <a:latin typeface="Aptos"/>
-                <a:ea typeface="Aptos"/>
-                <a:cs typeface="Aptos"/>
-              </a:rPr>
-              <a:t>lets a person take over and drive manually</a:t>
-            </a:r>
-          </a:p>
-        </p:txBody>
-      </p:sp>
-      <p:sp>
-        <p:nvSpPr>
-          <p:cNvPr id="6" name="Why ROS 2"/>
-          <p:cNvSpPr txBox="1"/>
-          <p:nvPr/>
-        </p:nvSpPr>
-        <p:spPr>
-          <a:xfrm>
-            <a:off x="7635240" y="1719072"/>
-            <a:ext cx="3794760" cy="384048"/>
-          </a:xfrm>
-          <a:prstGeom prst="rect">
-            <a:avLst/>
-          </a:prstGeom>
-          <a:noFill/>
-        </p:spPr>
-        <p:txBody>
-          <a:bodyPr wrap="square" lIns="0" tIns="0" rIns="0" bIns="0" anchor="t">
-            <a:noAutofit/>
-          </a:bodyPr>
-          <a:lstStyle/>
-          <a:p>
-            <a:pPr marL="0" indent="0" algn="l">
-              <a:spcBef>
-                <a:spcPts val="0"/>
-              </a:spcBef>
-              <a:buNone/>
-            </a:pPr>
-            <a:r>
-              <a:rPr lang="en-US" sz="1950" b="1" dirty="0">
-                <a:solidFill>
-                  <a:srgbClr val="30669D"/>
-                </a:solidFill>
-                <a:latin typeface="Aptos"/>
-                <a:ea typeface="Aptos"/>
-                <a:cs typeface="Aptos"/>
-              </a:rPr>
-              <a:t>Why ROS 2</a:t>
-            </a:r>
-          </a:p>
-        </p:txBody>
-      </p:sp>
-      <p:sp>
-        <p:nvSpPr>
-          <p:cNvPr id="7" name="Why ROS 2 list"/>
-          <p:cNvSpPr txBox="1"/>
-          <p:nvPr/>
-        </p:nvSpPr>
-        <p:spPr>
-          <a:xfrm>
-            <a:off x="7635240" y="2240280"/>
-            <a:ext cx="3794760" cy="2103120"/>
-          </a:xfrm>
-          <a:prstGeom prst="rect">
-            <a:avLst/>
-          </a:prstGeom>
-          <a:noFill/>
-        </p:spPr>
-        <p:txBody>
-          <a:bodyPr wrap="square" lIns="0" tIns="0" rIns="0" bIns="0" anchor="t">
-            <a:noAutofit/>
-          </a:bodyPr>
-          <a:lstStyle/>
-          <a:p>
-            <a:pPr marL="228600" indent="-228600" algn="l">
-              <a:spcBef>
-                <a:spcPts val="0"/>
-              </a:spcBef>
-              <a:buClr>
-                <a:srgbClr val="30669D"/>
-              </a:buClr>
-              <a:buFont typeface="Arial"/>
-              <a:buChar char="•"/>
-            </a:pPr>
-            <a:r>
-              <a:rPr lang="en-US" sz="1600" b="0" dirty="0">
-                <a:solidFill>
-                  <a:srgbClr val="000000"/>
-                </a:solidFill>
-                <a:latin typeface="Aptos"/>
-                <a:ea typeface="Aptos"/>
-                <a:cs typeface="Aptos"/>
-              </a:rPr>
-              <a:t>Each teammate can own a node without touching the others</a:t>
-            </a:r>
-          </a:p>
-          <a:p>
-            <a:pPr marL="228600" indent="-228600" algn="l">
-              <a:spcBef>
-                <a:spcPts val="900"/>
-              </a:spcBef>
-              <a:buClr>
-                <a:srgbClr val="30669D"/>
-              </a:buClr>
-              <a:buFont typeface="Arial"/>
-              <a:buChar char="•"/>
-            </a:pPr>
-            <a:r>
-              <a:rPr lang="en-US" sz="1600" b="0" dirty="0">
-                <a:solidFill>
-                  <a:srgbClr val="000000"/>
-                </a:solidFill>
-                <a:latin typeface="Aptos"/>
-                <a:ea typeface="Aptos"/>
-                <a:cs typeface="Aptos"/>
-              </a:rPr>
-              <a:t>Recorded drives can be replayed to test without the car</a:t>
-            </a:r>
-          </a:p>
-          <a:p>
-            <a:pPr marL="228600" indent="-228600" algn="l">
-              <a:spcBef>
-                <a:spcPts val="900"/>
-              </a:spcBef>
-              <a:buClr>
-                <a:srgbClr val="30669D"/>
-              </a:buClr>
-              <a:buFont typeface="Arial"/>
-              <a:buChar char="•"/>
-            </a:pPr>
-            <a:r>
-              <a:rPr lang="en-US" sz="1600" b="0" dirty="0">
-                <a:solidFill>
-                  <a:srgbClr val="000000"/>
-                </a:solidFill>
-                <a:latin typeface="Aptos"/>
-                <a:ea typeface="Aptos"/>
-                <a:cs typeface="Aptos"/>
-              </a:rPr>
-              <a:t>Laptops can watch the camera feed and topics live</a:t>
-            </a:r>
-          </a:p>
-        </p:txBody>
-      </p:sp>
-      <p:sp>
-        <p:nvSpPr>
-          <p:cNvPr id="8" name="Trade-off"/>
-          <p:cNvSpPr txBox="1"/>
-          <p:nvPr/>
-        </p:nvSpPr>
-        <p:spPr>
-          <a:xfrm>
-            <a:off x="7635240" y="4434840"/>
-            <a:ext cx="3794760" cy="384048"/>
-          </a:xfrm>
-          <a:prstGeom prst="rect">
-            <a:avLst/>
-          </a:prstGeom>
-          <a:noFill/>
-        </p:spPr>
-        <p:txBody>
-          <a:bodyPr wrap="square" lIns="0" tIns="0" rIns="0" bIns="0" anchor="t">
-            <a:noAutofit/>
-          </a:bodyPr>
-          <a:lstStyle/>
-          <a:p>
-            <a:pPr marL="0" indent="0" algn="l">
-              <a:spcBef>
-                <a:spcPts val="0"/>
-              </a:spcBef>
-              <a:buNone/>
-            </a:pPr>
-            <a:r>
-              <a:rPr lang="en-US" sz="1950" b="1" dirty="0">
-                <a:solidFill>
-                  <a:srgbClr val="30669D"/>
-                </a:solidFill>
-                <a:latin typeface="Aptos"/>
-                <a:ea typeface="Aptos"/>
-                <a:cs typeface="Aptos"/>
-              </a:rPr>
-              <a:t>Trade-off</a:t>
-            </a:r>
-          </a:p>
-        </p:txBody>
-      </p:sp>
-      <p:sp>
-        <p:nvSpPr>
-          <p:cNvPr id="9" name="Trade-off text"/>
-          <p:cNvSpPr txBox="1"/>
-          <p:nvPr/>
-        </p:nvSpPr>
-        <p:spPr>
-          <a:xfrm>
-            <a:off x="7635240" y="4956048"/>
-            <a:ext cx="3794760" cy="1280160"/>
-          </a:xfrm>
-          <a:prstGeom prst="rect">
-            <a:avLst/>
-          </a:prstGeom>
-          <a:noFill/>
-        </p:spPr>
-        <p:txBody>
-          <a:bodyPr wrap="square" lIns="0" tIns="0" rIns="0" bIns="0" anchor="t">
-            <a:noAutofit/>
-          </a:bodyPr>
-          <a:lstStyle/>
-          <a:p>
-            <a:pPr marL="0" indent="0" algn="l">
-              <a:spcBef>
-                <a:spcPts val="0"/>
-              </a:spcBef>
-              <a:buNone/>
-            </a:pPr>
-            <a:r>
-              <a:rPr lang="en-US" sz="1600" b="0" dirty="0">
-                <a:solidFill>
-                  <a:srgbClr val="000000"/>
-                </a:solidFill>
-                <a:latin typeface="Aptos"/>
-                <a:ea typeface="Aptos"/>
-                <a:cs typeface="Aptos"/>
-              </a:rPr>
-              <a:t>More upfront setup than a single script, including a custom Docker build for the CM5 camera</a:t>
             </a:r>
           </a:p>
         </p:txBody>
